--- a/팀_RLCC_최종 발표.pptx
+++ b/팀_RLCC_최종 발표.pptx
@@ -24,32 +24,32 @@
   <p:notesSz cx="5143500" cy="9144000"/>
   <p:embeddedFontLst>
     <p:embeddedFont>
-      <p:font typeface="Cafe24 Ssurround Bold" panose="020F0800000000000000" pitchFamily="50" charset="-127"/>
+      <p:font typeface="Arial Black" panose="020B0A04020102020204" pitchFamily="34" charset="0"/>
       <p:bold r:id="rId14"/>
     </p:embeddedFont>
     <p:embeddedFont>
-      <p:font typeface="CookieRunOTF Bold" panose="020B0600000101010101" pitchFamily="34" charset="-127"/>
+      <p:font typeface="Cafe24 Ssurround Bold" panose="020F0800000000000000" pitchFamily="50" charset="-127"/>
       <p:bold r:id="rId15"/>
     </p:embeddedFont>
     <p:embeddedFont>
+      <p:font typeface="CookieRunOTF Bold" panose="020B0600000101010101" pitchFamily="34" charset="-127"/>
+      <p:bold r:id="rId16"/>
+    </p:embeddedFont>
+    <p:embeddedFont>
       <p:font typeface="CookieRunOTF Regular" panose="020B0600000101010101" pitchFamily="34" charset="-127"/>
-      <p:regular r:id="rId16"/>
+      <p:regular r:id="rId17"/>
     </p:embeddedFont>
     <p:embeddedFont>
       <p:font typeface="SB 어그로 Bold" panose="02020603020101020101" pitchFamily="18" charset="-127"/>
-      <p:regular r:id="rId17"/>
+      <p:regular r:id="rId18"/>
     </p:embeddedFont>
     <p:embeddedFont>
       <p:font typeface="배달의민족 주아" panose="02020603020101020101" pitchFamily="18" charset="-127"/>
-      <p:regular r:id="rId18"/>
+      <p:regular r:id="rId19"/>
     </p:embeddedFont>
     <p:embeddedFont>
       <p:font typeface="여기어때 잘난체 고딕 TTF" pitchFamily="2" charset="-127"/>
-      <p:regular r:id="rId19"/>
-    </p:embeddedFont>
-    <p:embeddedFont>
-      <p:font typeface="Arial Black" panose="020B0A04020102020204" pitchFamily="34" charset="0"/>
-      <p:bold r:id="rId20"/>
+      <p:regular r:id="rId20"/>
     </p:embeddedFont>
   </p:embeddedFontLst>
   <p:defaultTextStyle>
@@ -3484,7 +3484,7 @@
           </a:solidFill>
           <a:ln w="12700">
             <a:solidFill>
-              <a:srgbClr val="2471A3"/>
+              <a:srgbClr val="319784"/>
             </a:solidFill>
             <a:prstDash val="solid"/>
           </a:ln>
@@ -3512,11 +3512,11 @@
             <a:avLst/>
           </a:prstGeom>
           <a:solidFill>
-            <a:srgbClr val="2471A3"/>
+            <a:srgbClr val="319784"/>
           </a:solidFill>
           <a:ln w="12700">
             <a:solidFill>
-              <a:srgbClr val="2471A3"/>
+              <a:srgbClr val="319784"/>
             </a:solidFill>
             <a:prstDash val="solid"/>
           </a:ln>
@@ -3664,7 +3664,7 @@
           </a:solidFill>
           <a:ln w="12700">
             <a:solidFill>
-              <a:srgbClr val="F4A261"/>
+              <a:srgbClr val="287A6A"/>
             </a:solidFill>
             <a:prstDash val="solid"/>
           </a:ln>
@@ -3692,11 +3692,11 @@
             <a:avLst/>
           </a:prstGeom>
           <a:solidFill>
-            <a:srgbClr val="F4A261"/>
+            <a:srgbClr val="287A6A"/>
           </a:solidFill>
           <a:ln w="12700">
             <a:solidFill>
-              <a:srgbClr val="F4A261"/>
+              <a:srgbClr val="287A6A"/>
             </a:solidFill>
             <a:prstDash val="solid"/>
           </a:ln>
@@ -3847,7 +3847,7 @@
           </a:solidFill>
           <a:ln w="12700">
             <a:solidFill>
-              <a:srgbClr val="7D3C98"/>
+              <a:srgbClr val="287C6C"/>
             </a:solidFill>
             <a:prstDash val="solid"/>
           </a:ln>
@@ -3875,11 +3875,11 @@
             <a:avLst/>
           </a:prstGeom>
           <a:solidFill>
-            <a:srgbClr val="7D3C98"/>
+            <a:srgbClr val="287C6C"/>
           </a:solidFill>
           <a:ln w="12700">
             <a:solidFill>
-              <a:srgbClr val="7D3C98"/>
+              <a:srgbClr val="287C6C"/>
             </a:solidFill>
             <a:prstDash val="solid"/>
           </a:ln>
@@ -4030,7 +4030,7 @@
           </a:solidFill>
           <a:ln w="12700">
             <a:solidFill>
-              <a:srgbClr val="C0392B"/>
+              <a:srgbClr val="22685B"/>
             </a:solidFill>
             <a:prstDash val="solid"/>
           </a:ln>
@@ -4058,11 +4058,11 @@
             <a:avLst/>
           </a:prstGeom>
           <a:solidFill>
-            <a:srgbClr val="C0392B"/>
+            <a:srgbClr val="22685B"/>
           </a:solidFill>
           <a:ln w="12700">
             <a:solidFill>
-              <a:srgbClr val="C0392B"/>
+              <a:srgbClr val="22685B"/>
             </a:solidFill>
             <a:prstDash val="solid"/>
           </a:ln>
@@ -4213,7 +4213,7 @@
           </a:solidFill>
           <a:ln w="12700">
             <a:solidFill>
-              <a:srgbClr val="27AE60"/>
+              <a:srgbClr val="18483F"/>
             </a:solidFill>
             <a:prstDash val="solid"/>
           </a:ln>
@@ -4241,11 +4241,11 @@
             <a:avLst/>
           </a:prstGeom>
           <a:solidFill>
-            <a:srgbClr val="27AE60"/>
+            <a:srgbClr val="18483F"/>
           </a:solidFill>
           <a:ln w="12700">
             <a:solidFill>
-              <a:srgbClr val="27AE60"/>
+              <a:srgbClr val="18483F"/>
             </a:solidFill>
             <a:prstDash val="solid"/>
           </a:ln>
@@ -5316,7 +5316,7 @@
                 <a:ea typeface="여기어때 잘난체 고딕 TTF" pitchFamily="2" charset="-127"/>
                 <a:cs typeface="Calibri" pitchFamily="34" charset="-120"/>
               </a:rPr>
-              <a:t>📌  </a:t>
+              <a:t>📌</a:t>
             </a:r>
             <a:r>
               <a:rPr lang="en-US" sz="1600" b="1" dirty="0" err="1">
@@ -7138,18 +7138,18 @@
         </p:nvSpPr>
         <p:spPr>
           <a:xfrm>
-            <a:off x="320040" y="1097280"/>
+            <a:off x="443484" y="1097280"/>
             <a:ext cx="1600200" cy="347472"/>
           </a:xfrm>
           <a:prstGeom prst="rect">
             <a:avLst/>
           </a:prstGeom>
           <a:solidFill>
-            <a:srgbClr val="607D8B"/>
+            <a:srgbClr val="3FBFA6"/>
           </a:solidFill>
           <a:ln w="12700">
             <a:solidFill>
-              <a:srgbClr val="607D8B"/>
+              <a:srgbClr val="3FBFA6"/>
             </a:solidFill>
             <a:prstDash val="solid"/>
           </a:ln>
@@ -7163,7 +7163,7 @@
         </p:nvSpPr>
         <p:spPr>
           <a:xfrm>
-            <a:off x="320040" y="1097280"/>
+            <a:off x="443484" y="1097280"/>
             <a:ext cx="1600200" cy="347472"/>
           </a:xfrm>
           <a:prstGeom prst="rect">
@@ -7205,8 +7205,1383 @@
         </p:nvSpPr>
         <p:spPr>
           <a:xfrm>
-            <a:off x="320040" y="1444752"/>
+            <a:off x="443484" y="1444752"/>
             <a:ext cx="1600200" cy="2377440"/>
+          </a:xfrm>
+          <a:prstGeom prst="rect">
+            <a:avLst/>
+          </a:prstGeom>
+          <a:solidFill>
+            <a:srgbClr val="FFFFFF"/>
+          </a:solidFill>
+          <a:ln w="12700">
+            <a:solidFill>
+              <a:srgbClr val="3FBFA6"/>
+            </a:solidFill>
+            <a:prstDash val="solid"/>
+          </a:ln>
+          <a:effectLst>
+            <a:outerShdw blurRad="101600" dist="38100" dir="8100000" algn="bl" rotWithShape="0">
+              <a:srgbClr val="000000">
+                <a:alpha val="10000"/>
+              </a:srgbClr>
+            </a:outerShdw>
+          </a:effectLst>
+        </p:spPr>
+      </p:sp>
+      <p:sp>
+        <p:nvSpPr>
+          <p:cNvPr id="7" name="Text 5"/>
+          <p:cNvSpPr/>
+          <p:nvPr/>
+        </p:nvSpPr>
+        <p:spPr>
+          <a:xfrm>
+            <a:off x="443484" y="1463040"/>
+            <a:ext cx="1600200" cy="475488"/>
+          </a:xfrm>
+          <a:prstGeom prst="rect">
+            <a:avLst/>
+          </a:prstGeom>
+          <a:noFill/>
+          <a:ln/>
+        </p:spPr>
+        <p:txBody>
+          <a:bodyPr wrap="square" lIns="0" tIns="0" rIns="0" bIns="0" rtlCol="0" anchor="ctr"/>
+          <a:lstStyle/>
+          <a:p>
+            <a:pPr marL="0" indent="0" algn="ctr">
+              <a:buNone/>
+            </a:pPr>
+            <a:r>
+              <a:rPr lang="en-US" sz="1300" b="1" dirty="0">
+                <a:solidFill>
+                  <a:srgbClr val="607D8B"/>
+                </a:solidFill>
+                <a:latin typeface="여기어때 잘난체 고딕 TTF" pitchFamily="2" charset="-127"/>
+                <a:ea typeface="여기어때 잘난체 고딕 TTF" pitchFamily="2" charset="-127"/>
+                <a:cs typeface="Calibri" pitchFamily="34" charset="-120"/>
+              </a:rPr>
+              <a:t>🥚알</a:t>
+            </a:r>
+            <a:endParaRPr lang="en-US" sz="1300" dirty="0">
+              <a:latin typeface="여기어때 잘난체 고딕 TTF" pitchFamily="2" charset="-127"/>
+              <a:ea typeface="여기어때 잘난체 고딕 TTF" pitchFamily="2" charset="-127"/>
+            </a:endParaRPr>
+          </a:p>
+        </p:txBody>
+      </p:sp>
+      <p:sp>
+        <p:nvSpPr>
+          <p:cNvPr id="8" name="Text 6"/>
+          <p:cNvSpPr/>
+          <p:nvPr/>
+        </p:nvSpPr>
+        <p:spPr>
+          <a:xfrm>
+            <a:off x="516636" y="1975104"/>
+            <a:ext cx="1453896" cy="1773936"/>
+          </a:xfrm>
+          <a:prstGeom prst="rect">
+            <a:avLst/>
+          </a:prstGeom>
+          <a:noFill/>
+          <a:ln/>
+        </p:spPr>
+        <p:txBody>
+          <a:bodyPr wrap="square" lIns="38100" tIns="38100" rIns="38100" bIns="38100" rtlCol="0" anchor="t"/>
+          <a:lstStyle/>
+          <a:p>
+            <a:pPr marL="171450" indent="-171450">
+              <a:buFont typeface="Arial" panose="020B0604020202020204" pitchFamily="34" charset="0"/>
+              <a:buChar char="•"/>
+            </a:pPr>
+            <a:r>
+              <a:rPr lang="en-US" sz="1150" dirty="0">
+                <a:solidFill>
+                  <a:srgbClr val="1A2B3C"/>
+                </a:solidFill>
+                <a:latin typeface="여기어때 잘난체 고딕 TTF" pitchFamily="2" charset="-127"/>
+                <a:ea typeface="여기어때 잘난체 고딕 TTF" pitchFamily="2" charset="-127"/>
+                <a:cs typeface="Calibri" pitchFamily="34" charset="-120"/>
+              </a:rPr>
+              <a:t>품어주기</a:t>
+            </a:r>
+            <a:endParaRPr lang="en-US" sz="1150" dirty="0">
+              <a:latin typeface="여기어때 잘난체 고딕 TTF" pitchFamily="2" charset="-127"/>
+              <a:ea typeface="여기어때 잘난체 고딕 TTF" pitchFamily="2" charset="-127"/>
+            </a:endParaRPr>
+          </a:p>
+          <a:p>
+            <a:pPr marL="171450" indent="-171450">
+              <a:buFont typeface="Arial" panose="020B0604020202020204" pitchFamily="34" charset="0"/>
+              <a:buChar char="•"/>
+            </a:pPr>
+            <a:r>
+              <a:rPr lang="en-US" sz="1150" dirty="0">
+                <a:solidFill>
+                  <a:srgbClr val="1A2B3C"/>
+                </a:solidFill>
+                <a:latin typeface="여기어때 잘난체 고딕 TTF" pitchFamily="2" charset="-127"/>
+                <a:ea typeface="여기어때 잘난체 고딕 TTF" pitchFamily="2" charset="-127"/>
+                <a:cs typeface="Calibri" pitchFamily="34" charset="-120"/>
+              </a:rPr>
+              <a:t>쓰다듬기</a:t>
+            </a:r>
+            <a:endParaRPr lang="en-US" sz="1150" dirty="0">
+              <a:latin typeface="여기어때 잘난체 고딕 TTF" pitchFamily="2" charset="-127"/>
+              <a:ea typeface="여기어때 잘난체 고딕 TTF" pitchFamily="2" charset="-127"/>
+            </a:endParaRPr>
+          </a:p>
+          <a:p>
+            <a:pPr marL="171450" indent="-171450">
+              <a:buFont typeface="Arial" panose="020B0604020202020204" pitchFamily="34" charset="0"/>
+              <a:buChar char="•"/>
+            </a:pPr>
+            <a:r>
+              <a:rPr lang="en-US" sz="1150" dirty="0" err="1">
+                <a:solidFill>
+                  <a:srgbClr val="1A2B3C"/>
+                </a:solidFill>
+                <a:latin typeface="여기어때 잘난체 고딕 TTF" pitchFamily="2" charset="-127"/>
+                <a:ea typeface="여기어때 잘난체 고딕 TTF" pitchFamily="2" charset="-127"/>
+                <a:cs typeface="Calibri" pitchFamily="34" charset="-120"/>
+              </a:rPr>
+              <a:t>방치하기</a:t>
+            </a:r>
+            <a:endParaRPr lang="en-US" sz="1150" dirty="0">
+              <a:latin typeface="여기어때 잘난체 고딕 TTF" pitchFamily="2" charset="-127"/>
+              <a:ea typeface="여기어때 잘난체 고딕 TTF" pitchFamily="2" charset="-127"/>
+            </a:endParaRPr>
+          </a:p>
+          <a:p>
+            <a:pPr marL="0" indent="0">
+              <a:buNone/>
+            </a:pPr>
+            <a:r>
+              <a:rPr lang="en-US" sz="1150" dirty="0">
+                <a:solidFill>
+                  <a:srgbClr val="1A2B3C"/>
+                </a:solidFill>
+                <a:latin typeface="여기어때 잘난체 고딕 TTF" pitchFamily="2" charset="-127"/>
+                <a:ea typeface="여기어때 잘난체 고딕 TTF" pitchFamily="2" charset="-127"/>
+                <a:cs typeface="Calibri" pitchFamily="34" charset="-120"/>
+              </a:rPr>
+              <a:t>( </a:t>
+            </a:r>
+            <a:r>
+              <a:rPr lang="en-US" sz="1150" dirty="0" err="1">
+                <a:solidFill>
+                  <a:srgbClr val="1A2B3C"/>
+                </a:solidFill>
+                <a:latin typeface="여기어때 잘난체 고딕 TTF" pitchFamily="2" charset="-127"/>
+                <a:ea typeface="여기어때 잘난체 고딕 TTF" pitchFamily="2" charset="-127"/>
+                <a:cs typeface="Calibri" pitchFamily="34" charset="-120"/>
+              </a:rPr>
+              <a:t>사망</a:t>
+            </a:r>
+            <a:r>
+              <a:rPr lang="en-US" sz="1150" dirty="0">
+                <a:solidFill>
+                  <a:srgbClr val="1A2B3C"/>
+                </a:solidFill>
+                <a:latin typeface="여기어때 잘난체 고딕 TTF" pitchFamily="2" charset="-127"/>
+                <a:ea typeface="여기어때 잘난체 고딕 TTF" pitchFamily="2" charset="-127"/>
+                <a:cs typeface="Calibri" pitchFamily="34" charset="-120"/>
+              </a:rPr>
+              <a:t> </a:t>
+            </a:r>
+            <a:r>
+              <a:rPr lang="en-US" sz="1150" dirty="0" err="1">
+                <a:solidFill>
+                  <a:srgbClr val="1A2B3C"/>
+                </a:solidFill>
+                <a:latin typeface="여기어때 잘난체 고딕 TTF" pitchFamily="2" charset="-127"/>
+                <a:ea typeface="여기어때 잘난체 고딕 TTF" pitchFamily="2" charset="-127"/>
+                <a:cs typeface="Calibri" pitchFamily="34" charset="-120"/>
+              </a:rPr>
+              <a:t>판정</a:t>
+            </a:r>
+            <a:r>
+              <a:rPr lang="en-US" sz="1150" dirty="0">
+                <a:solidFill>
+                  <a:srgbClr val="1A2B3C"/>
+                </a:solidFill>
+                <a:latin typeface="여기어때 잘난체 고딕 TTF" pitchFamily="2" charset="-127"/>
+                <a:ea typeface="여기어때 잘난체 고딕 TTF" pitchFamily="2" charset="-127"/>
+                <a:cs typeface="Calibri" pitchFamily="34" charset="-120"/>
+              </a:rPr>
+              <a:t> </a:t>
+            </a:r>
+            <a:r>
+              <a:rPr lang="en-US" sz="1150" dirty="0" err="1">
+                <a:solidFill>
+                  <a:srgbClr val="1A2B3C"/>
+                </a:solidFill>
+                <a:latin typeface="여기어때 잘난체 고딕 TTF" pitchFamily="2" charset="-127"/>
+                <a:ea typeface="여기어때 잘난체 고딕 TTF" pitchFamily="2" charset="-127"/>
+                <a:cs typeface="Calibri" pitchFamily="34" charset="-120"/>
+              </a:rPr>
+              <a:t>없음</a:t>
+            </a:r>
+            <a:r>
+              <a:rPr lang="en-US" sz="1150" dirty="0">
+                <a:solidFill>
+                  <a:srgbClr val="1A2B3C"/>
+                </a:solidFill>
+                <a:latin typeface="여기어때 잘난체 고딕 TTF" pitchFamily="2" charset="-127"/>
+                <a:ea typeface="여기어때 잘난체 고딕 TTF" pitchFamily="2" charset="-127"/>
+                <a:cs typeface="Calibri" pitchFamily="34" charset="-120"/>
+              </a:rPr>
+              <a:t> )</a:t>
+            </a:r>
+            <a:endParaRPr lang="en-US" sz="1150" dirty="0">
+              <a:latin typeface="여기어때 잘난체 고딕 TTF" pitchFamily="2" charset="-127"/>
+              <a:ea typeface="여기어때 잘난체 고딕 TTF" pitchFamily="2" charset="-127"/>
+            </a:endParaRPr>
+          </a:p>
+        </p:txBody>
+      </p:sp>
+      <p:sp>
+        <p:nvSpPr>
+          <p:cNvPr id="9" name="Shape 7"/>
+          <p:cNvSpPr/>
+          <p:nvPr/>
+        </p:nvSpPr>
+        <p:spPr>
+          <a:xfrm>
+            <a:off x="2107692" y="1097280"/>
+            <a:ext cx="1600200" cy="347472"/>
+          </a:xfrm>
+          <a:prstGeom prst="rect">
+            <a:avLst/>
+          </a:prstGeom>
+          <a:solidFill>
+            <a:srgbClr val="319784"/>
+          </a:solidFill>
+          <a:ln w="12700">
+            <a:solidFill>
+              <a:srgbClr val="319784"/>
+            </a:solidFill>
+            <a:prstDash val="solid"/>
+          </a:ln>
+        </p:spPr>
+      </p:sp>
+      <p:sp>
+        <p:nvSpPr>
+          <p:cNvPr id="10" name="Text 8"/>
+          <p:cNvSpPr/>
+          <p:nvPr/>
+        </p:nvSpPr>
+        <p:spPr>
+          <a:xfrm>
+            <a:off x="2107692" y="1097280"/>
+            <a:ext cx="1600200" cy="347472"/>
+          </a:xfrm>
+          <a:prstGeom prst="rect">
+            <a:avLst/>
+          </a:prstGeom>
+          <a:noFill/>
+          <a:ln/>
+        </p:spPr>
+        <p:txBody>
+          <a:bodyPr wrap="square" lIns="0" tIns="0" rIns="0" bIns="0" rtlCol="0" anchor="ctr"/>
+          <a:lstStyle/>
+          <a:p>
+            <a:pPr marL="0" indent="0" algn="ctr">
+              <a:buNone/>
+            </a:pPr>
+            <a:r>
+              <a:rPr lang="en-US" sz="1100" b="1" dirty="0">
+                <a:solidFill>
+                  <a:srgbClr val="FFFFFF"/>
+                </a:solidFill>
+                <a:latin typeface="여기어때 잘난체 고딕 TTF" pitchFamily="2" charset="-127"/>
+                <a:ea typeface="여기어때 잘난체 고딕 TTF" pitchFamily="2" charset="-127"/>
+                <a:cs typeface="Calibri" pitchFamily="34" charset="-120"/>
+              </a:rPr>
+              <a:t>2 ~ 3 주</a:t>
+            </a:r>
+            <a:endParaRPr lang="en-US" sz="1100" dirty="0">
+              <a:latin typeface="여기어때 잘난체 고딕 TTF" pitchFamily="2" charset="-127"/>
+              <a:ea typeface="여기어때 잘난체 고딕 TTF" pitchFamily="2" charset="-127"/>
+            </a:endParaRPr>
+          </a:p>
+        </p:txBody>
+      </p:sp>
+      <p:sp>
+        <p:nvSpPr>
+          <p:cNvPr id="11" name="Shape 9"/>
+          <p:cNvSpPr/>
+          <p:nvPr/>
+        </p:nvSpPr>
+        <p:spPr>
+          <a:xfrm>
+            <a:off x="2107692" y="1444752"/>
+            <a:ext cx="1600200" cy="2377440"/>
+          </a:xfrm>
+          <a:prstGeom prst="rect">
+            <a:avLst/>
+          </a:prstGeom>
+          <a:solidFill>
+            <a:srgbClr val="FFFFFF"/>
+          </a:solidFill>
+          <a:ln w="12700">
+            <a:solidFill>
+              <a:srgbClr val="319784"/>
+            </a:solidFill>
+            <a:prstDash val="solid"/>
+          </a:ln>
+          <a:effectLst>
+            <a:outerShdw blurRad="101600" dist="38100" dir="8100000" algn="bl" rotWithShape="0">
+              <a:srgbClr val="000000">
+                <a:alpha val="10000"/>
+              </a:srgbClr>
+            </a:outerShdw>
+          </a:effectLst>
+        </p:spPr>
+      </p:sp>
+      <p:sp>
+        <p:nvSpPr>
+          <p:cNvPr id="12" name="Text 10"/>
+          <p:cNvSpPr/>
+          <p:nvPr/>
+        </p:nvSpPr>
+        <p:spPr>
+          <a:xfrm>
+            <a:off x="2107692" y="1463040"/>
+            <a:ext cx="1600200" cy="475488"/>
+          </a:xfrm>
+          <a:prstGeom prst="rect">
+            <a:avLst/>
+          </a:prstGeom>
+          <a:noFill/>
+          <a:ln/>
+        </p:spPr>
+        <p:txBody>
+          <a:bodyPr wrap="square" lIns="0" tIns="0" rIns="0" bIns="0" rtlCol="0" anchor="ctr"/>
+          <a:lstStyle/>
+          <a:p>
+            <a:pPr marL="0" indent="0" algn="ctr">
+              <a:buNone/>
+            </a:pPr>
+            <a:r>
+              <a:rPr lang="en-US" sz="1300" b="1" dirty="0">
+                <a:solidFill>
+                  <a:srgbClr val="2471A3"/>
+                </a:solidFill>
+                <a:latin typeface="여기어때 잘난체 고딕 TTF" pitchFamily="2" charset="-127"/>
+                <a:ea typeface="여기어때 잘난체 고딕 TTF" pitchFamily="2" charset="-127"/>
+                <a:cs typeface="Calibri" pitchFamily="34" charset="-120"/>
+              </a:rPr>
+              <a:t>🐣</a:t>
+            </a:r>
+            <a:r>
+              <a:rPr lang="en-US" sz="1300" b="1" dirty="0" err="1">
+                <a:solidFill>
+                  <a:srgbClr val="2471A3"/>
+                </a:solidFill>
+                <a:latin typeface="여기어때 잘난체 고딕 TTF" pitchFamily="2" charset="-127"/>
+                <a:ea typeface="여기어때 잘난체 고딕 TTF" pitchFamily="2" charset="-127"/>
+                <a:cs typeface="Calibri" pitchFamily="34" charset="-120"/>
+              </a:rPr>
+              <a:t>유아기</a:t>
+            </a:r>
+            <a:endParaRPr lang="en-US" sz="1300" dirty="0">
+              <a:latin typeface="여기어때 잘난체 고딕 TTF" pitchFamily="2" charset="-127"/>
+              <a:ea typeface="여기어때 잘난체 고딕 TTF" pitchFamily="2" charset="-127"/>
+            </a:endParaRPr>
+          </a:p>
+        </p:txBody>
+      </p:sp>
+      <p:sp>
+        <p:nvSpPr>
+          <p:cNvPr id="13" name="Text 11"/>
+          <p:cNvSpPr/>
+          <p:nvPr/>
+        </p:nvSpPr>
+        <p:spPr>
+          <a:xfrm>
+            <a:off x="2180844" y="1975104"/>
+            <a:ext cx="1453896" cy="1773936"/>
+          </a:xfrm>
+          <a:prstGeom prst="rect">
+            <a:avLst/>
+          </a:prstGeom>
+          <a:noFill/>
+          <a:ln/>
+        </p:spPr>
+        <p:txBody>
+          <a:bodyPr wrap="square" lIns="38100" tIns="38100" rIns="38100" bIns="38100" rtlCol="0" anchor="t"/>
+          <a:lstStyle/>
+          <a:p>
+            <a:pPr marL="171450" indent="-171450">
+              <a:buFont typeface="Arial" panose="020B0604020202020204" pitchFamily="34" charset="0"/>
+              <a:buChar char="•"/>
+            </a:pPr>
+            <a:r>
+              <a:rPr lang="en-US" sz="1150" dirty="0">
+                <a:solidFill>
+                  <a:srgbClr val="1A2B3C"/>
+                </a:solidFill>
+                <a:latin typeface="여기어때 잘난체 고딕 TTF" pitchFamily="2" charset="-127"/>
+                <a:ea typeface="여기어때 잘난체 고딕 TTF" pitchFamily="2" charset="-127"/>
+                <a:cs typeface="Calibri" pitchFamily="34" charset="-120"/>
+              </a:rPr>
+              <a:t>이유식 먹이기</a:t>
+            </a:r>
+            <a:endParaRPr lang="en-US" sz="1150" dirty="0">
+              <a:latin typeface="여기어때 잘난체 고딕 TTF" pitchFamily="2" charset="-127"/>
+              <a:ea typeface="여기어때 잘난체 고딕 TTF" pitchFamily="2" charset="-127"/>
+            </a:endParaRPr>
+          </a:p>
+          <a:p>
+            <a:pPr marL="171450" indent="-171450">
+              <a:buFont typeface="Arial" panose="020B0604020202020204" pitchFamily="34" charset="0"/>
+              <a:buChar char="•"/>
+            </a:pPr>
+            <a:r>
+              <a:rPr lang="en-US" sz="1150" dirty="0">
+                <a:solidFill>
+                  <a:srgbClr val="1A2B3C"/>
+                </a:solidFill>
+                <a:latin typeface="여기어때 잘난체 고딕 TTF" pitchFamily="2" charset="-127"/>
+                <a:ea typeface="여기어때 잘난체 고딕 TTF" pitchFamily="2" charset="-127"/>
+                <a:cs typeface="Calibri" pitchFamily="34" charset="-120"/>
+              </a:rPr>
+              <a:t>청소하기</a:t>
+            </a:r>
+            <a:endParaRPr lang="en-US" sz="1150" dirty="0">
+              <a:latin typeface="여기어때 잘난체 고딕 TTF" pitchFamily="2" charset="-127"/>
+              <a:ea typeface="여기어때 잘난체 고딕 TTF" pitchFamily="2" charset="-127"/>
+            </a:endParaRPr>
+          </a:p>
+          <a:p>
+            <a:pPr marL="171450" indent="-171450">
+              <a:buFont typeface="Arial" panose="020B0604020202020204" pitchFamily="34" charset="0"/>
+              <a:buChar char="•"/>
+            </a:pPr>
+            <a:r>
+              <a:rPr lang="en-US" sz="1150" dirty="0">
+                <a:solidFill>
+                  <a:srgbClr val="1A2B3C"/>
+                </a:solidFill>
+                <a:latin typeface="여기어때 잘난체 고딕 TTF" pitchFamily="2" charset="-127"/>
+                <a:ea typeface="여기어때 잘난체 고딕 TTF" pitchFamily="2" charset="-127"/>
+                <a:cs typeface="Calibri" pitchFamily="34" charset="-120"/>
+              </a:rPr>
+              <a:t>재우기</a:t>
+            </a:r>
+            <a:endParaRPr lang="en-US" sz="1150" dirty="0">
+              <a:latin typeface="여기어때 잘난체 고딕 TTF" pitchFamily="2" charset="-127"/>
+              <a:ea typeface="여기어때 잘난체 고딕 TTF" pitchFamily="2" charset="-127"/>
+            </a:endParaRPr>
+          </a:p>
+          <a:p>
+            <a:pPr marL="171450" indent="-171450">
+              <a:buFont typeface="Arial" panose="020B0604020202020204" pitchFamily="34" charset="0"/>
+              <a:buChar char="•"/>
+            </a:pPr>
+            <a:r>
+              <a:rPr lang="en-US" sz="1150" dirty="0" err="1">
+                <a:solidFill>
+                  <a:srgbClr val="1A2B3C"/>
+                </a:solidFill>
+                <a:latin typeface="여기어때 잘난체 고딕 TTF" pitchFamily="2" charset="-127"/>
+                <a:ea typeface="여기어때 잘난체 고딕 TTF" pitchFamily="2" charset="-127"/>
+                <a:cs typeface="Calibri" pitchFamily="34" charset="-120"/>
+              </a:rPr>
+              <a:t>놀아주기</a:t>
+            </a:r>
+            <a:endParaRPr lang="en-US" sz="1150" dirty="0">
+              <a:solidFill>
+                <a:srgbClr val="1A2B3C"/>
+              </a:solidFill>
+              <a:latin typeface="여기어때 잘난체 고딕 TTF" pitchFamily="2" charset="-127"/>
+              <a:ea typeface="여기어때 잘난체 고딕 TTF" pitchFamily="2" charset="-127"/>
+              <a:cs typeface="Calibri" pitchFamily="34" charset="-120"/>
+            </a:endParaRPr>
+          </a:p>
+          <a:p>
+            <a:r>
+              <a:rPr lang="en-US" sz="1150" dirty="0">
+                <a:solidFill>
+                  <a:srgbClr val="1A2B3C"/>
+                </a:solidFill>
+                <a:latin typeface="여기어때 잘난체 고딕 TTF" pitchFamily="2" charset="-127"/>
+                <a:ea typeface="여기어때 잘난체 고딕 TTF" pitchFamily="2" charset="-127"/>
+                <a:cs typeface="Calibri" pitchFamily="34" charset="-120"/>
+              </a:rPr>
+              <a:t>    ( </a:t>
+            </a:r>
+            <a:r>
+              <a:rPr lang="en-US" sz="1150" dirty="0" err="1">
+                <a:solidFill>
+                  <a:srgbClr val="1A2B3C"/>
+                </a:solidFill>
+                <a:latin typeface="여기어때 잘난체 고딕 TTF" pitchFamily="2" charset="-127"/>
+                <a:ea typeface="여기어때 잘난체 고딕 TTF" pitchFamily="2" charset="-127"/>
+                <a:cs typeface="Calibri" pitchFamily="34" charset="-120"/>
+              </a:rPr>
+              <a:t>산책</a:t>
+            </a:r>
+            <a:r>
+              <a:rPr lang="en-US" sz="1150" dirty="0">
+                <a:solidFill>
+                  <a:srgbClr val="1A2B3C"/>
+                </a:solidFill>
+                <a:latin typeface="여기어때 잘난체 고딕 TTF" pitchFamily="2" charset="-127"/>
+                <a:ea typeface="여기어때 잘난체 고딕 TTF" pitchFamily="2" charset="-127"/>
+                <a:cs typeface="Calibri" pitchFamily="34" charset="-120"/>
+              </a:rPr>
+              <a:t> </a:t>
+            </a:r>
+            <a:r>
+              <a:rPr lang="en-US" sz="1150" dirty="0" err="1">
+                <a:solidFill>
+                  <a:srgbClr val="1A2B3C"/>
+                </a:solidFill>
+                <a:latin typeface="여기어때 잘난체 고딕 TTF" pitchFamily="2" charset="-127"/>
+                <a:ea typeface="여기어때 잘난체 고딕 TTF" pitchFamily="2" charset="-127"/>
+                <a:cs typeface="Calibri" pitchFamily="34" charset="-120"/>
+              </a:rPr>
+              <a:t>제외</a:t>
+            </a:r>
+            <a:r>
+              <a:rPr lang="en-US" sz="1150" dirty="0">
+                <a:solidFill>
+                  <a:srgbClr val="1A2B3C"/>
+                </a:solidFill>
+                <a:latin typeface="여기어때 잘난체 고딕 TTF" pitchFamily="2" charset="-127"/>
+                <a:ea typeface="여기어때 잘난체 고딕 TTF" pitchFamily="2" charset="-127"/>
+                <a:cs typeface="Calibri" pitchFamily="34" charset="-120"/>
+              </a:rPr>
+              <a:t> )</a:t>
+            </a:r>
+            <a:endParaRPr lang="en-US" sz="1150" dirty="0">
+              <a:latin typeface="여기어때 잘난체 고딕 TTF" pitchFamily="2" charset="-127"/>
+              <a:ea typeface="여기어때 잘난체 고딕 TTF" pitchFamily="2" charset="-127"/>
+            </a:endParaRPr>
+          </a:p>
+        </p:txBody>
+      </p:sp>
+      <p:sp>
+        <p:nvSpPr>
+          <p:cNvPr id="14" name="Shape 12"/>
+          <p:cNvSpPr/>
+          <p:nvPr/>
+        </p:nvSpPr>
+        <p:spPr>
+          <a:xfrm>
+            <a:off x="3771900" y="1097280"/>
+            <a:ext cx="1600200" cy="347472"/>
+          </a:xfrm>
+          <a:prstGeom prst="rect">
+            <a:avLst/>
+          </a:prstGeom>
+          <a:solidFill>
+            <a:srgbClr val="287C6C"/>
+          </a:solidFill>
+          <a:ln w="12700">
+            <a:solidFill>
+              <a:srgbClr val="287C6C"/>
+            </a:solidFill>
+            <a:prstDash val="solid"/>
+          </a:ln>
+        </p:spPr>
+      </p:sp>
+      <p:sp>
+        <p:nvSpPr>
+          <p:cNvPr id="15" name="Text 13"/>
+          <p:cNvSpPr/>
+          <p:nvPr/>
+        </p:nvSpPr>
+        <p:spPr>
+          <a:xfrm>
+            <a:off x="3771900" y="1097280"/>
+            <a:ext cx="1600200" cy="347472"/>
+          </a:xfrm>
+          <a:prstGeom prst="rect">
+            <a:avLst/>
+          </a:prstGeom>
+          <a:noFill/>
+          <a:ln/>
+        </p:spPr>
+        <p:txBody>
+          <a:bodyPr wrap="square" lIns="0" tIns="0" rIns="0" bIns="0" rtlCol="0" anchor="ctr"/>
+          <a:lstStyle/>
+          <a:p>
+            <a:pPr marL="0" indent="0" algn="ctr">
+              <a:buNone/>
+            </a:pPr>
+            <a:r>
+              <a:rPr lang="en-US" sz="1100" b="1" dirty="0">
+                <a:solidFill>
+                  <a:srgbClr val="FFFFFF"/>
+                </a:solidFill>
+                <a:latin typeface="여기어때 잘난체 고딕 TTF" pitchFamily="2" charset="-127"/>
+                <a:ea typeface="여기어때 잘난체 고딕 TTF" pitchFamily="2" charset="-127"/>
+                <a:cs typeface="Calibri" pitchFamily="34" charset="-120"/>
+              </a:rPr>
+              <a:t>4 ~ 5 주</a:t>
+            </a:r>
+            <a:endParaRPr lang="en-US" sz="1100" dirty="0">
+              <a:latin typeface="여기어때 잘난체 고딕 TTF" pitchFamily="2" charset="-127"/>
+              <a:ea typeface="여기어때 잘난체 고딕 TTF" pitchFamily="2" charset="-127"/>
+            </a:endParaRPr>
+          </a:p>
+        </p:txBody>
+      </p:sp>
+      <p:sp>
+        <p:nvSpPr>
+          <p:cNvPr id="16" name="Shape 14"/>
+          <p:cNvSpPr/>
+          <p:nvPr/>
+        </p:nvSpPr>
+        <p:spPr>
+          <a:xfrm>
+            <a:off x="3771900" y="1444752"/>
+            <a:ext cx="1600200" cy="2377440"/>
+          </a:xfrm>
+          <a:prstGeom prst="rect">
+            <a:avLst/>
+          </a:prstGeom>
+          <a:solidFill>
+            <a:srgbClr val="FFFFFF"/>
+          </a:solidFill>
+          <a:ln w="12700">
+            <a:solidFill>
+              <a:srgbClr val="287C6C"/>
+            </a:solidFill>
+            <a:prstDash val="solid"/>
+          </a:ln>
+          <a:effectLst>
+            <a:outerShdw blurRad="101600" dist="38100" dir="8100000" algn="bl" rotWithShape="0">
+              <a:srgbClr val="000000">
+                <a:alpha val="10000"/>
+              </a:srgbClr>
+            </a:outerShdw>
+          </a:effectLst>
+        </p:spPr>
+      </p:sp>
+      <p:sp>
+        <p:nvSpPr>
+          <p:cNvPr id="17" name="Text 15"/>
+          <p:cNvSpPr/>
+          <p:nvPr/>
+        </p:nvSpPr>
+        <p:spPr>
+          <a:xfrm>
+            <a:off x="3771900" y="1463040"/>
+            <a:ext cx="1600200" cy="475488"/>
+          </a:xfrm>
+          <a:prstGeom prst="rect">
+            <a:avLst/>
+          </a:prstGeom>
+          <a:noFill/>
+          <a:ln/>
+        </p:spPr>
+        <p:txBody>
+          <a:bodyPr wrap="square" lIns="0" tIns="0" rIns="0" bIns="0" rtlCol="0" anchor="ctr"/>
+          <a:lstStyle/>
+          <a:p>
+            <a:pPr marL="0" indent="0" algn="ctr">
+              <a:buNone/>
+            </a:pPr>
+            <a:r>
+              <a:rPr lang="en-US" sz="1300" b="1" dirty="0">
+                <a:solidFill>
+                  <a:srgbClr val="3FBFA6"/>
+                </a:solidFill>
+                <a:latin typeface="여기어때 잘난체 고딕 TTF" pitchFamily="2" charset="-127"/>
+                <a:ea typeface="여기어때 잘난체 고딕 TTF" pitchFamily="2" charset="-127"/>
+                <a:cs typeface="Calibri" pitchFamily="34" charset="-120"/>
+              </a:rPr>
+              <a:t>🐦</a:t>
+            </a:r>
+            <a:r>
+              <a:rPr lang="en-US" sz="1300" b="1" dirty="0" err="1">
+                <a:solidFill>
+                  <a:srgbClr val="3FBFA6"/>
+                </a:solidFill>
+                <a:latin typeface="여기어때 잘난체 고딕 TTF" pitchFamily="2" charset="-127"/>
+                <a:ea typeface="여기어때 잘난체 고딕 TTF" pitchFamily="2" charset="-127"/>
+                <a:cs typeface="Calibri" pitchFamily="34" charset="-120"/>
+              </a:rPr>
+              <a:t>유년기</a:t>
+            </a:r>
+            <a:endParaRPr lang="en-US" sz="1300" dirty="0">
+              <a:latin typeface="여기어때 잘난체 고딕 TTF" pitchFamily="2" charset="-127"/>
+              <a:ea typeface="여기어때 잘난체 고딕 TTF" pitchFamily="2" charset="-127"/>
+            </a:endParaRPr>
+          </a:p>
+        </p:txBody>
+      </p:sp>
+      <p:sp>
+        <p:nvSpPr>
+          <p:cNvPr id="18" name="Text 16"/>
+          <p:cNvSpPr/>
+          <p:nvPr/>
+        </p:nvSpPr>
+        <p:spPr>
+          <a:xfrm>
+            <a:off x="3845052" y="1975104"/>
+            <a:ext cx="1453896" cy="1773936"/>
+          </a:xfrm>
+          <a:prstGeom prst="rect">
+            <a:avLst/>
+          </a:prstGeom>
+          <a:noFill/>
+          <a:ln/>
+        </p:spPr>
+        <p:txBody>
+          <a:bodyPr wrap="square" lIns="38100" tIns="38100" rIns="38100" bIns="38100" rtlCol="0" anchor="t"/>
+          <a:lstStyle/>
+          <a:p>
+            <a:pPr marL="171450" indent="-171450">
+              <a:buFont typeface="Arial" panose="020B0604020202020204" pitchFamily="34" charset="0"/>
+              <a:buChar char="•"/>
+            </a:pPr>
+            <a:r>
+              <a:rPr lang="en-US" sz="1150" dirty="0">
+                <a:solidFill>
+                  <a:srgbClr val="1A2B3C"/>
+                </a:solidFill>
+                <a:latin typeface="여기어때 잘난체 고딕 TTF" pitchFamily="2" charset="-127"/>
+                <a:ea typeface="여기어때 잘난체 고딕 TTF" pitchFamily="2" charset="-127"/>
+                <a:cs typeface="Calibri" pitchFamily="34" charset="-120"/>
+              </a:rPr>
+              <a:t>먹이 주기</a:t>
+            </a:r>
+            <a:endParaRPr lang="en-US" sz="1150" dirty="0">
+              <a:latin typeface="여기어때 잘난체 고딕 TTF" pitchFamily="2" charset="-127"/>
+              <a:ea typeface="여기어때 잘난체 고딕 TTF" pitchFamily="2" charset="-127"/>
+            </a:endParaRPr>
+          </a:p>
+          <a:p>
+            <a:pPr marL="171450" indent="-171450">
+              <a:buFont typeface="Arial" panose="020B0604020202020204" pitchFamily="34" charset="0"/>
+              <a:buChar char="•"/>
+            </a:pPr>
+            <a:r>
+              <a:rPr lang="en-US" sz="1150" dirty="0">
+                <a:solidFill>
+                  <a:srgbClr val="1A2B3C"/>
+                </a:solidFill>
+                <a:latin typeface="여기어때 잘난체 고딕 TTF" pitchFamily="2" charset="-127"/>
+                <a:ea typeface="여기어때 잘난체 고딕 TTF" pitchFamily="2" charset="-127"/>
+                <a:cs typeface="Calibri" pitchFamily="34" charset="-120"/>
+              </a:rPr>
+              <a:t>청소하기</a:t>
+            </a:r>
+            <a:endParaRPr lang="en-US" sz="1150" dirty="0">
+              <a:latin typeface="여기어때 잘난체 고딕 TTF" pitchFamily="2" charset="-127"/>
+              <a:ea typeface="여기어때 잘난체 고딕 TTF" pitchFamily="2" charset="-127"/>
+            </a:endParaRPr>
+          </a:p>
+          <a:p>
+            <a:pPr marL="171450" indent="-171450">
+              <a:buFont typeface="Arial" panose="020B0604020202020204" pitchFamily="34" charset="0"/>
+              <a:buChar char="•"/>
+            </a:pPr>
+            <a:r>
+              <a:rPr lang="en-US" sz="1150" dirty="0">
+                <a:solidFill>
+                  <a:srgbClr val="1A2B3C"/>
+                </a:solidFill>
+                <a:latin typeface="여기어때 잘난체 고딕 TTF" pitchFamily="2" charset="-127"/>
+                <a:ea typeface="여기어때 잘난체 고딕 TTF" pitchFamily="2" charset="-127"/>
+                <a:cs typeface="Calibri" pitchFamily="34" charset="-120"/>
+              </a:rPr>
+              <a:t>훈련 시키기</a:t>
+            </a:r>
+            <a:endParaRPr lang="en-US" sz="1150" dirty="0">
+              <a:latin typeface="여기어때 잘난체 고딕 TTF" pitchFamily="2" charset="-127"/>
+              <a:ea typeface="여기어때 잘난체 고딕 TTF" pitchFamily="2" charset="-127"/>
+            </a:endParaRPr>
+          </a:p>
+          <a:p>
+            <a:pPr marL="171450" indent="-171450">
+              <a:buFont typeface="Arial" panose="020B0604020202020204" pitchFamily="34" charset="0"/>
+              <a:buChar char="•"/>
+            </a:pPr>
+            <a:r>
+              <a:rPr lang="en-US" sz="1150" dirty="0">
+                <a:solidFill>
+                  <a:srgbClr val="1A2B3C"/>
+                </a:solidFill>
+                <a:latin typeface="여기어때 잘난체 고딕 TTF" pitchFamily="2" charset="-127"/>
+                <a:ea typeface="여기어때 잘난체 고딕 TTF" pitchFamily="2" charset="-127"/>
+                <a:cs typeface="Calibri" pitchFamily="34" charset="-120"/>
+              </a:rPr>
+              <a:t>놀아주기</a:t>
+            </a:r>
+            <a:endParaRPr lang="en-US" sz="1150" dirty="0">
+              <a:latin typeface="여기어때 잘난체 고딕 TTF" pitchFamily="2" charset="-127"/>
+              <a:ea typeface="여기어때 잘난체 고딕 TTF" pitchFamily="2" charset="-127"/>
+            </a:endParaRPr>
+          </a:p>
+        </p:txBody>
+      </p:sp>
+      <p:sp>
+        <p:nvSpPr>
+          <p:cNvPr id="19" name="Shape 17"/>
+          <p:cNvSpPr/>
+          <p:nvPr/>
+        </p:nvSpPr>
+        <p:spPr>
+          <a:xfrm>
+            <a:off x="5436108" y="1097280"/>
+            <a:ext cx="1600200" cy="347472"/>
+          </a:xfrm>
+          <a:prstGeom prst="rect">
+            <a:avLst/>
+          </a:prstGeom>
+          <a:solidFill>
+            <a:srgbClr val="22685B"/>
+          </a:solidFill>
+          <a:ln w="12700">
+            <a:solidFill>
+              <a:srgbClr val="22685B"/>
+            </a:solidFill>
+            <a:prstDash val="solid"/>
+          </a:ln>
+        </p:spPr>
+      </p:sp>
+      <p:sp>
+        <p:nvSpPr>
+          <p:cNvPr id="20" name="Text 18"/>
+          <p:cNvSpPr/>
+          <p:nvPr/>
+        </p:nvSpPr>
+        <p:spPr>
+          <a:xfrm>
+            <a:off x="5436108" y="1097280"/>
+            <a:ext cx="1600200" cy="347472"/>
+          </a:xfrm>
+          <a:prstGeom prst="rect">
+            <a:avLst/>
+          </a:prstGeom>
+          <a:noFill/>
+          <a:ln/>
+        </p:spPr>
+        <p:txBody>
+          <a:bodyPr wrap="square" lIns="0" tIns="0" rIns="0" bIns="0" rtlCol="0" anchor="ctr"/>
+          <a:lstStyle/>
+          <a:p>
+            <a:pPr marL="0" indent="0" algn="ctr">
+              <a:buNone/>
+            </a:pPr>
+            <a:r>
+              <a:rPr lang="en-US" sz="1100" b="1" dirty="0">
+                <a:solidFill>
+                  <a:srgbClr val="FFFFFF"/>
+                </a:solidFill>
+                <a:latin typeface="여기어때 잘난체 고딕 TTF" pitchFamily="2" charset="-127"/>
+                <a:ea typeface="여기어때 잘난체 고딕 TTF" pitchFamily="2" charset="-127"/>
+                <a:cs typeface="Calibri" pitchFamily="34" charset="-120"/>
+              </a:rPr>
+              <a:t>6 ~ 7 주</a:t>
+            </a:r>
+            <a:endParaRPr lang="en-US" sz="1100" dirty="0">
+              <a:latin typeface="여기어때 잘난체 고딕 TTF" pitchFamily="2" charset="-127"/>
+              <a:ea typeface="여기어때 잘난체 고딕 TTF" pitchFamily="2" charset="-127"/>
+            </a:endParaRPr>
+          </a:p>
+        </p:txBody>
+      </p:sp>
+      <p:sp>
+        <p:nvSpPr>
+          <p:cNvPr id="21" name="Shape 19"/>
+          <p:cNvSpPr/>
+          <p:nvPr/>
+        </p:nvSpPr>
+        <p:spPr>
+          <a:xfrm>
+            <a:off x="5436108" y="1444752"/>
+            <a:ext cx="1600200" cy="2377440"/>
+          </a:xfrm>
+          <a:prstGeom prst="rect">
+            <a:avLst/>
+          </a:prstGeom>
+          <a:solidFill>
+            <a:srgbClr val="FFFFFF"/>
+          </a:solidFill>
+          <a:ln w="12700">
+            <a:solidFill>
+              <a:srgbClr val="22685B"/>
+            </a:solidFill>
+            <a:prstDash val="solid"/>
+          </a:ln>
+          <a:effectLst>
+            <a:outerShdw blurRad="101600" dist="38100" dir="8100000" algn="bl" rotWithShape="0">
+              <a:srgbClr val="000000">
+                <a:alpha val="10000"/>
+              </a:srgbClr>
+            </a:outerShdw>
+          </a:effectLst>
+        </p:spPr>
+      </p:sp>
+      <p:sp>
+        <p:nvSpPr>
+          <p:cNvPr id="22" name="Text 20"/>
+          <p:cNvSpPr/>
+          <p:nvPr/>
+        </p:nvSpPr>
+        <p:spPr>
+          <a:xfrm>
+            <a:off x="5436108" y="1463040"/>
+            <a:ext cx="1600200" cy="475488"/>
+          </a:xfrm>
+          <a:prstGeom prst="rect">
+            <a:avLst/>
+          </a:prstGeom>
+          <a:noFill/>
+          <a:ln/>
+        </p:spPr>
+        <p:txBody>
+          <a:bodyPr wrap="square" lIns="0" tIns="0" rIns="0" bIns="0" rtlCol="0" anchor="ctr"/>
+          <a:lstStyle/>
+          <a:p>
+            <a:pPr marL="0" indent="0" algn="ctr">
+              <a:buNone/>
+            </a:pPr>
+            <a:r>
+              <a:rPr lang="en-US" sz="1300" b="1" dirty="0">
+                <a:solidFill>
+                  <a:srgbClr val="F4A261"/>
+                </a:solidFill>
+                <a:latin typeface="여기어때 잘난체 고딕 TTF" pitchFamily="2" charset="-127"/>
+                <a:ea typeface="여기어때 잘난체 고딕 TTF" pitchFamily="2" charset="-127"/>
+                <a:cs typeface="Calibri" pitchFamily="34" charset="-120"/>
+              </a:rPr>
+              <a:t>🦜</a:t>
+            </a:r>
+            <a:r>
+              <a:rPr lang="en-US" sz="1300" b="1" dirty="0" err="1">
+                <a:solidFill>
+                  <a:srgbClr val="F4A261"/>
+                </a:solidFill>
+                <a:latin typeface="여기어때 잘난체 고딕 TTF" pitchFamily="2" charset="-127"/>
+                <a:ea typeface="여기어때 잘난체 고딕 TTF" pitchFamily="2" charset="-127"/>
+                <a:cs typeface="Calibri" pitchFamily="34" charset="-120"/>
+              </a:rPr>
+              <a:t>청소년기</a:t>
+            </a:r>
+            <a:endParaRPr lang="en-US" sz="1300" dirty="0">
+              <a:latin typeface="여기어때 잘난체 고딕 TTF" pitchFamily="2" charset="-127"/>
+              <a:ea typeface="여기어때 잘난체 고딕 TTF" pitchFamily="2" charset="-127"/>
+            </a:endParaRPr>
+          </a:p>
+        </p:txBody>
+      </p:sp>
+      <p:sp>
+        <p:nvSpPr>
+          <p:cNvPr id="23" name="Text 21"/>
+          <p:cNvSpPr/>
+          <p:nvPr/>
+        </p:nvSpPr>
+        <p:spPr>
+          <a:xfrm>
+            <a:off x="5509260" y="1975104"/>
+            <a:ext cx="1453896" cy="1773936"/>
+          </a:xfrm>
+          <a:prstGeom prst="rect">
+            <a:avLst/>
+          </a:prstGeom>
+          <a:noFill/>
+          <a:ln/>
+        </p:spPr>
+        <p:txBody>
+          <a:bodyPr wrap="square" lIns="38100" tIns="38100" rIns="38100" bIns="38100" rtlCol="0" anchor="t"/>
+          <a:lstStyle/>
+          <a:p>
+            <a:pPr marL="171450" indent="-171450">
+              <a:buFont typeface="Arial" panose="020B0604020202020204" pitchFamily="34" charset="0"/>
+              <a:buChar char="•"/>
+            </a:pPr>
+            <a:r>
+              <a:rPr lang="ko-KR" altLang="en-US" sz="1150" dirty="0">
+                <a:solidFill>
+                  <a:srgbClr val="1A2B3C"/>
+                </a:solidFill>
+                <a:latin typeface="여기어때 잘난체 고딕 TTF" pitchFamily="2" charset="-127"/>
+                <a:ea typeface="여기어때 잘난체 고딕 TTF" pitchFamily="2" charset="-127"/>
+                <a:cs typeface="Calibri" pitchFamily="34" charset="-120"/>
+              </a:rPr>
+              <a:t>모든 행동 가능</a:t>
+            </a:r>
+            <a:endParaRPr lang="en-US" altLang="ko-KR" sz="1150" dirty="0">
+              <a:solidFill>
+                <a:srgbClr val="1A2B3C"/>
+              </a:solidFill>
+              <a:latin typeface="여기어때 잘난체 고딕 TTF" pitchFamily="2" charset="-127"/>
+              <a:ea typeface="여기어때 잘난체 고딕 TTF" pitchFamily="2" charset="-127"/>
+              <a:cs typeface="Calibri" pitchFamily="34" charset="-120"/>
+            </a:endParaRPr>
+          </a:p>
+          <a:p>
+            <a:pPr marL="171450" indent="-171450">
+              <a:buFont typeface="Arial" panose="020B0604020202020204" pitchFamily="34" charset="0"/>
+              <a:buChar char="•"/>
+            </a:pPr>
+            <a:r>
+              <a:rPr lang="ko-KR" altLang="en-US" sz="1150" dirty="0">
+                <a:solidFill>
+                  <a:srgbClr val="1A2B3C"/>
+                </a:solidFill>
+                <a:latin typeface="여기어때 잘난체 고딕 TTF" pitchFamily="2" charset="-127"/>
+                <a:ea typeface="여기어때 잘난체 고딕 TTF" pitchFamily="2" charset="-127"/>
+                <a:cs typeface="Calibri" pitchFamily="34" charset="-120"/>
+              </a:rPr>
+              <a:t>훈련 선택지 추가</a:t>
+            </a:r>
+            <a:endParaRPr lang="en-US" altLang="ko-KR" sz="1150" dirty="0">
+              <a:solidFill>
+                <a:srgbClr val="1A2B3C"/>
+              </a:solidFill>
+              <a:latin typeface="여기어때 잘난체 고딕 TTF" pitchFamily="2" charset="-127"/>
+              <a:ea typeface="여기어때 잘난체 고딕 TTF" pitchFamily="2" charset="-127"/>
+              <a:cs typeface="Calibri" pitchFamily="34" charset="-120"/>
+            </a:endParaRPr>
+          </a:p>
+          <a:p>
+            <a:pPr marL="171450" indent="-171450">
+              <a:buFont typeface="Arial" panose="020B0604020202020204" pitchFamily="34" charset="0"/>
+              <a:buChar char="•"/>
+            </a:pPr>
+            <a:r>
+              <a:rPr lang="en-US" sz="1150" dirty="0" err="1">
+                <a:solidFill>
+                  <a:srgbClr val="1A2B3C"/>
+                </a:solidFill>
+                <a:latin typeface="여기어때 잘난체 고딕 TTF" pitchFamily="2" charset="-127"/>
+                <a:ea typeface="여기어때 잘난체 고딕 TTF" pitchFamily="2" charset="-127"/>
+                <a:cs typeface="Calibri" pitchFamily="34" charset="-120"/>
+              </a:rPr>
+              <a:t>아이템</a:t>
+            </a:r>
+            <a:r>
+              <a:rPr lang="en-US" sz="1150" dirty="0">
+                <a:solidFill>
+                  <a:srgbClr val="1A2B3C"/>
+                </a:solidFill>
+                <a:latin typeface="여기어때 잘난체 고딕 TTF" pitchFamily="2" charset="-127"/>
+                <a:ea typeface="여기어때 잘난체 고딕 TTF" pitchFamily="2" charset="-127"/>
+                <a:cs typeface="Calibri" pitchFamily="34" charset="-120"/>
+              </a:rPr>
+              <a:t> </a:t>
+            </a:r>
+            <a:r>
+              <a:rPr lang="en-US" sz="1150" dirty="0" err="1">
+                <a:solidFill>
+                  <a:srgbClr val="1A2B3C"/>
+                </a:solidFill>
+                <a:latin typeface="여기어때 잘난체 고딕 TTF" pitchFamily="2" charset="-127"/>
+                <a:ea typeface="여기어때 잘난체 고딕 TTF" pitchFamily="2" charset="-127"/>
+                <a:cs typeface="Calibri" pitchFamily="34" charset="-120"/>
+              </a:rPr>
+              <a:t>활용</a:t>
+            </a:r>
+            <a:r>
+              <a:rPr lang="en-US" sz="1150" dirty="0">
+                <a:latin typeface="여기어때 잘난체 고딕 TTF" pitchFamily="2" charset="-127"/>
+                <a:ea typeface="여기어때 잘난체 고딕 TTF" pitchFamily="2" charset="-127"/>
+              </a:rPr>
+              <a:t> </a:t>
+            </a:r>
+            <a:r>
+              <a:rPr lang="en-US" sz="1150" dirty="0" err="1">
+                <a:solidFill>
+                  <a:srgbClr val="1A2B3C"/>
+                </a:solidFill>
+                <a:latin typeface="여기어때 잘난체 고딕 TTF" pitchFamily="2" charset="-127"/>
+                <a:ea typeface="여기어때 잘난체 고딕 TTF" pitchFamily="2" charset="-127"/>
+                <a:cs typeface="Calibri" pitchFamily="34" charset="-120"/>
+              </a:rPr>
+              <a:t>가능</a:t>
+            </a:r>
+            <a:endParaRPr lang="en-US" sz="1150" dirty="0">
+              <a:latin typeface="여기어때 잘난체 고딕 TTF" pitchFamily="2" charset="-127"/>
+              <a:ea typeface="여기어때 잘난체 고딕 TTF" pitchFamily="2" charset="-127"/>
+            </a:endParaRPr>
+          </a:p>
+        </p:txBody>
+      </p:sp>
+      <p:sp>
+        <p:nvSpPr>
+          <p:cNvPr id="24" name="Shape 22"/>
+          <p:cNvSpPr/>
+          <p:nvPr/>
+        </p:nvSpPr>
+        <p:spPr>
+          <a:xfrm>
+            <a:off x="7100316" y="1097280"/>
+            <a:ext cx="1600200" cy="347472"/>
+          </a:xfrm>
+          <a:prstGeom prst="rect">
+            <a:avLst/>
+          </a:prstGeom>
+          <a:noFill/>
+          <a:ln w="12700">
+            <a:solidFill>
+              <a:srgbClr val="C0392B"/>
+            </a:solidFill>
+            <a:prstDash val="solid"/>
+          </a:ln>
+        </p:spPr>
+      </p:sp>
+      <p:sp>
+        <p:nvSpPr>
+          <p:cNvPr id="25" name="Text 23"/>
+          <p:cNvSpPr/>
+          <p:nvPr/>
+        </p:nvSpPr>
+        <p:spPr>
+          <a:xfrm>
+            <a:off x="7100316" y="1097280"/>
+            <a:ext cx="1600200" cy="347472"/>
+          </a:xfrm>
+          <a:prstGeom prst="rect">
+            <a:avLst/>
+          </a:prstGeom>
+          <a:solidFill>
+            <a:srgbClr val="18483F"/>
+          </a:solidFill>
+          <a:ln>
+            <a:solidFill>
+              <a:srgbClr val="18483F"/>
+            </a:solidFill>
+          </a:ln>
+        </p:spPr>
+        <p:txBody>
+          <a:bodyPr wrap="square" lIns="0" tIns="0" rIns="0" bIns="0" rtlCol="0" anchor="ctr"/>
+          <a:lstStyle/>
+          <a:p>
+            <a:pPr marL="0" indent="0" algn="ctr">
+              <a:buNone/>
+            </a:pPr>
+            <a:r>
+              <a:rPr lang="en-US" sz="1100" b="1" dirty="0">
+                <a:solidFill>
+                  <a:srgbClr val="FFFFFF"/>
+                </a:solidFill>
+                <a:latin typeface="여기어때 잘난체 고딕 TTF" pitchFamily="2" charset="-127"/>
+                <a:ea typeface="여기어때 잘난체 고딕 TTF" pitchFamily="2" charset="-127"/>
+                <a:cs typeface="Calibri" pitchFamily="34" charset="-120"/>
+              </a:rPr>
+              <a:t>8 주</a:t>
+            </a:r>
+            <a:endParaRPr lang="en-US" sz="1100" dirty="0">
+              <a:latin typeface="여기어때 잘난체 고딕 TTF" pitchFamily="2" charset="-127"/>
+              <a:ea typeface="여기어때 잘난체 고딕 TTF" pitchFamily="2" charset="-127"/>
+            </a:endParaRPr>
+          </a:p>
+        </p:txBody>
+      </p:sp>
+      <p:sp>
+        <p:nvSpPr>
+          <p:cNvPr id="26" name="Shape 24"/>
+          <p:cNvSpPr/>
+          <p:nvPr/>
+        </p:nvSpPr>
+        <p:spPr>
+          <a:xfrm>
+            <a:off x="7100316" y="1444752"/>
+            <a:ext cx="1600200" cy="2377440"/>
+          </a:xfrm>
+          <a:prstGeom prst="rect">
+            <a:avLst/>
+          </a:prstGeom>
+          <a:solidFill>
+            <a:srgbClr val="FFFFFF"/>
+          </a:solidFill>
+          <a:ln w="12700">
+            <a:solidFill>
+              <a:srgbClr val="18483F"/>
+            </a:solidFill>
+            <a:prstDash val="solid"/>
+          </a:ln>
+          <a:effectLst>
+            <a:outerShdw blurRad="101600" dist="38100" dir="8100000" algn="bl" rotWithShape="0">
+              <a:srgbClr val="000000">
+                <a:alpha val="10000"/>
+              </a:srgbClr>
+            </a:outerShdw>
+          </a:effectLst>
+        </p:spPr>
+      </p:sp>
+      <p:sp>
+        <p:nvSpPr>
+          <p:cNvPr id="27" name="Text 25"/>
+          <p:cNvSpPr/>
+          <p:nvPr/>
+        </p:nvSpPr>
+        <p:spPr>
+          <a:xfrm>
+            <a:off x="7100316" y="1463040"/>
+            <a:ext cx="1600200" cy="475488"/>
+          </a:xfrm>
+          <a:prstGeom prst="rect">
+            <a:avLst/>
+          </a:prstGeom>
+          <a:noFill/>
+          <a:ln/>
+        </p:spPr>
+        <p:txBody>
+          <a:bodyPr wrap="square" lIns="0" tIns="0" rIns="0" bIns="0" rtlCol="0" anchor="ctr"/>
+          <a:lstStyle/>
+          <a:p>
+            <a:pPr marL="0" indent="0" algn="ctr">
+              <a:buNone/>
+            </a:pPr>
+            <a:r>
+              <a:rPr lang="en-US" sz="1300" b="1" dirty="0">
+                <a:solidFill>
+                  <a:srgbClr val="C0392B"/>
+                </a:solidFill>
+                <a:latin typeface="여기어때 잘난체 고딕 TTF" pitchFamily="2" charset="-127"/>
+                <a:ea typeface="여기어때 잘난체 고딕 TTF" pitchFamily="2" charset="-127"/>
+                <a:cs typeface="Calibri" pitchFamily="34" charset="-120"/>
+              </a:rPr>
+              <a:t>🦅</a:t>
+            </a:r>
+            <a:r>
+              <a:rPr lang="en-US" sz="1300" b="1" dirty="0" err="1">
+                <a:solidFill>
+                  <a:srgbClr val="C0392B"/>
+                </a:solidFill>
+                <a:latin typeface="여기어때 잘난체 고딕 TTF" pitchFamily="2" charset="-127"/>
+                <a:ea typeface="여기어때 잘난체 고딕 TTF" pitchFamily="2" charset="-127"/>
+                <a:cs typeface="Calibri" pitchFamily="34" charset="-120"/>
+              </a:rPr>
+              <a:t>성체</a:t>
+            </a:r>
+            <a:endParaRPr lang="en-US" sz="1300" dirty="0">
+              <a:latin typeface="여기어때 잘난체 고딕 TTF" pitchFamily="2" charset="-127"/>
+              <a:ea typeface="여기어때 잘난체 고딕 TTF" pitchFamily="2" charset="-127"/>
+            </a:endParaRPr>
+          </a:p>
+        </p:txBody>
+      </p:sp>
+      <p:sp>
+        <p:nvSpPr>
+          <p:cNvPr id="28" name="Text 26"/>
+          <p:cNvSpPr/>
+          <p:nvPr/>
+        </p:nvSpPr>
+        <p:spPr>
+          <a:xfrm>
+            <a:off x="7173468" y="1975104"/>
+            <a:ext cx="1453896" cy="1773936"/>
+          </a:xfrm>
+          <a:prstGeom prst="rect">
+            <a:avLst/>
+          </a:prstGeom>
+          <a:noFill/>
+          <a:ln/>
+        </p:spPr>
+        <p:txBody>
+          <a:bodyPr wrap="square" lIns="38100" tIns="38100" rIns="38100" bIns="38100" rtlCol="0" anchor="t"/>
+          <a:lstStyle/>
+          <a:p>
+            <a:pPr marL="171450" indent="-171450">
+              <a:buFont typeface="Arial" panose="020B0604020202020204" pitchFamily="34" charset="0"/>
+              <a:buChar char="•"/>
+            </a:pPr>
+            <a:r>
+              <a:rPr lang="en-US" sz="1150" dirty="0" err="1">
+                <a:solidFill>
+                  <a:srgbClr val="1A2B3C"/>
+                </a:solidFill>
+                <a:latin typeface="여기어때 잘난체 고딕 TTF" pitchFamily="2" charset="-127"/>
+                <a:ea typeface="여기어때 잘난체 고딕 TTF" pitchFamily="2" charset="-127"/>
+                <a:cs typeface="Calibri" pitchFamily="34" charset="-120"/>
+              </a:rPr>
+              <a:t>모든</a:t>
+            </a:r>
+            <a:r>
+              <a:rPr lang="en-US" sz="1150" dirty="0">
+                <a:solidFill>
+                  <a:srgbClr val="1A2B3C"/>
+                </a:solidFill>
+                <a:latin typeface="여기어때 잘난체 고딕 TTF" pitchFamily="2" charset="-127"/>
+                <a:ea typeface="여기어때 잘난체 고딕 TTF" pitchFamily="2" charset="-127"/>
+                <a:cs typeface="Calibri" pitchFamily="34" charset="-120"/>
+              </a:rPr>
+              <a:t> </a:t>
+            </a:r>
+            <a:r>
+              <a:rPr lang="en-US" sz="1150" dirty="0" err="1">
+                <a:solidFill>
+                  <a:srgbClr val="1A2B3C"/>
+                </a:solidFill>
+                <a:latin typeface="여기어때 잘난체 고딕 TTF" pitchFamily="2" charset="-127"/>
+                <a:ea typeface="여기어때 잘난체 고딕 TTF" pitchFamily="2" charset="-127"/>
+                <a:cs typeface="Calibri" pitchFamily="34" charset="-120"/>
+              </a:rPr>
+              <a:t>행동</a:t>
+            </a:r>
+            <a:r>
+              <a:rPr lang="en-US" sz="1150" dirty="0">
+                <a:solidFill>
+                  <a:srgbClr val="1A2B3C"/>
+                </a:solidFill>
+                <a:latin typeface="여기어때 잘난체 고딕 TTF" pitchFamily="2" charset="-127"/>
+                <a:ea typeface="여기어때 잘난체 고딕 TTF" pitchFamily="2" charset="-127"/>
+                <a:cs typeface="Calibri" pitchFamily="34" charset="-120"/>
+              </a:rPr>
+              <a:t> </a:t>
+            </a:r>
+            <a:r>
+              <a:rPr lang="ko-KR" altLang="en-US" sz="1150" dirty="0">
+                <a:solidFill>
+                  <a:srgbClr val="1A2B3C"/>
+                </a:solidFill>
+                <a:latin typeface="여기어때 잘난체 고딕 TTF" pitchFamily="2" charset="-127"/>
+                <a:ea typeface="여기어때 잘난체 고딕 TTF" pitchFamily="2" charset="-127"/>
+                <a:cs typeface="Calibri" pitchFamily="34" charset="-120"/>
+              </a:rPr>
+              <a:t>가능</a:t>
+            </a:r>
+            <a:endParaRPr lang="en-US" altLang="ko-KR" sz="1150" dirty="0">
+              <a:solidFill>
+                <a:srgbClr val="1A2B3C"/>
+              </a:solidFill>
+              <a:latin typeface="여기어때 잘난체 고딕 TTF" pitchFamily="2" charset="-127"/>
+              <a:ea typeface="여기어때 잘난체 고딕 TTF" pitchFamily="2" charset="-127"/>
+              <a:cs typeface="Calibri" pitchFamily="34" charset="-120"/>
+            </a:endParaRPr>
+          </a:p>
+          <a:p>
+            <a:pPr marL="171450" indent="-171450">
+              <a:buFont typeface="Arial" panose="020B0604020202020204" pitchFamily="34" charset="0"/>
+              <a:buChar char="•"/>
+            </a:pPr>
+            <a:r>
+              <a:rPr lang="ko-KR" altLang="en-US" sz="1150" dirty="0">
+                <a:latin typeface="여기어때 잘난체 고딕 TTF" pitchFamily="2" charset="-127"/>
+                <a:ea typeface="여기어때 잘난체 고딕 TTF" pitchFamily="2" charset="-127"/>
+              </a:rPr>
+              <a:t>엔딩 결정</a:t>
+            </a:r>
+            <a:endParaRPr lang="en-US" sz="1150" dirty="0">
+              <a:latin typeface="여기어때 잘난체 고딕 TTF" pitchFamily="2" charset="-127"/>
+              <a:ea typeface="여기어때 잘난체 고딕 TTF" pitchFamily="2" charset="-127"/>
+            </a:endParaRPr>
+          </a:p>
+        </p:txBody>
+      </p:sp>
+      <p:sp>
+        <p:nvSpPr>
+          <p:cNvPr id="29" name="Shape 27"/>
+          <p:cNvSpPr/>
+          <p:nvPr/>
+        </p:nvSpPr>
+        <p:spPr>
+          <a:xfrm>
+            <a:off x="443484" y="3977640"/>
+            <a:ext cx="3899916" cy="914400"/>
           </a:xfrm>
           <a:prstGeom prst="rect">
             <a:avLst/>
@@ -7231,14 +8606,14 @@
       </p:sp>
       <p:sp>
         <p:nvSpPr>
-          <p:cNvPr id="7" name="Text 5"/>
-          <p:cNvSpPr/>
-          <p:nvPr/>
-        </p:nvSpPr>
-        <p:spPr>
-          <a:xfrm>
-            <a:off x="320040" y="1463040"/>
-            <a:ext cx="1600200" cy="475488"/>
+          <p:cNvPr id="30" name="Text 28"/>
+          <p:cNvSpPr/>
+          <p:nvPr/>
+        </p:nvSpPr>
+        <p:spPr>
+          <a:xfrm>
+            <a:off x="562356" y="4061895"/>
+            <a:ext cx="3931920" cy="365760"/>
           </a:xfrm>
           <a:prstGeom prst="rect">
             <a:avLst/>
@@ -7250,21 +8625,109 @@
           <a:bodyPr wrap="square" lIns="0" tIns="0" rIns="0" bIns="0" rtlCol="0" anchor="ctr"/>
           <a:lstStyle/>
           <a:p>
-            <a:pPr marL="0" indent="0" algn="ctr">
+            <a:pPr marL="0" indent="0">
               <a:buNone/>
             </a:pPr>
             <a:r>
-              <a:rPr lang="en-US" sz="1300" b="1" dirty="0">
-                <a:solidFill>
-                  <a:srgbClr val="607D8B"/>
+              <a:rPr lang="en-US" sz="1200" b="1" dirty="0">
+                <a:solidFill>
+                  <a:srgbClr val="1A2B3C"/>
                 </a:solidFill>
                 <a:latin typeface="여기어때 잘난체 고딕 TTF" pitchFamily="2" charset="-127"/>
                 <a:ea typeface="여기어때 잘난체 고딕 TTF" pitchFamily="2" charset="-127"/>
                 <a:cs typeface="Calibri" pitchFamily="34" charset="-120"/>
               </a:rPr>
-              <a:t>🥚알</a:t>
-            </a:r>
-            <a:endParaRPr lang="en-US" sz="1300" dirty="0">
+              <a:t>⏱  주차별 </a:t>
+            </a:r>
+            <a:r>
+              <a:rPr lang="en-US" sz="1200" b="1" dirty="0" err="1">
+                <a:solidFill>
+                  <a:srgbClr val="1A2B3C"/>
+                </a:solidFill>
+                <a:latin typeface="여기어때 잘난체 고딕 TTF" pitchFamily="2" charset="-127"/>
+                <a:ea typeface="여기어때 잘난체 고딕 TTF" pitchFamily="2" charset="-127"/>
+                <a:cs typeface="Calibri" pitchFamily="34" charset="-120"/>
+              </a:rPr>
+              <a:t>패시브</a:t>
+            </a:r>
+            <a:r>
+              <a:rPr lang="en-US" sz="1200" b="1" dirty="0">
+                <a:solidFill>
+                  <a:srgbClr val="1A2B3C"/>
+                </a:solidFill>
+                <a:latin typeface="여기어때 잘난체 고딕 TTF" pitchFamily="2" charset="-127"/>
+                <a:ea typeface="여기어때 잘난체 고딕 TTF" pitchFamily="2" charset="-127"/>
+                <a:cs typeface="Calibri" pitchFamily="34" charset="-120"/>
+              </a:rPr>
+              <a:t> ( </a:t>
+            </a:r>
+            <a:r>
+              <a:rPr lang="en-US" sz="1200" b="1" dirty="0" err="1">
+                <a:solidFill>
+                  <a:srgbClr val="1A2B3C"/>
+                </a:solidFill>
+                <a:latin typeface="여기어때 잘난체 고딕 TTF" pitchFamily="2" charset="-127"/>
+                <a:ea typeface="여기어때 잘난체 고딕 TTF" pitchFamily="2" charset="-127"/>
+                <a:cs typeface="Calibri" pitchFamily="34" charset="-120"/>
+              </a:rPr>
+              <a:t>매주</a:t>
+            </a:r>
+            <a:r>
+              <a:rPr lang="en-US" sz="1200" b="1" dirty="0">
+                <a:solidFill>
+                  <a:srgbClr val="1A2B3C"/>
+                </a:solidFill>
+                <a:latin typeface="여기어때 잘난체 고딕 TTF" pitchFamily="2" charset="-127"/>
+                <a:ea typeface="여기어때 잘난체 고딕 TTF" pitchFamily="2" charset="-127"/>
+                <a:cs typeface="Calibri" pitchFamily="34" charset="-120"/>
+              </a:rPr>
+              <a:t> </a:t>
+            </a:r>
+            <a:r>
+              <a:rPr lang="en-US" sz="1200" b="1" dirty="0" err="1">
+                <a:solidFill>
+                  <a:srgbClr val="1A2B3C"/>
+                </a:solidFill>
+                <a:latin typeface="여기어때 잘난체 고딕 TTF" pitchFamily="2" charset="-127"/>
+                <a:ea typeface="여기어때 잘난체 고딕 TTF" pitchFamily="2" charset="-127"/>
+                <a:cs typeface="Calibri" pitchFamily="34" charset="-120"/>
+              </a:rPr>
+              <a:t>자동</a:t>
+            </a:r>
+            <a:r>
+              <a:rPr lang="en-US" sz="1200" b="1" dirty="0">
+                <a:solidFill>
+                  <a:srgbClr val="1A2B3C"/>
+                </a:solidFill>
+                <a:latin typeface="여기어때 잘난체 고딕 TTF" pitchFamily="2" charset="-127"/>
+                <a:ea typeface="여기어때 잘난체 고딕 TTF" pitchFamily="2" charset="-127"/>
+                <a:cs typeface="Calibri" pitchFamily="34" charset="-120"/>
+              </a:rPr>
+              <a:t> </a:t>
+            </a:r>
+            <a:r>
+              <a:rPr lang="en-US" sz="1200" b="1" dirty="0" err="1">
+                <a:solidFill>
+                  <a:srgbClr val="1A2B3C"/>
+                </a:solidFill>
+                <a:latin typeface="여기어때 잘난체 고딕 TTF" pitchFamily="2" charset="-127"/>
+                <a:ea typeface="여기어때 잘난체 고딕 TTF" pitchFamily="2" charset="-127"/>
+                <a:cs typeface="Calibri" pitchFamily="34" charset="-120"/>
+              </a:rPr>
+              <a:t>적용</a:t>
+            </a:r>
+            <a:r>
+              <a:rPr lang="en-US" sz="1200" b="1" dirty="0">
+                <a:solidFill>
+                  <a:srgbClr val="1A2B3C"/>
+                </a:solidFill>
+                <a:latin typeface="여기어때 잘난체 고딕 TTF" pitchFamily="2" charset="-127"/>
+                <a:ea typeface="여기어때 잘난체 고딕 TTF" pitchFamily="2" charset="-127"/>
+                <a:cs typeface="Calibri" pitchFamily="34" charset="-120"/>
+              </a:rPr>
+              <a:t> )</a:t>
+            </a:r>
+            <a:endParaRPr lang="en-US" sz="1200" dirty="0">
               <a:latin typeface="여기어때 잘난체 고딕 TTF" pitchFamily="2" charset="-127"/>
               <a:ea typeface="여기어때 잘난체 고딕 TTF" pitchFamily="2" charset="-127"/>
             </a:endParaRPr>
@@ -7273,219 +8736,14 @@
       </p:sp>
       <p:sp>
         <p:nvSpPr>
-          <p:cNvPr id="8" name="Text 6"/>
-          <p:cNvSpPr/>
-          <p:nvPr/>
-        </p:nvSpPr>
-        <p:spPr>
-          <a:xfrm>
-            <a:off x="393192" y="1975104"/>
-            <a:ext cx="1453896" cy="1773936"/>
-          </a:xfrm>
-          <a:prstGeom prst="rect">
-            <a:avLst/>
-          </a:prstGeom>
-          <a:noFill/>
-          <a:ln/>
-        </p:spPr>
-        <p:txBody>
-          <a:bodyPr wrap="square" lIns="38100" tIns="38100" rIns="38100" bIns="38100" rtlCol="0" anchor="t"/>
-          <a:lstStyle/>
-          <a:p>
-            <a:pPr marL="171450" indent="-171450">
-              <a:buFont typeface="Arial" panose="020B0604020202020204" pitchFamily="34" charset="0"/>
-              <a:buChar char="•"/>
-            </a:pPr>
-            <a:r>
-              <a:rPr lang="en-US" sz="1150" dirty="0">
-                <a:solidFill>
-                  <a:srgbClr val="1A2B3C"/>
-                </a:solidFill>
-                <a:latin typeface="여기어때 잘난체 고딕 TTF" pitchFamily="2" charset="-127"/>
-                <a:ea typeface="여기어때 잘난체 고딕 TTF" pitchFamily="2" charset="-127"/>
-                <a:cs typeface="Calibri" pitchFamily="34" charset="-120"/>
-              </a:rPr>
-              <a:t>품어주기</a:t>
-            </a:r>
-            <a:endParaRPr lang="en-US" sz="1150" dirty="0">
-              <a:latin typeface="여기어때 잘난체 고딕 TTF" pitchFamily="2" charset="-127"/>
-              <a:ea typeface="여기어때 잘난체 고딕 TTF" pitchFamily="2" charset="-127"/>
-            </a:endParaRPr>
-          </a:p>
-          <a:p>
-            <a:pPr marL="171450" indent="-171450">
-              <a:buFont typeface="Arial" panose="020B0604020202020204" pitchFamily="34" charset="0"/>
-              <a:buChar char="•"/>
-            </a:pPr>
-            <a:r>
-              <a:rPr lang="en-US" sz="1150" dirty="0">
-                <a:solidFill>
-                  <a:srgbClr val="1A2B3C"/>
-                </a:solidFill>
-                <a:latin typeface="여기어때 잘난체 고딕 TTF" pitchFamily="2" charset="-127"/>
-                <a:ea typeface="여기어때 잘난체 고딕 TTF" pitchFamily="2" charset="-127"/>
-                <a:cs typeface="Calibri" pitchFamily="34" charset="-120"/>
-              </a:rPr>
-              <a:t>쓰다듬기</a:t>
-            </a:r>
-            <a:endParaRPr lang="en-US" sz="1150" dirty="0">
-              <a:latin typeface="여기어때 잘난체 고딕 TTF" pitchFamily="2" charset="-127"/>
-              <a:ea typeface="여기어때 잘난체 고딕 TTF" pitchFamily="2" charset="-127"/>
-            </a:endParaRPr>
-          </a:p>
-          <a:p>
-            <a:pPr marL="171450" indent="-171450">
-              <a:buFont typeface="Arial" panose="020B0604020202020204" pitchFamily="34" charset="0"/>
-              <a:buChar char="•"/>
-            </a:pPr>
-            <a:r>
-              <a:rPr lang="en-US" sz="1150" dirty="0">
-                <a:solidFill>
-                  <a:srgbClr val="1A2B3C"/>
-                </a:solidFill>
-                <a:latin typeface="여기어때 잘난체 고딕 TTF" pitchFamily="2" charset="-127"/>
-                <a:ea typeface="여기어때 잘난체 고딕 TTF" pitchFamily="2" charset="-127"/>
-                <a:cs typeface="Calibri" pitchFamily="34" charset="-120"/>
-              </a:rPr>
-              <a:t>방치하기</a:t>
-            </a:r>
-            <a:endParaRPr lang="en-US" sz="1150" dirty="0">
-              <a:latin typeface="여기어때 잘난체 고딕 TTF" pitchFamily="2" charset="-127"/>
-              <a:ea typeface="여기어때 잘난체 고딕 TTF" pitchFamily="2" charset="-127"/>
-            </a:endParaRPr>
-          </a:p>
-          <a:p>
-            <a:pPr marL="0" indent="0">
-              <a:buNone/>
-            </a:pPr>
-            <a:endParaRPr lang="en-US" sz="1150" dirty="0">
-              <a:latin typeface="여기어때 잘난체 고딕 TTF" pitchFamily="2" charset="-127"/>
-              <a:ea typeface="여기어때 잘난체 고딕 TTF" pitchFamily="2" charset="-127"/>
-            </a:endParaRPr>
-          </a:p>
-          <a:p>
-            <a:pPr marL="0" indent="0">
-              <a:buNone/>
-            </a:pPr>
-            <a:r>
-              <a:rPr lang="en-US" sz="1150" dirty="0">
-                <a:solidFill>
-                  <a:srgbClr val="1A2B3C"/>
-                </a:solidFill>
-                <a:latin typeface="여기어때 잘난체 고딕 TTF" pitchFamily="2" charset="-127"/>
-                <a:ea typeface="여기어때 잘난체 고딕 TTF" pitchFamily="2" charset="-127"/>
-                <a:cs typeface="Calibri" pitchFamily="34" charset="-120"/>
-              </a:rPr>
-              <a:t>( </a:t>
-            </a:r>
-            <a:r>
-              <a:rPr lang="en-US" sz="1150" dirty="0" err="1">
-                <a:solidFill>
-                  <a:srgbClr val="1A2B3C"/>
-                </a:solidFill>
-                <a:latin typeface="여기어때 잘난체 고딕 TTF" pitchFamily="2" charset="-127"/>
-                <a:ea typeface="여기어때 잘난체 고딕 TTF" pitchFamily="2" charset="-127"/>
-                <a:cs typeface="Calibri" pitchFamily="34" charset="-120"/>
-              </a:rPr>
-              <a:t>사망</a:t>
-            </a:r>
-            <a:r>
-              <a:rPr lang="en-US" sz="1150" dirty="0">
-                <a:solidFill>
-                  <a:srgbClr val="1A2B3C"/>
-                </a:solidFill>
-                <a:latin typeface="여기어때 잘난체 고딕 TTF" pitchFamily="2" charset="-127"/>
-                <a:ea typeface="여기어때 잘난체 고딕 TTF" pitchFamily="2" charset="-127"/>
-                <a:cs typeface="Calibri" pitchFamily="34" charset="-120"/>
-              </a:rPr>
-              <a:t> </a:t>
-            </a:r>
-            <a:r>
-              <a:rPr lang="en-US" sz="1150" dirty="0" err="1">
-                <a:solidFill>
-                  <a:srgbClr val="1A2B3C"/>
-                </a:solidFill>
-                <a:latin typeface="여기어때 잘난체 고딕 TTF" pitchFamily="2" charset="-127"/>
-                <a:ea typeface="여기어때 잘난체 고딕 TTF" pitchFamily="2" charset="-127"/>
-                <a:cs typeface="Calibri" pitchFamily="34" charset="-120"/>
-              </a:rPr>
-              <a:t>판정</a:t>
-            </a:r>
-            <a:r>
-              <a:rPr lang="en-US" sz="1150" dirty="0">
-                <a:solidFill>
-                  <a:srgbClr val="1A2B3C"/>
-                </a:solidFill>
-                <a:latin typeface="여기어때 잘난체 고딕 TTF" pitchFamily="2" charset="-127"/>
-                <a:ea typeface="여기어때 잘난체 고딕 TTF" pitchFamily="2" charset="-127"/>
-                <a:cs typeface="Calibri" pitchFamily="34" charset="-120"/>
-              </a:rPr>
-              <a:t> </a:t>
-            </a:r>
-            <a:r>
-              <a:rPr lang="en-US" sz="1150" dirty="0" err="1">
-                <a:solidFill>
-                  <a:srgbClr val="1A2B3C"/>
-                </a:solidFill>
-                <a:latin typeface="여기어때 잘난체 고딕 TTF" pitchFamily="2" charset="-127"/>
-                <a:ea typeface="여기어때 잘난체 고딕 TTF" pitchFamily="2" charset="-127"/>
-                <a:cs typeface="Calibri" pitchFamily="34" charset="-120"/>
-              </a:rPr>
-              <a:t>없음</a:t>
-            </a:r>
-            <a:r>
-              <a:rPr lang="en-US" sz="1150" dirty="0">
-                <a:solidFill>
-                  <a:srgbClr val="1A2B3C"/>
-                </a:solidFill>
-                <a:latin typeface="여기어때 잘난체 고딕 TTF" pitchFamily="2" charset="-127"/>
-                <a:ea typeface="여기어때 잘난체 고딕 TTF" pitchFamily="2" charset="-127"/>
-                <a:cs typeface="Calibri" pitchFamily="34" charset="-120"/>
-              </a:rPr>
-              <a:t> )</a:t>
-            </a:r>
-            <a:endParaRPr lang="en-US" sz="1150" dirty="0">
-              <a:latin typeface="여기어때 잘난체 고딕 TTF" pitchFamily="2" charset="-127"/>
-              <a:ea typeface="여기어때 잘난체 고딕 TTF" pitchFamily="2" charset="-127"/>
-            </a:endParaRPr>
-          </a:p>
-        </p:txBody>
-      </p:sp>
-      <p:sp>
-        <p:nvSpPr>
-          <p:cNvPr id="9" name="Shape 7"/>
-          <p:cNvSpPr/>
-          <p:nvPr/>
-        </p:nvSpPr>
-        <p:spPr>
-          <a:xfrm>
-            <a:off x="1984248" y="1097280"/>
-            <a:ext cx="1600200" cy="347472"/>
-          </a:xfrm>
-          <a:prstGeom prst="rect">
-            <a:avLst/>
-          </a:prstGeom>
-          <a:solidFill>
-            <a:srgbClr val="2471A3"/>
-          </a:solidFill>
-          <a:ln w="12700">
-            <a:solidFill>
-              <a:srgbClr val="2471A3"/>
-            </a:solidFill>
-            <a:prstDash val="solid"/>
-          </a:ln>
-        </p:spPr>
-      </p:sp>
-      <p:sp>
-        <p:nvSpPr>
-          <p:cNvPr id="10" name="Text 8"/>
-          <p:cNvSpPr/>
-          <p:nvPr/>
-        </p:nvSpPr>
-        <p:spPr>
-          <a:xfrm>
-            <a:off x="1984248" y="1097280"/>
-            <a:ext cx="1600200" cy="347472"/>
+          <p:cNvPr id="31" name="Text 29"/>
+          <p:cNvSpPr/>
+          <p:nvPr/>
+        </p:nvSpPr>
+        <p:spPr>
+          <a:xfrm>
+            <a:off x="562356" y="4418511"/>
+            <a:ext cx="3931920" cy="457200"/>
           </a:xfrm>
           <a:prstGeom prst="rect">
             <a:avLst/>
@@ -7497,21 +8755,21 @@
           <a:bodyPr wrap="square" lIns="0" tIns="0" rIns="0" bIns="0" rtlCol="0" anchor="ctr"/>
           <a:lstStyle/>
           <a:p>
-            <a:pPr marL="0" indent="0" algn="ctr">
+            <a:pPr marL="0" indent="0">
               <a:buNone/>
             </a:pPr>
             <a:r>
-              <a:rPr lang="en-US" sz="1100" b="1" dirty="0">
-                <a:solidFill>
-                  <a:srgbClr val="FFFFFF"/>
+              <a:rPr lang="en-US" sz="1200" dirty="0">
+                <a:solidFill>
+                  <a:srgbClr val="607D8B"/>
                 </a:solidFill>
                 <a:latin typeface="여기어때 잘난체 고딕 TTF" pitchFamily="2" charset="-127"/>
                 <a:ea typeface="여기어때 잘난체 고딕 TTF" pitchFamily="2" charset="-127"/>
                 <a:cs typeface="Calibri" pitchFamily="34" charset="-120"/>
               </a:rPr>
-              <a:t>2 ~ 3 주</a:t>
-            </a:r>
-            <a:endParaRPr lang="en-US" sz="1100" dirty="0">
+              <a:t>포만감 −10  /  청결도 −5  /  스트레스 +5</a:t>
+            </a:r>
+            <a:endParaRPr lang="en-US" sz="1200" dirty="0">
               <a:latin typeface="여기어때 잘난체 고딕 TTF" pitchFamily="2" charset="-127"/>
               <a:ea typeface="여기어때 잘난체 고딕 TTF" pitchFamily="2" charset="-127"/>
             </a:endParaRPr>
@@ -7520,337 +8778,14 @@
       </p:sp>
       <p:sp>
         <p:nvSpPr>
-          <p:cNvPr id="11" name="Shape 9"/>
-          <p:cNvSpPr/>
-          <p:nvPr/>
-        </p:nvSpPr>
-        <p:spPr>
-          <a:xfrm>
-            <a:off x="1984248" y="1444752"/>
-            <a:ext cx="1600200" cy="2377440"/>
-          </a:xfrm>
-          <a:prstGeom prst="rect">
-            <a:avLst/>
-          </a:prstGeom>
-          <a:solidFill>
-            <a:srgbClr val="FFFFFF"/>
-          </a:solidFill>
-          <a:ln w="12700">
-            <a:solidFill>
-              <a:srgbClr val="2471A3"/>
-            </a:solidFill>
-            <a:prstDash val="solid"/>
-          </a:ln>
-          <a:effectLst>
-            <a:outerShdw blurRad="101600" dist="38100" dir="8100000" algn="bl" rotWithShape="0">
-              <a:srgbClr val="000000">
-                <a:alpha val="10000"/>
-              </a:srgbClr>
-            </a:outerShdw>
-          </a:effectLst>
-        </p:spPr>
-      </p:sp>
-      <p:sp>
-        <p:nvSpPr>
-          <p:cNvPr id="12" name="Text 10"/>
-          <p:cNvSpPr/>
-          <p:nvPr/>
-        </p:nvSpPr>
-        <p:spPr>
-          <a:xfrm>
-            <a:off x="1984248" y="1463040"/>
-            <a:ext cx="1600200" cy="475488"/>
-          </a:xfrm>
-          <a:prstGeom prst="rect">
-            <a:avLst/>
-          </a:prstGeom>
-          <a:noFill/>
-          <a:ln/>
-        </p:spPr>
-        <p:txBody>
-          <a:bodyPr wrap="square" lIns="0" tIns="0" rIns="0" bIns="0" rtlCol="0" anchor="ctr"/>
-          <a:lstStyle/>
-          <a:p>
-            <a:pPr marL="0" indent="0" algn="ctr">
-              <a:buNone/>
-            </a:pPr>
-            <a:r>
-              <a:rPr lang="en-US" sz="1300" b="1" dirty="0">
-                <a:solidFill>
-                  <a:srgbClr val="2471A3"/>
-                </a:solidFill>
-                <a:latin typeface="여기어때 잘난체 고딕 TTF" pitchFamily="2" charset="-127"/>
-                <a:ea typeface="여기어때 잘난체 고딕 TTF" pitchFamily="2" charset="-127"/>
-                <a:cs typeface="Calibri" pitchFamily="34" charset="-120"/>
-              </a:rPr>
-              <a:t>🐣</a:t>
-            </a:r>
-            <a:r>
-              <a:rPr lang="en-US" sz="1300" b="1" dirty="0" err="1">
-                <a:solidFill>
-                  <a:srgbClr val="2471A3"/>
-                </a:solidFill>
-                <a:latin typeface="여기어때 잘난체 고딕 TTF" pitchFamily="2" charset="-127"/>
-                <a:ea typeface="여기어때 잘난체 고딕 TTF" pitchFamily="2" charset="-127"/>
-                <a:cs typeface="Calibri" pitchFamily="34" charset="-120"/>
-              </a:rPr>
-              <a:t>유아기</a:t>
-            </a:r>
-            <a:endParaRPr lang="en-US" sz="1300" dirty="0">
-              <a:latin typeface="여기어때 잘난체 고딕 TTF" pitchFamily="2" charset="-127"/>
-              <a:ea typeface="여기어때 잘난체 고딕 TTF" pitchFamily="2" charset="-127"/>
-            </a:endParaRPr>
-          </a:p>
-        </p:txBody>
-      </p:sp>
-      <p:sp>
-        <p:nvSpPr>
-          <p:cNvPr id="13" name="Text 11"/>
-          <p:cNvSpPr/>
-          <p:nvPr/>
-        </p:nvSpPr>
-        <p:spPr>
-          <a:xfrm>
-            <a:off x="2057400" y="1975104"/>
-            <a:ext cx="1453896" cy="1773936"/>
-          </a:xfrm>
-          <a:prstGeom prst="rect">
-            <a:avLst/>
-          </a:prstGeom>
-          <a:noFill/>
-          <a:ln/>
-        </p:spPr>
-        <p:txBody>
-          <a:bodyPr wrap="square" lIns="38100" tIns="38100" rIns="38100" bIns="38100" rtlCol="0" anchor="t"/>
-          <a:lstStyle/>
-          <a:p>
-            <a:pPr marL="171450" indent="-171450">
-              <a:buFont typeface="Arial" panose="020B0604020202020204" pitchFamily="34" charset="0"/>
-              <a:buChar char="•"/>
-            </a:pPr>
-            <a:r>
-              <a:rPr lang="en-US" sz="1150" dirty="0">
-                <a:solidFill>
-                  <a:srgbClr val="1A2B3C"/>
-                </a:solidFill>
-                <a:latin typeface="여기어때 잘난체 고딕 TTF" pitchFamily="2" charset="-127"/>
-                <a:ea typeface="여기어때 잘난체 고딕 TTF" pitchFamily="2" charset="-127"/>
-                <a:cs typeface="Calibri" pitchFamily="34" charset="-120"/>
-              </a:rPr>
-              <a:t>이유식 먹이기</a:t>
-            </a:r>
-            <a:endParaRPr lang="en-US" sz="1150" dirty="0">
-              <a:latin typeface="여기어때 잘난체 고딕 TTF" pitchFamily="2" charset="-127"/>
-              <a:ea typeface="여기어때 잘난체 고딕 TTF" pitchFamily="2" charset="-127"/>
-            </a:endParaRPr>
-          </a:p>
-          <a:p>
-            <a:pPr marL="171450" indent="-171450">
-              <a:buFont typeface="Arial" panose="020B0604020202020204" pitchFamily="34" charset="0"/>
-              <a:buChar char="•"/>
-            </a:pPr>
-            <a:r>
-              <a:rPr lang="en-US" sz="1150" dirty="0">
-                <a:solidFill>
-                  <a:srgbClr val="1A2B3C"/>
-                </a:solidFill>
-                <a:latin typeface="여기어때 잘난체 고딕 TTF" pitchFamily="2" charset="-127"/>
-                <a:ea typeface="여기어때 잘난체 고딕 TTF" pitchFamily="2" charset="-127"/>
-                <a:cs typeface="Calibri" pitchFamily="34" charset="-120"/>
-              </a:rPr>
-              <a:t>청소하기</a:t>
-            </a:r>
-            <a:endParaRPr lang="en-US" sz="1150" dirty="0">
-              <a:latin typeface="여기어때 잘난체 고딕 TTF" pitchFamily="2" charset="-127"/>
-              <a:ea typeface="여기어때 잘난체 고딕 TTF" pitchFamily="2" charset="-127"/>
-            </a:endParaRPr>
-          </a:p>
-          <a:p>
-            <a:pPr marL="171450" indent="-171450">
-              <a:buFont typeface="Arial" panose="020B0604020202020204" pitchFamily="34" charset="0"/>
-              <a:buChar char="•"/>
-            </a:pPr>
-            <a:r>
-              <a:rPr lang="en-US" sz="1150" dirty="0">
-                <a:solidFill>
-                  <a:srgbClr val="1A2B3C"/>
-                </a:solidFill>
-                <a:latin typeface="여기어때 잘난체 고딕 TTF" pitchFamily="2" charset="-127"/>
-                <a:ea typeface="여기어때 잘난체 고딕 TTF" pitchFamily="2" charset="-127"/>
-                <a:cs typeface="Calibri" pitchFamily="34" charset="-120"/>
-              </a:rPr>
-              <a:t>재우기</a:t>
-            </a:r>
-            <a:endParaRPr lang="en-US" sz="1150" dirty="0">
-              <a:latin typeface="여기어때 잘난체 고딕 TTF" pitchFamily="2" charset="-127"/>
-              <a:ea typeface="여기어때 잘난체 고딕 TTF" pitchFamily="2" charset="-127"/>
-            </a:endParaRPr>
-          </a:p>
-          <a:p>
-            <a:pPr marL="171450" indent="-171450">
-              <a:buFont typeface="Arial" panose="020B0604020202020204" pitchFamily="34" charset="0"/>
-              <a:buChar char="•"/>
-            </a:pPr>
-            <a:r>
-              <a:rPr lang="en-US" sz="1150" dirty="0" err="1">
-                <a:solidFill>
-                  <a:srgbClr val="1A2B3C"/>
-                </a:solidFill>
-                <a:latin typeface="여기어때 잘난체 고딕 TTF" pitchFamily="2" charset="-127"/>
-                <a:ea typeface="여기어때 잘난체 고딕 TTF" pitchFamily="2" charset="-127"/>
-                <a:cs typeface="Calibri" pitchFamily="34" charset="-120"/>
-              </a:rPr>
-              <a:t>놀아주기</a:t>
-            </a:r>
-            <a:endParaRPr lang="en-US" sz="1150" dirty="0">
-              <a:solidFill>
-                <a:srgbClr val="1A2B3C"/>
-              </a:solidFill>
-              <a:latin typeface="여기어때 잘난체 고딕 TTF" pitchFamily="2" charset="-127"/>
-              <a:ea typeface="여기어때 잘난체 고딕 TTF" pitchFamily="2" charset="-127"/>
-              <a:cs typeface="Calibri" pitchFamily="34" charset="-120"/>
-            </a:endParaRPr>
-          </a:p>
-          <a:p>
-            <a:r>
-              <a:rPr lang="en-US" sz="1150" dirty="0">
-                <a:solidFill>
-                  <a:srgbClr val="1A2B3C"/>
-                </a:solidFill>
-                <a:latin typeface="여기어때 잘난체 고딕 TTF" pitchFamily="2" charset="-127"/>
-                <a:ea typeface="여기어때 잘난체 고딕 TTF" pitchFamily="2" charset="-127"/>
-                <a:cs typeface="Calibri" pitchFamily="34" charset="-120"/>
-              </a:rPr>
-              <a:t>    ( </a:t>
-            </a:r>
-            <a:r>
-              <a:rPr lang="en-US" sz="1150" dirty="0" err="1">
-                <a:solidFill>
-                  <a:srgbClr val="1A2B3C"/>
-                </a:solidFill>
-                <a:latin typeface="여기어때 잘난체 고딕 TTF" pitchFamily="2" charset="-127"/>
-                <a:ea typeface="여기어때 잘난체 고딕 TTF" pitchFamily="2" charset="-127"/>
-                <a:cs typeface="Calibri" pitchFamily="34" charset="-120"/>
-              </a:rPr>
-              <a:t>산책</a:t>
-            </a:r>
-            <a:r>
-              <a:rPr lang="en-US" sz="1150" dirty="0">
-                <a:solidFill>
-                  <a:srgbClr val="1A2B3C"/>
-                </a:solidFill>
-                <a:latin typeface="여기어때 잘난체 고딕 TTF" pitchFamily="2" charset="-127"/>
-                <a:ea typeface="여기어때 잘난체 고딕 TTF" pitchFamily="2" charset="-127"/>
-                <a:cs typeface="Calibri" pitchFamily="34" charset="-120"/>
-              </a:rPr>
-              <a:t> </a:t>
-            </a:r>
-            <a:r>
-              <a:rPr lang="en-US" sz="1150" dirty="0" err="1">
-                <a:solidFill>
-                  <a:srgbClr val="1A2B3C"/>
-                </a:solidFill>
-                <a:latin typeface="여기어때 잘난체 고딕 TTF" pitchFamily="2" charset="-127"/>
-                <a:ea typeface="여기어때 잘난체 고딕 TTF" pitchFamily="2" charset="-127"/>
-                <a:cs typeface="Calibri" pitchFamily="34" charset="-120"/>
-              </a:rPr>
-              <a:t>제외</a:t>
-            </a:r>
-            <a:r>
-              <a:rPr lang="en-US" sz="1150" dirty="0">
-                <a:solidFill>
-                  <a:srgbClr val="1A2B3C"/>
-                </a:solidFill>
-                <a:latin typeface="여기어때 잘난체 고딕 TTF" pitchFamily="2" charset="-127"/>
-                <a:ea typeface="여기어때 잘난체 고딕 TTF" pitchFamily="2" charset="-127"/>
-                <a:cs typeface="Calibri" pitchFamily="34" charset="-120"/>
-              </a:rPr>
-              <a:t> )</a:t>
-            </a:r>
-            <a:endParaRPr lang="en-US" sz="1150" dirty="0">
-              <a:latin typeface="여기어때 잘난체 고딕 TTF" pitchFamily="2" charset="-127"/>
-              <a:ea typeface="여기어때 잘난체 고딕 TTF" pitchFamily="2" charset="-127"/>
-            </a:endParaRPr>
-          </a:p>
-        </p:txBody>
-      </p:sp>
-      <p:sp>
-        <p:nvSpPr>
-          <p:cNvPr id="14" name="Shape 12"/>
-          <p:cNvSpPr/>
-          <p:nvPr/>
-        </p:nvSpPr>
-        <p:spPr>
-          <a:xfrm>
-            <a:off x="3648456" y="1097280"/>
-            <a:ext cx="1600200" cy="347472"/>
-          </a:xfrm>
-          <a:prstGeom prst="rect">
-            <a:avLst/>
-          </a:prstGeom>
-          <a:solidFill>
-            <a:srgbClr val="3FBFA6"/>
-          </a:solidFill>
-          <a:ln w="12700">
-            <a:solidFill>
-              <a:srgbClr val="3FBFA6"/>
-            </a:solidFill>
-            <a:prstDash val="solid"/>
-          </a:ln>
-        </p:spPr>
-      </p:sp>
-      <p:sp>
-        <p:nvSpPr>
-          <p:cNvPr id="15" name="Text 13"/>
-          <p:cNvSpPr/>
-          <p:nvPr/>
-        </p:nvSpPr>
-        <p:spPr>
-          <a:xfrm>
-            <a:off x="3648456" y="1097280"/>
-            <a:ext cx="1600200" cy="347472"/>
-          </a:xfrm>
-          <a:prstGeom prst="rect">
-            <a:avLst/>
-          </a:prstGeom>
-          <a:noFill/>
-          <a:ln/>
-        </p:spPr>
-        <p:txBody>
-          <a:bodyPr wrap="square" lIns="0" tIns="0" rIns="0" bIns="0" rtlCol="0" anchor="ctr"/>
-          <a:lstStyle/>
-          <a:p>
-            <a:pPr marL="0" indent="0" algn="ctr">
-              <a:buNone/>
-            </a:pPr>
-            <a:r>
-              <a:rPr lang="en-US" sz="1100" b="1" dirty="0">
-                <a:solidFill>
-                  <a:srgbClr val="FFFFFF"/>
-                </a:solidFill>
-                <a:latin typeface="여기어때 잘난체 고딕 TTF" pitchFamily="2" charset="-127"/>
-                <a:ea typeface="여기어때 잘난체 고딕 TTF" pitchFamily="2" charset="-127"/>
-                <a:cs typeface="Calibri" pitchFamily="34" charset="-120"/>
-              </a:rPr>
-              <a:t>4 ~ 5 주</a:t>
-            </a:r>
-            <a:endParaRPr lang="en-US" sz="1100" dirty="0">
-              <a:latin typeface="여기어때 잘난체 고딕 TTF" pitchFamily="2" charset="-127"/>
-              <a:ea typeface="여기어때 잘난체 고딕 TTF" pitchFamily="2" charset="-127"/>
-            </a:endParaRPr>
-          </a:p>
-        </p:txBody>
-      </p:sp>
-      <p:sp>
-        <p:nvSpPr>
-          <p:cNvPr id="16" name="Shape 14"/>
-          <p:cNvSpPr/>
-          <p:nvPr/>
-        </p:nvSpPr>
-        <p:spPr>
-          <a:xfrm>
-            <a:off x="3648456" y="1444752"/>
-            <a:ext cx="1600200" cy="2377440"/>
+          <p:cNvPr id="32" name="Shape 30"/>
+          <p:cNvSpPr/>
+          <p:nvPr/>
+        </p:nvSpPr>
+        <p:spPr>
+          <a:xfrm>
+            <a:off x="4800600" y="3977640"/>
+            <a:ext cx="3899916" cy="914400"/>
           </a:xfrm>
           <a:prstGeom prst="rect">
             <a:avLst/>
@@ -7875,14 +8810,14 @@
       </p:sp>
       <p:sp>
         <p:nvSpPr>
-          <p:cNvPr id="17" name="Text 15"/>
-          <p:cNvSpPr/>
-          <p:nvPr/>
-        </p:nvSpPr>
-        <p:spPr>
-          <a:xfrm>
-            <a:off x="3648456" y="1463040"/>
-            <a:ext cx="1600200" cy="475488"/>
+          <p:cNvPr id="33" name="Text 31"/>
+          <p:cNvSpPr/>
+          <p:nvPr/>
+        </p:nvSpPr>
+        <p:spPr>
+          <a:xfrm>
+            <a:off x="4919472" y="4061895"/>
+            <a:ext cx="3931920" cy="365760"/>
           </a:xfrm>
           <a:prstGeom prst="rect">
             <a:avLst/>
@@ -7894,843 +8829,19 @@
           <a:bodyPr wrap="square" lIns="0" tIns="0" rIns="0" bIns="0" rtlCol="0" anchor="ctr"/>
           <a:lstStyle/>
           <a:p>
-            <a:pPr marL="0" indent="0" algn="ctr">
+            <a:pPr marL="0" indent="0">
               <a:buNone/>
             </a:pPr>
             <a:r>
-              <a:rPr lang="en-US" sz="1300" b="1" dirty="0">
-                <a:solidFill>
-                  <a:srgbClr val="3FBFA6"/>
+              <a:rPr lang="en-US" sz="1200" b="1" dirty="0">
+                <a:solidFill>
+                  <a:srgbClr val="1A2B3C"/>
                 </a:solidFill>
                 <a:latin typeface="여기어때 잘난체 고딕 TTF" pitchFamily="2" charset="-127"/>
                 <a:ea typeface="여기어때 잘난체 고딕 TTF" pitchFamily="2" charset="-127"/>
                 <a:cs typeface="Calibri" pitchFamily="34" charset="-120"/>
               </a:rPr>
-              <a:t>🐦</a:t>
-            </a:r>
-            <a:r>
-              <a:rPr lang="en-US" sz="1300" b="1" dirty="0" err="1">
-                <a:solidFill>
-                  <a:srgbClr val="3FBFA6"/>
-                </a:solidFill>
-                <a:latin typeface="여기어때 잘난체 고딕 TTF" pitchFamily="2" charset="-127"/>
-                <a:ea typeface="여기어때 잘난체 고딕 TTF" pitchFamily="2" charset="-127"/>
-                <a:cs typeface="Calibri" pitchFamily="34" charset="-120"/>
-              </a:rPr>
-              <a:t>유년기</a:t>
-            </a:r>
-            <a:endParaRPr lang="en-US" sz="1300" dirty="0">
-              <a:latin typeface="여기어때 잘난체 고딕 TTF" pitchFamily="2" charset="-127"/>
-              <a:ea typeface="여기어때 잘난체 고딕 TTF" pitchFamily="2" charset="-127"/>
-            </a:endParaRPr>
-          </a:p>
-        </p:txBody>
-      </p:sp>
-      <p:sp>
-        <p:nvSpPr>
-          <p:cNvPr id="18" name="Text 16"/>
-          <p:cNvSpPr/>
-          <p:nvPr/>
-        </p:nvSpPr>
-        <p:spPr>
-          <a:xfrm>
-            <a:off x="3721608" y="1975104"/>
-            <a:ext cx="1453896" cy="1773936"/>
-          </a:xfrm>
-          <a:prstGeom prst="rect">
-            <a:avLst/>
-          </a:prstGeom>
-          <a:noFill/>
-          <a:ln/>
-        </p:spPr>
-        <p:txBody>
-          <a:bodyPr wrap="square" lIns="38100" tIns="38100" rIns="38100" bIns="38100" rtlCol="0" anchor="t"/>
-          <a:lstStyle/>
-          <a:p>
-            <a:pPr marL="171450" indent="-171450">
-              <a:buFont typeface="Arial" panose="020B0604020202020204" pitchFamily="34" charset="0"/>
-              <a:buChar char="•"/>
-            </a:pPr>
-            <a:r>
-              <a:rPr lang="en-US" sz="1150" dirty="0">
-                <a:solidFill>
-                  <a:srgbClr val="1A2B3C"/>
-                </a:solidFill>
-                <a:latin typeface="여기어때 잘난체 고딕 TTF" pitchFamily="2" charset="-127"/>
-                <a:ea typeface="여기어때 잘난체 고딕 TTF" pitchFamily="2" charset="-127"/>
-                <a:cs typeface="Calibri" pitchFamily="34" charset="-120"/>
-              </a:rPr>
-              <a:t>먹이 주기</a:t>
-            </a:r>
-            <a:endParaRPr lang="en-US" sz="1150" dirty="0">
-              <a:latin typeface="여기어때 잘난체 고딕 TTF" pitchFamily="2" charset="-127"/>
-              <a:ea typeface="여기어때 잘난체 고딕 TTF" pitchFamily="2" charset="-127"/>
-            </a:endParaRPr>
-          </a:p>
-          <a:p>
-            <a:pPr marL="171450" indent="-171450">
-              <a:buFont typeface="Arial" panose="020B0604020202020204" pitchFamily="34" charset="0"/>
-              <a:buChar char="•"/>
-            </a:pPr>
-            <a:r>
-              <a:rPr lang="en-US" sz="1150" dirty="0">
-                <a:solidFill>
-                  <a:srgbClr val="1A2B3C"/>
-                </a:solidFill>
-                <a:latin typeface="여기어때 잘난체 고딕 TTF" pitchFamily="2" charset="-127"/>
-                <a:ea typeface="여기어때 잘난체 고딕 TTF" pitchFamily="2" charset="-127"/>
-                <a:cs typeface="Calibri" pitchFamily="34" charset="-120"/>
-              </a:rPr>
-              <a:t>청소하기</a:t>
-            </a:r>
-            <a:endParaRPr lang="en-US" sz="1150" dirty="0">
-              <a:latin typeface="여기어때 잘난체 고딕 TTF" pitchFamily="2" charset="-127"/>
-              <a:ea typeface="여기어때 잘난체 고딕 TTF" pitchFamily="2" charset="-127"/>
-            </a:endParaRPr>
-          </a:p>
-          <a:p>
-            <a:pPr marL="171450" indent="-171450">
-              <a:buFont typeface="Arial" panose="020B0604020202020204" pitchFamily="34" charset="0"/>
-              <a:buChar char="•"/>
-            </a:pPr>
-            <a:r>
-              <a:rPr lang="en-US" sz="1150" dirty="0">
-                <a:solidFill>
-                  <a:srgbClr val="1A2B3C"/>
-                </a:solidFill>
-                <a:latin typeface="여기어때 잘난체 고딕 TTF" pitchFamily="2" charset="-127"/>
-                <a:ea typeface="여기어때 잘난체 고딕 TTF" pitchFamily="2" charset="-127"/>
-                <a:cs typeface="Calibri" pitchFamily="34" charset="-120"/>
-              </a:rPr>
-              <a:t>훈련 시키기</a:t>
-            </a:r>
-            <a:endParaRPr lang="en-US" sz="1150" dirty="0">
-              <a:latin typeface="여기어때 잘난체 고딕 TTF" pitchFamily="2" charset="-127"/>
-              <a:ea typeface="여기어때 잘난체 고딕 TTF" pitchFamily="2" charset="-127"/>
-            </a:endParaRPr>
-          </a:p>
-          <a:p>
-            <a:pPr marL="171450" indent="-171450">
-              <a:buFont typeface="Arial" panose="020B0604020202020204" pitchFamily="34" charset="0"/>
-              <a:buChar char="•"/>
-            </a:pPr>
-            <a:r>
-              <a:rPr lang="en-US" sz="1150" dirty="0">
-                <a:solidFill>
-                  <a:srgbClr val="1A2B3C"/>
-                </a:solidFill>
-                <a:latin typeface="여기어때 잘난체 고딕 TTF" pitchFamily="2" charset="-127"/>
-                <a:ea typeface="여기어때 잘난체 고딕 TTF" pitchFamily="2" charset="-127"/>
-                <a:cs typeface="Calibri" pitchFamily="34" charset="-120"/>
-              </a:rPr>
-              <a:t>놀아주기</a:t>
-            </a:r>
-            <a:endParaRPr lang="en-US" sz="1150" dirty="0">
-              <a:latin typeface="여기어때 잘난체 고딕 TTF" pitchFamily="2" charset="-127"/>
-              <a:ea typeface="여기어때 잘난체 고딕 TTF" pitchFamily="2" charset="-127"/>
-            </a:endParaRPr>
-          </a:p>
-        </p:txBody>
-      </p:sp>
-      <p:sp>
-        <p:nvSpPr>
-          <p:cNvPr id="19" name="Shape 17"/>
-          <p:cNvSpPr/>
-          <p:nvPr/>
-        </p:nvSpPr>
-        <p:spPr>
-          <a:xfrm>
-            <a:off x="5312664" y="1097280"/>
-            <a:ext cx="1600200" cy="347472"/>
-          </a:xfrm>
-          <a:prstGeom prst="rect">
-            <a:avLst/>
-          </a:prstGeom>
-          <a:solidFill>
-            <a:srgbClr val="F4A261"/>
-          </a:solidFill>
-          <a:ln w="12700">
-            <a:solidFill>
-              <a:srgbClr val="F4A261"/>
-            </a:solidFill>
-            <a:prstDash val="solid"/>
-          </a:ln>
-        </p:spPr>
-      </p:sp>
-      <p:sp>
-        <p:nvSpPr>
-          <p:cNvPr id="20" name="Text 18"/>
-          <p:cNvSpPr/>
-          <p:nvPr/>
-        </p:nvSpPr>
-        <p:spPr>
-          <a:xfrm>
-            <a:off x="5312664" y="1097280"/>
-            <a:ext cx="1600200" cy="347472"/>
-          </a:xfrm>
-          <a:prstGeom prst="rect">
-            <a:avLst/>
-          </a:prstGeom>
-          <a:noFill/>
-          <a:ln/>
-        </p:spPr>
-        <p:txBody>
-          <a:bodyPr wrap="square" lIns="0" tIns="0" rIns="0" bIns="0" rtlCol="0" anchor="ctr"/>
-          <a:lstStyle/>
-          <a:p>
-            <a:pPr marL="0" indent="0" algn="ctr">
-              <a:buNone/>
-            </a:pPr>
-            <a:r>
-              <a:rPr lang="en-US" sz="1100" b="1" dirty="0">
-                <a:solidFill>
-                  <a:srgbClr val="FFFFFF"/>
-                </a:solidFill>
-                <a:latin typeface="여기어때 잘난체 고딕 TTF" pitchFamily="2" charset="-127"/>
-                <a:ea typeface="여기어때 잘난체 고딕 TTF" pitchFamily="2" charset="-127"/>
-                <a:cs typeface="Calibri" pitchFamily="34" charset="-120"/>
-              </a:rPr>
-              <a:t>6 ~ 7 주</a:t>
-            </a:r>
-            <a:endParaRPr lang="en-US" sz="1100" dirty="0">
-              <a:latin typeface="여기어때 잘난체 고딕 TTF" pitchFamily="2" charset="-127"/>
-              <a:ea typeface="여기어때 잘난체 고딕 TTF" pitchFamily="2" charset="-127"/>
-            </a:endParaRPr>
-          </a:p>
-        </p:txBody>
-      </p:sp>
-      <p:sp>
-        <p:nvSpPr>
-          <p:cNvPr id="21" name="Shape 19"/>
-          <p:cNvSpPr/>
-          <p:nvPr/>
-        </p:nvSpPr>
-        <p:spPr>
-          <a:xfrm>
-            <a:off x="5312664" y="1444752"/>
-            <a:ext cx="1600200" cy="2377440"/>
-          </a:xfrm>
-          <a:prstGeom prst="rect">
-            <a:avLst/>
-          </a:prstGeom>
-          <a:solidFill>
-            <a:srgbClr val="FFFFFF"/>
-          </a:solidFill>
-          <a:ln w="12700">
-            <a:solidFill>
-              <a:srgbClr val="F4A261"/>
-            </a:solidFill>
-            <a:prstDash val="solid"/>
-          </a:ln>
-          <a:effectLst>
-            <a:outerShdw blurRad="101600" dist="38100" dir="8100000" algn="bl" rotWithShape="0">
-              <a:srgbClr val="000000">
-                <a:alpha val="10000"/>
-              </a:srgbClr>
-            </a:outerShdw>
-          </a:effectLst>
-        </p:spPr>
-      </p:sp>
-      <p:sp>
-        <p:nvSpPr>
-          <p:cNvPr id="22" name="Text 20"/>
-          <p:cNvSpPr/>
-          <p:nvPr/>
-        </p:nvSpPr>
-        <p:spPr>
-          <a:xfrm>
-            <a:off x="5312664" y="1463040"/>
-            <a:ext cx="1600200" cy="475488"/>
-          </a:xfrm>
-          <a:prstGeom prst="rect">
-            <a:avLst/>
-          </a:prstGeom>
-          <a:noFill/>
-          <a:ln/>
-        </p:spPr>
-        <p:txBody>
-          <a:bodyPr wrap="square" lIns="0" tIns="0" rIns="0" bIns="0" rtlCol="0" anchor="ctr"/>
-          <a:lstStyle/>
-          <a:p>
-            <a:pPr marL="0" indent="0" algn="ctr">
-              <a:buNone/>
-            </a:pPr>
-            <a:r>
-              <a:rPr lang="en-US" sz="1300" b="1" dirty="0">
-                <a:solidFill>
-                  <a:srgbClr val="F4A261"/>
-                </a:solidFill>
-                <a:latin typeface="여기어때 잘난체 고딕 TTF" pitchFamily="2" charset="-127"/>
-                <a:ea typeface="여기어때 잘난체 고딕 TTF" pitchFamily="2" charset="-127"/>
-                <a:cs typeface="Calibri" pitchFamily="34" charset="-120"/>
-              </a:rPr>
-              <a:t>🦜</a:t>
-            </a:r>
-            <a:r>
-              <a:rPr lang="en-US" sz="1300" b="1" dirty="0" err="1">
-                <a:solidFill>
-                  <a:srgbClr val="F4A261"/>
-                </a:solidFill>
-                <a:latin typeface="여기어때 잘난체 고딕 TTF" pitchFamily="2" charset="-127"/>
-                <a:ea typeface="여기어때 잘난체 고딕 TTF" pitchFamily="2" charset="-127"/>
-                <a:cs typeface="Calibri" pitchFamily="34" charset="-120"/>
-              </a:rPr>
-              <a:t>청소년기</a:t>
-            </a:r>
-            <a:endParaRPr lang="en-US" sz="1300" dirty="0">
-              <a:latin typeface="여기어때 잘난체 고딕 TTF" pitchFamily="2" charset="-127"/>
-              <a:ea typeface="여기어때 잘난체 고딕 TTF" pitchFamily="2" charset="-127"/>
-            </a:endParaRPr>
-          </a:p>
-        </p:txBody>
-      </p:sp>
-      <p:sp>
-        <p:nvSpPr>
-          <p:cNvPr id="23" name="Text 21"/>
-          <p:cNvSpPr/>
-          <p:nvPr/>
-        </p:nvSpPr>
-        <p:spPr>
-          <a:xfrm>
-            <a:off x="5385816" y="1975104"/>
-            <a:ext cx="1453896" cy="1773936"/>
-          </a:xfrm>
-          <a:prstGeom prst="rect">
-            <a:avLst/>
-          </a:prstGeom>
-          <a:noFill/>
-          <a:ln/>
-        </p:spPr>
-        <p:txBody>
-          <a:bodyPr wrap="square" lIns="38100" tIns="38100" rIns="38100" bIns="38100" rtlCol="0" anchor="t"/>
-          <a:lstStyle/>
-          <a:p>
-            <a:pPr marL="171450" indent="-171450">
-              <a:buFont typeface="Arial" panose="020B0604020202020204" pitchFamily="34" charset="0"/>
-              <a:buChar char="•"/>
-            </a:pPr>
-            <a:r>
-              <a:rPr lang="ko-KR" altLang="en-US" sz="1150" dirty="0">
-                <a:solidFill>
-                  <a:srgbClr val="1A2B3C"/>
-                </a:solidFill>
-                <a:latin typeface="여기어때 잘난체 고딕 TTF" pitchFamily="2" charset="-127"/>
-                <a:ea typeface="여기어때 잘난체 고딕 TTF" pitchFamily="2" charset="-127"/>
-                <a:cs typeface="Calibri" pitchFamily="34" charset="-120"/>
-              </a:rPr>
-              <a:t>모든 행동 가능</a:t>
-            </a:r>
-            <a:endParaRPr lang="en-US" altLang="ko-KR" sz="1150" dirty="0">
-              <a:solidFill>
-                <a:srgbClr val="1A2B3C"/>
-              </a:solidFill>
-              <a:latin typeface="여기어때 잘난체 고딕 TTF" pitchFamily="2" charset="-127"/>
-              <a:ea typeface="여기어때 잘난체 고딕 TTF" pitchFamily="2" charset="-127"/>
-              <a:cs typeface="Calibri" pitchFamily="34" charset="-120"/>
-            </a:endParaRPr>
-          </a:p>
-          <a:p>
-            <a:pPr marL="171450" indent="-171450">
-              <a:buFont typeface="Arial" panose="020B0604020202020204" pitchFamily="34" charset="0"/>
-              <a:buChar char="•"/>
-            </a:pPr>
-            <a:r>
-              <a:rPr lang="ko-KR" altLang="en-US" sz="1150" dirty="0">
-                <a:solidFill>
-                  <a:srgbClr val="1A2B3C"/>
-                </a:solidFill>
-                <a:latin typeface="여기어때 잘난체 고딕 TTF" pitchFamily="2" charset="-127"/>
-                <a:ea typeface="여기어때 잘난체 고딕 TTF" pitchFamily="2" charset="-127"/>
-                <a:cs typeface="Calibri" pitchFamily="34" charset="-120"/>
-              </a:rPr>
-              <a:t>훈련 선택지 추가</a:t>
-            </a:r>
-            <a:endParaRPr lang="en-US" altLang="ko-KR" sz="1150" dirty="0">
-              <a:solidFill>
-                <a:srgbClr val="1A2B3C"/>
-              </a:solidFill>
-              <a:latin typeface="여기어때 잘난체 고딕 TTF" pitchFamily="2" charset="-127"/>
-              <a:ea typeface="여기어때 잘난체 고딕 TTF" pitchFamily="2" charset="-127"/>
-              <a:cs typeface="Calibri" pitchFamily="34" charset="-120"/>
-            </a:endParaRPr>
-          </a:p>
-          <a:p>
-            <a:pPr marL="171450" indent="-171450">
-              <a:buFont typeface="Arial" panose="020B0604020202020204" pitchFamily="34" charset="0"/>
-              <a:buChar char="•"/>
-            </a:pPr>
-            <a:r>
-              <a:rPr lang="en-US" sz="1150" dirty="0" err="1">
-                <a:solidFill>
-                  <a:srgbClr val="1A2B3C"/>
-                </a:solidFill>
-                <a:latin typeface="여기어때 잘난체 고딕 TTF" pitchFamily="2" charset="-127"/>
-                <a:ea typeface="여기어때 잘난체 고딕 TTF" pitchFamily="2" charset="-127"/>
-                <a:cs typeface="Calibri" pitchFamily="34" charset="-120"/>
-              </a:rPr>
-              <a:t>아이템</a:t>
-            </a:r>
-            <a:r>
-              <a:rPr lang="en-US" sz="1150" dirty="0">
-                <a:solidFill>
-                  <a:srgbClr val="1A2B3C"/>
-                </a:solidFill>
-                <a:latin typeface="여기어때 잘난체 고딕 TTF" pitchFamily="2" charset="-127"/>
-                <a:ea typeface="여기어때 잘난체 고딕 TTF" pitchFamily="2" charset="-127"/>
-                <a:cs typeface="Calibri" pitchFamily="34" charset="-120"/>
-              </a:rPr>
-              <a:t> </a:t>
-            </a:r>
-            <a:r>
-              <a:rPr lang="en-US" sz="1150" dirty="0" err="1">
-                <a:solidFill>
-                  <a:srgbClr val="1A2B3C"/>
-                </a:solidFill>
-                <a:latin typeface="여기어때 잘난체 고딕 TTF" pitchFamily="2" charset="-127"/>
-                <a:ea typeface="여기어때 잘난체 고딕 TTF" pitchFamily="2" charset="-127"/>
-                <a:cs typeface="Calibri" pitchFamily="34" charset="-120"/>
-              </a:rPr>
-              <a:t>활용</a:t>
-            </a:r>
-            <a:r>
-              <a:rPr lang="en-US" sz="1150" dirty="0">
-                <a:latin typeface="여기어때 잘난체 고딕 TTF" pitchFamily="2" charset="-127"/>
-                <a:ea typeface="여기어때 잘난체 고딕 TTF" pitchFamily="2" charset="-127"/>
-              </a:rPr>
-              <a:t> </a:t>
-            </a:r>
-            <a:r>
-              <a:rPr lang="en-US" sz="1150" dirty="0" err="1">
-                <a:solidFill>
-                  <a:srgbClr val="1A2B3C"/>
-                </a:solidFill>
-                <a:latin typeface="여기어때 잘난체 고딕 TTF" pitchFamily="2" charset="-127"/>
-                <a:ea typeface="여기어때 잘난체 고딕 TTF" pitchFamily="2" charset="-127"/>
-                <a:cs typeface="Calibri" pitchFamily="34" charset="-120"/>
-              </a:rPr>
-              <a:t>가능</a:t>
-            </a:r>
-            <a:endParaRPr lang="en-US" sz="1150" dirty="0">
-              <a:latin typeface="여기어때 잘난체 고딕 TTF" pitchFamily="2" charset="-127"/>
-              <a:ea typeface="여기어때 잘난체 고딕 TTF" pitchFamily="2" charset="-127"/>
-            </a:endParaRPr>
-          </a:p>
-        </p:txBody>
-      </p:sp>
-      <p:sp>
-        <p:nvSpPr>
-          <p:cNvPr id="24" name="Shape 22"/>
-          <p:cNvSpPr/>
-          <p:nvPr/>
-        </p:nvSpPr>
-        <p:spPr>
-          <a:xfrm>
-            <a:off x="6976872" y="1097280"/>
-            <a:ext cx="1600200" cy="347472"/>
-          </a:xfrm>
-          <a:prstGeom prst="rect">
-            <a:avLst/>
-          </a:prstGeom>
-          <a:solidFill>
-            <a:srgbClr val="C0392B"/>
-          </a:solidFill>
-          <a:ln w="12700">
-            <a:solidFill>
-              <a:srgbClr val="C0392B"/>
-            </a:solidFill>
-            <a:prstDash val="solid"/>
-          </a:ln>
-        </p:spPr>
-      </p:sp>
-      <p:sp>
-        <p:nvSpPr>
-          <p:cNvPr id="25" name="Text 23"/>
-          <p:cNvSpPr/>
-          <p:nvPr/>
-        </p:nvSpPr>
-        <p:spPr>
-          <a:xfrm>
-            <a:off x="6976872" y="1097280"/>
-            <a:ext cx="1600200" cy="347472"/>
-          </a:xfrm>
-          <a:prstGeom prst="rect">
-            <a:avLst/>
-          </a:prstGeom>
-          <a:noFill/>
-          <a:ln/>
-        </p:spPr>
-        <p:txBody>
-          <a:bodyPr wrap="square" lIns="0" tIns="0" rIns="0" bIns="0" rtlCol="0" anchor="ctr"/>
-          <a:lstStyle/>
-          <a:p>
-            <a:pPr marL="0" indent="0" algn="ctr">
-              <a:buNone/>
-            </a:pPr>
-            <a:r>
-              <a:rPr lang="en-US" sz="1100" b="1" dirty="0">
-                <a:solidFill>
-                  <a:srgbClr val="FFFFFF"/>
-                </a:solidFill>
-                <a:latin typeface="여기어때 잘난체 고딕 TTF" pitchFamily="2" charset="-127"/>
-                <a:ea typeface="여기어때 잘난체 고딕 TTF" pitchFamily="2" charset="-127"/>
-                <a:cs typeface="Calibri" pitchFamily="34" charset="-120"/>
-              </a:rPr>
-              <a:t>8 주</a:t>
-            </a:r>
-            <a:endParaRPr lang="en-US" sz="1100" dirty="0">
-              <a:latin typeface="여기어때 잘난체 고딕 TTF" pitchFamily="2" charset="-127"/>
-              <a:ea typeface="여기어때 잘난체 고딕 TTF" pitchFamily="2" charset="-127"/>
-            </a:endParaRPr>
-          </a:p>
-        </p:txBody>
-      </p:sp>
-      <p:sp>
-        <p:nvSpPr>
-          <p:cNvPr id="26" name="Shape 24"/>
-          <p:cNvSpPr/>
-          <p:nvPr/>
-        </p:nvSpPr>
-        <p:spPr>
-          <a:xfrm>
-            <a:off x="6976872" y="1444752"/>
-            <a:ext cx="1600200" cy="2377440"/>
-          </a:xfrm>
-          <a:prstGeom prst="rect">
-            <a:avLst/>
-          </a:prstGeom>
-          <a:solidFill>
-            <a:srgbClr val="FFFFFF"/>
-          </a:solidFill>
-          <a:ln w="12700">
-            <a:solidFill>
-              <a:srgbClr val="C0392B"/>
-            </a:solidFill>
-            <a:prstDash val="solid"/>
-          </a:ln>
-          <a:effectLst>
-            <a:outerShdw blurRad="101600" dist="38100" dir="8100000" algn="bl" rotWithShape="0">
-              <a:srgbClr val="000000">
-                <a:alpha val="10000"/>
-              </a:srgbClr>
-            </a:outerShdw>
-          </a:effectLst>
-        </p:spPr>
-      </p:sp>
-      <p:sp>
-        <p:nvSpPr>
-          <p:cNvPr id="27" name="Text 25"/>
-          <p:cNvSpPr/>
-          <p:nvPr/>
-        </p:nvSpPr>
-        <p:spPr>
-          <a:xfrm>
-            <a:off x="6976872" y="1463040"/>
-            <a:ext cx="1600200" cy="475488"/>
-          </a:xfrm>
-          <a:prstGeom prst="rect">
-            <a:avLst/>
-          </a:prstGeom>
-          <a:noFill/>
-          <a:ln/>
-        </p:spPr>
-        <p:txBody>
-          <a:bodyPr wrap="square" lIns="0" tIns="0" rIns="0" bIns="0" rtlCol="0" anchor="ctr"/>
-          <a:lstStyle/>
-          <a:p>
-            <a:pPr marL="0" indent="0" algn="ctr">
-              <a:buNone/>
-            </a:pPr>
-            <a:r>
-              <a:rPr lang="en-US" sz="1300" b="1" dirty="0">
-                <a:solidFill>
-                  <a:srgbClr val="C0392B"/>
-                </a:solidFill>
-                <a:latin typeface="여기어때 잘난체 고딕 TTF" pitchFamily="2" charset="-127"/>
-                <a:ea typeface="여기어때 잘난체 고딕 TTF" pitchFamily="2" charset="-127"/>
-                <a:cs typeface="Calibri" pitchFamily="34" charset="-120"/>
-              </a:rPr>
-              <a:t>🦅</a:t>
-            </a:r>
-            <a:r>
-              <a:rPr lang="en-US" sz="1300" b="1" dirty="0" err="1">
-                <a:solidFill>
-                  <a:srgbClr val="C0392B"/>
-                </a:solidFill>
-                <a:latin typeface="여기어때 잘난체 고딕 TTF" pitchFamily="2" charset="-127"/>
-                <a:ea typeface="여기어때 잘난체 고딕 TTF" pitchFamily="2" charset="-127"/>
-                <a:cs typeface="Calibri" pitchFamily="34" charset="-120"/>
-              </a:rPr>
-              <a:t>성체</a:t>
-            </a:r>
-            <a:endParaRPr lang="en-US" sz="1300" dirty="0">
-              <a:latin typeface="여기어때 잘난체 고딕 TTF" pitchFamily="2" charset="-127"/>
-              <a:ea typeface="여기어때 잘난체 고딕 TTF" pitchFamily="2" charset="-127"/>
-            </a:endParaRPr>
-          </a:p>
-        </p:txBody>
-      </p:sp>
-      <p:sp>
-        <p:nvSpPr>
-          <p:cNvPr id="28" name="Text 26"/>
-          <p:cNvSpPr/>
-          <p:nvPr/>
-        </p:nvSpPr>
-        <p:spPr>
-          <a:xfrm>
-            <a:off x="7050024" y="1975104"/>
-            <a:ext cx="1453896" cy="1773936"/>
-          </a:xfrm>
-          <a:prstGeom prst="rect">
-            <a:avLst/>
-          </a:prstGeom>
-          <a:noFill/>
-          <a:ln/>
-        </p:spPr>
-        <p:txBody>
-          <a:bodyPr wrap="square" lIns="38100" tIns="38100" rIns="38100" bIns="38100" rtlCol="0" anchor="t"/>
-          <a:lstStyle/>
-          <a:p>
-            <a:pPr marL="171450" indent="-171450">
-              <a:buFont typeface="Arial" panose="020B0604020202020204" pitchFamily="34" charset="0"/>
-              <a:buChar char="•"/>
-            </a:pPr>
-            <a:r>
-              <a:rPr lang="en-US" sz="1150" dirty="0" err="1">
-                <a:solidFill>
-                  <a:srgbClr val="1A2B3C"/>
-                </a:solidFill>
-                <a:latin typeface="여기어때 잘난체 고딕 TTF" pitchFamily="2" charset="-127"/>
-                <a:ea typeface="여기어때 잘난체 고딕 TTF" pitchFamily="2" charset="-127"/>
-                <a:cs typeface="Calibri" pitchFamily="34" charset="-120"/>
-              </a:rPr>
-              <a:t>모든</a:t>
-            </a:r>
-            <a:r>
-              <a:rPr lang="en-US" sz="1150" dirty="0">
-                <a:solidFill>
-                  <a:srgbClr val="1A2B3C"/>
-                </a:solidFill>
-                <a:latin typeface="여기어때 잘난체 고딕 TTF" pitchFamily="2" charset="-127"/>
-                <a:ea typeface="여기어때 잘난체 고딕 TTF" pitchFamily="2" charset="-127"/>
-                <a:cs typeface="Calibri" pitchFamily="34" charset="-120"/>
-              </a:rPr>
-              <a:t> </a:t>
-            </a:r>
-            <a:r>
-              <a:rPr lang="en-US" sz="1150" dirty="0" err="1">
-                <a:solidFill>
-                  <a:srgbClr val="1A2B3C"/>
-                </a:solidFill>
-                <a:latin typeface="여기어때 잘난체 고딕 TTF" pitchFamily="2" charset="-127"/>
-                <a:ea typeface="여기어때 잘난체 고딕 TTF" pitchFamily="2" charset="-127"/>
-                <a:cs typeface="Calibri" pitchFamily="34" charset="-120"/>
-              </a:rPr>
-              <a:t>행동</a:t>
-            </a:r>
-            <a:r>
-              <a:rPr lang="en-US" sz="1150" dirty="0">
-                <a:solidFill>
-                  <a:srgbClr val="1A2B3C"/>
-                </a:solidFill>
-                <a:latin typeface="여기어때 잘난체 고딕 TTF" pitchFamily="2" charset="-127"/>
-                <a:ea typeface="여기어때 잘난체 고딕 TTF" pitchFamily="2" charset="-127"/>
-                <a:cs typeface="Calibri" pitchFamily="34" charset="-120"/>
-              </a:rPr>
-              <a:t> </a:t>
-            </a:r>
-            <a:r>
-              <a:rPr lang="ko-KR" altLang="en-US" sz="1150" dirty="0">
-                <a:solidFill>
-                  <a:srgbClr val="1A2B3C"/>
-                </a:solidFill>
-                <a:latin typeface="여기어때 잘난체 고딕 TTF" pitchFamily="2" charset="-127"/>
-                <a:ea typeface="여기어때 잘난체 고딕 TTF" pitchFamily="2" charset="-127"/>
-                <a:cs typeface="Calibri" pitchFamily="34" charset="-120"/>
-              </a:rPr>
-              <a:t>가능</a:t>
-            </a:r>
-            <a:endParaRPr lang="en-US" altLang="ko-KR" sz="1150" dirty="0">
-              <a:solidFill>
-                <a:srgbClr val="1A2B3C"/>
-              </a:solidFill>
-              <a:latin typeface="여기어때 잘난체 고딕 TTF" pitchFamily="2" charset="-127"/>
-              <a:ea typeface="여기어때 잘난체 고딕 TTF" pitchFamily="2" charset="-127"/>
-              <a:cs typeface="Calibri" pitchFamily="34" charset="-120"/>
-            </a:endParaRPr>
-          </a:p>
-          <a:p>
-            <a:pPr marL="171450" indent="-171450">
-              <a:buFont typeface="Arial" panose="020B0604020202020204" pitchFamily="34" charset="0"/>
-              <a:buChar char="•"/>
-            </a:pPr>
-            <a:r>
-              <a:rPr lang="ko-KR" altLang="en-US" sz="1150" dirty="0">
-                <a:latin typeface="여기어때 잘난체 고딕 TTF" pitchFamily="2" charset="-127"/>
-                <a:ea typeface="여기어때 잘난체 고딕 TTF" pitchFamily="2" charset="-127"/>
-              </a:rPr>
-              <a:t>엔딩 결정</a:t>
-            </a:r>
-            <a:endParaRPr lang="en-US" sz="1150" dirty="0">
-              <a:latin typeface="여기어때 잘난체 고딕 TTF" pitchFamily="2" charset="-127"/>
-              <a:ea typeface="여기어때 잘난체 고딕 TTF" pitchFamily="2" charset="-127"/>
-            </a:endParaRPr>
-          </a:p>
-        </p:txBody>
-      </p:sp>
-      <p:sp>
-        <p:nvSpPr>
-          <p:cNvPr id="29" name="Shape 27"/>
-          <p:cNvSpPr/>
-          <p:nvPr/>
-        </p:nvSpPr>
-        <p:spPr>
-          <a:xfrm>
-            <a:off x="320040" y="3977640"/>
-            <a:ext cx="4114800" cy="914400"/>
-          </a:xfrm>
-          <a:prstGeom prst="rect">
-            <a:avLst/>
-          </a:prstGeom>
-          <a:solidFill>
-            <a:srgbClr val="FFFFFF"/>
-          </a:solidFill>
-          <a:ln w="12700">
-            <a:solidFill>
-              <a:srgbClr val="607D8B"/>
-            </a:solidFill>
-            <a:prstDash val="solid"/>
-          </a:ln>
-          <a:effectLst>
-            <a:outerShdw blurRad="101600" dist="38100" dir="8100000" algn="bl" rotWithShape="0">
-              <a:srgbClr val="000000">
-                <a:alpha val="10000"/>
-              </a:srgbClr>
-            </a:outerShdw>
-          </a:effectLst>
-        </p:spPr>
-      </p:sp>
-      <p:sp>
-        <p:nvSpPr>
-          <p:cNvPr id="30" name="Text 28"/>
-          <p:cNvSpPr/>
-          <p:nvPr/>
-        </p:nvSpPr>
-        <p:spPr>
-          <a:xfrm>
-            <a:off x="411480" y="3995928"/>
-            <a:ext cx="3931920" cy="365760"/>
-          </a:xfrm>
-          <a:prstGeom prst="rect">
-            <a:avLst/>
-          </a:prstGeom>
-          <a:noFill/>
-          <a:ln/>
-        </p:spPr>
-        <p:txBody>
-          <a:bodyPr wrap="square" lIns="0" tIns="0" rIns="0" bIns="0" rtlCol="0" anchor="ctr"/>
-          <a:lstStyle/>
-          <a:p>
-            <a:pPr marL="0" indent="0">
-              <a:buNone/>
-            </a:pPr>
-            <a:r>
-              <a:rPr lang="en-US" sz="1200" b="1" dirty="0">
-                <a:solidFill>
-                  <a:srgbClr val="1A2B3C"/>
-                </a:solidFill>
-                <a:latin typeface="여기어때 잘난체 고딕 TTF" pitchFamily="2" charset="-127"/>
-                <a:ea typeface="여기어때 잘난체 고딕 TTF" pitchFamily="2" charset="-127"/>
-                <a:cs typeface="Calibri" pitchFamily="34" charset="-120"/>
-              </a:rPr>
-              <a:t>⏱  주차별 </a:t>
-            </a:r>
-            <a:r>
-              <a:rPr lang="en-US" sz="1200" b="1" dirty="0" err="1">
-                <a:solidFill>
-                  <a:srgbClr val="1A2B3C"/>
-                </a:solidFill>
-                <a:latin typeface="여기어때 잘난체 고딕 TTF" pitchFamily="2" charset="-127"/>
-                <a:ea typeface="여기어때 잘난체 고딕 TTF" pitchFamily="2" charset="-127"/>
-                <a:cs typeface="Calibri" pitchFamily="34" charset="-120"/>
-              </a:rPr>
-              <a:t>패시브</a:t>
-            </a:r>
-            <a:r>
-              <a:rPr lang="en-US" sz="1200" b="1" dirty="0">
-                <a:solidFill>
-                  <a:srgbClr val="1A2B3C"/>
-                </a:solidFill>
-                <a:latin typeface="여기어때 잘난체 고딕 TTF" pitchFamily="2" charset="-127"/>
-                <a:ea typeface="여기어때 잘난체 고딕 TTF" pitchFamily="2" charset="-127"/>
-                <a:cs typeface="Calibri" pitchFamily="34" charset="-120"/>
-              </a:rPr>
-              <a:t> ( </a:t>
-            </a:r>
-            <a:r>
-              <a:rPr lang="en-US" sz="1200" b="1" dirty="0" err="1">
-                <a:solidFill>
-                  <a:srgbClr val="1A2B3C"/>
-                </a:solidFill>
-                <a:latin typeface="여기어때 잘난체 고딕 TTF" pitchFamily="2" charset="-127"/>
-                <a:ea typeface="여기어때 잘난체 고딕 TTF" pitchFamily="2" charset="-127"/>
-                <a:cs typeface="Calibri" pitchFamily="34" charset="-120"/>
-              </a:rPr>
-              <a:t>매주</a:t>
-            </a:r>
-            <a:r>
-              <a:rPr lang="en-US" sz="1200" b="1" dirty="0">
-                <a:solidFill>
-                  <a:srgbClr val="1A2B3C"/>
-                </a:solidFill>
-                <a:latin typeface="여기어때 잘난체 고딕 TTF" pitchFamily="2" charset="-127"/>
-                <a:ea typeface="여기어때 잘난체 고딕 TTF" pitchFamily="2" charset="-127"/>
-                <a:cs typeface="Calibri" pitchFamily="34" charset="-120"/>
-              </a:rPr>
-              <a:t> </a:t>
-            </a:r>
-            <a:r>
-              <a:rPr lang="en-US" sz="1200" b="1" dirty="0" err="1">
-                <a:solidFill>
-                  <a:srgbClr val="1A2B3C"/>
-                </a:solidFill>
-                <a:latin typeface="여기어때 잘난체 고딕 TTF" pitchFamily="2" charset="-127"/>
-                <a:ea typeface="여기어때 잘난체 고딕 TTF" pitchFamily="2" charset="-127"/>
-                <a:cs typeface="Calibri" pitchFamily="34" charset="-120"/>
-              </a:rPr>
-              <a:t>자동</a:t>
-            </a:r>
-            <a:r>
-              <a:rPr lang="en-US" sz="1200" b="1" dirty="0">
-                <a:solidFill>
-                  <a:srgbClr val="1A2B3C"/>
-                </a:solidFill>
-                <a:latin typeface="여기어때 잘난체 고딕 TTF" pitchFamily="2" charset="-127"/>
-                <a:ea typeface="여기어때 잘난체 고딕 TTF" pitchFamily="2" charset="-127"/>
-                <a:cs typeface="Calibri" pitchFamily="34" charset="-120"/>
-              </a:rPr>
-              <a:t> </a:t>
-            </a:r>
-            <a:r>
-              <a:rPr lang="en-US" sz="1200" b="1" dirty="0" err="1">
-                <a:solidFill>
-                  <a:srgbClr val="1A2B3C"/>
-                </a:solidFill>
-                <a:latin typeface="여기어때 잘난체 고딕 TTF" pitchFamily="2" charset="-127"/>
-                <a:ea typeface="여기어때 잘난체 고딕 TTF" pitchFamily="2" charset="-127"/>
-                <a:cs typeface="Calibri" pitchFamily="34" charset="-120"/>
-              </a:rPr>
-              <a:t>적용</a:t>
-            </a:r>
-            <a:r>
-              <a:rPr lang="en-US" sz="1200" b="1" dirty="0">
-                <a:solidFill>
-                  <a:srgbClr val="1A2B3C"/>
-                </a:solidFill>
-                <a:latin typeface="여기어때 잘난체 고딕 TTF" pitchFamily="2" charset="-127"/>
-                <a:ea typeface="여기어때 잘난체 고딕 TTF" pitchFamily="2" charset="-127"/>
-                <a:cs typeface="Calibri" pitchFamily="34" charset="-120"/>
-              </a:rPr>
-              <a:t> )</a:t>
+              <a:t>🎯  행동 시스템</a:t>
             </a:r>
             <a:endParaRPr lang="en-US" sz="1200" dirty="0">
               <a:latin typeface="여기어때 잘난체 고딕 TTF" pitchFamily="2" charset="-127"/>
@@ -8741,129 +8852,13 @@
       </p:sp>
       <p:sp>
         <p:nvSpPr>
-          <p:cNvPr id="31" name="Text 29"/>
-          <p:cNvSpPr/>
-          <p:nvPr/>
-        </p:nvSpPr>
-        <p:spPr>
-          <a:xfrm>
-            <a:off x="411480" y="4352544"/>
-            <a:ext cx="3931920" cy="457200"/>
-          </a:xfrm>
-          <a:prstGeom prst="rect">
-            <a:avLst/>
-          </a:prstGeom>
-          <a:noFill/>
-          <a:ln/>
-        </p:spPr>
-        <p:txBody>
-          <a:bodyPr wrap="square" lIns="0" tIns="0" rIns="0" bIns="0" rtlCol="0" anchor="ctr"/>
-          <a:lstStyle/>
-          <a:p>
-            <a:pPr marL="0" indent="0">
-              <a:buNone/>
-            </a:pPr>
-            <a:r>
-              <a:rPr lang="en-US" sz="1200" dirty="0">
-                <a:solidFill>
-                  <a:srgbClr val="607D8B"/>
-                </a:solidFill>
-                <a:latin typeface="여기어때 잘난체 고딕 TTF" pitchFamily="2" charset="-127"/>
-                <a:ea typeface="여기어때 잘난체 고딕 TTF" pitchFamily="2" charset="-127"/>
-                <a:cs typeface="Calibri" pitchFamily="34" charset="-120"/>
-              </a:rPr>
-              <a:t>포만감 −10  /  청결도 −5  /  스트레스 +5</a:t>
-            </a:r>
-            <a:endParaRPr lang="en-US" sz="1200" dirty="0">
-              <a:latin typeface="여기어때 잘난체 고딕 TTF" pitchFamily="2" charset="-127"/>
-              <a:ea typeface="여기어때 잘난체 고딕 TTF" pitchFamily="2" charset="-127"/>
-            </a:endParaRPr>
-          </a:p>
-        </p:txBody>
-      </p:sp>
-      <p:sp>
-        <p:nvSpPr>
-          <p:cNvPr id="32" name="Shape 30"/>
-          <p:cNvSpPr/>
-          <p:nvPr/>
-        </p:nvSpPr>
-        <p:spPr>
-          <a:xfrm>
-            <a:off x="4709160" y="3977640"/>
-            <a:ext cx="4114800" cy="914400"/>
-          </a:xfrm>
-          <a:prstGeom prst="rect">
-            <a:avLst/>
-          </a:prstGeom>
-          <a:solidFill>
-            <a:srgbClr val="FFFFFF"/>
-          </a:solidFill>
-          <a:ln w="12700">
-            <a:solidFill>
-              <a:srgbClr val="3FBFA6"/>
-            </a:solidFill>
-            <a:prstDash val="solid"/>
-          </a:ln>
-          <a:effectLst>
-            <a:outerShdw blurRad="101600" dist="38100" dir="8100000" algn="bl" rotWithShape="0">
-              <a:srgbClr val="000000">
-                <a:alpha val="10000"/>
-              </a:srgbClr>
-            </a:outerShdw>
-          </a:effectLst>
-        </p:spPr>
-      </p:sp>
-      <p:sp>
-        <p:nvSpPr>
-          <p:cNvPr id="33" name="Text 31"/>
-          <p:cNvSpPr/>
-          <p:nvPr/>
-        </p:nvSpPr>
-        <p:spPr>
-          <a:xfrm>
-            <a:off x="4800600" y="3995928"/>
-            <a:ext cx="3931920" cy="365760"/>
-          </a:xfrm>
-          <a:prstGeom prst="rect">
-            <a:avLst/>
-          </a:prstGeom>
-          <a:noFill/>
-          <a:ln/>
-        </p:spPr>
-        <p:txBody>
-          <a:bodyPr wrap="square" lIns="0" tIns="0" rIns="0" bIns="0" rtlCol="0" anchor="ctr"/>
-          <a:lstStyle/>
-          <a:p>
-            <a:pPr marL="0" indent="0">
-              <a:buNone/>
-            </a:pPr>
-            <a:r>
-              <a:rPr lang="en-US" sz="1200" b="1" dirty="0">
-                <a:solidFill>
-                  <a:srgbClr val="1A2B3C"/>
-                </a:solidFill>
-                <a:latin typeface="여기어때 잘난체 고딕 TTF" pitchFamily="2" charset="-127"/>
-                <a:ea typeface="여기어때 잘난체 고딕 TTF" pitchFamily="2" charset="-127"/>
-                <a:cs typeface="Calibri" pitchFamily="34" charset="-120"/>
-              </a:rPr>
-              <a:t>🎯  행동 시스템</a:t>
-            </a:r>
-            <a:endParaRPr lang="en-US" sz="1200" dirty="0">
-              <a:latin typeface="여기어때 잘난체 고딕 TTF" pitchFamily="2" charset="-127"/>
-              <a:ea typeface="여기어때 잘난체 고딕 TTF" pitchFamily="2" charset="-127"/>
-            </a:endParaRPr>
-          </a:p>
-        </p:txBody>
-      </p:sp>
-      <p:sp>
-        <p:nvSpPr>
           <p:cNvPr id="34" name="Text 32"/>
           <p:cNvSpPr/>
           <p:nvPr/>
         </p:nvSpPr>
         <p:spPr>
           <a:xfrm>
-            <a:off x="4800600" y="4352544"/>
+            <a:off x="4919472" y="4418511"/>
             <a:ext cx="3931920" cy="457200"/>
           </a:xfrm>
           <a:prstGeom prst="rect">

--- a/팀_RLCC_최종 발표.pptx
+++ b/팀_RLCC_최종 발표.pptx
@@ -9562,7 +9562,7 @@
                 <a:ea typeface="배달의민족 주아" panose="02020603020101020101" pitchFamily="18" charset="-127"/>
                 <a:cs typeface="Calibri" pitchFamily="34" charset="-120"/>
               </a:rPr>
-              <a:t>포만감 0 → 아사 (즉시 사망)</a:t>
+              <a:t>포만감 0 -&gt; 아사 (즉시 사망)</a:t>
             </a:r>
             <a:endParaRPr lang="en-US" sz="1400" dirty="0">
               <a:latin typeface="배달의민족 주아" panose="02020603020101020101" pitchFamily="18" charset="-127"/>
@@ -9584,7 +9584,29 @@
                 <a:ea typeface="배달의민족 주아" panose="02020603020101020101" pitchFamily="18" charset="-127"/>
                 <a:cs typeface="Calibri" pitchFamily="34" charset="-120"/>
               </a:rPr>
-              <a:t>청결도 0 → 병사 (즉시 사망)</a:t>
+              <a:t>청결도 0 -&gt; </a:t>
+            </a:r>
+            <a:r>
+              <a:rPr lang="en-US" sz="1400" dirty="0" err="1">
+                <a:solidFill>
+                  <a:srgbClr val="1A2B3C"/>
+                </a:solidFill>
+                <a:latin typeface="배달의민족 주아" panose="02020603020101020101" pitchFamily="18" charset="-127"/>
+                <a:ea typeface="배달의민족 주아" panose="02020603020101020101" pitchFamily="18" charset="-127"/>
+                <a:cs typeface="Calibri" pitchFamily="34" charset="-120"/>
+              </a:rPr>
+              <a:t>병사</a:t>
+            </a:r>
+            <a:r>
+              <a:rPr lang="en-US" sz="1400" dirty="0">
+                <a:solidFill>
+                  <a:srgbClr val="1A2B3C"/>
+                </a:solidFill>
+                <a:latin typeface="배달의민족 주아" panose="02020603020101020101" pitchFamily="18" charset="-127"/>
+                <a:ea typeface="배달의민족 주아" panose="02020603020101020101" pitchFamily="18" charset="-127"/>
+                <a:cs typeface="Calibri" pitchFamily="34" charset="-120"/>
+              </a:rPr>
+              <a:t> (즉시 사망)</a:t>
             </a:r>
             <a:endParaRPr lang="en-US" sz="1400" dirty="0">
               <a:latin typeface="배달의민족 주아" panose="02020603020101020101" pitchFamily="18" charset="-127"/>
@@ -9606,7 +9628,7 @@
                 <a:ea typeface="배달의민족 주아" panose="02020603020101020101" pitchFamily="18" charset="-127"/>
                 <a:cs typeface="Calibri" pitchFamily="34" charset="-120"/>
               </a:rPr>
-              <a:t>스트레스 90+ → 도주 엔딩 발동</a:t>
+              <a:t>스트레스 90+도주 엔딩 발동</a:t>
             </a:r>
             <a:endParaRPr lang="en-US" sz="1400" dirty="0">
               <a:latin typeface="배달의민족 주아" panose="02020603020101020101" pitchFamily="18" charset="-127"/>
@@ -9995,7 +10017,7 @@
           <p:nvPr>
             <p:extLst>
               <p:ext uri="{D42A27DB-BD31-4B8C-83A1-F6EECF244321}">
-                <p14:modId xmlns:p14="http://schemas.microsoft.com/office/powerpoint/2010/main" val="3537366624"/>
+                <p14:modId xmlns:p14="http://schemas.microsoft.com/office/powerpoint/2010/main" val="1262578005"/>
               </p:ext>
             </p:extLst>
           </p:nvPr>
@@ -10385,6 +10407,17 @@
                         <a:buNone/>
                       </a:pPr>
                       <a:r>
+                        <a:rPr lang="en-US" sz="1400" b="0" dirty="0" err="1">
+                          <a:solidFill>
+                            <a:srgbClr val="1A2B3C"/>
+                          </a:solidFill>
+                          <a:latin typeface="배달의민족 주아" panose="02020603020101020101" pitchFamily="18" charset="-127"/>
+                          <a:ea typeface="배달의민족 주아" panose="02020603020101020101" pitchFamily="18" charset="-127"/>
+                          <a:cs typeface="Calibri" pitchFamily="34" charset="-120"/>
+                        </a:rPr>
+                        <a:t>포만감</a:t>
+                      </a:r>
+                      <a:r>
                         <a:rPr lang="en-US" sz="1400" b="0" dirty="0">
                           <a:solidFill>
                             <a:srgbClr val="1A2B3C"/>
@@ -10393,7 +10426,7 @@
                           <a:ea typeface="배달의민족 주아" panose="02020603020101020101" pitchFamily="18" charset="-127"/>
                           <a:cs typeface="Calibri" pitchFamily="34" charset="-120"/>
                         </a:rPr>
-                        <a:t>포만감 = 0</a:t>
+                        <a:t> 0</a:t>
                       </a:r>
                       <a:endParaRPr lang="en-US" sz="1400" b="0" dirty="0">
                         <a:latin typeface="배달의민족 주아" panose="02020603020101020101" pitchFamily="18" charset="-127"/>
@@ -10569,6 +10602,17 @@
                         <a:buNone/>
                       </a:pPr>
                       <a:r>
+                        <a:rPr lang="en-US" sz="1400" b="0" dirty="0" err="1">
+                          <a:solidFill>
+                            <a:srgbClr val="1A2B3C"/>
+                          </a:solidFill>
+                          <a:latin typeface="배달의민족 주아" panose="02020603020101020101" pitchFamily="18" charset="-127"/>
+                          <a:ea typeface="배달의민족 주아" panose="02020603020101020101" pitchFamily="18" charset="-127"/>
+                          <a:cs typeface="Calibri" pitchFamily="34" charset="-120"/>
+                        </a:rPr>
+                        <a:t>청결도</a:t>
+                      </a:r>
+                      <a:r>
                         <a:rPr lang="en-US" sz="1400" b="0" dirty="0">
                           <a:solidFill>
                             <a:srgbClr val="1A2B3C"/>
@@ -10577,7 +10621,7 @@
                           <a:ea typeface="배달의민족 주아" panose="02020603020101020101" pitchFamily="18" charset="-127"/>
                           <a:cs typeface="Calibri" pitchFamily="34" charset="-120"/>
                         </a:rPr>
-                        <a:t>청결도 = 0</a:t>
+                        <a:t> 0</a:t>
                       </a:r>
                       <a:endParaRPr lang="en-US" sz="1400" b="0" dirty="0">
                         <a:latin typeface="배달의민족 주아" panose="02020603020101020101" pitchFamily="18" charset="-127"/>
@@ -10753,6 +10797,17 @@
                         <a:buNone/>
                       </a:pPr>
                       <a:r>
+                        <a:rPr lang="en-US" sz="1400" b="0" dirty="0" err="1">
+                          <a:solidFill>
+                            <a:srgbClr val="1A2B3C"/>
+                          </a:solidFill>
+                          <a:latin typeface="배달의민족 주아" panose="02020603020101020101" pitchFamily="18" charset="-127"/>
+                          <a:ea typeface="배달의민족 주아" panose="02020603020101020101" pitchFamily="18" charset="-127"/>
+                          <a:cs typeface="Calibri" pitchFamily="34" charset="-120"/>
+                        </a:rPr>
+                        <a:t>스트레스</a:t>
+                      </a:r>
+                      <a:r>
                         <a:rPr lang="en-US" sz="1400" b="0" dirty="0">
                           <a:solidFill>
                             <a:srgbClr val="1A2B3C"/>
@@ -10761,7 +10816,7 @@
                           <a:ea typeface="배달의민족 주아" panose="02020603020101020101" pitchFamily="18" charset="-127"/>
                           <a:cs typeface="Calibri" pitchFamily="34" charset="-120"/>
                         </a:rPr>
-                        <a:t>스트레스 ≥ 90</a:t>
+                        <a:t> 90</a:t>
                       </a:r>
                       <a:endParaRPr lang="en-US" sz="1400" b="0" dirty="0">
                         <a:latin typeface="배달의민족 주아" panose="02020603020101020101" pitchFamily="18" charset="-127"/>
@@ -10945,7 +11000,29 @@
                           <a:ea typeface="배달의민족 주아" panose="02020603020101020101" pitchFamily="18" charset="-127"/>
                           <a:cs typeface="Calibri" pitchFamily="34" charset="-120"/>
                         </a:rPr>
-                        <a:t>8주 클리어, 만족도 ≤ 35</a:t>
+                        <a:t>8주 클리어, </a:t>
+                      </a:r>
+                      <a:r>
+                        <a:rPr lang="en-US" sz="1400" b="0" dirty="0" err="1">
+                          <a:solidFill>
+                            <a:srgbClr val="1A2B3C"/>
+                          </a:solidFill>
+                          <a:latin typeface="배달의민족 주아" panose="02020603020101020101" pitchFamily="18" charset="-127"/>
+                          <a:ea typeface="배달의민족 주아" panose="02020603020101020101" pitchFamily="18" charset="-127"/>
+                          <a:cs typeface="Calibri" pitchFamily="34" charset="-120"/>
+                        </a:rPr>
+                        <a:t>만족도</a:t>
+                      </a:r>
+                      <a:r>
+                        <a:rPr lang="en-US" sz="1400" b="0" dirty="0">
+                          <a:solidFill>
+                            <a:srgbClr val="1A2B3C"/>
+                          </a:solidFill>
+                          <a:latin typeface="배달의민족 주아" panose="02020603020101020101" pitchFamily="18" charset="-127"/>
+                          <a:ea typeface="배달의민족 주아" panose="02020603020101020101" pitchFamily="18" charset="-127"/>
+                          <a:cs typeface="Calibri" pitchFamily="34" charset="-120"/>
+                        </a:rPr>
+                        <a:t> 35</a:t>
                       </a:r>
                       <a:endParaRPr lang="en-US" sz="1400" b="0" dirty="0">
                         <a:latin typeface="배달의민족 주아" panose="02020603020101020101" pitchFamily="18" charset="-127"/>
@@ -11520,6 +11597,17 @@
                         <a:buNone/>
                       </a:pPr>
                       <a:r>
+                        <a:rPr lang="en-US" sz="1400" b="0" dirty="0" err="1">
+                          <a:solidFill>
+                            <a:srgbClr val="1A2B3C"/>
+                          </a:solidFill>
+                          <a:latin typeface="배달의민족 주아" panose="02020603020101020101" pitchFamily="18" charset="-127"/>
+                          <a:ea typeface="배달의민족 주아" panose="02020603020101020101" pitchFamily="18" charset="-127"/>
+                          <a:cs typeface="Calibri" pitchFamily="34" charset="-120"/>
+                        </a:rPr>
+                        <a:t>만족도</a:t>
+                      </a:r>
+                      <a:r>
                         <a:rPr lang="en-US" sz="1400" b="0" dirty="0">
                           <a:solidFill>
                             <a:srgbClr val="1A2B3C"/>
@@ -11528,7 +11616,7 @@
                           <a:ea typeface="배달의민족 주아" panose="02020603020101020101" pitchFamily="18" charset="-127"/>
                           <a:cs typeface="Calibri" pitchFamily="34" charset="-120"/>
                         </a:rPr>
-                        <a:t>만족도 ≥ 76</a:t>
+                        <a:t> 76</a:t>
                       </a:r>
                       <a:endParaRPr lang="en-US" sz="1400" b="0" dirty="0">
                         <a:latin typeface="배달의민족 주아" panose="02020603020101020101" pitchFamily="18" charset="-127"/>
@@ -11917,7 +12005,29 @@
                           <a:ea typeface="배달의민족 주아" panose="02020603020101020101" pitchFamily="18" charset="-127"/>
                           <a:cs typeface="Calibri" pitchFamily="34" charset="-120"/>
                         </a:rPr>
-                        <a:t>포만감 100 + 만족도 ≥ 85</a:t>
+                        <a:t>포만감 100 + </a:t>
+                      </a:r>
+                      <a:r>
+                        <a:rPr lang="en-US" sz="1400" b="0" dirty="0" err="1">
+                          <a:solidFill>
+                            <a:srgbClr val="1A2B3C"/>
+                          </a:solidFill>
+                          <a:latin typeface="배달의민족 주아" panose="02020603020101020101" pitchFamily="18" charset="-127"/>
+                          <a:ea typeface="배달의민족 주아" panose="02020603020101020101" pitchFamily="18" charset="-127"/>
+                          <a:cs typeface="Calibri" pitchFamily="34" charset="-120"/>
+                        </a:rPr>
+                        <a:t>만족도</a:t>
+                      </a:r>
+                      <a:r>
+                        <a:rPr lang="en-US" sz="1400" b="0" dirty="0">
+                          <a:solidFill>
+                            <a:srgbClr val="1A2B3C"/>
+                          </a:solidFill>
+                          <a:latin typeface="배달의민족 주아" panose="02020603020101020101" pitchFamily="18" charset="-127"/>
+                          <a:ea typeface="배달의민족 주아" panose="02020603020101020101" pitchFamily="18" charset="-127"/>
+                          <a:cs typeface="Calibri" pitchFamily="34" charset="-120"/>
+                        </a:rPr>
+                        <a:t> 85</a:t>
                       </a:r>
                       <a:endParaRPr lang="en-US" sz="1400" b="0" dirty="0">
                         <a:latin typeface="배달의민족 주아" panose="02020603020101020101" pitchFamily="18" charset="-127"/>
@@ -12101,7 +12211,29 @@
                           <a:ea typeface="배달의민족 주아" panose="02020603020101020101" pitchFamily="18" charset="-127"/>
                           <a:cs typeface="Calibri" pitchFamily="34" charset="-120"/>
                         </a:rPr>
-                        <a:t>훈련도 100 + 만족도 ≥ 85</a:t>
+                        <a:t>훈련도 100 + </a:t>
+                      </a:r>
+                      <a:r>
+                        <a:rPr lang="en-US" sz="1400" b="0" dirty="0" err="1">
+                          <a:solidFill>
+                            <a:srgbClr val="1A2B3C"/>
+                          </a:solidFill>
+                          <a:latin typeface="배달의민족 주아" panose="02020603020101020101" pitchFamily="18" charset="-127"/>
+                          <a:ea typeface="배달의민족 주아" panose="02020603020101020101" pitchFamily="18" charset="-127"/>
+                          <a:cs typeface="Calibri" pitchFamily="34" charset="-120"/>
+                        </a:rPr>
+                        <a:t>만족도</a:t>
+                      </a:r>
+                      <a:r>
+                        <a:rPr lang="en-US" sz="1400" b="0" dirty="0">
+                          <a:solidFill>
+                            <a:srgbClr val="1A2B3C"/>
+                          </a:solidFill>
+                          <a:latin typeface="배달의민족 주아" panose="02020603020101020101" pitchFamily="18" charset="-127"/>
+                          <a:ea typeface="배달의민족 주아" panose="02020603020101020101" pitchFamily="18" charset="-127"/>
+                          <a:cs typeface="Calibri" pitchFamily="34" charset="-120"/>
+                        </a:rPr>
+                        <a:t> 85</a:t>
                       </a:r>
                       <a:endParaRPr lang="en-US" sz="1400" b="0" dirty="0">
                         <a:latin typeface="배달의민족 주아" panose="02020603020101020101" pitchFamily="18" charset="-127"/>
@@ -12285,7 +12417,29 @@
                           <a:ea typeface="배달의민족 주아" panose="02020603020101020101" pitchFamily="18" charset="-127"/>
                           <a:cs typeface="Calibri" pitchFamily="34" charset="-120"/>
                         </a:rPr>
-                        <a:t>청결도 100 + 만족도 ≥ 85</a:t>
+                        <a:t>청결도 100 + </a:t>
+                      </a:r>
+                      <a:r>
+                        <a:rPr lang="en-US" sz="1400" b="0" dirty="0" err="1">
+                          <a:solidFill>
+                            <a:srgbClr val="1A2B3C"/>
+                          </a:solidFill>
+                          <a:latin typeface="배달의민족 주아" panose="02020603020101020101" pitchFamily="18" charset="-127"/>
+                          <a:ea typeface="배달의민족 주아" panose="02020603020101020101" pitchFamily="18" charset="-127"/>
+                          <a:cs typeface="Calibri" pitchFamily="34" charset="-120"/>
+                        </a:rPr>
+                        <a:t>만족도</a:t>
+                      </a:r>
+                      <a:r>
+                        <a:rPr lang="en-US" sz="1400" b="0" dirty="0">
+                          <a:solidFill>
+                            <a:srgbClr val="1A2B3C"/>
+                          </a:solidFill>
+                          <a:latin typeface="배달의민족 주아" panose="02020603020101020101" pitchFamily="18" charset="-127"/>
+                          <a:ea typeface="배달의민족 주아" panose="02020603020101020101" pitchFamily="18" charset="-127"/>
+                          <a:cs typeface="Calibri" pitchFamily="34" charset="-120"/>
+                        </a:rPr>
+                        <a:t> 85</a:t>
                       </a:r>
                       <a:endParaRPr lang="en-US" sz="1400" b="0" dirty="0">
                         <a:latin typeface="배달의민족 주아" panose="02020603020101020101" pitchFamily="18" charset="-127"/>

--- a/팀_RLCC_최종 발표.pptx
+++ b/팀_RLCC_최종 발표.pptx
@@ -1,27 +1,57 @@
 
 <file path=ppt/presentation.xml><?xml version="1.0" encoding="utf-8"?>
-<p:presentation xmlns:r="http://schemas.openxmlformats.org/officeDocument/2006/relationships" xmlns:c="http://schemas.openxmlformats.org/drawingml/2006/chart" xmlns:a="http://schemas.openxmlformats.org/drawingml/2006/main" xmlns:dgm="http://schemas.openxmlformats.org/drawingml/2006/diagram" xmlns:dsp="http://schemas.microsoft.com/office/drawing/2008/diagram" xmlns:p="http://schemas.openxmlformats.org/presentationml/2006/main" embedTrueTypeFonts="1" autoCompressPictures="0">
+<p:presentation xmlns:a="http://schemas.openxmlformats.org/drawingml/2006/main" xmlns:r="http://schemas.openxmlformats.org/officeDocument/2006/relationships" xmlns:p="http://schemas.openxmlformats.org/presentationml/2006/main" embedTrueTypeFonts="1" autoCompressPictures="0">
   <p:sldMasterIdLst>
     <p:sldMasterId id="2147483663" r:id="rId1"/>
   </p:sldMasterIdLst>
   <p:notesMasterIdLst>
-    <p:notesMasterId r:id="rId2"/>
+    <p:notesMasterId r:id="rId13"/>
   </p:notesMasterIdLst>
   <p:sldIdLst>
-    <p:sldId id="256" r:id="rId3"/>
-    <p:sldId id="257" r:id="rId4"/>
-    <p:sldId id="258" r:id="rId5"/>
-    <p:sldId id="259" r:id="rId6"/>
-    <p:sldId id="260" r:id="rId7"/>
-    <p:sldId id="261" r:id="rId8"/>
-    <p:sldId id="262" r:id="rId9"/>
-    <p:sldId id="263" r:id="rId10"/>
-    <p:sldId id="264" r:id="rId11"/>
-    <p:sldId id="265" r:id="rId12"/>
-    <p:sldId id="266" r:id="rId13"/>
+    <p:sldId id="256" r:id="rId2"/>
+    <p:sldId id="257" r:id="rId3"/>
+    <p:sldId id="258" r:id="rId4"/>
+    <p:sldId id="259" r:id="rId5"/>
+    <p:sldId id="260" r:id="rId6"/>
+    <p:sldId id="261" r:id="rId7"/>
+    <p:sldId id="262" r:id="rId8"/>
+    <p:sldId id="263" r:id="rId9"/>
+    <p:sldId id="264" r:id="rId10"/>
+    <p:sldId id="265" r:id="rId11"/>
+    <p:sldId id="266" r:id="rId12"/>
   </p:sldIdLst>
   <p:sldSz cx="9144000" cy="5143500" type="screen16x9"/>
   <p:notesSz cx="5143500" cy="9144000"/>
+  <p:embeddedFontLst>
+    <p:embeddedFont>
+      <p:font typeface="Cafe24 Ssurround Bold" panose="020F0800000000000000" pitchFamily="50" charset="-127"/>
+      <p:bold r:id="rId14"/>
+    </p:embeddedFont>
+    <p:embeddedFont>
+      <p:font typeface="CookieRunOTF Bold" panose="020B0600000101010101" pitchFamily="34" charset="-127"/>
+      <p:bold r:id="rId15"/>
+    </p:embeddedFont>
+    <p:embeddedFont>
+      <p:font typeface="CookieRunOTF Regular" panose="020B0600000101010101" pitchFamily="34" charset="-127"/>
+      <p:regular r:id="rId16"/>
+    </p:embeddedFont>
+    <p:embeddedFont>
+      <p:font typeface="SB 어그로 Bold" panose="02020603020101020101" pitchFamily="18" charset="-127"/>
+      <p:regular r:id="rId17"/>
+    </p:embeddedFont>
+    <p:embeddedFont>
+      <p:font typeface="배달의민족 주아" panose="02020603020101020101" pitchFamily="18" charset="-127"/>
+      <p:regular r:id="rId18"/>
+    </p:embeddedFont>
+    <p:embeddedFont>
+      <p:font typeface="여기어때 잘난체 고딕 TTF" pitchFamily="2" charset="-127"/>
+      <p:regular r:id="rId19"/>
+    </p:embeddedFont>
+    <p:embeddedFont>
+      <p:font typeface="Arial Black" panose="020B0A04020102020204" pitchFamily="34" charset="0"/>
+      <p:bold r:id="rId20"/>
+    </p:embeddedFont>
+  </p:embeddedFontLst>
   <p:defaultTextStyle>
     <a:lvl1pPr marL="0" algn="l" defTabSz="914400" rtl="0" eaLnBrk="1" latinLnBrk="0" hangingPunct="1">
       <a:defRPr sz="1800" kern="1200">
@@ -114,11 +144,16 @@
       </a:defRPr>
     </a:lvl9pPr>
   </p:defaultTextStyle>
+  <p:extLst>
+    <p:ext uri="{EFAFB233-063F-42B5-8137-9DF3F51BA10A}">
+      <p15:sldGuideLst xmlns:p15="http://schemas.microsoft.com/office/powerpoint/2012/main"/>
+    </p:ext>
+  </p:extLst>
 </p:presentation>
 </file>
 
 <file path=ppt/notesMasters/notesMaster1.xml><?xml version="1.0" encoding="utf-8"?>
-<p:notesMaster xmlns:r="http://schemas.openxmlformats.org/officeDocument/2006/relationships" xmlns:c="http://schemas.openxmlformats.org/drawingml/2006/chart" xmlns:a="http://schemas.openxmlformats.org/drawingml/2006/main" xmlns:dgm="http://schemas.openxmlformats.org/drawingml/2006/diagram" xmlns:dsp="http://schemas.microsoft.com/office/drawing/2008/diagram" xmlns:p="http://schemas.openxmlformats.org/presentationml/2006/main">
+<p:notesMaster xmlns:a="http://schemas.openxmlformats.org/drawingml/2006/main" xmlns:r="http://schemas.openxmlformats.org/officeDocument/2006/relationships" xmlns:p="http://schemas.openxmlformats.org/presentationml/2006/main">
   <p:cSld>
     <p:bg>
       <p:bgRef idx="1001">
@@ -239,7 +274,7 @@
 </file>
 
 <file path=ppt/notesSlides/notesSlide1.xml><?xml version="1.0" encoding="utf-8"?>
-<p:notes xmlns:r="http://schemas.openxmlformats.org/officeDocument/2006/relationships" xmlns:c="http://schemas.openxmlformats.org/drawingml/2006/chart" xmlns:a="http://schemas.openxmlformats.org/drawingml/2006/main" xmlns:dgm="http://schemas.openxmlformats.org/drawingml/2006/diagram" xmlns:dsp="http://schemas.microsoft.com/office/drawing/2008/diagram" xmlns:p="http://schemas.openxmlformats.org/presentationml/2006/main">
+<p:notes xmlns:a="http://schemas.openxmlformats.org/drawingml/2006/main" xmlns:r="http://schemas.openxmlformats.org/officeDocument/2006/relationships" xmlns:p="http://schemas.openxmlformats.org/presentationml/2006/main">
   <p:cSld>
     <p:spTree>
       <p:nvGrpSpPr>
@@ -262,7 +297,7 @@
             <a:spLocks noGrp="1" noRot="1" noChangeAspect="1" noTextEdit="1"/>
           </p:cNvSpPr>
           <p:nvPr>
-            <p:ph type="sldImg" idx="0"/>
+            <p:ph type="sldImg"/>
           </p:nvPr>
         </p:nvSpPr>
         <p:spPr/>
@@ -285,10 +320,6 @@
             <a:pPr lvl="0">
               <a:defRPr/>
             </a:pPr>
-            <a:r>
-              <a:rPr lang="ko-KR" altLang="en-US"/>
-              <a:t/>
-            </a:r>
             <a:endParaRPr lang="ko-KR" altLang="en-US"/>
           </a:p>
         </p:txBody>
@@ -331,7 +362,7 @@
 </file>
 
 <file path=ppt/notesSlides/notesSlide10.xml><?xml version="1.0" encoding="utf-8"?>
-<p:notes xmlns:r="http://schemas.openxmlformats.org/officeDocument/2006/relationships" xmlns:c="http://schemas.openxmlformats.org/drawingml/2006/chart" xmlns:a="http://schemas.openxmlformats.org/drawingml/2006/main" xmlns:dgm="http://schemas.openxmlformats.org/drawingml/2006/diagram" xmlns:dsp="http://schemas.microsoft.com/office/drawing/2008/diagram" xmlns:p="http://schemas.openxmlformats.org/presentationml/2006/main">
+<p:notes xmlns:a="http://schemas.openxmlformats.org/drawingml/2006/main" xmlns:r="http://schemas.openxmlformats.org/officeDocument/2006/relationships" xmlns:p="http://schemas.openxmlformats.org/presentationml/2006/main">
   <p:cSld>
     <p:spTree>
       <p:nvGrpSpPr>
@@ -354,7 +385,7 @@
             <a:spLocks noGrp="1" noRot="1" noChangeAspect="1" noTextEdit="1"/>
           </p:cNvSpPr>
           <p:nvPr>
-            <p:ph type="sldImg" idx="0"/>
+            <p:ph type="sldImg"/>
           </p:nvPr>
         </p:nvSpPr>
         <p:spPr/>
@@ -377,10 +408,6 @@
             <a:pPr lvl="0">
               <a:defRPr/>
             </a:pPr>
-            <a:r>
-              <a:rPr lang="ko-KR" altLang="en-US"/>
-              <a:t/>
-            </a:r>
             <a:endParaRPr lang="ko-KR" altLang="en-US"/>
           </a:p>
         </p:txBody>
@@ -423,7 +450,7 @@
 </file>
 
 <file path=ppt/notesSlides/notesSlide11.xml><?xml version="1.0" encoding="utf-8"?>
-<p:notes xmlns:r="http://schemas.openxmlformats.org/officeDocument/2006/relationships" xmlns:c="http://schemas.openxmlformats.org/drawingml/2006/chart" xmlns:a="http://schemas.openxmlformats.org/drawingml/2006/main" xmlns:dgm="http://schemas.openxmlformats.org/drawingml/2006/diagram" xmlns:dsp="http://schemas.microsoft.com/office/drawing/2008/diagram" xmlns:p="http://schemas.openxmlformats.org/presentationml/2006/main">
+<p:notes xmlns:a="http://schemas.openxmlformats.org/drawingml/2006/main" xmlns:r="http://schemas.openxmlformats.org/officeDocument/2006/relationships" xmlns:p="http://schemas.openxmlformats.org/presentationml/2006/main">
   <p:cSld>
     <p:spTree>
       <p:nvGrpSpPr>
@@ -446,7 +473,7 @@
             <a:spLocks noGrp="1" noRot="1" noChangeAspect="1" noTextEdit="1"/>
           </p:cNvSpPr>
           <p:nvPr>
-            <p:ph type="sldImg" idx="0"/>
+            <p:ph type="sldImg"/>
           </p:nvPr>
         </p:nvSpPr>
         <p:spPr/>
@@ -469,10 +496,6 @@
             <a:pPr lvl="0">
               <a:defRPr/>
             </a:pPr>
-            <a:r>
-              <a:rPr lang="ko-KR" altLang="en-US"/>
-              <a:t/>
-            </a:r>
             <a:endParaRPr lang="ko-KR" altLang="en-US"/>
           </a:p>
         </p:txBody>
@@ -515,7 +538,7 @@
 </file>
 
 <file path=ppt/notesSlides/notesSlide2.xml><?xml version="1.0" encoding="utf-8"?>
-<p:notes xmlns:r="http://schemas.openxmlformats.org/officeDocument/2006/relationships" xmlns:c="http://schemas.openxmlformats.org/drawingml/2006/chart" xmlns:a="http://schemas.openxmlformats.org/drawingml/2006/main" xmlns:dgm="http://schemas.openxmlformats.org/drawingml/2006/diagram" xmlns:dsp="http://schemas.microsoft.com/office/drawing/2008/diagram" xmlns:p="http://schemas.openxmlformats.org/presentationml/2006/main">
+<p:notes xmlns:a="http://schemas.openxmlformats.org/drawingml/2006/main" xmlns:r="http://schemas.openxmlformats.org/officeDocument/2006/relationships" xmlns:p="http://schemas.openxmlformats.org/presentationml/2006/main">
   <p:cSld>
     <p:spTree>
       <p:nvGrpSpPr>
@@ -538,7 +561,7 @@
             <a:spLocks noGrp="1" noRot="1" noChangeAspect="1" noTextEdit="1"/>
           </p:cNvSpPr>
           <p:nvPr>
-            <p:ph type="sldImg" idx="0"/>
+            <p:ph type="sldImg"/>
           </p:nvPr>
         </p:nvSpPr>
         <p:spPr/>
@@ -561,10 +584,6 @@
             <a:pPr lvl="0">
               <a:defRPr/>
             </a:pPr>
-            <a:r>
-              <a:rPr lang="ko-KR" altLang="en-US"/>
-              <a:t/>
-            </a:r>
             <a:endParaRPr lang="ko-KR" altLang="en-US"/>
           </a:p>
         </p:txBody>
@@ -607,7 +626,7 @@
 </file>
 
 <file path=ppt/notesSlides/notesSlide3.xml><?xml version="1.0" encoding="utf-8"?>
-<p:notes xmlns:r="http://schemas.openxmlformats.org/officeDocument/2006/relationships" xmlns:c="http://schemas.openxmlformats.org/drawingml/2006/chart" xmlns:a="http://schemas.openxmlformats.org/drawingml/2006/main" xmlns:dgm="http://schemas.openxmlformats.org/drawingml/2006/diagram" xmlns:dsp="http://schemas.microsoft.com/office/drawing/2008/diagram" xmlns:p="http://schemas.openxmlformats.org/presentationml/2006/main">
+<p:notes xmlns:a="http://schemas.openxmlformats.org/drawingml/2006/main" xmlns:r="http://schemas.openxmlformats.org/officeDocument/2006/relationships" xmlns:p="http://schemas.openxmlformats.org/presentationml/2006/main">
   <p:cSld>
     <p:spTree>
       <p:nvGrpSpPr>
@@ -630,7 +649,7 @@
             <a:spLocks noGrp="1" noRot="1" noChangeAspect="1" noTextEdit="1"/>
           </p:cNvSpPr>
           <p:nvPr>
-            <p:ph type="sldImg" idx="0"/>
+            <p:ph type="sldImg"/>
           </p:nvPr>
         </p:nvSpPr>
         <p:spPr/>
@@ -653,10 +672,6 @@
             <a:pPr lvl="0">
               <a:defRPr/>
             </a:pPr>
-            <a:r>
-              <a:rPr lang="ko-KR" altLang="en-US"/>
-              <a:t/>
-            </a:r>
             <a:endParaRPr lang="ko-KR" altLang="en-US"/>
           </a:p>
         </p:txBody>
@@ -699,7 +714,7 @@
 </file>
 
 <file path=ppt/notesSlides/notesSlide4.xml><?xml version="1.0" encoding="utf-8"?>
-<p:notes xmlns:r="http://schemas.openxmlformats.org/officeDocument/2006/relationships" xmlns:c="http://schemas.openxmlformats.org/drawingml/2006/chart" xmlns:a="http://schemas.openxmlformats.org/drawingml/2006/main" xmlns:dgm="http://schemas.openxmlformats.org/drawingml/2006/diagram" xmlns:dsp="http://schemas.microsoft.com/office/drawing/2008/diagram" xmlns:p="http://schemas.openxmlformats.org/presentationml/2006/main">
+<p:notes xmlns:a="http://schemas.openxmlformats.org/drawingml/2006/main" xmlns:r="http://schemas.openxmlformats.org/officeDocument/2006/relationships" xmlns:p="http://schemas.openxmlformats.org/presentationml/2006/main">
   <p:cSld>
     <p:spTree>
       <p:nvGrpSpPr>
@@ -722,7 +737,7 @@
             <a:spLocks noGrp="1" noRot="1" noChangeAspect="1" noTextEdit="1"/>
           </p:cNvSpPr>
           <p:nvPr>
-            <p:ph type="sldImg" idx="0"/>
+            <p:ph type="sldImg"/>
           </p:nvPr>
         </p:nvSpPr>
         <p:spPr/>
@@ -745,10 +760,6 @@
             <a:pPr lvl="0">
               <a:defRPr/>
             </a:pPr>
-            <a:r>
-              <a:rPr lang="ko-KR" altLang="en-US"/>
-              <a:t/>
-            </a:r>
             <a:endParaRPr lang="ko-KR" altLang="en-US"/>
           </a:p>
         </p:txBody>
@@ -791,7 +802,7 @@
 </file>
 
 <file path=ppt/notesSlides/notesSlide5.xml><?xml version="1.0" encoding="utf-8"?>
-<p:notes xmlns:r="http://schemas.openxmlformats.org/officeDocument/2006/relationships" xmlns:c="http://schemas.openxmlformats.org/drawingml/2006/chart" xmlns:a="http://schemas.openxmlformats.org/drawingml/2006/main" xmlns:dgm="http://schemas.openxmlformats.org/drawingml/2006/diagram" xmlns:dsp="http://schemas.microsoft.com/office/drawing/2008/diagram" xmlns:p="http://schemas.openxmlformats.org/presentationml/2006/main">
+<p:notes xmlns:a="http://schemas.openxmlformats.org/drawingml/2006/main" xmlns:r="http://schemas.openxmlformats.org/officeDocument/2006/relationships" xmlns:p="http://schemas.openxmlformats.org/presentationml/2006/main">
   <p:cSld>
     <p:spTree>
       <p:nvGrpSpPr>
@@ -814,7 +825,7 @@
             <a:spLocks noGrp="1" noRot="1" noChangeAspect="1" noTextEdit="1"/>
           </p:cNvSpPr>
           <p:nvPr>
-            <p:ph type="sldImg" idx="0"/>
+            <p:ph type="sldImg"/>
           </p:nvPr>
         </p:nvSpPr>
         <p:spPr/>
@@ -837,10 +848,6 @@
             <a:pPr lvl="0">
               <a:defRPr/>
             </a:pPr>
-            <a:r>
-              <a:rPr lang="ko-KR" altLang="en-US"/>
-              <a:t/>
-            </a:r>
             <a:endParaRPr lang="ko-KR" altLang="en-US"/>
           </a:p>
         </p:txBody>
@@ -883,7 +890,7 @@
 </file>
 
 <file path=ppt/notesSlides/notesSlide6.xml><?xml version="1.0" encoding="utf-8"?>
-<p:notes xmlns:r="http://schemas.openxmlformats.org/officeDocument/2006/relationships" xmlns:c="http://schemas.openxmlformats.org/drawingml/2006/chart" xmlns:a="http://schemas.openxmlformats.org/drawingml/2006/main" xmlns:dgm="http://schemas.openxmlformats.org/drawingml/2006/diagram" xmlns:dsp="http://schemas.microsoft.com/office/drawing/2008/diagram" xmlns:p="http://schemas.openxmlformats.org/presentationml/2006/main">
+<p:notes xmlns:a="http://schemas.openxmlformats.org/drawingml/2006/main" xmlns:r="http://schemas.openxmlformats.org/officeDocument/2006/relationships" xmlns:p="http://schemas.openxmlformats.org/presentationml/2006/main">
   <p:cSld>
     <p:spTree>
       <p:nvGrpSpPr>
@@ -906,7 +913,7 @@
             <a:spLocks noGrp="1" noRot="1" noChangeAspect="1" noTextEdit="1"/>
           </p:cNvSpPr>
           <p:nvPr>
-            <p:ph type="sldImg" idx="0"/>
+            <p:ph type="sldImg"/>
           </p:nvPr>
         </p:nvSpPr>
         <p:spPr/>
@@ -929,10 +936,6 @@
             <a:pPr lvl="0">
               <a:defRPr/>
             </a:pPr>
-            <a:r>
-              <a:rPr lang="ko-KR" altLang="en-US"/>
-              <a:t/>
-            </a:r>
             <a:endParaRPr lang="ko-KR" altLang="en-US"/>
           </a:p>
         </p:txBody>
@@ -975,7 +978,7 @@
 </file>
 
 <file path=ppt/notesSlides/notesSlide7.xml><?xml version="1.0" encoding="utf-8"?>
-<p:notes xmlns:r="http://schemas.openxmlformats.org/officeDocument/2006/relationships" xmlns:c="http://schemas.openxmlformats.org/drawingml/2006/chart" xmlns:a="http://schemas.openxmlformats.org/drawingml/2006/main" xmlns:dgm="http://schemas.openxmlformats.org/drawingml/2006/diagram" xmlns:dsp="http://schemas.microsoft.com/office/drawing/2008/diagram" xmlns:p="http://schemas.openxmlformats.org/presentationml/2006/main">
+<p:notes xmlns:a="http://schemas.openxmlformats.org/drawingml/2006/main" xmlns:r="http://schemas.openxmlformats.org/officeDocument/2006/relationships" xmlns:p="http://schemas.openxmlformats.org/presentationml/2006/main">
   <p:cSld>
     <p:spTree>
       <p:nvGrpSpPr>
@@ -998,7 +1001,7 @@
             <a:spLocks noGrp="1" noRot="1" noChangeAspect="1" noTextEdit="1"/>
           </p:cNvSpPr>
           <p:nvPr>
-            <p:ph type="sldImg" idx="0"/>
+            <p:ph type="sldImg"/>
           </p:nvPr>
         </p:nvSpPr>
         <p:spPr/>
@@ -1021,10 +1024,6 @@
             <a:pPr lvl="0">
               <a:defRPr/>
             </a:pPr>
-            <a:r>
-              <a:rPr lang="ko-KR" altLang="en-US"/>
-              <a:t/>
-            </a:r>
             <a:endParaRPr lang="ko-KR" altLang="en-US"/>
           </a:p>
         </p:txBody>
@@ -1067,7 +1066,7 @@
 </file>
 
 <file path=ppt/notesSlides/notesSlide8.xml><?xml version="1.0" encoding="utf-8"?>
-<p:notes xmlns:r="http://schemas.openxmlformats.org/officeDocument/2006/relationships" xmlns:c="http://schemas.openxmlformats.org/drawingml/2006/chart" xmlns:a="http://schemas.openxmlformats.org/drawingml/2006/main" xmlns:dgm="http://schemas.openxmlformats.org/drawingml/2006/diagram" xmlns:dsp="http://schemas.microsoft.com/office/drawing/2008/diagram" xmlns:p="http://schemas.openxmlformats.org/presentationml/2006/main">
+<p:notes xmlns:a="http://schemas.openxmlformats.org/drawingml/2006/main" xmlns:r="http://schemas.openxmlformats.org/officeDocument/2006/relationships" xmlns:p="http://schemas.openxmlformats.org/presentationml/2006/main">
   <p:cSld>
     <p:spTree>
       <p:nvGrpSpPr>
@@ -1090,7 +1089,7 @@
             <a:spLocks noGrp="1" noRot="1" noChangeAspect="1" noTextEdit="1"/>
           </p:cNvSpPr>
           <p:nvPr>
-            <p:ph type="sldImg" idx="0"/>
+            <p:ph type="sldImg"/>
           </p:nvPr>
         </p:nvSpPr>
         <p:spPr/>
@@ -1113,10 +1112,6 @@
             <a:pPr lvl="0">
               <a:defRPr/>
             </a:pPr>
-            <a:r>
-              <a:rPr lang="ko-KR" altLang="en-US"/>
-              <a:t/>
-            </a:r>
             <a:endParaRPr lang="ko-KR" altLang="en-US"/>
           </a:p>
         </p:txBody>
@@ -1159,7 +1154,7 @@
 </file>
 
 <file path=ppt/notesSlides/notesSlide9.xml><?xml version="1.0" encoding="utf-8"?>
-<p:notes xmlns:r="http://schemas.openxmlformats.org/officeDocument/2006/relationships" xmlns:c="http://schemas.openxmlformats.org/drawingml/2006/chart" xmlns:a="http://schemas.openxmlformats.org/drawingml/2006/main" xmlns:dgm="http://schemas.openxmlformats.org/drawingml/2006/diagram" xmlns:dsp="http://schemas.microsoft.com/office/drawing/2008/diagram" xmlns:p="http://schemas.openxmlformats.org/presentationml/2006/main">
+<p:notes xmlns:a="http://schemas.openxmlformats.org/drawingml/2006/main" xmlns:r="http://schemas.openxmlformats.org/officeDocument/2006/relationships" xmlns:p="http://schemas.openxmlformats.org/presentationml/2006/main">
   <p:cSld>
     <p:spTree>
       <p:nvGrpSpPr>
@@ -1182,7 +1177,7 @@
             <a:spLocks noGrp="1" noRot="1" noChangeAspect="1" noTextEdit="1"/>
           </p:cNvSpPr>
           <p:nvPr>
-            <p:ph type="sldImg" idx="0"/>
+            <p:ph type="sldImg"/>
           </p:nvPr>
         </p:nvSpPr>
         <p:spPr/>
@@ -1205,10 +1200,6 @@
             <a:pPr lvl="0">
               <a:defRPr/>
             </a:pPr>
-            <a:r>
-              <a:rPr lang="ko-KR" altLang="en-US"/>
-              <a:t/>
-            </a:r>
             <a:endParaRPr lang="ko-KR" altLang="en-US"/>
           </a:p>
         </p:txBody>
@@ -1885,13 +1876,14 @@
 </file>
 
 <file path=ppt/slides/slide10.xml><?xml version="1.0" encoding="utf-8"?>
-<p:sld xmlns:r="http://schemas.openxmlformats.org/officeDocument/2006/relationships" xmlns:c="http://schemas.openxmlformats.org/drawingml/2006/chart" xmlns:a="http://schemas.openxmlformats.org/drawingml/2006/main" xmlns:dgm="http://schemas.openxmlformats.org/drawingml/2006/diagram" xmlns:dsp="http://schemas.microsoft.com/office/drawing/2008/diagram" xmlns:p="http://schemas.openxmlformats.org/presentationml/2006/main">
+<p:sld xmlns:a="http://schemas.openxmlformats.org/drawingml/2006/main" xmlns:r="http://schemas.openxmlformats.org/officeDocument/2006/relationships" xmlns:p="http://schemas.openxmlformats.org/presentationml/2006/main">
   <p:cSld name="Slide 10">
     <p:bg>
-      <p:bgPr shadeToTitle="0">
+      <p:bgPr>
         <a:solidFill>
-          <a:srgbClr val="1a2b3c"/>
+          <a:srgbClr val="1A2B3C"/>
         </a:solidFill>
+        <a:effectLst/>
       </p:bgPr>
     </p:bg>
     <p:spTree>
@@ -1923,17 +1915,18 @@
             <a:avLst/>
           </a:prstGeom>
           <a:solidFill>
-            <a:srgbClr val="3fbfa6"/>
+            <a:srgbClr val="3FBFA6"/>
           </a:solidFill>
           <a:ln w="12700">
             <a:solidFill>
-              <a:srgbClr val="3fbfa6"/>
+              <a:srgbClr val="3FBFA6"/>
             </a:solidFill>
             <a:prstDash val="solid"/>
           </a:ln>
         </p:spPr>
         <p:txBody>
           <a:bodyPr anchor="ctr"/>
+          <a:lstStyle/>
           <a:p>
             <a:pPr algn="ctr">
               <a:defRPr/>
@@ -1970,7 +1963,7 @@
             <a:r>
               <a:rPr lang="en-US" sz="3000">
                 <a:solidFill>
-                  <a:srgbClr val="ffffff"/>
+                  <a:srgbClr val="FFFFFF"/>
                 </a:solidFill>
                 <a:latin typeface="SB 어그로 Bold"/>
                 <a:ea typeface="SB 어그로 Bold"/>
@@ -2000,11 +1993,11 @@
             <a:avLst/>
           </a:prstGeom>
           <a:solidFill>
-            <a:srgbClr val="0d1f2d"/>
+            <a:srgbClr val="0D1F2D"/>
           </a:solidFill>
           <a:ln w="12700">
             <a:solidFill>
-              <a:srgbClr val="3fbfa6"/>
+              <a:srgbClr val="3FBFA6"/>
             </a:solidFill>
             <a:prstDash val="solid"/>
           </a:ln>
@@ -2018,6 +2011,7 @@
         </p:spPr>
         <p:txBody>
           <a:bodyPr anchor="ctr"/>
+          <a:lstStyle/>
           <a:p>
             <a:pPr algn="ctr">
               <a:defRPr/>
@@ -2047,19 +2041,18 @@
           <a:bodyPr wrap="square" lIns="0" tIns="0" rIns="0" bIns="0" anchor="ctr"/>
           <a:lstStyle/>
           <a:p>
-            <a:pPr marL="0" indent="0" algn="ctr">
-              <a:buNone/>
-              <a:defRPr/>
-            </a:pPr>
-            <a:r>
-              <a:rPr lang="en-US" sz="2600">
+            <a:pPr algn="ctr">
+              <a:defRPr/>
+            </a:pPr>
+            <a:r>
+              <a:rPr lang="ko-KR" altLang="en-US" sz="2600" dirty="0">
                 <a:solidFill>
                   <a:schemeClr val="lt1"/>
                 </a:solidFill>
               </a:rPr>
-              <a:t>🏗</a:t>
-            </a:r>
-            <a:endParaRPr lang="en-US" sz="2600">
+              <a:t>🏗️</a:t>
+            </a:r>
+            <a:endParaRPr lang="en-US" altLang="ko-KR" sz="2600" dirty="0">
               <a:solidFill>
                 <a:schemeClr val="lt1"/>
               </a:solidFill>
@@ -2095,7 +2088,7 @@
             <a:r>
               <a:rPr lang="en-US" sz="1500">
                 <a:solidFill>
-                  <a:srgbClr val="3fbfa6"/>
+                  <a:srgbClr val="3FBFA6"/>
                 </a:solidFill>
                 <a:latin typeface="SB 어그로 Bold"/>
                 <a:ea typeface="SB 어그로 Bold"/>
@@ -2138,7 +2131,7 @@
             <a:r>
               <a:rPr lang="en-US" sz="1300">
                 <a:solidFill>
-                  <a:srgbClr val="ffffff"/>
+                  <a:srgbClr val="FFFFFF"/>
                 </a:solidFill>
                 <a:latin typeface="CookieRunOTF Regular"/>
                 <a:ea typeface="CookieRunOTF Regular"/>
@@ -2146,14 +2139,6 @@
               </a:rPr>
               <a:t>5개 클래스 역할 명확 분리</a:t>
             </a:r>
-            <a:endParaRPr lang="en-US" sz="1300">
-              <a:solidFill>
-                <a:srgbClr val="ffffff"/>
-              </a:solidFill>
-              <a:latin typeface="CookieRunOTF Regular"/>
-              <a:ea typeface="CookieRunOTF Regular"/>
-              <a:cs typeface="Calibri"/>
-            </a:endParaRPr>
           </a:p>
           <a:p>
             <a:pPr marL="0" indent="0" algn="ctr">
@@ -2163,7 +2148,7 @@
             <a:r>
               <a:rPr lang="en-US" sz="1300">
                 <a:solidFill>
-                  <a:srgbClr val="ffffff"/>
+                  <a:srgbClr val="FFFFFF"/>
                 </a:solidFill>
                 <a:latin typeface="CookieRunOTF Regular"/>
                 <a:ea typeface="CookieRunOTF Regular"/>
@@ -2193,11 +2178,11 @@
             <a:avLst/>
           </a:prstGeom>
           <a:solidFill>
-            <a:srgbClr val="0d1f2d"/>
+            <a:srgbClr val="0D1F2D"/>
           </a:solidFill>
           <a:ln w="12700">
             <a:solidFill>
-              <a:srgbClr val="3fbfa6"/>
+              <a:srgbClr val="3FBFA6"/>
             </a:solidFill>
             <a:prstDash val="solid"/>
           </a:ln>
@@ -2211,6 +2196,7 @@
         </p:spPr>
         <p:txBody>
           <a:bodyPr anchor="ctr"/>
+          <a:lstStyle/>
           <a:p>
             <a:pPr algn="ctr">
               <a:defRPr/>
@@ -2252,11 +2238,6 @@
               </a:rPr>
               <a:t>🎮</a:t>
             </a:r>
-            <a:endParaRPr lang="en-US" sz="2600">
-              <a:solidFill>
-                <a:schemeClr val="lt1"/>
-              </a:solidFill>
-            </a:endParaRPr>
           </a:p>
         </p:txBody>
       </p:sp>
@@ -2288,7 +2269,7 @@
             <a:r>
               <a:rPr lang="en-US" sz="1500">
                 <a:solidFill>
-                  <a:srgbClr val="3fbfa6"/>
+                  <a:srgbClr val="3FBFA6"/>
                 </a:solidFill>
                 <a:latin typeface="SB 어그로 Bold"/>
                 <a:ea typeface="SB 어그로 Bold"/>
@@ -2331,7 +2312,7 @@
             <a:r>
               <a:rPr lang="en-US" sz="1300">
                 <a:solidFill>
-                  <a:srgbClr val="ffffff"/>
+                  <a:srgbClr val="FFFFFF"/>
                 </a:solidFill>
                 <a:latin typeface="CookieRunOTF Regular"/>
                 <a:ea typeface="CookieRunOTF Regular"/>
@@ -2339,14 +2320,6 @@
               </a:rPr>
               <a:t>8주 흐름·성장·엔딩 분기</a:t>
             </a:r>
-            <a:endParaRPr lang="en-US" sz="1300">
-              <a:solidFill>
-                <a:srgbClr val="ffffff"/>
-              </a:solidFill>
-              <a:latin typeface="CookieRunOTF Regular"/>
-              <a:ea typeface="CookieRunOTF Regular"/>
-              <a:cs typeface="Calibri"/>
-            </a:endParaRPr>
           </a:p>
           <a:p>
             <a:pPr marL="0" indent="0" algn="ctr">
@@ -2356,7 +2329,7 @@
             <a:r>
               <a:rPr lang="en-US" sz="1300">
                 <a:solidFill>
-                  <a:srgbClr val="ffffff"/>
+                  <a:srgbClr val="FFFFFF"/>
                 </a:solidFill>
                 <a:latin typeface="CookieRunOTF Regular"/>
                 <a:ea typeface="CookieRunOTF Regular"/>
@@ -2386,11 +2359,11 @@
             <a:avLst/>
           </a:prstGeom>
           <a:solidFill>
-            <a:srgbClr val="0d1f2d"/>
+            <a:srgbClr val="0D1F2D"/>
           </a:solidFill>
           <a:ln w="12700">
             <a:solidFill>
-              <a:srgbClr val="3fbfa6"/>
+              <a:srgbClr val="3FBFA6"/>
             </a:solidFill>
             <a:prstDash val="solid"/>
           </a:ln>
@@ -2404,6 +2377,7 @@
         </p:spPr>
         <p:txBody>
           <a:bodyPr anchor="ctr"/>
+          <a:lstStyle/>
           <a:p>
             <a:pPr algn="ctr">
               <a:defRPr/>
@@ -2445,11 +2419,6 @@
               </a:rPr>
               <a:t>🌐</a:t>
             </a:r>
-            <a:endParaRPr lang="en-US" sz="2600">
-              <a:solidFill>
-                <a:schemeClr val="lt1"/>
-              </a:solidFill>
-            </a:endParaRPr>
           </a:p>
         </p:txBody>
       </p:sp>
@@ -2481,7 +2450,7 @@
             <a:r>
               <a:rPr lang="en-US" sz="1500">
                 <a:solidFill>
-                  <a:srgbClr val="3fbfa6"/>
+                  <a:srgbClr val="3FBFA6"/>
                 </a:solidFill>
                 <a:latin typeface="SB 어그로 Bold"/>
                 <a:ea typeface="SB 어그로 Bold"/>
@@ -2524,7 +2493,7 @@
             <a:r>
               <a:rPr lang="en-US" sz="1300">
                 <a:solidFill>
-                  <a:srgbClr val="ffffff"/>
+                  <a:srgbClr val="FFFFFF"/>
                 </a:solidFill>
                 <a:latin typeface="CookieRunOTF Regular"/>
                 <a:ea typeface="CookieRunOTF Regular"/>
@@ -2532,14 +2501,6 @@
               </a:rPr>
               <a:t>UTF-8 인코딩 설정</a:t>
             </a:r>
-            <a:endParaRPr lang="en-US" sz="1300">
-              <a:solidFill>
-                <a:srgbClr val="ffffff"/>
-              </a:solidFill>
-              <a:latin typeface="CookieRunOTF Regular"/>
-              <a:ea typeface="CookieRunOTF Regular"/>
-              <a:cs typeface="Calibri"/>
-            </a:endParaRPr>
           </a:p>
           <a:p>
             <a:pPr marL="0" indent="0" algn="ctr">
@@ -2549,7 +2510,7 @@
             <a:r>
               <a:rPr lang="en-US" sz="1300">
                 <a:solidFill>
-                  <a:srgbClr val="ffffff"/>
+                  <a:srgbClr val="FFFFFF"/>
                 </a:solidFill>
                 <a:latin typeface="CookieRunOTF Regular"/>
                 <a:ea typeface="CookieRunOTF Regular"/>
@@ -2579,11 +2540,11 @@
             <a:avLst/>
           </a:prstGeom>
           <a:solidFill>
-            <a:srgbClr val="0d1f2d"/>
+            <a:srgbClr val="0D1F2D"/>
           </a:solidFill>
           <a:ln w="12700">
             <a:solidFill>
-              <a:srgbClr val="3fbfa6"/>
+              <a:srgbClr val="3FBFA6"/>
             </a:solidFill>
             <a:prstDash val="solid"/>
           </a:ln>
@@ -2597,6 +2558,7 @@
         </p:spPr>
         <p:txBody>
           <a:bodyPr anchor="ctr"/>
+          <a:lstStyle/>
           <a:p>
             <a:pPr algn="ctr">
               <a:defRPr/>
@@ -2638,11 +2600,6 @@
               </a:rPr>
               <a:t>🏆</a:t>
             </a:r>
-            <a:endParaRPr lang="en-US" sz="2600">
-              <a:solidFill>
-                <a:schemeClr val="lt1"/>
-              </a:solidFill>
-            </a:endParaRPr>
           </a:p>
         </p:txBody>
       </p:sp>
@@ -2674,7 +2631,7 @@
             <a:r>
               <a:rPr lang="en-US" sz="1500">
                 <a:solidFill>
-                  <a:srgbClr val="3fbfa6"/>
+                  <a:srgbClr val="3FBFA6"/>
                 </a:solidFill>
                 <a:latin typeface="SB 어그로 Bold"/>
                 <a:ea typeface="SB 어그로 Bold"/>
@@ -2717,7 +2674,7 @@
             <a:r>
               <a:rPr lang="en-US" sz="1300">
                 <a:solidFill>
-                  <a:srgbClr val="ffffff"/>
+                  <a:srgbClr val="FFFFFF"/>
                 </a:solidFill>
                 <a:latin typeface="CookieRunOTF Regular"/>
                 <a:ea typeface="CookieRunOTF Regular"/>
@@ -2725,14 +2682,6 @@
               </a:rPr>
               <a:t>아이템·반항 시스템</a:t>
             </a:r>
-            <a:endParaRPr lang="en-US" sz="1300">
-              <a:solidFill>
-                <a:srgbClr val="ffffff"/>
-              </a:solidFill>
-              <a:latin typeface="CookieRunOTF Regular"/>
-              <a:ea typeface="CookieRunOTF Regular"/>
-              <a:cs typeface="Calibri"/>
-            </a:endParaRPr>
           </a:p>
           <a:p>
             <a:pPr marL="0" indent="0" algn="ctr">
@@ -2742,7 +2691,7 @@
             <a:r>
               <a:rPr lang="en-US" sz="1300">
                 <a:solidFill>
-                  <a:srgbClr val="ffffff"/>
+                  <a:srgbClr val="FFFFFF"/>
                 </a:solidFill>
                 <a:latin typeface="CookieRunOTF Regular"/>
                 <a:ea typeface="CookieRunOTF Regular"/>
@@ -2772,17 +2721,18 @@
             <a:avLst/>
           </a:prstGeom>
           <a:solidFill>
-            <a:srgbClr val="3fbfa6"/>
+            <a:srgbClr val="3FBFA6"/>
           </a:solidFill>
           <a:ln w="12700">
             <a:solidFill>
-              <a:srgbClr val="3fbfa6"/>
+              <a:srgbClr val="3FBFA6"/>
             </a:solidFill>
             <a:prstDash val="solid"/>
           </a:ln>
         </p:spPr>
         <p:txBody>
           <a:bodyPr anchor="ctr"/>
+          <a:lstStyle/>
           <a:p>
             <a:pPr algn="ctr">
               <a:defRPr/>
@@ -2819,7 +2769,7 @@
             <a:r>
               <a:rPr lang="en-US" sz="1400">
                 <a:solidFill>
-                  <a:srgbClr val="ffffff"/>
+                  <a:srgbClr val="FFFFFF"/>
                 </a:solidFill>
                 <a:latin typeface="여기어때 잘난체 고딕 TTF"/>
                 <a:ea typeface="여기어때 잘난체 고딕 TTF"/>
@@ -2830,7 +2780,7 @@
             <a:r>
               <a:rPr lang="en-US" sz="1400" b="1">
                 <a:solidFill>
-                  <a:srgbClr val="ffffff"/>
+                  <a:srgbClr val="FFFFFF"/>
                 </a:solidFill>
                 <a:latin typeface="여기어때 잘난체 고딕 TTF"/>
                 <a:ea typeface="여기어때 잘난체 고딕 TTF"/>
@@ -2871,15 +2821,203 @@
               <a:defRPr/>
             </a:pPr>
             <a:r>
-              <a:rPr lang="en-US" sz="1450">
-                <a:solidFill>
-                  <a:srgbClr val="ffffff"/>
+              <a:rPr lang="en-US" sz="1450" dirty="0">
+                <a:solidFill>
+                  <a:srgbClr val="FFFFFF"/>
                 </a:solidFill>
                 <a:latin typeface="배달의민족 주아"/>
                 <a:ea typeface="배달의민족 주아"/>
                 <a:cs typeface="Calibri"/>
               </a:rPr>
-              <a:t>💾  저장 / 불러오기 (파일 I/O)</a:t>
+              <a:t>💾  </a:t>
+            </a:r>
+            <a:r>
+              <a:rPr lang="en-US" sz="1450" dirty="0" err="1">
+                <a:solidFill>
+                  <a:srgbClr val="FFFFFF"/>
+                </a:solidFill>
+                <a:latin typeface="배달의민족 주아"/>
+                <a:ea typeface="배달의민족 주아"/>
+                <a:cs typeface="Calibri"/>
+              </a:rPr>
+              <a:t>저장</a:t>
+            </a:r>
+            <a:r>
+              <a:rPr lang="en-US" sz="1450" dirty="0">
+                <a:solidFill>
+                  <a:srgbClr val="FFFFFF"/>
+                </a:solidFill>
+                <a:latin typeface="배달의민족 주아"/>
+                <a:ea typeface="배달의민족 주아"/>
+                <a:cs typeface="Calibri"/>
+              </a:rPr>
+              <a:t> / </a:t>
+            </a:r>
+            <a:r>
+              <a:rPr lang="en-US" sz="1450" dirty="0" err="1">
+                <a:solidFill>
+                  <a:srgbClr val="FFFFFF"/>
+                </a:solidFill>
+                <a:latin typeface="배달의민족 주아"/>
+                <a:ea typeface="배달의민족 주아"/>
+                <a:cs typeface="Calibri"/>
+              </a:rPr>
+              <a:t>불러오기</a:t>
+            </a:r>
+            <a:r>
+              <a:rPr lang="en-US" sz="1450" dirty="0">
+                <a:solidFill>
+                  <a:srgbClr val="FFFFFF"/>
+                </a:solidFill>
+                <a:latin typeface="배달의민족 주아"/>
+                <a:ea typeface="배달의민족 주아"/>
+                <a:cs typeface="Calibri"/>
+              </a:rPr>
+              <a:t> (</a:t>
+            </a:r>
+            <a:r>
+              <a:rPr lang="en-US" sz="1450" dirty="0" err="1">
+                <a:solidFill>
+                  <a:srgbClr val="FFFFFF"/>
+                </a:solidFill>
+                <a:latin typeface="배달의민족 주아"/>
+                <a:ea typeface="배달의민족 주아"/>
+                <a:cs typeface="Calibri"/>
+              </a:rPr>
+              <a:t>파일</a:t>
+            </a:r>
+            <a:r>
+              <a:rPr lang="en-US" sz="1450" dirty="0">
+                <a:solidFill>
+                  <a:srgbClr val="FFFFFF"/>
+                </a:solidFill>
+                <a:latin typeface="배달의민족 주아"/>
+                <a:ea typeface="배달의민족 주아"/>
+                <a:cs typeface="Calibri"/>
+              </a:rPr>
+              <a:t> I/O)</a:t>
+            </a:r>
+            <a:endParaRPr lang="en-US" sz="1450" dirty="0">
+              <a:latin typeface="배달의민족 주아"/>
+              <a:ea typeface="배달의민족 주아"/>
+            </a:endParaRPr>
+          </a:p>
+        </p:txBody>
+      </p:sp>
+      <p:sp>
+        <p:nvSpPr>
+          <p:cNvPr id="23" name="Text 21"/>
+          <p:cNvSpPr/>
+          <p:nvPr/>
+        </p:nvSpPr>
+        <p:spPr>
+          <a:xfrm>
+            <a:off x="1449324" y="4032504"/>
+            <a:ext cx="3840480" cy="347472"/>
+          </a:xfrm>
+          <a:prstGeom prst="rect">
+            <a:avLst/>
+          </a:prstGeom>
+          <a:noFill/>
+          <a:ln/>
+        </p:spPr>
+        <p:txBody>
+          <a:bodyPr wrap="square" lIns="0" tIns="0" rIns="0" bIns="0" anchor="ctr"/>
+          <a:lstStyle/>
+          <a:p>
+            <a:pPr>
+              <a:defRPr/>
+            </a:pPr>
+            <a:r>
+              <a:rPr lang="ko-KR" altLang="ko-KR" sz="1600" dirty="0"/>
+              <a:t>🖥️</a:t>
+            </a:r>
+            <a:r>
+              <a:rPr lang="en-US" sz="1450" dirty="0">
+                <a:solidFill>
+                  <a:srgbClr val="FFFFFF"/>
+                </a:solidFill>
+                <a:latin typeface="배달의민족 주아"/>
+                <a:ea typeface="배달의민족 주아"/>
+                <a:cs typeface="Calibri"/>
+              </a:rPr>
+              <a:t>  GUI </a:t>
+            </a:r>
+            <a:r>
+              <a:rPr lang="en-US" sz="1450" dirty="0" err="1">
+                <a:solidFill>
+                  <a:srgbClr val="FFFFFF"/>
+                </a:solidFill>
+                <a:latin typeface="배달의민족 주아"/>
+                <a:ea typeface="배달의민족 주아"/>
+                <a:cs typeface="Calibri"/>
+              </a:rPr>
+              <a:t>라이브러리</a:t>
+            </a:r>
+            <a:r>
+              <a:rPr lang="en-US" sz="1450" dirty="0">
+                <a:solidFill>
+                  <a:srgbClr val="FFFFFF"/>
+                </a:solidFill>
+                <a:latin typeface="배달의민족 주아"/>
+                <a:ea typeface="배달의민족 주아"/>
+                <a:cs typeface="Calibri"/>
+              </a:rPr>
+              <a:t> </a:t>
+            </a:r>
+            <a:r>
+              <a:rPr lang="en-US" sz="1450" dirty="0" err="1">
+                <a:solidFill>
+                  <a:srgbClr val="FFFFFF"/>
+                </a:solidFill>
+                <a:latin typeface="배달의민족 주아"/>
+                <a:ea typeface="배달의민족 주아"/>
+                <a:cs typeface="Calibri"/>
+              </a:rPr>
+              <a:t>도입</a:t>
+            </a:r>
+            <a:endParaRPr lang="en-US" sz="1450" dirty="0">
+              <a:latin typeface="배달의민족 주아"/>
+              <a:ea typeface="배달의민족 주아"/>
+            </a:endParaRPr>
+          </a:p>
+        </p:txBody>
+      </p:sp>
+      <p:sp>
+        <p:nvSpPr>
+          <p:cNvPr id="24" name="Text 22"/>
+          <p:cNvSpPr/>
+          <p:nvPr/>
+        </p:nvSpPr>
+        <p:spPr>
+          <a:xfrm>
+            <a:off x="1449324" y="4416552"/>
+            <a:ext cx="3840480" cy="347472"/>
+          </a:xfrm>
+          <a:prstGeom prst="rect">
+            <a:avLst/>
+          </a:prstGeom>
+          <a:noFill/>
+          <a:ln/>
+        </p:spPr>
+        <p:txBody>
+          <a:bodyPr wrap="square" lIns="0" tIns="0" rIns="0" bIns="0" anchor="ctr"/>
+          <a:lstStyle/>
+          <a:p>
+            <a:pPr marL="0" indent="0" algn="l">
+              <a:buNone/>
+              <a:defRPr/>
+            </a:pPr>
+            <a:r>
+              <a:rPr lang="en-US" sz="1450">
+                <a:solidFill>
+                  <a:srgbClr val="FFFFFF"/>
+                </a:solidFill>
+                <a:latin typeface="배달의민족 주아"/>
+                <a:ea typeface="배달의민족 주아"/>
+                <a:cs typeface="Calibri"/>
+              </a:rPr>
+              <a:t>🎯  난이도 선택 기능</a:t>
             </a:r>
             <a:endParaRPr lang="en-US" sz="1450">
               <a:latin typeface="배달의민족 주아"/>
@@ -2890,13 +3028,13 @@
       </p:sp>
       <p:sp>
         <p:nvSpPr>
-          <p:cNvPr id="23" name="Text 21"/>
-          <p:cNvSpPr/>
-          <p:nvPr/>
-        </p:nvSpPr>
-        <p:spPr>
-          <a:xfrm>
-            <a:off x="1449324" y="4032504"/>
+          <p:cNvPr id="25" name="Text 23"/>
+          <p:cNvSpPr/>
+          <p:nvPr/>
+        </p:nvSpPr>
+        <p:spPr>
+          <a:xfrm>
+            <a:off x="4773168" y="3685032"/>
             <a:ext cx="3840480" cy="347472"/>
           </a:xfrm>
           <a:prstGeom prst="rect">
@@ -2916,13 +3054,13 @@
             <a:r>
               <a:rPr lang="en-US" sz="1450">
                 <a:solidFill>
-                  <a:srgbClr val="ffffff"/>
+                  <a:srgbClr val="FFFFFF"/>
                 </a:solidFill>
                 <a:latin typeface="배달의민족 주아"/>
                 <a:ea typeface="배달의민족 주아"/>
                 <a:cs typeface="Calibri"/>
               </a:rPr>
-              <a:t>🖥  GUI 라이브러리 도입</a:t>
+              <a:t>🔓  엔딩 조건 및 종류 확장</a:t>
             </a:r>
             <a:endParaRPr lang="en-US" sz="1450">
               <a:latin typeface="배달의민족 주아"/>
@@ -2933,13 +3071,13 @@
       </p:sp>
       <p:sp>
         <p:nvSpPr>
-          <p:cNvPr id="24" name="Text 22"/>
-          <p:cNvSpPr/>
-          <p:nvPr/>
-        </p:nvSpPr>
-        <p:spPr>
-          <a:xfrm>
-            <a:off x="1449324" y="4416552"/>
+          <p:cNvPr id="26" name="Text 24"/>
+          <p:cNvSpPr/>
+          <p:nvPr/>
+        </p:nvSpPr>
+        <p:spPr>
+          <a:xfrm>
+            <a:off x="4754880" y="4069080"/>
             <a:ext cx="3840480" cy="347472"/>
           </a:xfrm>
           <a:prstGeom prst="rect">
@@ -2959,93 +3097,7 @@
             <a:r>
               <a:rPr lang="en-US" sz="1450">
                 <a:solidFill>
-                  <a:srgbClr val="ffffff"/>
-                </a:solidFill>
-                <a:latin typeface="배달의민족 주아"/>
-                <a:ea typeface="배달의민족 주아"/>
-                <a:cs typeface="Calibri"/>
-              </a:rPr>
-              <a:t>🎯  난이도 선택 기능</a:t>
-            </a:r>
-            <a:endParaRPr lang="en-US" sz="1450">
-              <a:latin typeface="배달의민족 주아"/>
-              <a:ea typeface="배달의민족 주아"/>
-            </a:endParaRPr>
-          </a:p>
-        </p:txBody>
-      </p:sp>
-      <p:sp>
-        <p:nvSpPr>
-          <p:cNvPr id="25" name="Text 23"/>
-          <p:cNvSpPr/>
-          <p:nvPr/>
-        </p:nvSpPr>
-        <p:spPr>
-          <a:xfrm>
-            <a:off x="4773168" y="3685032"/>
-            <a:ext cx="3840480" cy="347472"/>
-          </a:xfrm>
-          <a:prstGeom prst="rect">
-            <a:avLst/>
-          </a:prstGeom>
-          <a:noFill/>
-          <a:ln/>
-        </p:spPr>
-        <p:txBody>
-          <a:bodyPr wrap="square" lIns="0" tIns="0" rIns="0" bIns="0" anchor="ctr"/>
-          <a:lstStyle/>
-          <a:p>
-            <a:pPr marL="0" indent="0" algn="l">
-              <a:buNone/>
-              <a:defRPr/>
-            </a:pPr>
-            <a:r>
-              <a:rPr lang="en-US" sz="1450">
-                <a:solidFill>
-                  <a:srgbClr val="ffffff"/>
-                </a:solidFill>
-                <a:latin typeface="배달의민족 주아"/>
-                <a:ea typeface="배달의민족 주아"/>
-                <a:cs typeface="Calibri"/>
-              </a:rPr>
-              <a:t>🔓  엔딩 조건 및 종류 확장</a:t>
-            </a:r>
-            <a:endParaRPr lang="en-US" sz="1450">
-              <a:latin typeface="배달의민족 주아"/>
-              <a:ea typeface="배달의민족 주아"/>
-            </a:endParaRPr>
-          </a:p>
-        </p:txBody>
-      </p:sp>
-      <p:sp>
-        <p:nvSpPr>
-          <p:cNvPr id="26" name="Text 24"/>
-          <p:cNvSpPr/>
-          <p:nvPr/>
-        </p:nvSpPr>
-        <p:spPr>
-          <a:xfrm>
-            <a:off x="4754880" y="4069080"/>
-            <a:ext cx="3840480" cy="347472"/>
-          </a:xfrm>
-          <a:prstGeom prst="rect">
-            <a:avLst/>
-          </a:prstGeom>
-          <a:noFill/>
-          <a:ln/>
-        </p:spPr>
-        <p:txBody>
-          <a:bodyPr wrap="square" lIns="0" tIns="0" rIns="0" bIns="0" anchor="ctr"/>
-          <a:lstStyle/>
-          <a:p>
-            <a:pPr marL="0" indent="0" algn="l">
-              <a:buNone/>
-              <a:defRPr/>
-            </a:pPr>
-            <a:r>
-              <a:rPr lang="en-US" sz="1450">
-                <a:solidFill>
-                  <a:srgbClr val="ffffff"/>
+                  <a:srgbClr val="FFFFFF"/>
                 </a:solidFill>
                 <a:latin typeface="배달의민족 주아"/>
                 <a:ea typeface="배달의민족 주아"/>
@@ -3065,11 +3117,11 @@
   <p:clrMapOvr>
     <a:masterClrMapping/>
   </p:clrMapOvr>
-  <mc:AlternateContent xmlns:mc="http://schemas.openxmlformats.org/markup-compatibility/2006">
-    <mc:Choice xmlns:p14="http://schemas.microsoft.com/office/powerpoint/2010/main" Requires="p14">
-      <p:transition xmlns:mc="http://schemas.openxmlformats.org/markup-compatibility/2006" xmlns:p14="http://schemas.microsoft.com/office/powerpoint/2010/main" mc:Ignorable="p14" p14:dur="500"/>
+  <mc:AlternateContent xmlns:mc="http://schemas.openxmlformats.org/markup-compatibility/2006" xmlns:p14="http://schemas.microsoft.com/office/powerpoint/2010/main">
+    <mc:Choice Requires="p14">
+      <p:transition/>
     </mc:Choice>
-    <mc:Fallback>
+    <mc:Fallback xmlns:dsp="http://schemas.microsoft.com/office/drawing/2008/diagram" xmlns:dgm="http://schemas.openxmlformats.org/drawingml/2006/diagram" xmlns:c="http://schemas.openxmlformats.org/drawingml/2006/chart" xmlns="">
       <p:transition/>
     </mc:Fallback>
   </mc:AlternateContent>
@@ -5739,13 +5791,14 @@
 </file>
 
 <file path=ppt/slides/slide4.xml><?xml version="1.0" encoding="utf-8"?>
-<p:sld xmlns:r="http://schemas.openxmlformats.org/officeDocument/2006/relationships" xmlns:c="http://schemas.openxmlformats.org/drawingml/2006/chart" xmlns:a="http://schemas.openxmlformats.org/drawingml/2006/main" xmlns:dgm="http://schemas.openxmlformats.org/drawingml/2006/diagram" xmlns:dsp="http://schemas.microsoft.com/office/drawing/2008/diagram" xmlns:p="http://schemas.openxmlformats.org/presentationml/2006/main">
+<p:sld xmlns:a="http://schemas.openxmlformats.org/drawingml/2006/main" xmlns:r="http://schemas.openxmlformats.org/officeDocument/2006/relationships" xmlns:p="http://schemas.openxmlformats.org/presentationml/2006/main">
   <p:cSld name="Slide 4">
     <p:bg>
-      <p:bgPr shadeToTitle="0">
+      <p:bgPr>
         <a:solidFill>
-          <a:srgbClr val="f4f7fa"/>
+          <a:srgbClr val="F4F7FA"/>
         </a:solidFill>
+        <a:effectLst/>
       </p:bgPr>
     </p:bg>
     <p:spTree>
@@ -5823,17 +5876,18 @@
             <a:avLst/>
           </a:prstGeom>
           <a:solidFill>
-            <a:srgbClr val="3fbfa6"/>
+            <a:srgbClr val="3FBFA6"/>
           </a:solidFill>
           <a:ln w="12700">
             <a:solidFill>
-              <a:srgbClr val="3fbfa6"/>
+              <a:srgbClr val="3FBFA6"/>
             </a:solidFill>
             <a:prstDash val="solid"/>
           </a:ln>
         </p:spPr>
         <p:txBody>
           <a:bodyPr anchor="ctr"/>
+          <a:lstStyle/>
           <a:p>
             <a:pPr algn="ctr">
               <a:defRPr/>
@@ -5857,11 +5911,11 @@
             <a:avLst/>
           </a:prstGeom>
           <a:solidFill>
-            <a:srgbClr val="1a2b3c"/>
+            <a:srgbClr val="1A2B3C"/>
           </a:solidFill>
           <a:ln w="12700">
             <a:solidFill>
-              <a:srgbClr val="3fbfa6"/>
+              <a:srgbClr val="3FBFA6"/>
             </a:solidFill>
             <a:prstDash val="solid"/>
           </a:ln>
@@ -5875,6 +5929,7 @@
         </p:spPr>
         <p:txBody>
           <a:bodyPr anchor="ctr"/>
+          <a:lstStyle/>
           <a:p>
             <a:pPr algn="ctr">
               <a:defRPr/>
@@ -5911,7 +5966,7 @@
             <a:r>
               <a:rPr lang="en-US" sz="1500" b="1">
                 <a:solidFill>
-                  <a:srgbClr val="3fbfa6"/>
+                  <a:srgbClr val="3FBFA6"/>
                 </a:solidFill>
                 <a:latin typeface="CookieRunOTF Regular"/>
                 <a:ea typeface="CookieRunOTF Regular"/>
@@ -5942,7 +5997,7 @@
           </a:prstGeom>
           <a:ln>
             <a:solidFill>
-              <a:srgbClr val="3fbfa6"/>
+              <a:srgbClr val="3FBFA6"/>
             </a:solidFill>
           </a:ln>
         </p:spPr>
@@ -5962,6 +6017,7 @@
         </p:style>
         <p:txBody>
           <a:bodyPr wrap="square" anchor="ctr"/>
+          <a:lstStyle/>
           <a:p>
             <a:pPr algn="ctr">
               <a:defRPr/>
@@ -5986,7 +6042,7 @@
           </a:prstGeom>
           <a:ln>
             <a:solidFill>
-              <a:srgbClr val="3fbfa6"/>
+              <a:srgbClr val="3FBFA6"/>
             </a:solidFill>
           </a:ln>
         </p:spPr>
@@ -6006,6 +6062,7 @@
         </p:style>
         <p:txBody>
           <a:bodyPr wrap="square" anchor="ctr"/>
+          <a:lstStyle/>
           <a:p>
             <a:pPr algn="ctr">
               <a:defRPr/>
@@ -6030,7 +6087,7 @@
           </a:prstGeom>
           <a:ln>
             <a:solidFill>
-              <a:srgbClr val="3fbfa6"/>
+              <a:srgbClr val="3FBFA6"/>
             </a:solidFill>
           </a:ln>
         </p:spPr>
@@ -6050,6 +6107,7 @@
         </p:style>
         <p:txBody>
           <a:bodyPr wrap="square" anchor="ctr"/>
+          <a:lstStyle/>
           <a:p>
             <a:pPr algn="ctr">
               <a:defRPr/>
@@ -6074,7 +6132,7 @@
           </a:prstGeom>
           <a:ln>
             <a:solidFill>
-              <a:srgbClr val="3fbfa6"/>
+              <a:srgbClr val="3FBFA6"/>
             </a:solidFill>
           </a:ln>
         </p:spPr>
@@ -6094,6 +6152,7 @@
         </p:style>
         <p:txBody>
           <a:bodyPr wrap="square" anchor="ctr"/>
+          <a:lstStyle/>
           <a:p>
             <a:pPr algn="ctr">
               <a:defRPr/>
@@ -6117,11 +6176,11 @@
             <a:avLst/>
           </a:prstGeom>
           <a:solidFill>
-            <a:srgbClr val="ffffff"/>
+            <a:srgbClr val="FFFFFF"/>
           </a:solidFill>
           <a:ln w="12700">
             <a:solidFill>
-              <a:srgbClr val="3fbfa6"/>
+              <a:srgbClr val="3FBFA6"/>
             </a:solidFill>
             <a:prstDash val="solid"/>
           </a:ln>
@@ -6135,6 +6194,7 @@
         </p:spPr>
         <p:txBody>
           <a:bodyPr anchor="ctr"/>
+          <a:lstStyle/>
           <a:p>
             <a:pPr algn="ctr">
               <a:defRPr/>
@@ -6158,17 +6218,18 @@
             <a:avLst/>
           </a:prstGeom>
           <a:solidFill>
-            <a:srgbClr val="3fbfa6"/>
+            <a:srgbClr val="3FBFA6"/>
           </a:solidFill>
           <a:ln w="12700">
             <a:solidFill>
-              <a:srgbClr val="3fbfa6"/>
+              <a:srgbClr val="3FBFA6"/>
             </a:solidFill>
             <a:prstDash val="solid"/>
           </a:ln>
         </p:spPr>
         <p:txBody>
           <a:bodyPr anchor="ctr"/>
+          <a:lstStyle/>
           <a:p>
             <a:pPr algn="ctr">
               <a:defRPr/>
@@ -6205,7 +6266,7 @@
             <a:r>
               <a:rPr lang="en-US" sz="1100" b="1">
                 <a:solidFill>
-                  <a:srgbClr val="ffffff"/>
+                  <a:srgbClr val="FFFFFF"/>
                 </a:solidFill>
                 <a:latin typeface="CookieRunOTF Regular"/>
                 <a:ea typeface="CookieRunOTF Regular"/>
@@ -6248,7 +6309,7 @@
             <a:r>
               <a:rPr lang="en-US" sz="1100">
                 <a:solidFill>
-                  <a:srgbClr val="1a2b3c"/>
+                  <a:srgbClr val="1A2B3C"/>
                 </a:solidFill>
                 <a:latin typeface="CookieRunOTF Regular"/>
                 <a:ea typeface="CookieRunOTF Regular"/>
@@ -6256,14 +6317,6 @@
               </a:rPr>
               <a:t>새 객체</a:t>
             </a:r>
-            <a:endParaRPr lang="en-US" sz="1100">
-              <a:solidFill>
-                <a:srgbClr val="1a2b3c"/>
-              </a:solidFill>
-              <a:latin typeface="CookieRunOTF Regular"/>
-              <a:ea typeface="CookieRunOTF Regular"/>
-              <a:cs typeface="Calibri"/>
-            </a:endParaRPr>
           </a:p>
           <a:p>
             <a:pPr marL="0" indent="0" algn="ctr">
@@ -6273,7 +6326,7 @@
             <a:r>
               <a:rPr lang="en-US" sz="1100">
                 <a:solidFill>
-                  <a:srgbClr val="1a2b3c"/>
+                  <a:srgbClr val="1A2B3C"/>
                 </a:solidFill>
                 <a:latin typeface="CookieRunOTF Regular"/>
                 <a:ea typeface="CookieRunOTF Regular"/>
@@ -6303,11 +6356,11 @@
             <a:avLst/>
           </a:prstGeom>
           <a:solidFill>
-            <a:srgbClr val="ffffff"/>
+            <a:srgbClr val="FFFFFF"/>
           </a:solidFill>
           <a:ln w="12700">
             <a:solidFill>
-              <a:srgbClr val="f4a261"/>
+              <a:srgbClr val="F4A261"/>
             </a:solidFill>
             <a:prstDash val="solid"/>
           </a:ln>
@@ -6321,6 +6374,7 @@
         </p:spPr>
         <p:txBody>
           <a:bodyPr anchor="ctr"/>
+          <a:lstStyle/>
           <a:p>
             <a:pPr algn="ctr">
               <a:defRPr/>
@@ -6344,17 +6398,18 @@
             <a:avLst/>
           </a:prstGeom>
           <a:solidFill>
-            <a:srgbClr val="f4a261"/>
+            <a:srgbClr val="F4A261"/>
           </a:solidFill>
           <a:ln w="12700">
             <a:solidFill>
-              <a:srgbClr val="f4a261"/>
+              <a:srgbClr val="F4A261"/>
             </a:solidFill>
             <a:prstDash val="solid"/>
           </a:ln>
         </p:spPr>
         <p:txBody>
           <a:bodyPr anchor="ctr"/>
+          <a:lstStyle/>
           <a:p>
             <a:pPr algn="ctr">
               <a:defRPr/>
@@ -6391,7 +6446,7 @@
             <a:r>
               <a:rPr lang="en-US" sz="1100" b="1">
                 <a:solidFill>
-                  <a:srgbClr val="ffffff"/>
+                  <a:srgbClr val="FFFFFF"/>
                 </a:solidFill>
                 <a:latin typeface="CookieRunOTF Regular"/>
                 <a:ea typeface="CookieRunOTF Regular"/>
@@ -6434,7 +6489,7 @@
             <a:r>
               <a:rPr lang="en-US" sz="1100">
                 <a:solidFill>
-                  <a:srgbClr val="1a2b3c"/>
+                  <a:srgbClr val="1A2B3C"/>
                 </a:solidFill>
                 <a:latin typeface="CookieRunOTF Regular"/>
                 <a:ea typeface="CookieRunOTF Regular"/>
@@ -6442,14 +6497,6 @@
               </a:rPr>
               <a:t>시간 흐름</a:t>
             </a:r>
-            <a:endParaRPr lang="en-US" sz="1100">
-              <a:solidFill>
-                <a:srgbClr val="1a2b3c"/>
-              </a:solidFill>
-              <a:latin typeface="CookieRunOTF Regular"/>
-              <a:ea typeface="CookieRunOTF Regular"/>
-              <a:cs typeface="Calibri"/>
-            </a:endParaRPr>
           </a:p>
           <a:p>
             <a:pPr marL="0" indent="0" algn="ctr">
@@ -6459,7 +6506,7 @@
             <a:r>
               <a:rPr lang="en-US" sz="1100">
                 <a:solidFill>
-                  <a:srgbClr val="1a2b3c"/>
+                  <a:srgbClr val="1A2B3C"/>
                 </a:solidFill>
                 <a:latin typeface="CookieRunOTF Regular"/>
                 <a:ea typeface="CookieRunOTF Regular"/>
@@ -6489,11 +6536,11 @@
             <a:avLst/>
           </a:prstGeom>
           <a:solidFill>
-            <a:srgbClr val="ffffff"/>
+            <a:srgbClr val="FFFFFF"/>
           </a:solidFill>
           <a:ln w="12700">
             <a:solidFill>
-              <a:srgbClr val="2471a3"/>
+              <a:srgbClr val="2471A3"/>
             </a:solidFill>
             <a:prstDash val="solid"/>
           </a:ln>
@@ -6507,6 +6554,7 @@
         </p:spPr>
         <p:txBody>
           <a:bodyPr anchor="ctr"/>
+          <a:lstStyle/>
           <a:p>
             <a:pPr algn="ctr">
               <a:defRPr/>
@@ -6530,17 +6578,18 @@
             <a:avLst/>
           </a:prstGeom>
           <a:solidFill>
-            <a:srgbClr val="2471a3"/>
+            <a:srgbClr val="2471A3"/>
           </a:solidFill>
           <a:ln w="12700">
             <a:solidFill>
-              <a:srgbClr val="2471a3"/>
+              <a:srgbClr val="2471A3"/>
             </a:solidFill>
             <a:prstDash val="solid"/>
           </a:ln>
         </p:spPr>
         <p:txBody>
           <a:bodyPr anchor="ctr"/>
+          <a:lstStyle/>
           <a:p>
             <a:pPr algn="ctr">
               <a:defRPr/>
@@ -6577,7 +6626,7 @@
             <a:r>
               <a:rPr lang="en-US" sz="1100" b="1">
                 <a:solidFill>
-                  <a:srgbClr val="ffffff"/>
+                  <a:srgbClr val="FFFFFF"/>
                 </a:solidFill>
                 <a:latin typeface="CookieRunOTF Regular"/>
                 <a:ea typeface="CookieRunOTF Regular"/>
@@ -6620,7 +6669,7 @@
             <a:r>
               <a:rPr lang="en-US" sz="1100">
                 <a:solidFill>
-                  <a:srgbClr val="1a2b3c"/>
+                  <a:srgbClr val="1A2B3C"/>
                 </a:solidFill>
                 <a:latin typeface="CookieRunOTF Regular"/>
                 <a:ea typeface="CookieRunOTF Regular"/>
@@ -6628,14 +6677,6 @@
               </a:rPr>
               <a:t>행동 정의</a:t>
             </a:r>
-            <a:endParaRPr lang="en-US" sz="1100">
-              <a:solidFill>
-                <a:srgbClr val="1a2b3c"/>
-              </a:solidFill>
-              <a:latin typeface="CookieRunOTF Regular"/>
-              <a:ea typeface="CookieRunOTF Regular"/>
-              <a:cs typeface="Calibri"/>
-            </a:endParaRPr>
           </a:p>
           <a:p>
             <a:pPr marL="0" indent="0" algn="ctr">
@@ -6645,7 +6686,7 @@
             <a:r>
               <a:rPr lang="en-US" sz="1100">
                 <a:solidFill>
-                  <a:srgbClr val="1a2b3c"/>
+                  <a:srgbClr val="1A2B3C"/>
                 </a:solidFill>
                 <a:latin typeface="CookieRunOTF Regular"/>
                 <a:ea typeface="CookieRunOTF Regular"/>
@@ -6675,11 +6716,11 @@
             <a:avLst/>
           </a:prstGeom>
           <a:solidFill>
-            <a:srgbClr val="ffffff"/>
+            <a:srgbClr val="FFFFFF"/>
           </a:solidFill>
           <a:ln w="12700">
             <a:solidFill>
-              <a:srgbClr val="7d3c98"/>
+              <a:srgbClr val="7D3C98"/>
             </a:solidFill>
             <a:prstDash val="solid"/>
           </a:ln>
@@ -6693,6 +6734,7 @@
         </p:spPr>
         <p:txBody>
           <a:bodyPr anchor="ctr"/>
+          <a:lstStyle/>
           <a:p>
             <a:pPr algn="ctr">
               <a:defRPr/>
@@ -6716,17 +6758,18 @@
             <a:avLst/>
           </a:prstGeom>
           <a:solidFill>
-            <a:srgbClr val="7d3c98"/>
+            <a:srgbClr val="7D3C98"/>
           </a:solidFill>
           <a:ln w="12700">
             <a:solidFill>
-              <a:srgbClr val="7d3c98"/>
+              <a:srgbClr val="7D3C98"/>
             </a:solidFill>
             <a:prstDash val="solid"/>
           </a:ln>
         </p:spPr>
         <p:txBody>
           <a:bodyPr anchor="ctr"/>
+          <a:lstStyle/>
           <a:p>
             <a:pPr algn="ctr">
               <a:defRPr/>
@@ -6763,7 +6806,7 @@
             <a:r>
               <a:rPr lang="en-US" sz="1100" b="1">
                 <a:solidFill>
-                  <a:srgbClr val="ffffff"/>
+                  <a:srgbClr val="FFFFFF"/>
                 </a:solidFill>
                 <a:latin typeface="CookieRunOTF Regular"/>
                 <a:ea typeface="CookieRunOTF Regular"/>
@@ -6806,7 +6849,7 @@
             <a:r>
               <a:rPr lang="en-US" sz="1100">
                 <a:solidFill>
-                  <a:srgbClr val="1a2b3c"/>
+                  <a:srgbClr val="1A2B3C"/>
                 </a:solidFill>
                 <a:latin typeface="CookieRunOTF Regular"/>
                 <a:ea typeface="CookieRunOTF Regular"/>
@@ -6814,14 +6857,6 @@
               </a:rPr>
               <a:t>화면 출력</a:t>
             </a:r>
-            <a:endParaRPr lang="en-US" sz="1100">
-              <a:solidFill>
-                <a:srgbClr val="1a2b3c"/>
-              </a:solidFill>
-              <a:latin typeface="CookieRunOTF Regular"/>
-              <a:ea typeface="CookieRunOTF Regular"/>
-              <a:cs typeface="Calibri"/>
-            </a:endParaRPr>
           </a:p>
           <a:p>
             <a:pPr marL="0" indent="0" algn="ctr">
@@ -6831,7 +6866,7 @@
             <a:r>
               <a:rPr lang="en-US" sz="1100">
                 <a:solidFill>
-                  <a:srgbClr val="1a2b3c"/>
+                  <a:srgbClr val="1A2B3C"/>
                 </a:solidFill>
                 <a:latin typeface="CookieRunOTF Regular"/>
                 <a:ea typeface="CookieRunOTF Regular"/>
@@ -6861,11 +6896,11 @@
             <a:avLst/>
           </a:prstGeom>
           <a:solidFill>
-            <a:srgbClr val="1a2b3c"/>
+            <a:srgbClr val="1A2B3C"/>
           </a:solidFill>
           <a:ln w="12700">
             <a:solidFill>
-              <a:srgbClr val="3fbfa6"/>
+              <a:srgbClr val="3FBFA6"/>
             </a:solidFill>
             <a:prstDash val="solid"/>
           </a:ln>
@@ -6879,6 +6914,7 @@
         </p:spPr>
         <p:txBody>
           <a:bodyPr anchor="ctr"/>
+          <a:lstStyle/>
           <a:p>
             <a:pPr algn="ctr">
               <a:defRPr/>
@@ -6915,7 +6951,7 @@
             <a:r>
               <a:rPr lang="en-US" sz="1600" b="1">
                 <a:solidFill>
-                  <a:srgbClr val="3fbfa6"/>
+                  <a:srgbClr val="3FBFA6"/>
                 </a:solidFill>
                 <a:latin typeface="여기어때 잘난체 고딕 TTF"/>
                 <a:ea typeface="여기어때 잘난체 고딕 TTF"/>
@@ -6926,7 +6962,7 @@
             <a:r>
               <a:rPr lang="en-US" altLang="ko-KR" sz="1600" b="1">
                 <a:solidFill>
-                  <a:srgbClr val="3fbfa6"/>
+                  <a:srgbClr val="3FBFA6"/>
                 </a:solidFill>
                 <a:latin typeface="여기어때 잘난체 고딕 TTF"/>
                 <a:ea typeface="여기어때 잘난체 고딕 TTF"/>
@@ -6937,7 +6973,7 @@
             <a:r>
               <a:rPr lang="en-US" sz="1600" b="1">
                 <a:solidFill>
-                  <a:srgbClr val="3fbfa6"/>
+                  <a:srgbClr val="3FBFA6"/>
                 </a:solidFill>
                 <a:latin typeface="여기어때 잘난체 고딕 TTF"/>
                 <a:ea typeface="여기어때 잘난체 고딕 TTF"/>
@@ -6945,14 +6981,6 @@
               </a:rPr>
               <a:t> 스트레스) )  ÷  4</a:t>
             </a:r>
-            <a:endParaRPr lang="en-US" sz="1600" b="1">
-              <a:solidFill>
-                <a:srgbClr val="3fbfa6"/>
-              </a:solidFill>
-              <a:latin typeface="여기어때 잘난체 고딕 TTF"/>
-              <a:ea typeface="여기어때 잘난체 고딕 TTF"/>
-              <a:cs typeface="Consolas"/>
-            </a:endParaRPr>
           </a:p>
         </p:txBody>
       </p:sp>
@@ -6984,7 +7012,7 @@
             <a:r>
               <a:rPr lang="en-US" sz="1200">
                 <a:solidFill>
-                  <a:srgbClr val="607d8b"/>
+                  <a:srgbClr val="607D8B"/>
                 </a:solidFill>
                 <a:latin typeface="여기어때 잘난체 고딕 TTF"/>
                 <a:ea typeface="여기어때 잘난체 고딕 TTF"/>
@@ -7015,7 +7043,7 @@
           </a:prstGeom>
           <a:ln>
             <a:solidFill>
-              <a:srgbClr val="3fbfa6"/>
+              <a:srgbClr val="3FBFA6"/>
             </a:solidFill>
           </a:ln>
         </p:spPr>
@@ -7035,6 +7063,7 @@
         </p:style>
         <p:txBody>
           <a:bodyPr wrap="square" anchor="ctr"/>
+          <a:lstStyle/>
           <a:p>
             <a:pPr algn="ctr">
               <a:defRPr/>
@@ -7058,7 +7087,7 @@
             <a:avLst/>
           </a:prstGeom>
           <a:solidFill>
-            <a:srgbClr val="3fbfa6"/>
+            <a:srgbClr val="3FBFA6"/>
           </a:solidFill>
           <a:ln>
             <a:noFill/>
@@ -7107,7 +7136,7 @@
           </a:prstGeom>
           <a:ln>
             <a:solidFill>
-              <a:srgbClr val="3fbfa6"/>
+              <a:srgbClr val="3FBFA6"/>
             </a:solidFill>
           </a:ln>
         </p:spPr>
@@ -7127,6 +7156,7 @@
         </p:style>
         <p:txBody>
           <a:bodyPr wrap="square" anchor="ctr"/>
+          <a:lstStyle/>
           <a:p>
             <a:pPr algn="ctr">
               <a:defRPr/>
@@ -7154,7 +7184,7 @@
           </a:prstGeom>
           <a:ln>
             <a:solidFill>
-              <a:srgbClr val="3fbfa6"/>
+              <a:srgbClr val="3FBFA6"/>
             </a:solidFill>
             <a:tailEnd type="triangle"/>
           </a:ln>
@@ -7193,7 +7223,7 @@
           </a:prstGeom>
           <a:ln>
             <a:solidFill>
-              <a:srgbClr val="3fbfa6"/>
+              <a:srgbClr val="3FBFA6"/>
             </a:solidFill>
             <a:prstDash val="sysDash"/>
             <a:tailEnd type="triangle"/>
@@ -7233,7 +7263,7 @@
           </a:prstGeom>
           <a:ln>
             <a:solidFill>
-              <a:srgbClr val="3fbfa6"/>
+              <a:srgbClr val="3FBFA6"/>
             </a:solidFill>
             <a:prstDash val="sysDash"/>
             <a:tailEnd type="triangle"/>
@@ -7269,7 +7299,7 @@
             <a:avLst/>
           </a:prstGeom>
           <a:solidFill>
-            <a:srgbClr val="3fbfa6">
+            <a:srgbClr val="3FBFA6">
               <a:alpha val="50000"/>
             </a:srgbClr>
           </a:solidFill>
@@ -7280,6 +7310,7 @@
         </p:spPr>
         <p:txBody>
           <a:bodyPr anchor="ctr"/>
+          <a:lstStyle/>
           <a:p>
             <a:pPr algn="ctr">
               <a:defRPr/>
@@ -7303,7 +7334,7 @@
             <a:avLst/>
           </a:prstGeom>
           <a:solidFill>
-            <a:srgbClr val="3fbfa6">
+            <a:srgbClr val="3FBFA6">
               <a:alpha val="50000"/>
             </a:srgbClr>
           </a:solidFill>
@@ -7314,6 +7345,7 @@
         </p:spPr>
         <p:txBody>
           <a:bodyPr anchor="ctr"/>
+          <a:lstStyle/>
           <a:p>
             <a:pPr algn="ctr">
               <a:defRPr/>
@@ -7327,11 +7359,11 @@
   <p:clrMapOvr>
     <a:masterClrMapping/>
   </p:clrMapOvr>
-  <mc:AlternateContent xmlns:mc="http://schemas.openxmlformats.org/markup-compatibility/2006">
-    <mc:Choice xmlns:p14="http://schemas.microsoft.com/office/powerpoint/2010/main" Requires="p14">
-      <p:transition xmlns:mc="http://schemas.openxmlformats.org/markup-compatibility/2006" xmlns:p14="http://schemas.microsoft.com/office/powerpoint/2010/main" mc:Ignorable="p14" p14:dur="500"/>
+  <mc:AlternateContent xmlns:mc="http://schemas.openxmlformats.org/markup-compatibility/2006" xmlns:p14="http://schemas.microsoft.com/office/powerpoint/2010/main">
+    <mc:Choice Requires="p14">
+      <p:transition/>
     </mc:Choice>
-    <mc:Fallback>
+    <mc:Fallback xmlns:dsp="http://schemas.microsoft.com/office/drawing/2008/diagram" xmlns:dgm="http://schemas.openxmlformats.org/drawingml/2006/diagram" xmlns:c="http://schemas.openxmlformats.org/drawingml/2006/chart" xmlns="">
       <p:transition/>
     </mc:Fallback>
   </mc:AlternateContent>
@@ -7339,13 +7371,14 @@
 </file>
 
 <file path=ppt/slides/slide5.xml><?xml version="1.0" encoding="utf-8"?>
-<p:sld xmlns:r="http://schemas.openxmlformats.org/officeDocument/2006/relationships" xmlns:c="http://schemas.openxmlformats.org/drawingml/2006/chart" xmlns:a="http://schemas.openxmlformats.org/drawingml/2006/main" xmlns:dgm="http://schemas.openxmlformats.org/drawingml/2006/diagram" xmlns:dsp="http://schemas.microsoft.com/office/drawing/2008/diagram" xmlns:p="http://schemas.openxmlformats.org/presentationml/2006/main">
+<p:sld xmlns:a="http://schemas.openxmlformats.org/drawingml/2006/main" xmlns:r="http://schemas.openxmlformats.org/officeDocument/2006/relationships" xmlns:p="http://schemas.openxmlformats.org/presentationml/2006/main">
   <p:cSld name="Slide 5">
     <p:bg>
-      <p:bgPr shadeToTitle="0">
+      <p:bgPr>
         <a:solidFill>
-          <a:srgbClr val="f4f7fa"/>
+          <a:srgbClr val="F4F7FA"/>
         </a:solidFill>
+        <a:effectLst/>
       </p:bgPr>
     </p:bg>
     <p:spTree>
@@ -7390,7 +7423,7 @@
             <a:r>
               <a:rPr lang="en-US" sz="3300">
                 <a:solidFill>
-                  <a:srgbClr val="1a2b3c"/>
+                  <a:srgbClr val="1A2B3C"/>
                 </a:solidFill>
                 <a:latin typeface="SB 어그로 Bold"/>
                 <a:ea typeface="SB 어그로 Bold"/>
@@ -7420,17 +7453,18 @@
             <a:avLst/>
           </a:prstGeom>
           <a:solidFill>
-            <a:srgbClr val="3fbfa6"/>
+            <a:srgbClr val="3FBFA6"/>
           </a:solidFill>
           <a:ln w="12700">
             <a:solidFill>
-              <a:srgbClr val="3fbfa6"/>
+              <a:srgbClr val="3FBFA6"/>
             </a:solidFill>
             <a:prstDash val="solid"/>
           </a:ln>
         </p:spPr>
         <p:txBody>
           <a:bodyPr anchor="ctr"/>
+          <a:lstStyle/>
           <a:p>
             <a:pPr algn="ctr">
               <a:defRPr/>
@@ -7454,17 +7488,18 @@
             <a:avLst/>
           </a:prstGeom>
           <a:solidFill>
-            <a:srgbClr val="3fbfa6"/>
+            <a:srgbClr val="3FBFA6"/>
           </a:solidFill>
           <a:ln w="12700">
             <a:solidFill>
-              <a:srgbClr val="3fbfa6"/>
+              <a:srgbClr val="3FBFA6"/>
             </a:solidFill>
             <a:prstDash val="solid"/>
           </a:ln>
         </p:spPr>
         <p:txBody>
           <a:bodyPr anchor="ctr"/>
+          <a:lstStyle/>
           <a:p>
             <a:pPr algn="ctr">
               <a:defRPr/>
@@ -7501,7 +7536,7 @@
             <a:r>
               <a:rPr lang="en-US" sz="1100" b="1">
                 <a:solidFill>
-                  <a:srgbClr val="ffffff"/>
+                  <a:srgbClr val="FFFFFF"/>
                 </a:solidFill>
                 <a:latin typeface="여기어때 잘난체 고딕 TTF"/>
                 <a:ea typeface="여기어때 잘난체 고딕 TTF"/>
@@ -7531,11 +7566,11 @@
             <a:avLst/>
           </a:prstGeom>
           <a:solidFill>
-            <a:srgbClr val="ffffff"/>
+            <a:srgbClr val="FFFFFF"/>
           </a:solidFill>
           <a:ln w="12700">
             <a:solidFill>
-              <a:srgbClr val="3fbfa6"/>
+              <a:srgbClr val="3FBFA6"/>
             </a:solidFill>
             <a:prstDash val="solid"/>
           </a:ln>
@@ -7549,6 +7584,7 @@
         </p:spPr>
         <p:txBody>
           <a:bodyPr anchor="ctr"/>
+          <a:lstStyle/>
           <a:p>
             <a:pPr algn="ctr">
               <a:defRPr/>
@@ -7585,7 +7621,7 @@
             <a:r>
               <a:rPr lang="en-US" sz="1300" b="1">
                 <a:solidFill>
-                  <a:srgbClr val="607d8b"/>
+                  <a:srgbClr val="607D8B"/>
                 </a:solidFill>
                 <a:latin typeface="여기어때 잘난체 고딕 TTF"/>
                 <a:ea typeface="여기어때 잘난체 고딕 TTF"/>
@@ -7629,7 +7665,7 @@
             <a:r>
               <a:rPr lang="en-US" sz="1150">
                 <a:solidFill>
-                  <a:srgbClr val="1a2b3c"/>
+                  <a:srgbClr val="1A2B3C"/>
                 </a:solidFill>
                 <a:latin typeface="여기어때 잘난체 고딕 TTF"/>
                 <a:ea typeface="여기어때 잘난체 고딕 TTF"/>
@@ -7637,14 +7673,6 @@
               </a:rPr>
               <a:t>품어주기</a:t>
             </a:r>
-            <a:endParaRPr lang="en-US" sz="1150">
-              <a:solidFill>
-                <a:srgbClr val="1a2b3c"/>
-              </a:solidFill>
-              <a:latin typeface="여기어때 잘난체 고딕 TTF"/>
-              <a:ea typeface="여기어때 잘난체 고딕 TTF"/>
-              <a:cs typeface="Calibri"/>
-            </a:endParaRPr>
           </a:p>
           <a:p>
             <a:pPr marL="171450" indent="-171450">
@@ -7655,7 +7683,7 @@
             <a:r>
               <a:rPr lang="en-US" sz="1150">
                 <a:solidFill>
-                  <a:srgbClr val="1a2b3c"/>
+                  <a:srgbClr val="1A2B3C"/>
                 </a:solidFill>
                 <a:latin typeface="여기어때 잘난체 고딕 TTF"/>
                 <a:ea typeface="여기어때 잘난체 고딕 TTF"/>
@@ -7663,14 +7691,6 @@
               </a:rPr>
               <a:t>쓰다듬기</a:t>
             </a:r>
-            <a:endParaRPr lang="en-US" sz="1150">
-              <a:solidFill>
-                <a:srgbClr val="1a2b3c"/>
-              </a:solidFill>
-              <a:latin typeface="여기어때 잘난체 고딕 TTF"/>
-              <a:ea typeface="여기어때 잘난체 고딕 TTF"/>
-              <a:cs typeface="Calibri"/>
-            </a:endParaRPr>
           </a:p>
           <a:p>
             <a:pPr marL="171450" indent="-171450">
@@ -7681,7 +7701,7 @@
             <a:r>
               <a:rPr lang="en-US" sz="1150">
                 <a:solidFill>
-                  <a:srgbClr val="1a2b3c"/>
+                  <a:srgbClr val="1A2B3C"/>
                 </a:solidFill>
                 <a:latin typeface="여기어때 잘난체 고딕 TTF"/>
                 <a:ea typeface="여기어때 잘난체 고딕 TTF"/>
@@ -7689,14 +7709,6 @@
               </a:rPr>
               <a:t>방치하기</a:t>
             </a:r>
-            <a:endParaRPr lang="en-US" sz="1150">
-              <a:solidFill>
-                <a:srgbClr val="1a2b3c"/>
-              </a:solidFill>
-              <a:latin typeface="여기어때 잘난체 고딕 TTF"/>
-              <a:ea typeface="여기어때 잘난체 고딕 TTF"/>
-              <a:cs typeface="Calibri"/>
-            </a:endParaRPr>
           </a:p>
           <a:p>
             <a:pPr marL="0" indent="0">
@@ -7706,7 +7718,7 @@
             <a:r>
               <a:rPr lang="en-US" sz="1150">
                 <a:solidFill>
-                  <a:srgbClr val="1a2b3c"/>
+                  <a:srgbClr val="1A2B3C"/>
                 </a:solidFill>
                 <a:latin typeface="여기어때 잘난체 고딕 TTF"/>
                 <a:ea typeface="여기어때 잘난체 고딕 TTF"/>
@@ -7747,6 +7759,7 @@
         </p:spPr>
         <p:txBody>
           <a:bodyPr anchor="ctr"/>
+          <a:lstStyle/>
           <a:p>
             <a:pPr algn="ctr">
               <a:defRPr/>
@@ -7783,7 +7796,7 @@
             <a:r>
               <a:rPr lang="en-US" sz="1100" b="1">
                 <a:solidFill>
-                  <a:srgbClr val="ffffff"/>
+                  <a:srgbClr val="FFFFFF"/>
                 </a:solidFill>
                 <a:latin typeface="여기어때 잘난체 고딕 TTF"/>
                 <a:ea typeface="여기어때 잘난체 고딕 TTF"/>
@@ -7813,7 +7826,7 @@
             <a:avLst/>
           </a:prstGeom>
           <a:solidFill>
-            <a:srgbClr val="ffffff"/>
+            <a:srgbClr val="FFFFFF"/>
           </a:solidFill>
           <a:ln w="12700">
             <a:solidFill>
@@ -7831,6 +7844,7 @@
         </p:spPr>
         <p:txBody>
           <a:bodyPr anchor="ctr"/>
+          <a:lstStyle/>
           <a:p>
             <a:pPr algn="ctr">
               <a:defRPr/>
@@ -7867,7 +7881,7 @@
             <a:r>
               <a:rPr lang="en-US" sz="1300" b="1">
                 <a:solidFill>
-                  <a:srgbClr val="2471a3"/>
+                  <a:srgbClr val="2471A3"/>
                 </a:solidFill>
                 <a:latin typeface="여기어때 잘난체 고딕 TTF"/>
                 <a:ea typeface="여기어때 잘난체 고딕 TTF"/>
@@ -7911,7 +7925,7 @@
             <a:r>
               <a:rPr lang="en-US" sz="1150">
                 <a:solidFill>
-                  <a:srgbClr val="1a2b3c"/>
+                  <a:srgbClr val="1A2B3C"/>
                 </a:solidFill>
                 <a:latin typeface="여기어때 잘난체 고딕 TTF"/>
                 <a:ea typeface="여기어때 잘난체 고딕 TTF"/>
@@ -7919,14 +7933,6 @@
               </a:rPr>
               <a:t>이유식 먹이기</a:t>
             </a:r>
-            <a:endParaRPr lang="en-US" sz="1150">
-              <a:solidFill>
-                <a:srgbClr val="1a2b3c"/>
-              </a:solidFill>
-              <a:latin typeface="여기어때 잘난체 고딕 TTF"/>
-              <a:ea typeface="여기어때 잘난체 고딕 TTF"/>
-              <a:cs typeface="Calibri"/>
-            </a:endParaRPr>
           </a:p>
           <a:p>
             <a:pPr marL="171450" indent="-171450">
@@ -7937,7 +7943,7 @@
             <a:r>
               <a:rPr lang="en-US" sz="1150">
                 <a:solidFill>
-                  <a:srgbClr val="1a2b3c"/>
+                  <a:srgbClr val="1A2B3C"/>
                 </a:solidFill>
                 <a:latin typeface="여기어때 잘난체 고딕 TTF"/>
                 <a:ea typeface="여기어때 잘난체 고딕 TTF"/>
@@ -7945,14 +7951,6 @@
               </a:rPr>
               <a:t>청소하기</a:t>
             </a:r>
-            <a:endParaRPr lang="en-US" sz="1150">
-              <a:solidFill>
-                <a:srgbClr val="1a2b3c"/>
-              </a:solidFill>
-              <a:latin typeface="여기어때 잘난체 고딕 TTF"/>
-              <a:ea typeface="여기어때 잘난체 고딕 TTF"/>
-              <a:cs typeface="Calibri"/>
-            </a:endParaRPr>
           </a:p>
           <a:p>
             <a:pPr marL="171450" indent="-171450">
@@ -7963,7 +7961,7 @@
             <a:r>
               <a:rPr lang="en-US" sz="1150">
                 <a:solidFill>
-                  <a:srgbClr val="1a2b3c"/>
+                  <a:srgbClr val="1A2B3C"/>
                 </a:solidFill>
                 <a:latin typeface="여기어때 잘난체 고딕 TTF"/>
                 <a:ea typeface="여기어때 잘난체 고딕 TTF"/>
@@ -7971,14 +7969,6 @@
               </a:rPr>
               <a:t>재우기</a:t>
             </a:r>
-            <a:endParaRPr lang="en-US" sz="1150">
-              <a:solidFill>
-                <a:srgbClr val="1a2b3c"/>
-              </a:solidFill>
-              <a:latin typeface="여기어때 잘난체 고딕 TTF"/>
-              <a:ea typeface="여기어때 잘난체 고딕 TTF"/>
-              <a:cs typeface="Calibri"/>
-            </a:endParaRPr>
           </a:p>
           <a:p>
             <a:pPr marL="171450" indent="-171450">
@@ -7989,7 +7979,7 @@
             <a:r>
               <a:rPr lang="en-US" sz="1150">
                 <a:solidFill>
-                  <a:srgbClr val="1a2b3c"/>
+                  <a:srgbClr val="1A2B3C"/>
                 </a:solidFill>
                 <a:latin typeface="여기어때 잘난체 고딕 TTF"/>
                 <a:ea typeface="여기어때 잘난체 고딕 TTF"/>
@@ -7997,14 +7987,6 @@
               </a:rPr>
               <a:t>놀아주기</a:t>
             </a:r>
-            <a:endParaRPr lang="en-US" sz="1150">
-              <a:solidFill>
-                <a:srgbClr val="1a2b3c"/>
-              </a:solidFill>
-              <a:latin typeface="여기어때 잘난체 고딕 TTF"/>
-              <a:ea typeface="여기어때 잘난체 고딕 TTF"/>
-              <a:cs typeface="Calibri"/>
-            </a:endParaRPr>
           </a:p>
           <a:p>
             <a:pPr lvl="0">
@@ -8013,7 +7995,7 @@
             <a:r>
               <a:rPr lang="en-US" sz="1150">
                 <a:solidFill>
-                  <a:srgbClr val="1a2b3c"/>
+                  <a:srgbClr val="1A2B3C"/>
                 </a:solidFill>
                 <a:latin typeface="여기어때 잘난체 고딕 TTF"/>
                 <a:ea typeface="여기어때 잘난체 고딕 TTF"/>
@@ -8043,17 +8025,18 @@
             <a:avLst/>
           </a:prstGeom>
           <a:solidFill>
-            <a:srgbClr val="287c6c"/>
+            <a:srgbClr val="287C6C"/>
           </a:solidFill>
           <a:ln w="12700">
             <a:solidFill>
-              <a:srgbClr val="287c6c"/>
+              <a:srgbClr val="287C6C"/>
             </a:solidFill>
             <a:prstDash val="solid"/>
           </a:ln>
         </p:spPr>
         <p:txBody>
           <a:bodyPr anchor="ctr"/>
+          <a:lstStyle/>
           <a:p>
             <a:pPr algn="ctr">
               <a:defRPr/>
@@ -8090,7 +8073,7 @@
             <a:r>
               <a:rPr lang="en-US" sz="1100" b="1">
                 <a:solidFill>
-                  <a:srgbClr val="ffffff"/>
+                  <a:srgbClr val="FFFFFF"/>
                 </a:solidFill>
                 <a:latin typeface="여기어때 잘난체 고딕 TTF"/>
                 <a:ea typeface="여기어때 잘난체 고딕 TTF"/>
@@ -8120,11 +8103,11 @@
             <a:avLst/>
           </a:prstGeom>
           <a:solidFill>
-            <a:srgbClr val="ffffff"/>
+            <a:srgbClr val="FFFFFF"/>
           </a:solidFill>
           <a:ln w="12700">
             <a:solidFill>
-              <a:srgbClr val="287c6c"/>
+              <a:srgbClr val="287C6C"/>
             </a:solidFill>
             <a:prstDash val="solid"/>
           </a:ln>
@@ -8138,6 +8121,7 @@
         </p:spPr>
         <p:txBody>
           <a:bodyPr anchor="ctr"/>
+          <a:lstStyle/>
           <a:p>
             <a:pPr algn="ctr">
               <a:defRPr/>
@@ -8174,7 +8158,7 @@
             <a:r>
               <a:rPr lang="en-US" sz="1300" b="1">
                 <a:solidFill>
-                  <a:srgbClr val="3fbfa6"/>
+                  <a:srgbClr val="3FBFA6"/>
                 </a:solidFill>
                 <a:latin typeface="여기어때 잘난체 고딕 TTF"/>
                 <a:ea typeface="여기어때 잘난체 고딕 TTF"/>
@@ -8218,7 +8202,7 @@
             <a:r>
               <a:rPr lang="en-US" sz="1150">
                 <a:solidFill>
-                  <a:srgbClr val="1a2b3c"/>
+                  <a:srgbClr val="1A2B3C"/>
                 </a:solidFill>
                 <a:latin typeface="여기어때 잘난체 고딕 TTF"/>
                 <a:ea typeface="여기어때 잘난체 고딕 TTF"/>
@@ -8226,14 +8210,6 @@
               </a:rPr>
               <a:t>먹이 주기</a:t>
             </a:r>
-            <a:endParaRPr lang="en-US" sz="1150">
-              <a:solidFill>
-                <a:srgbClr val="1a2b3c"/>
-              </a:solidFill>
-              <a:latin typeface="여기어때 잘난체 고딕 TTF"/>
-              <a:ea typeface="여기어때 잘난체 고딕 TTF"/>
-              <a:cs typeface="Calibri"/>
-            </a:endParaRPr>
           </a:p>
           <a:p>
             <a:pPr marL="171450" indent="-171450">
@@ -8244,7 +8220,7 @@
             <a:r>
               <a:rPr lang="en-US" sz="1150">
                 <a:solidFill>
-                  <a:srgbClr val="1a2b3c"/>
+                  <a:srgbClr val="1A2B3C"/>
                 </a:solidFill>
                 <a:latin typeface="여기어때 잘난체 고딕 TTF"/>
                 <a:ea typeface="여기어때 잘난체 고딕 TTF"/>
@@ -8252,14 +8228,6 @@
               </a:rPr>
               <a:t>청소하기</a:t>
             </a:r>
-            <a:endParaRPr lang="en-US" sz="1150">
-              <a:solidFill>
-                <a:srgbClr val="1a2b3c"/>
-              </a:solidFill>
-              <a:latin typeface="여기어때 잘난체 고딕 TTF"/>
-              <a:ea typeface="여기어때 잘난체 고딕 TTF"/>
-              <a:cs typeface="Calibri"/>
-            </a:endParaRPr>
           </a:p>
           <a:p>
             <a:pPr marL="171450" indent="-171450">
@@ -8270,7 +8238,7 @@
             <a:r>
               <a:rPr lang="en-US" sz="1150">
                 <a:solidFill>
-                  <a:srgbClr val="1a2b3c"/>
+                  <a:srgbClr val="1A2B3C"/>
                 </a:solidFill>
                 <a:latin typeface="여기어때 잘난체 고딕 TTF"/>
                 <a:ea typeface="여기어때 잘난체 고딕 TTF"/>
@@ -8278,14 +8246,6 @@
               </a:rPr>
               <a:t>훈련 시키기</a:t>
             </a:r>
-            <a:endParaRPr lang="en-US" sz="1150">
-              <a:solidFill>
-                <a:srgbClr val="1a2b3c"/>
-              </a:solidFill>
-              <a:latin typeface="여기어때 잘난체 고딕 TTF"/>
-              <a:ea typeface="여기어때 잘난체 고딕 TTF"/>
-              <a:cs typeface="Calibri"/>
-            </a:endParaRPr>
           </a:p>
           <a:p>
             <a:pPr marL="171450" indent="-171450">
@@ -8296,7 +8256,7 @@
             <a:r>
               <a:rPr lang="en-US" sz="1150">
                 <a:solidFill>
-                  <a:srgbClr val="1a2b3c"/>
+                  <a:srgbClr val="1A2B3C"/>
                 </a:solidFill>
                 <a:latin typeface="여기어때 잘난체 고딕 TTF"/>
                 <a:ea typeface="여기어때 잘난체 고딕 TTF"/>
@@ -8326,17 +8286,18 @@
             <a:avLst/>
           </a:prstGeom>
           <a:solidFill>
-            <a:srgbClr val="22685b"/>
+            <a:srgbClr val="22685B"/>
           </a:solidFill>
           <a:ln w="12700">
             <a:solidFill>
-              <a:srgbClr val="22685b"/>
+              <a:srgbClr val="22685B"/>
             </a:solidFill>
             <a:prstDash val="solid"/>
           </a:ln>
         </p:spPr>
         <p:txBody>
           <a:bodyPr anchor="ctr"/>
+          <a:lstStyle/>
           <a:p>
             <a:pPr algn="ctr">
               <a:defRPr/>
@@ -8373,7 +8334,7 @@
             <a:r>
               <a:rPr lang="en-US" sz="1100" b="1">
                 <a:solidFill>
-                  <a:srgbClr val="ffffff"/>
+                  <a:srgbClr val="FFFFFF"/>
                 </a:solidFill>
                 <a:latin typeface="여기어때 잘난체 고딕 TTF"/>
                 <a:ea typeface="여기어때 잘난체 고딕 TTF"/>
@@ -8403,11 +8364,11 @@
             <a:avLst/>
           </a:prstGeom>
           <a:solidFill>
-            <a:srgbClr val="ffffff"/>
+            <a:srgbClr val="FFFFFF"/>
           </a:solidFill>
           <a:ln w="12700">
             <a:solidFill>
-              <a:srgbClr val="22685b"/>
+              <a:srgbClr val="22685B"/>
             </a:solidFill>
             <a:prstDash val="solid"/>
           </a:ln>
@@ -8421,6 +8382,7 @@
         </p:spPr>
         <p:txBody>
           <a:bodyPr anchor="ctr"/>
+          <a:lstStyle/>
           <a:p>
             <a:pPr algn="ctr">
               <a:defRPr/>
@@ -8457,7 +8419,7 @@
             <a:r>
               <a:rPr lang="en-US" sz="1300" b="1">
                 <a:solidFill>
-                  <a:srgbClr val="f4a261"/>
+                  <a:srgbClr val="F4A261"/>
                 </a:solidFill>
                 <a:latin typeface="여기어때 잘난체 고딕 TTF"/>
                 <a:ea typeface="여기어때 잘난체 고딕 TTF"/>
@@ -8501,7 +8463,7 @@
             <a:r>
               <a:rPr lang="ko-KR" altLang="en-US" sz="1150">
                 <a:solidFill>
-                  <a:srgbClr val="1a2b3c"/>
+                  <a:srgbClr val="1A2B3C"/>
                 </a:solidFill>
                 <a:latin typeface="여기어때 잘난체 고딕 TTF"/>
                 <a:ea typeface="여기어때 잘난체 고딕 TTF"/>
@@ -8509,14 +8471,6 @@
               </a:rPr>
               <a:t>모든 행동 가능</a:t>
             </a:r>
-            <a:endParaRPr lang="ko-KR" altLang="en-US" sz="1150">
-              <a:solidFill>
-                <a:srgbClr val="1a2b3c"/>
-              </a:solidFill>
-              <a:latin typeface="여기어때 잘난체 고딕 TTF"/>
-              <a:ea typeface="여기어때 잘난체 고딕 TTF"/>
-              <a:cs typeface="Calibri"/>
-            </a:endParaRPr>
           </a:p>
           <a:p>
             <a:pPr marL="171450" indent="-171450">
@@ -8527,7 +8481,7 @@
             <a:r>
               <a:rPr lang="ko-KR" altLang="en-US" sz="1150">
                 <a:solidFill>
-                  <a:srgbClr val="1a2b3c"/>
+                  <a:srgbClr val="1A2B3C"/>
                 </a:solidFill>
                 <a:latin typeface="여기어때 잘난체 고딕 TTF"/>
                 <a:ea typeface="여기어때 잘난체 고딕 TTF"/>
@@ -8535,14 +8489,6 @@
               </a:rPr>
               <a:t>훈련 선택지 추가</a:t>
             </a:r>
-            <a:endParaRPr lang="ko-KR" altLang="en-US" sz="1150">
-              <a:solidFill>
-                <a:srgbClr val="1a2b3c"/>
-              </a:solidFill>
-              <a:latin typeface="여기어때 잘난체 고딕 TTF"/>
-              <a:ea typeface="여기어때 잘난체 고딕 TTF"/>
-              <a:cs typeface="Calibri"/>
-            </a:endParaRPr>
           </a:p>
           <a:p>
             <a:pPr marL="171450" indent="-171450">
@@ -8553,7 +8499,7 @@
             <a:r>
               <a:rPr lang="en-US" sz="1150">
                 <a:solidFill>
-                  <a:srgbClr val="1a2b3c"/>
+                  <a:srgbClr val="1A2B3C"/>
                 </a:solidFill>
                 <a:latin typeface="여기어때 잘난체 고딕 TTF"/>
                 <a:ea typeface="여기어때 잘난체 고딕 TTF"/>
@@ -8571,7 +8517,7 @@
             <a:r>
               <a:rPr lang="en-US" sz="1150">
                 <a:solidFill>
-                  <a:srgbClr val="1a2b3c"/>
+                  <a:srgbClr val="1A2B3C"/>
                 </a:solidFill>
                 <a:latin typeface="여기어때 잘난체 고딕 TTF"/>
                 <a:ea typeface="여기어때 잘난체 고딕 TTF"/>
@@ -8603,13 +8549,14 @@
           <a:noFill/>
           <a:ln w="12700">
             <a:solidFill>
-              <a:srgbClr val="c0392b"/>
+              <a:srgbClr val="C0392B"/>
             </a:solidFill>
             <a:prstDash val="solid"/>
           </a:ln>
         </p:spPr>
         <p:txBody>
           <a:bodyPr anchor="ctr"/>
+          <a:lstStyle/>
           <a:p>
             <a:pPr algn="ctr">
               <a:defRPr/>
@@ -8633,11 +8580,11 @@
             <a:avLst/>
           </a:prstGeom>
           <a:solidFill>
-            <a:srgbClr val="18483f"/>
+            <a:srgbClr val="18483F"/>
           </a:solidFill>
           <a:ln>
             <a:solidFill>
-              <a:srgbClr val="18483f"/>
+              <a:srgbClr val="18483F"/>
             </a:solidFill>
           </a:ln>
         </p:spPr>
@@ -8652,7 +8599,7 @@
             <a:r>
               <a:rPr lang="en-US" sz="1100" b="1">
                 <a:solidFill>
-                  <a:srgbClr val="ffffff"/>
+                  <a:srgbClr val="FFFFFF"/>
                 </a:solidFill>
                 <a:latin typeface="여기어때 잘난체 고딕 TTF"/>
                 <a:ea typeface="여기어때 잘난체 고딕 TTF"/>
@@ -8682,11 +8629,11 @@
             <a:avLst/>
           </a:prstGeom>
           <a:solidFill>
-            <a:srgbClr val="ffffff"/>
+            <a:srgbClr val="FFFFFF"/>
           </a:solidFill>
           <a:ln w="12700">
             <a:solidFill>
-              <a:srgbClr val="18483f"/>
+              <a:srgbClr val="18483F"/>
             </a:solidFill>
             <a:prstDash val="solid"/>
           </a:ln>
@@ -8700,6 +8647,7 @@
         </p:spPr>
         <p:txBody>
           <a:bodyPr anchor="ctr"/>
+          <a:lstStyle/>
           <a:p>
             <a:pPr algn="ctr">
               <a:defRPr/>
@@ -8736,7 +8684,7 @@
             <a:r>
               <a:rPr lang="en-US" sz="1300" b="1">
                 <a:solidFill>
-                  <a:srgbClr val="c0392b"/>
+                  <a:srgbClr val="C0392B"/>
                 </a:solidFill>
                 <a:latin typeface="여기어때 잘난체 고딕 TTF"/>
                 <a:ea typeface="여기어때 잘난체 고딕 TTF"/>
@@ -8780,7 +8728,7 @@
             <a:r>
               <a:rPr lang="en-US" sz="1150">
                 <a:solidFill>
-                  <a:srgbClr val="1a2b3c"/>
+                  <a:srgbClr val="1A2B3C"/>
                 </a:solidFill>
                 <a:latin typeface="여기어때 잘난체 고딕 TTF"/>
                 <a:ea typeface="여기어때 잘난체 고딕 TTF"/>
@@ -8791,7 +8739,7 @@
             <a:r>
               <a:rPr lang="ko-KR" altLang="en-US" sz="1150">
                 <a:solidFill>
-                  <a:srgbClr val="1a2b3c"/>
+                  <a:srgbClr val="1A2B3C"/>
                 </a:solidFill>
                 <a:latin typeface="여기어때 잘난체 고딕 TTF"/>
                 <a:ea typeface="여기어때 잘난체 고딕 TTF"/>
@@ -8799,14 +8747,6 @@
               </a:rPr>
               <a:t>가능</a:t>
             </a:r>
-            <a:endParaRPr lang="ko-KR" altLang="en-US" sz="1150">
-              <a:solidFill>
-                <a:srgbClr val="1a2b3c"/>
-              </a:solidFill>
-              <a:latin typeface="여기어때 잘난체 고딕 TTF"/>
-              <a:ea typeface="여기어때 잘난체 고딕 TTF"/>
-              <a:cs typeface="Calibri"/>
-            </a:endParaRPr>
           </a:p>
           <a:p>
             <a:pPr marL="171450" indent="-171450">
@@ -8843,11 +8783,11 @@
             <a:avLst/>
           </a:prstGeom>
           <a:solidFill>
-            <a:srgbClr val="ffffff"/>
+            <a:srgbClr val="FFFFFF"/>
           </a:solidFill>
           <a:ln w="12700">
             <a:solidFill>
-              <a:srgbClr val="607d8b"/>
+              <a:srgbClr val="607D8B"/>
             </a:solidFill>
             <a:prstDash val="solid"/>
           </a:ln>
@@ -8861,6 +8801,7 @@
         </p:spPr>
         <p:txBody>
           <a:bodyPr anchor="ctr"/>
+          <a:lstStyle/>
           <a:p>
             <a:pPr algn="ctr">
               <a:defRPr/>
@@ -8890,22 +8831,131 @@
           <a:bodyPr wrap="square" lIns="0" tIns="0" rIns="0" bIns="0" anchor="ctr"/>
           <a:lstStyle/>
           <a:p>
-            <a:pPr marL="0" indent="0">
-              <a:buNone/>
-              <a:defRPr/>
-            </a:pPr>
-            <a:r>
-              <a:rPr lang="en-US" sz="1200" b="1">
-                <a:solidFill>
-                  <a:srgbClr val="1a2b3c"/>
+            <a:pPr>
+              <a:defRPr/>
+            </a:pPr>
+            <a:r>
+              <a:rPr lang="en-US" sz="1200" b="1" dirty="0">
+                <a:solidFill>
+                  <a:srgbClr val="1A2B3C"/>
                 </a:solidFill>
                 <a:latin typeface="여기어때 잘난체 고딕 TTF"/>
                 <a:ea typeface="여기어때 잘난체 고딕 TTF"/>
                 <a:cs typeface="Calibri"/>
               </a:rPr>
-              <a:t>⏱  주차별 패시브 ( 매주 자동 적용 )</a:t>
-            </a:r>
-            <a:endParaRPr lang="en-US" sz="1200">
+              <a:t>⏱️  </a:t>
+            </a:r>
+            <a:r>
+              <a:rPr lang="en-US" sz="1200" b="1" dirty="0" err="1">
+                <a:solidFill>
+                  <a:srgbClr val="1A2B3C"/>
+                </a:solidFill>
+                <a:latin typeface="여기어때 잘난체 고딕 TTF"/>
+                <a:ea typeface="여기어때 잘난체 고딕 TTF"/>
+                <a:cs typeface="Calibri"/>
+              </a:rPr>
+              <a:t>주차별</a:t>
+            </a:r>
+            <a:r>
+              <a:rPr lang="en-US" sz="1200" b="1" dirty="0">
+                <a:solidFill>
+                  <a:srgbClr val="1A2B3C"/>
+                </a:solidFill>
+                <a:latin typeface="여기어때 잘난체 고딕 TTF"/>
+                <a:ea typeface="여기어때 잘난체 고딕 TTF"/>
+                <a:cs typeface="Calibri"/>
+              </a:rPr>
+              <a:t> </a:t>
+            </a:r>
+            <a:r>
+              <a:rPr lang="en-US" sz="1200" b="1" dirty="0" err="1">
+                <a:solidFill>
+                  <a:srgbClr val="1A2B3C"/>
+                </a:solidFill>
+                <a:latin typeface="여기어때 잘난체 고딕 TTF"/>
+                <a:ea typeface="여기어때 잘난체 고딕 TTF"/>
+                <a:cs typeface="Calibri"/>
+              </a:rPr>
+              <a:t>패시브</a:t>
+            </a:r>
+            <a:r>
+              <a:rPr lang="en-US" sz="1200" b="1" dirty="0">
+                <a:solidFill>
+                  <a:srgbClr val="1A2B3C"/>
+                </a:solidFill>
+                <a:latin typeface="여기어때 잘난체 고딕 TTF"/>
+                <a:ea typeface="여기어때 잘난체 고딕 TTF"/>
+                <a:cs typeface="Calibri"/>
+              </a:rPr>
+              <a:t> ( </a:t>
+            </a:r>
+            <a:r>
+              <a:rPr lang="en-US" sz="1200" b="1" dirty="0" err="1">
+                <a:solidFill>
+                  <a:srgbClr val="1A2B3C"/>
+                </a:solidFill>
+                <a:latin typeface="여기어때 잘난체 고딕 TTF"/>
+                <a:ea typeface="여기어때 잘난체 고딕 TTF"/>
+                <a:cs typeface="Calibri"/>
+              </a:rPr>
+              <a:t>매주</a:t>
+            </a:r>
+            <a:r>
+              <a:rPr lang="en-US" sz="1200" b="1" dirty="0">
+                <a:solidFill>
+                  <a:srgbClr val="1A2B3C"/>
+                </a:solidFill>
+                <a:latin typeface="여기어때 잘난체 고딕 TTF"/>
+                <a:ea typeface="여기어때 잘난체 고딕 TTF"/>
+                <a:cs typeface="Calibri"/>
+              </a:rPr>
+              <a:t> </a:t>
+            </a:r>
+            <a:r>
+              <a:rPr lang="en-US" sz="1200" b="1" dirty="0" err="1">
+                <a:solidFill>
+                  <a:srgbClr val="1A2B3C"/>
+                </a:solidFill>
+                <a:latin typeface="여기어때 잘난체 고딕 TTF"/>
+                <a:ea typeface="여기어때 잘난체 고딕 TTF"/>
+                <a:cs typeface="Calibri"/>
+              </a:rPr>
+              <a:t>자동</a:t>
+            </a:r>
+            <a:r>
+              <a:rPr lang="en-US" sz="1200" b="1" dirty="0">
+                <a:solidFill>
+                  <a:srgbClr val="1A2B3C"/>
+                </a:solidFill>
+                <a:latin typeface="여기어때 잘난체 고딕 TTF"/>
+                <a:ea typeface="여기어때 잘난체 고딕 TTF"/>
+                <a:cs typeface="Calibri"/>
+              </a:rPr>
+              <a:t> </a:t>
+            </a:r>
+            <a:r>
+              <a:rPr lang="en-US" sz="1200" b="1" dirty="0" err="1">
+                <a:solidFill>
+                  <a:srgbClr val="1A2B3C"/>
+                </a:solidFill>
+                <a:latin typeface="여기어때 잘난체 고딕 TTF"/>
+                <a:ea typeface="여기어때 잘난체 고딕 TTF"/>
+                <a:cs typeface="Calibri"/>
+              </a:rPr>
+              <a:t>적용</a:t>
+            </a:r>
+            <a:r>
+              <a:rPr lang="en-US" sz="1200" b="1" dirty="0">
+                <a:solidFill>
+                  <a:srgbClr val="1A2B3C"/>
+                </a:solidFill>
+                <a:latin typeface="여기어때 잘난체 고딕 TTF"/>
+                <a:ea typeface="여기어때 잘난체 고딕 TTF"/>
+                <a:cs typeface="Calibri"/>
+              </a:rPr>
+              <a:t> )</a:t>
+            </a:r>
+            <a:endParaRPr lang="en-US" sz="1200" dirty="0">
               <a:latin typeface="여기어때 잘난체 고딕 TTF"/>
               <a:ea typeface="여기어때 잘난체 고딕 TTF"/>
             </a:endParaRPr>
@@ -8940,7 +8990,7 @@
             <a:r>
               <a:rPr lang="en-US" sz="1200">
                 <a:solidFill>
-                  <a:srgbClr val="607d8b"/>
+                  <a:srgbClr val="607D8B"/>
                 </a:solidFill>
                 <a:latin typeface="여기어때 잘난체 고딕 TTF"/>
                 <a:ea typeface="여기어때 잘난체 고딕 TTF"/>
@@ -8951,7 +9001,7 @@
             <a:r>
               <a:rPr lang="en-US" altLang="ko-KR" sz="1200">
                 <a:solidFill>
-                  <a:srgbClr val="607d8b"/>
+                  <a:srgbClr val="607D8B"/>
                 </a:solidFill>
                 <a:latin typeface="여기어때 잘난체 고딕 TTF"/>
                 <a:ea typeface="여기어때 잘난체 고딕 TTF"/>
@@ -8962,7 +9012,7 @@
             <a:r>
               <a:rPr lang="en-US" sz="1200">
                 <a:solidFill>
-                  <a:srgbClr val="607d8b"/>
+                  <a:srgbClr val="607D8B"/>
                 </a:solidFill>
                 <a:latin typeface="여기어때 잘난체 고딕 TTF"/>
                 <a:ea typeface="여기어때 잘난체 고딕 TTF"/>
@@ -8973,7 +9023,7 @@
             <a:r>
               <a:rPr lang="en-US" altLang="ko-KR" sz="1200">
                 <a:solidFill>
-                  <a:srgbClr val="607d8b"/>
+                  <a:srgbClr val="607D8B"/>
                 </a:solidFill>
                 <a:latin typeface="여기어때 잘난체 고딕 TTF"/>
                 <a:ea typeface="여기어때 잘난체 고딕 TTF"/>
@@ -8984,7 +9034,7 @@
             <a:r>
               <a:rPr lang="en-US" sz="1200">
                 <a:solidFill>
-                  <a:srgbClr val="607d8b"/>
+                  <a:srgbClr val="607D8B"/>
                 </a:solidFill>
                 <a:latin typeface="여기어때 잘난체 고딕 TTF"/>
                 <a:ea typeface="여기어때 잘난체 고딕 TTF"/>
@@ -8992,14 +9042,6 @@
               </a:rPr>
               <a:t>5  /  스트레스 +5</a:t>
             </a:r>
-            <a:endParaRPr lang="en-US" sz="1200">
-              <a:solidFill>
-                <a:srgbClr val="607d8b"/>
-              </a:solidFill>
-              <a:latin typeface="여기어때 잘난체 고딕 TTF"/>
-              <a:ea typeface="여기어때 잘난체 고딕 TTF"/>
-              <a:cs typeface="Calibri"/>
-            </a:endParaRPr>
           </a:p>
         </p:txBody>
       </p:sp>
@@ -9018,11 +9060,11 @@
             <a:avLst/>
           </a:prstGeom>
           <a:solidFill>
-            <a:srgbClr val="ffffff"/>
+            <a:srgbClr val="FFFFFF"/>
           </a:solidFill>
           <a:ln w="12700">
             <a:solidFill>
-              <a:srgbClr val="3fbfa6"/>
+              <a:srgbClr val="3FBFA6"/>
             </a:solidFill>
             <a:prstDash val="solid"/>
           </a:ln>
@@ -9036,6 +9078,7 @@
         </p:spPr>
         <p:txBody>
           <a:bodyPr anchor="ctr"/>
+          <a:lstStyle/>
           <a:p>
             <a:pPr algn="ctr">
               <a:defRPr/>
@@ -9072,7 +9115,7 @@
             <a:r>
               <a:rPr lang="en-US" sz="1200" b="1">
                 <a:solidFill>
-                  <a:srgbClr val="1a2b3c"/>
+                  <a:srgbClr val="1A2B3C"/>
                 </a:solidFill>
                 <a:latin typeface="여기어때 잘난체 고딕 TTF"/>
                 <a:ea typeface="여기어때 잘난체 고딕 TTF"/>
@@ -9115,7 +9158,7 @@
             <a:r>
               <a:rPr lang="en-US" sz="1200">
                 <a:solidFill>
-                  <a:srgbClr val="607d8b"/>
+                  <a:srgbClr val="607D8B"/>
                 </a:solidFill>
                 <a:latin typeface="여기어때 잘난체 고딕 TTF"/>
                 <a:ea typeface="여기어때 잘난체 고딕 TTF"/>
@@ -9145,7 +9188,7 @@
             <a:avLst/>
           </a:prstGeom>
           <a:solidFill>
-            <a:srgbClr val="3fbfa6">
+            <a:srgbClr val="3FBFA6">
               <a:alpha val="50000"/>
             </a:srgbClr>
           </a:solidFill>
@@ -9156,6 +9199,7 @@
         </p:spPr>
         <p:txBody>
           <a:bodyPr anchor="ctr"/>
+          <a:lstStyle/>
           <a:p>
             <a:pPr algn="ctr">
               <a:defRPr/>
@@ -9179,7 +9223,7 @@
             <a:avLst/>
           </a:prstGeom>
           <a:solidFill>
-            <a:srgbClr val="3fbfa6">
+            <a:srgbClr val="3FBFA6">
               <a:alpha val="50000"/>
             </a:srgbClr>
           </a:solidFill>
@@ -9190,6 +9234,7 @@
         </p:spPr>
         <p:txBody>
           <a:bodyPr anchor="ctr"/>
+          <a:lstStyle/>
           <a:p>
             <a:pPr algn="ctr">
               <a:defRPr/>
@@ -9203,11 +9248,11 @@
   <p:clrMapOvr>
     <a:masterClrMapping/>
   </p:clrMapOvr>
-  <mc:AlternateContent xmlns:mc="http://schemas.openxmlformats.org/markup-compatibility/2006">
-    <mc:Choice xmlns:p14="http://schemas.microsoft.com/office/powerpoint/2010/main" Requires="p14">
-      <p:transition xmlns:mc="http://schemas.openxmlformats.org/markup-compatibility/2006" xmlns:p14="http://schemas.microsoft.com/office/powerpoint/2010/main" mc:Ignorable="p14" p14:dur="500"/>
+  <mc:AlternateContent xmlns:mc="http://schemas.openxmlformats.org/markup-compatibility/2006" xmlns:p14="http://schemas.microsoft.com/office/powerpoint/2010/main">
+    <mc:Choice Requires="p14">
+      <p:transition/>
     </mc:Choice>
-    <mc:Fallback>
+    <mc:Fallback xmlns:dsp="http://schemas.microsoft.com/office/drawing/2008/diagram" xmlns:dgm="http://schemas.openxmlformats.org/drawingml/2006/diagram" xmlns:c="http://schemas.openxmlformats.org/drawingml/2006/chart" xmlns="">
       <p:transition/>
     </mc:Fallback>
   </mc:AlternateContent>
@@ -9215,13 +9260,14 @@
 </file>
 
 <file path=ppt/slides/slide6.xml><?xml version="1.0" encoding="utf-8"?>
-<p:sld xmlns:r="http://schemas.openxmlformats.org/officeDocument/2006/relationships" xmlns:c="http://schemas.openxmlformats.org/drawingml/2006/chart" xmlns:a="http://schemas.openxmlformats.org/drawingml/2006/main" xmlns:dgm="http://schemas.openxmlformats.org/drawingml/2006/diagram" xmlns:dsp="http://schemas.microsoft.com/office/drawing/2008/diagram" xmlns:p="http://schemas.openxmlformats.org/presentationml/2006/main">
+<p:sld xmlns:a="http://schemas.openxmlformats.org/drawingml/2006/main" xmlns:r="http://schemas.openxmlformats.org/officeDocument/2006/relationships" xmlns:p="http://schemas.openxmlformats.org/presentationml/2006/main">
   <p:cSld name="Slide 6">
     <p:bg>
-      <p:bgPr shadeToTitle="0">
+      <p:bgPr>
         <a:solidFill>
-          <a:srgbClr val="f4f7fa"/>
+          <a:srgbClr val="F4F7FA"/>
         </a:solidFill>
+        <a:effectLst/>
       </p:bgPr>
     </p:bg>
     <p:spTree>
@@ -9266,7 +9312,7 @@
             <a:r>
               <a:rPr lang="en-US" sz="3300">
                 <a:solidFill>
-                  <a:srgbClr val="1a2b3c"/>
+                  <a:srgbClr val="1A2B3C"/>
                 </a:solidFill>
                 <a:latin typeface="SB 어그로 Bold"/>
                 <a:ea typeface="SB 어그로 Bold"/>
@@ -9296,17 +9342,18 @@
             <a:avLst/>
           </a:prstGeom>
           <a:solidFill>
-            <a:srgbClr val="3fbfa6"/>
+            <a:srgbClr val="3FBFA6"/>
           </a:solidFill>
           <a:ln w="12700">
             <a:solidFill>
-              <a:srgbClr val="3fbfa6"/>
+              <a:srgbClr val="3FBFA6"/>
             </a:solidFill>
             <a:prstDash val="solid"/>
           </a:ln>
         </p:spPr>
         <p:txBody>
           <a:bodyPr anchor="ctr"/>
+          <a:lstStyle/>
           <a:p>
             <a:pPr algn="ctr">
               <a:defRPr/>
@@ -9330,11 +9377,11 @@
             <a:avLst/>
           </a:prstGeom>
           <a:solidFill>
-            <a:srgbClr val="ffffff"/>
+            <a:srgbClr val="FFFFFF"/>
           </a:solidFill>
           <a:ln w="12700">
             <a:solidFill>
-              <a:srgbClr val="3fbfa6"/>
+              <a:srgbClr val="3FBFA6"/>
             </a:solidFill>
             <a:prstDash val="solid"/>
           </a:ln>
@@ -9348,6 +9395,7 @@
         </p:spPr>
         <p:txBody>
           <a:bodyPr anchor="ctr"/>
+          <a:lstStyle/>
           <a:p>
             <a:pPr algn="ctr">
               <a:defRPr/>
@@ -9371,17 +9419,18 @@
             <a:avLst/>
           </a:prstGeom>
           <a:solidFill>
-            <a:srgbClr val="3fbfa6"/>
+            <a:srgbClr val="3FBFA6"/>
           </a:solidFill>
           <a:ln w="12700">
             <a:solidFill>
-              <a:srgbClr val="3fbfa6"/>
+              <a:srgbClr val="3FBFA6"/>
             </a:solidFill>
             <a:prstDash val="solid"/>
           </a:ln>
         </p:spPr>
         <p:txBody>
           <a:bodyPr anchor="ctr"/>
+          <a:lstStyle/>
           <a:p>
             <a:pPr algn="ctr">
               <a:defRPr/>
@@ -9418,7 +9467,7 @@
             <a:r>
               <a:rPr lang="en-US" sz="1400" b="1">
                 <a:solidFill>
-                  <a:srgbClr val="ffffff"/>
+                  <a:srgbClr val="FFFFFF"/>
                 </a:solidFill>
                 <a:latin typeface="여기어때 잘난체 고딕 TTF"/>
                 <a:ea typeface="여기어때 잘난체 고딕 TTF"/>
@@ -9463,7 +9512,7 @@
             <a:r>
               <a:rPr lang="en-US" sz="1400">
                 <a:solidFill>
-                  <a:srgbClr val="1a2b3c"/>
+                  <a:srgbClr val="1A2B3C"/>
                 </a:solidFill>
                 <a:latin typeface="배달의민족 주아"/>
                 <a:ea typeface="배달의민족 주아"/>
@@ -9471,14 +9520,6 @@
               </a:rPr>
               <a:t>훈련 행동 시 40% 확률 아이템 획득</a:t>
             </a:r>
-            <a:endParaRPr lang="en-US" sz="1400">
-              <a:solidFill>
-                <a:srgbClr val="1a2b3c"/>
-              </a:solidFill>
-              <a:latin typeface="배달의민족 주아"/>
-              <a:ea typeface="배달의민족 주아"/>
-              <a:cs typeface="Calibri"/>
-            </a:endParaRPr>
           </a:p>
           <a:p>
             <a:pPr marL="285750" indent="-285750" algn="l">
@@ -9490,7 +9531,7 @@
             <a:r>
               <a:rPr lang="en-US" sz="1400">
                 <a:solidFill>
-                  <a:srgbClr val="1a2b3c"/>
+                  <a:srgbClr val="1A2B3C"/>
                 </a:solidFill>
                 <a:latin typeface="배달의민족 주아"/>
                 <a:ea typeface="배달의민족 주아"/>
@@ -9498,14 +9539,6 @@
               </a:rPr>
               <a:t>견과류 / 해바라기씨 / 고급 모이</a:t>
             </a:r>
-            <a:endParaRPr lang="en-US" sz="1400">
-              <a:solidFill>
-                <a:srgbClr val="1a2b3c"/>
-              </a:solidFill>
-              <a:latin typeface="배달의민족 주아"/>
-              <a:ea typeface="배달의민족 주아"/>
-              <a:cs typeface="Calibri"/>
-            </a:endParaRPr>
           </a:p>
           <a:p>
             <a:pPr marL="285750" indent="-285750" algn="l">
@@ -9517,7 +9550,7 @@
             <a:r>
               <a:rPr lang="en-US" sz="1400">
                 <a:solidFill>
-                  <a:srgbClr val="1a2b3c"/>
+                  <a:srgbClr val="1A2B3C"/>
                 </a:solidFill>
                 <a:latin typeface="배달의민족 주아"/>
                 <a:ea typeface="배달의민족 주아"/>
@@ -9547,11 +9580,11 @@
             <a:avLst/>
           </a:prstGeom>
           <a:solidFill>
-            <a:srgbClr val="ffffff"/>
+            <a:srgbClr val="FFFFFF"/>
           </a:solidFill>
           <a:ln w="12700">
             <a:solidFill>
-              <a:srgbClr val="f4a261"/>
+              <a:srgbClr val="F4A261"/>
             </a:solidFill>
             <a:prstDash val="solid"/>
           </a:ln>
@@ -9565,6 +9598,7 @@
         </p:spPr>
         <p:txBody>
           <a:bodyPr anchor="ctr"/>
+          <a:lstStyle/>
           <a:p>
             <a:pPr algn="ctr">
               <a:defRPr/>
@@ -9588,17 +9622,18 @@
             <a:avLst/>
           </a:prstGeom>
           <a:solidFill>
-            <a:srgbClr val="f4a261"/>
+            <a:srgbClr val="F4A261"/>
           </a:solidFill>
           <a:ln w="12700">
             <a:solidFill>
-              <a:srgbClr val="f4a261"/>
+              <a:srgbClr val="F4A261"/>
             </a:solidFill>
             <a:prstDash val="solid"/>
           </a:ln>
         </p:spPr>
         <p:txBody>
           <a:bodyPr anchor="ctr"/>
+          <a:lstStyle/>
           <a:p>
             <a:pPr algn="ctr">
               <a:defRPr/>
@@ -9635,7 +9670,7 @@
             <a:r>
               <a:rPr lang="en-US" sz="1400" b="1">
                 <a:solidFill>
-                  <a:srgbClr val="ffffff"/>
+                  <a:srgbClr val="FFFFFF"/>
                 </a:solidFill>
                 <a:latin typeface="여기어때 잘난체 고딕 TTF"/>
                 <a:ea typeface="여기어때 잘난체 고딕 TTF"/>
@@ -9680,7 +9715,7 @@
             <a:r>
               <a:rPr lang="en-US" sz="1400">
                 <a:solidFill>
-                  <a:srgbClr val="1a2b3c"/>
+                  <a:srgbClr val="1A2B3C"/>
                 </a:solidFill>
                 <a:latin typeface="배달의민족 주아"/>
                 <a:ea typeface="배달의민족 주아"/>
@@ -9688,14 +9723,6 @@
               </a:rPr>
               <a:t>스트레스 50 이상 시 20% 확률 발동</a:t>
             </a:r>
-            <a:endParaRPr lang="en-US" sz="1400">
-              <a:solidFill>
-                <a:srgbClr val="1a2b3c"/>
-              </a:solidFill>
-              <a:latin typeface="배달의민족 주아"/>
-              <a:ea typeface="배달의민족 주아"/>
-              <a:cs typeface="Calibri"/>
-            </a:endParaRPr>
           </a:p>
           <a:p>
             <a:pPr marL="285750" indent="-285750" algn="l">
@@ -9707,7 +9734,7 @@
             <a:r>
               <a:rPr lang="en-US" sz="1400">
                 <a:solidFill>
-                  <a:srgbClr val="1a2b3c"/>
+                  <a:srgbClr val="1A2B3C"/>
                 </a:solidFill>
                 <a:latin typeface="배달의민족 주아"/>
                 <a:ea typeface="배달의민족 주아"/>
@@ -9715,14 +9742,6 @@
               </a:rPr>
               <a:t>반항 시 스트레스 +10 페널티</a:t>
             </a:r>
-            <a:endParaRPr lang="en-US" sz="1400">
-              <a:solidFill>
-                <a:srgbClr val="1a2b3c"/>
-              </a:solidFill>
-              <a:latin typeface="배달의민족 주아"/>
-              <a:ea typeface="배달의민족 주아"/>
-              <a:cs typeface="Calibri"/>
-            </a:endParaRPr>
           </a:p>
           <a:p>
             <a:pPr marL="285750" indent="-285750" algn="l">
@@ -9734,7 +9753,7 @@
             <a:r>
               <a:rPr lang="en-US" sz="1400">
                 <a:solidFill>
-                  <a:srgbClr val="1a2b3c"/>
+                  <a:srgbClr val="1A2B3C"/>
                 </a:solidFill>
                 <a:latin typeface="배달의민족 주아"/>
                 <a:ea typeface="배달의민족 주아"/>
@@ -9764,11 +9783,11 @@
             <a:avLst/>
           </a:prstGeom>
           <a:solidFill>
-            <a:srgbClr val="ffffff"/>
+            <a:srgbClr val="FFFFFF"/>
           </a:solidFill>
           <a:ln w="12700">
             <a:solidFill>
-              <a:srgbClr val="2471a3"/>
+              <a:srgbClr val="2471A3"/>
             </a:solidFill>
             <a:prstDash val="solid"/>
           </a:ln>
@@ -9782,6 +9801,7 @@
         </p:spPr>
         <p:txBody>
           <a:bodyPr anchor="ctr"/>
+          <a:lstStyle/>
           <a:p>
             <a:pPr algn="ctr">
               <a:defRPr/>
@@ -9805,17 +9825,18 @@
             <a:avLst/>
           </a:prstGeom>
           <a:solidFill>
-            <a:srgbClr val="2471a3"/>
+            <a:srgbClr val="2471A3"/>
           </a:solidFill>
           <a:ln w="12700">
             <a:solidFill>
-              <a:srgbClr val="2471a3"/>
+              <a:srgbClr val="2471A3"/>
             </a:solidFill>
             <a:prstDash val="solid"/>
           </a:ln>
         </p:spPr>
         <p:txBody>
           <a:bodyPr anchor="ctr"/>
+          <a:lstStyle/>
           <a:p>
             <a:pPr algn="ctr">
               <a:defRPr/>
@@ -9852,7 +9873,7 @@
             <a:r>
               <a:rPr lang="en-US" sz="1400" b="1">
                 <a:solidFill>
-                  <a:srgbClr val="ffffff"/>
+                  <a:srgbClr val="FFFFFF"/>
                 </a:solidFill>
                 <a:latin typeface="여기어때 잘난체 고딕 TTF"/>
                 <a:ea typeface="여기어때 잘난체 고딕 TTF"/>
@@ -9897,7 +9918,7 @@
             <a:r>
               <a:rPr lang="en-US" sz="1400">
                 <a:solidFill>
-                  <a:srgbClr val="1a2b3c"/>
+                  <a:srgbClr val="1A2B3C"/>
                 </a:solidFill>
                 <a:latin typeface="배달의민족 주아"/>
                 <a:ea typeface="배달의민족 주아"/>
@@ -9905,14 +9926,6 @@
               </a:rPr>
               <a:t>포만감 0 → 아사 (즉시 사망)</a:t>
             </a:r>
-            <a:endParaRPr lang="en-US" sz="1400">
-              <a:solidFill>
-                <a:srgbClr val="1a2b3c"/>
-              </a:solidFill>
-              <a:latin typeface="배달의민족 주아"/>
-              <a:ea typeface="배달의민족 주아"/>
-              <a:cs typeface="Calibri"/>
-            </a:endParaRPr>
           </a:p>
           <a:p>
             <a:pPr marL="285750" indent="-285750" algn="l">
@@ -9924,7 +9937,7 @@
             <a:r>
               <a:rPr lang="en-US" sz="1400">
                 <a:solidFill>
-                  <a:srgbClr val="1a2b3c"/>
+                  <a:srgbClr val="1A2B3C"/>
                 </a:solidFill>
                 <a:latin typeface="배달의민족 주아"/>
                 <a:ea typeface="배달의민족 주아"/>
@@ -9932,14 +9945,6 @@
               </a:rPr>
               <a:t>청결도 0 → 병사 (즉시 사망)</a:t>
             </a:r>
-            <a:endParaRPr lang="en-US" sz="1400">
-              <a:solidFill>
-                <a:srgbClr val="1a2b3c"/>
-              </a:solidFill>
-              <a:latin typeface="배달의민족 주아"/>
-              <a:ea typeface="배달의민족 주아"/>
-              <a:cs typeface="Calibri"/>
-            </a:endParaRPr>
           </a:p>
           <a:p>
             <a:pPr marL="285750" indent="-285750" algn="l">
@@ -9951,7 +9956,7 @@
             <a:r>
               <a:rPr lang="en-US" sz="1400">
                 <a:solidFill>
-                  <a:srgbClr val="1a2b3c"/>
+                  <a:srgbClr val="1A2B3C"/>
                 </a:solidFill>
                 <a:latin typeface="배달의민족 주아"/>
                 <a:ea typeface="배달의민족 주아"/>
@@ -9981,11 +9986,11 @@
             <a:avLst/>
           </a:prstGeom>
           <a:solidFill>
-            <a:srgbClr val="ffffff"/>
+            <a:srgbClr val="FFFFFF"/>
           </a:solidFill>
           <a:ln w="12700">
             <a:solidFill>
-              <a:srgbClr val="7d3c98"/>
+              <a:srgbClr val="7D3C98"/>
             </a:solidFill>
             <a:prstDash val="solid"/>
           </a:ln>
@@ -9999,6 +10004,7 @@
         </p:spPr>
         <p:txBody>
           <a:bodyPr anchor="ctr"/>
+          <a:lstStyle/>
           <a:p>
             <a:pPr algn="ctr">
               <a:defRPr/>
@@ -10022,17 +10028,18 @@
             <a:avLst/>
           </a:prstGeom>
           <a:solidFill>
-            <a:srgbClr val="7d3c98"/>
+            <a:srgbClr val="7D3C98"/>
           </a:solidFill>
           <a:ln w="12700">
             <a:solidFill>
-              <a:srgbClr val="7d3c98"/>
+              <a:srgbClr val="7D3C98"/>
             </a:solidFill>
             <a:prstDash val="solid"/>
           </a:ln>
         </p:spPr>
         <p:txBody>
           <a:bodyPr anchor="ctr"/>
+          <a:lstStyle/>
           <a:p>
             <a:pPr algn="ctr">
               <a:defRPr/>
@@ -10069,7 +10076,7 @@
             <a:r>
               <a:rPr lang="en-US" sz="1400" b="1">
                 <a:solidFill>
-                  <a:srgbClr val="ffffff"/>
+                  <a:srgbClr val="FFFFFF"/>
                 </a:solidFill>
                 <a:latin typeface="여기어때 잘난체 고딕 TTF"/>
                 <a:ea typeface="여기어때 잘난체 고딕 TTF"/>
@@ -10114,7 +10121,7 @@
             <a:r>
               <a:rPr lang="en-US" sz="1400">
                 <a:solidFill>
-                  <a:srgbClr val="1a2b3c"/>
+                  <a:srgbClr val="1A2B3C"/>
                 </a:solidFill>
                 <a:latin typeface="배달의민족 주아"/>
                 <a:ea typeface="배달의민족 주아"/>
@@ -10122,14 +10129,6 @@
               </a:rPr>
               <a:t>성장 단계별 아트 자동 전환</a:t>
             </a:r>
-            <a:endParaRPr lang="en-US" sz="1400">
-              <a:solidFill>
-                <a:srgbClr val="1a2b3c"/>
-              </a:solidFill>
-              <a:latin typeface="배달의민족 주아"/>
-              <a:ea typeface="배달의민족 주아"/>
-              <a:cs typeface="Calibri"/>
-            </a:endParaRPr>
           </a:p>
           <a:p>
             <a:pPr marL="285750" indent="-285750" algn="l">
@@ -10141,7 +10140,7 @@
             <a:r>
               <a:rPr lang="en-US" sz="1400">
                 <a:solidFill>
-                  <a:srgbClr val="1a2b3c"/>
+                  <a:srgbClr val="1A2B3C"/>
                 </a:solidFill>
                 <a:latin typeface="배달의민족 주아"/>
                 <a:ea typeface="배달의민족 주아"/>
@@ -10149,14 +10148,6 @@
               </a:rPr>
               <a:t>행동별 전용 아트 출력</a:t>
             </a:r>
-            <a:endParaRPr lang="en-US" sz="1400">
-              <a:solidFill>
-                <a:srgbClr val="1a2b3c"/>
-              </a:solidFill>
-              <a:latin typeface="배달의민족 주아"/>
-              <a:ea typeface="배달의민족 주아"/>
-              <a:cs typeface="Calibri"/>
-            </a:endParaRPr>
           </a:p>
           <a:p>
             <a:pPr marL="285750" indent="-285750" algn="l">
@@ -10168,7 +10159,7 @@
             <a:r>
               <a:rPr lang="en-US" sz="1400">
                 <a:solidFill>
-                  <a:srgbClr val="1a2b3c"/>
+                  <a:srgbClr val="1A2B3C"/>
                 </a:solidFill>
                 <a:latin typeface="배달의민족 주아"/>
                 <a:ea typeface="배달의민족 주아"/>
@@ -10198,7 +10189,7 @@
             <a:avLst/>
           </a:prstGeom>
           <a:solidFill>
-            <a:srgbClr val="3fbfa6">
+            <a:srgbClr val="3FBFA6">
               <a:alpha val="50000"/>
             </a:srgbClr>
           </a:solidFill>
@@ -10209,6 +10200,7 @@
         </p:spPr>
         <p:txBody>
           <a:bodyPr anchor="ctr"/>
+          <a:lstStyle/>
           <a:p>
             <a:pPr algn="ctr">
               <a:defRPr/>
@@ -10232,7 +10224,7 @@
             <a:avLst/>
           </a:prstGeom>
           <a:solidFill>
-            <a:srgbClr val="3fbfa6">
+            <a:srgbClr val="3FBFA6">
               <a:alpha val="50000"/>
             </a:srgbClr>
           </a:solidFill>
@@ -10243,6 +10235,7 @@
         </p:spPr>
         <p:txBody>
           <a:bodyPr anchor="ctr"/>
+          <a:lstStyle/>
           <a:p>
             <a:pPr algn="ctr">
               <a:defRPr/>
@@ -10256,11 +10249,11 @@
   <p:clrMapOvr>
     <a:masterClrMapping/>
   </p:clrMapOvr>
-  <mc:AlternateContent xmlns:mc="http://schemas.openxmlformats.org/markup-compatibility/2006">
-    <mc:Choice xmlns:p14="http://schemas.microsoft.com/office/powerpoint/2010/main" Requires="p14">
-      <p:transition xmlns:mc="http://schemas.openxmlformats.org/markup-compatibility/2006" xmlns:p14="http://schemas.microsoft.com/office/powerpoint/2010/main" mc:Ignorable="p14" p14:dur="500"/>
+  <mc:AlternateContent xmlns:mc="http://schemas.openxmlformats.org/markup-compatibility/2006" xmlns:p14="http://schemas.microsoft.com/office/powerpoint/2010/main">
+    <mc:Choice Requires="p14">
+      <p:transition/>
     </mc:Choice>
-    <mc:Fallback>
+    <mc:Fallback xmlns:dsp="http://schemas.microsoft.com/office/drawing/2008/diagram" xmlns:dgm="http://schemas.openxmlformats.org/drawingml/2006/diagram" xmlns:c="http://schemas.openxmlformats.org/drawingml/2006/chart" xmlns="">
       <p:transition/>
     </mc:Fallback>
   </mc:AlternateContent>
@@ -10268,13 +10261,14 @@
 </file>
 
 <file path=ppt/slides/slide7.xml><?xml version="1.0" encoding="utf-8"?>
-<p:sld xmlns:r="http://schemas.openxmlformats.org/officeDocument/2006/relationships" xmlns:c="http://schemas.openxmlformats.org/drawingml/2006/chart" xmlns:a="http://schemas.openxmlformats.org/drawingml/2006/main" xmlns:dgm="http://schemas.openxmlformats.org/drawingml/2006/diagram" xmlns:dsp="http://schemas.microsoft.com/office/drawing/2008/diagram" xmlns:p="http://schemas.openxmlformats.org/presentationml/2006/main">
+<p:sld xmlns:a="http://schemas.openxmlformats.org/drawingml/2006/main" xmlns:r="http://schemas.openxmlformats.org/officeDocument/2006/relationships" xmlns:p="http://schemas.openxmlformats.org/presentationml/2006/main">
   <p:cSld name="Slide 7">
     <p:bg>
-      <p:bgPr shadeToTitle="0">
+      <p:bgPr>
         <a:solidFill>
-          <a:srgbClr val="f4f7fa"/>
+          <a:srgbClr val="F4F7FA"/>
         </a:solidFill>
+        <a:effectLst/>
       </p:bgPr>
     </p:bg>
     <p:spTree>
@@ -10319,7 +10313,7 @@
             <a:r>
               <a:rPr lang="en-US" sz="3300">
                 <a:solidFill>
-                  <a:srgbClr val="1a2b3c"/>
+                  <a:srgbClr val="1A2B3C"/>
                 </a:solidFill>
                 <a:latin typeface="SB 어그로 Bold"/>
                 <a:ea typeface="SB 어그로 Bold"/>
@@ -10349,17 +10343,18 @@
             <a:avLst/>
           </a:prstGeom>
           <a:solidFill>
-            <a:srgbClr val="3fbfa6"/>
+            <a:srgbClr val="3FBFA6"/>
           </a:solidFill>
           <a:ln w="12700">
             <a:solidFill>
-              <a:srgbClr val="3fbfa6"/>
+              <a:srgbClr val="3FBFA6"/>
             </a:solidFill>
             <a:prstDash val="solid"/>
           </a:ln>
         </p:spPr>
         <p:txBody>
           <a:bodyPr anchor="ctr"/>
+          <a:lstStyle/>
           <a:p>
             <a:pPr algn="ctr">
               <a:defRPr/>
@@ -10383,15 +10378,35 @@
         <a:graphic>
           <a:graphicData uri="http://schemas.openxmlformats.org/drawingml/2006/table">
             <a:tbl>
+              <a:tblPr/>
               <a:tblGrid>
-                <a:gridCol w="914400"/>
-                <a:gridCol w="3474720"/>
-                <a:gridCol w="4114800"/>
+                <a:gridCol w="914400">
+                  <a:extLst>
+                    <a:ext uri="{9D8B030D-6E8A-4147-A177-3AD203B41FA5}">
+                      <a16:colId xmlns:a16="http://schemas.microsoft.com/office/drawing/2014/main" val="20000"/>
+                    </a:ext>
+                  </a:extLst>
+                </a:gridCol>
+                <a:gridCol w="3474720">
+                  <a:extLst>
+                    <a:ext uri="{9D8B030D-6E8A-4147-A177-3AD203B41FA5}">
+                      <a16:colId xmlns:a16="http://schemas.microsoft.com/office/drawing/2014/main" val="20001"/>
+                    </a:ext>
+                  </a:extLst>
+                </a:gridCol>
+                <a:gridCol w="4114800">
+                  <a:extLst>
+                    <a:ext uri="{9D8B030D-6E8A-4147-A177-3AD203B41FA5}">
+                      <a16:colId xmlns:a16="http://schemas.microsoft.com/office/drawing/2014/main" val="20002"/>
+                    </a:ext>
+                  </a:extLst>
+                </a:gridCol>
               </a:tblGrid>
               <a:tr h="324612">
                 <a:tc>
                   <a:txBody>
-                    <a:bodyPr vert="horz" lIns="91440" tIns="45720" rIns="91440" bIns="45720" anchor="ctr" anchorCtr="0"/>
+                    <a:bodyPr/>
+                    <a:lstStyle/>
                     <a:p>
                       <a:pPr marL="0" indent="0" algn="ctr">
                         <a:buNone/>
@@ -10400,7 +10415,7 @@
                       <a:r>
                         <a:rPr lang="en-US" sz="1400" b="0">
                           <a:solidFill>
-                            <a:srgbClr val="ffffff"/>
+                            <a:srgbClr val="FFFFFF"/>
                           </a:solidFill>
                           <a:latin typeface="배달의민족 주아"/>
                           <a:ea typeface="배달의민족 주아"/>
@@ -10415,43 +10430,44 @@
                       </a:endParaRPr>
                     </a:p>
                   </a:txBody>
-                  <a:tcPr marL="91440" marR="91440" anchor="ctr">
+                  <a:tcPr anchor="ctr">
                     <a:lnL w="12700" cap="flat" cmpd="sng" algn="ctr">
                       <a:solidFill>
-                        <a:srgbClr val="d0d0d0"/>
+                        <a:srgbClr val="D0D0D0"/>
                       </a:solidFill>
                       <a:prstDash val="solid"/>
                       <a:round/>
                     </a:lnL>
                     <a:lnR w="12700" cap="flat" cmpd="sng" algn="ctr">
                       <a:solidFill>
-                        <a:srgbClr val="d0d0d0"/>
+                        <a:srgbClr val="D0D0D0"/>
                       </a:solidFill>
                       <a:prstDash val="solid"/>
                       <a:round/>
                     </a:lnR>
                     <a:lnT w="12700" cap="flat" cmpd="sng" algn="ctr">
                       <a:solidFill>
-                        <a:srgbClr val="d0d0d0"/>
+                        <a:srgbClr val="D0D0D0"/>
                       </a:solidFill>
                       <a:prstDash val="solid"/>
                       <a:round/>
                     </a:lnT>
                     <a:lnB w="12700" cap="flat" cmpd="sng" algn="ctr">
                       <a:solidFill>
-                        <a:srgbClr val="d0d0d0"/>
+                        <a:srgbClr val="D0D0D0"/>
                       </a:solidFill>
                       <a:prstDash val="solid"/>
                       <a:round/>
                     </a:lnB>
                     <a:solidFill>
-                      <a:srgbClr val="1a2b3c"/>
+                      <a:srgbClr val="1A2B3C"/>
                     </a:solidFill>
                   </a:tcPr>
                 </a:tc>
                 <a:tc>
                   <a:txBody>
-                    <a:bodyPr vert="horz" lIns="91440" tIns="45720" rIns="91440" bIns="45720" anchor="ctr" anchorCtr="0"/>
+                    <a:bodyPr/>
+                    <a:lstStyle/>
                     <a:p>
                       <a:pPr marL="0" indent="0" algn="l">
                         <a:buNone/>
@@ -10460,7 +10476,7 @@
                       <a:r>
                         <a:rPr lang="en-US" sz="1400" b="0">
                           <a:solidFill>
-                            <a:srgbClr val="ffffff"/>
+                            <a:srgbClr val="FFFFFF"/>
                           </a:solidFill>
                           <a:latin typeface="배달의민족 주아"/>
                           <a:ea typeface="배달의민족 주아"/>
@@ -10475,43 +10491,44 @@
                       </a:endParaRPr>
                     </a:p>
                   </a:txBody>
-                  <a:tcPr marL="91440" marR="91440" anchor="ctr">
+                  <a:tcPr anchor="ctr">
                     <a:lnL w="12700" cap="flat" cmpd="sng" algn="ctr">
                       <a:solidFill>
-                        <a:srgbClr val="d0d0d0"/>
+                        <a:srgbClr val="D0D0D0"/>
                       </a:solidFill>
                       <a:prstDash val="solid"/>
                       <a:round/>
                     </a:lnL>
                     <a:lnR w="12700" cap="flat" cmpd="sng" algn="ctr">
                       <a:solidFill>
-                        <a:srgbClr val="d0d0d0"/>
+                        <a:srgbClr val="D0D0D0"/>
                       </a:solidFill>
                       <a:prstDash val="solid"/>
                       <a:round/>
                     </a:lnR>
                     <a:lnT w="12700" cap="flat" cmpd="sng" algn="ctr">
                       <a:solidFill>
-                        <a:srgbClr val="d0d0d0"/>
+                        <a:srgbClr val="D0D0D0"/>
                       </a:solidFill>
                       <a:prstDash val="solid"/>
                       <a:round/>
                     </a:lnT>
                     <a:lnB w="12700" cap="flat" cmpd="sng" algn="ctr">
                       <a:solidFill>
-                        <a:srgbClr val="d0d0d0"/>
+                        <a:srgbClr val="D0D0D0"/>
                       </a:solidFill>
                       <a:prstDash val="solid"/>
                       <a:round/>
                     </a:lnB>
                     <a:solidFill>
-                      <a:srgbClr val="1a2b3c"/>
+                      <a:srgbClr val="1A2B3C"/>
                     </a:solidFill>
                   </a:tcPr>
                 </a:tc>
                 <a:tc>
                   <a:txBody>
-                    <a:bodyPr vert="horz" lIns="91440" tIns="45720" rIns="91440" bIns="45720" anchor="ctr" anchorCtr="0"/>
+                    <a:bodyPr/>
+                    <a:lstStyle/>
                     <a:p>
                       <a:pPr marL="0" indent="0" algn="l">
                         <a:buNone/>
@@ -10520,7 +10537,7 @@
                       <a:r>
                         <a:rPr lang="en-US" sz="1400" b="0">
                           <a:solidFill>
-                            <a:srgbClr val="ffffff"/>
+                            <a:srgbClr val="FFFFFF"/>
                           </a:solidFill>
                           <a:latin typeface="배달의민족 주아"/>
                           <a:ea typeface="배달의민족 주아"/>
@@ -10535,45 +10552,51 @@
                       </a:endParaRPr>
                     </a:p>
                   </a:txBody>
-                  <a:tcPr marL="91440" marR="91440" anchor="ctr">
+                  <a:tcPr anchor="ctr">
                     <a:lnL w="12700" cap="flat" cmpd="sng" algn="ctr">
                       <a:solidFill>
-                        <a:srgbClr val="d0d0d0"/>
+                        <a:srgbClr val="D0D0D0"/>
                       </a:solidFill>
                       <a:prstDash val="solid"/>
                       <a:round/>
                     </a:lnL>
                     <a:lnR w="12700" cap="flat" cmpd="sng" algn="ctr">
                       <a:solidFill>
-                        <a:srgbClr val="d0d0d0"/>
+                        <a:srgbClr val="D0D0D0"/>
                       </a:solidFill>
                       <a:prstDash val="solid"/>
                       <a:round/>
                     </a:lnR>
                     <a:lnT w="12700" cap="flat" cmpd="sng" algn="ctr">
                       <a:solidFill>
-                        <a:srgbClr val="d0d0d0"/>
+                        <a:srgbClr val="D0D0D0"/>
                       </a:solidFill>
                       <a:prstDash val="solid"/>
                       <a:round/>
                     </a:lnT>
                     <a:lnB w="12700" cap="flat" cmpd="sng" algn="ctr">
                       <a:solidFill>
-                        <a:srgbClr val="d0d0d0"/>
+                        <a:srgbClr val="D0D0D0"/>
                       </a:solidFill>
                       <a:prstDash val="solid"/>
                       <a:round/>
                     </a:lnB>
                     <a:solidFill>
-                      <a:srgbClr val="1a2b3c"/>
+                      <a:srgbClr val="1A2B3C"/>
                     </a:solidFill>
                   </a:tcPr>
                 </a:tc>
+                <a:extLst>
+                  <a:ext uri="{0D108BD9-81ED-4DB2-BD59-A6C34878D82A}">
+                    <a16:rowId xmlns:a16="http://schemas.microsoft.com/office/drawing/2014/main" val="10000"/>
+                  </a:ext>
+                </a:extLst>
               </a:tr>
               <a:tr h="324612">
                 <a:tc rowSpan="4">
                   <a:txBody>
-                    <a:bodyPr vert="horz" lIns="91440" tIns="45720" rIns="91440" bIns="45720" anchor="ctr" anchorCtr="0"/>
+                    <a:bodyPr/>
+                    <a:lstStyle/>
                     <a:p>
                       <a:pPr marL="0" indent="0" algn="ctr">
                         <a:buNone/>
@@ -10582,7 +10605,7 @@
                       <a:r>
                         <a:rPr lang="en-US" sz="1400" b="0">
                           <a:solidFill>
-                            <a:srgbClr val="c0392b"/>
+                            <a:srgbClr val="C0392B"/>
                           </a:solidFill>
                           <a:latin typeface="배달의민족 주아"/>
                           <a:ea typeface="배달의민족 주아"/>
@@ -10590,41 +10613,33 @@
                         </a:rPr>
                         <a:t>배드</a:t>
                       </a:r>
-                      <a:endParaRPr lang="en-US" sz="1400" b="0">
-                        <a:solidFill>
-                          <a:srgbClr val="c0392b"/>
-                        </a:solidFill>
-                        <a:latin typeface="배달의민족 주아"/>
-                        <a:ea typeface="배달의민족 주아"/>
-                        <a:cs typeface="Calibri"/>
-                      </a:endParaRPr>
                     </a:p>
                   </a:txBody>
-                  <a:tcPr marL="91440" marR="91440" anchor="ctr">
+                  <a:tcPr anchor="ctr">
                     <a:lnL w="12700" cap="flat" cmpd="sng" algn="ctr">
                       <a:solidFill>
-                        <a:srgbClr val="d0d0d0"/>
+                        <a:srgbClr val="D0D0D0"/>
                       </a:solidFill>
                       <a:prstDash val="solid"/>
                       <a:round/>
                     </a:lnL>
                     <a:lnR w="12700" cap="flat" cmpd="sng" algn="ctr">
                       <a:solidFill>
-                        <a:srgbClr val="d0d0d0"/>
+                        <a:srgbClr val="D0D0D0"/>
                       </a:solidFill>
                       <a:prstDash val="solid"/>
                       <a:round/>
                     </a:lnR>
                     <a:lnT w="12700" cap="flat" cmpd="sng" algn="ctr">
                       <a:solidFill>
-                        <a:srgbClr val="d0d0d0"/>
+                        <a:srgbClr val="D0D0D0"/>
                       </a:solidFill>
                       <a:prstDash val="solid"/>
                       <a:round/>
                     </a:lnT>
                     <a:lnB w="12700" cap="flat" cmpd="sng" algn="ctr">
                       <a:solidFill>
-                        <a:srgbClr val="d0d0d0"/>
+                        <a:srgbClr val="D0D0D0"/>
                       </a:solidFill>
                       <a:prstDash val="solid"/>
                       <a:round/>
@@ -10633,7 +10648,8 @@
                 </a:tc>
                 <a:tc>
                   <a:txBody>
-                    <a:bodyPr vert="horz" lIns="91440" tIns="45720" rIns="91440" bIns="45720" anchor="ctr" anchorCtr="0"/>
+                    <a:bodyPr/>
+                    <a:lstStyle/>
                     <a:p>
                       <a:pPr marL="0" indent="0" algn="l">
                         <a:buNone/>
@@ -10642,7 +10658,7 @@
                       <a:r>
                         <a:rPr lang="en-US" sz="1400" b="0">
                           <a:solidFill>
-                            <a:srgbClr val="1a2b3c"/>
+                            <a:srgbClr val="1A2B3C"/>
                           </a:solidFill>
                           <a:latin typeface="배달의민족 주아"/>
                           <a:ea typeface="배달의민족 주아"/>
@@ -10657,31 +10673,31 @@
                       </a:endParaRPr>
                     </a:p>
                   </a:txBody>
-                  <a:tcPr marL="91440" marR="91440" anchor="ctr">
+                  <a:tcPr anchor="ctr">
                     <a:lnL w="12700" cap="flat" cmpd="sng" algn="ctr">
                       <a:solidFill>
-                        <a:srgbClr val="d0d0d0"/>
+                        <a:srgbClr val="D0D0D0"/>
                       </a:solidFill>
                       <a:prstDash val="solid"/>
                       <a:round/>
                     </a:lnL>
                     <a:lnR w="12700" cap="flat" cmpd="sng" algn="ctr">
                       <a:solidFill>
-                        <a:srgbClr val="d0d0d0"/>
+                        <a:srgbClr val="D0D0D0"/>
                       </a:solidFill>
                       <a:prstDash val="solid"/>
                       <a:round/>
                     </a:lnR>
                     <a:lnT w="12700" cap="flat" cmpd="sng" algn="ctr">
                       <a:solidFill>
-                        <a:srgbClr val="d0d0d0"/>
+                        <a:srgbClr val="D0D0D0"/>
                       </a:solidFill>
                       <a:prstDash val="solid"/>
                       <a:round/>
                     </a:lnT>
                     <a:lnB w="12700" cap="flat" cmpd="sng" algn="ctr">
                       <a:solidFill>
-                        <a:srgbClr val="d0d0d0"/>
+                        <a:srgbClr val="D0D0D0"/>
                       </a:solidFill>
                       <a:prstDash val="solid"/>
                       <a:round/>
@@ -10690,7 +10706,8 @@
                 </a:tc>
                 <a:tc>
                   <a:txBody>
-                    <a:bodyPr vert="horz" lIns="91440" tIns="45720" rIns="91440" bIns="45720" anchor="ctr" anchorCtr="0"/>
+                    <a:bodyPr/>
+                    <a:lstStyle/>
                     <a:p>
                       <a:pPr marL="0" indent="0" algn="l">
                         <a:buNone/>
@@ -10699,7 +10716,7 @@
                       <a:r>
                         <a:rPr lang="en-US" sz="1400" b="0">
                           <a:solidFill>
-                            <a:srgbClr val="1a2b3c"/>
+                            <a:srgbClr val="1A2B3C"/>
                           </a:solidFill>
                           <a:latin typeface="배달의민족 주아"/>
                           <a:ea typeface="배달의민족 주아"/>
@@ -10710,7 +10727,7 @@
                       <a:r>
                         <a:rPr lang="en-US" altLang="ko-KR" sz="1400" b="0">
                           <a:solidFill>
-                            <a:srgbClr val="1a2b3c"/>
+                            <a:srgbClr val="1A2B3C"/>
                           </a:solidFill>
                           <a:latin typeface="배달의민족 주아"/>
                           <a:ea typeface="배달의민족 주아"/>
@@ -10721,7 +10738,7 @@
                       <a:r>
                         <a:rPr lang="ko-KR" altLang="en-US" sz="1400" b="0">
                           <a:solidFill>
-                            <a:srgbClr val="1a2b3c"/>
+                            <a:srgbClr val="1A2B3C"/>
                           </a:solidFill>
                           <a:latin typeface="배달의민족 주아"/>
                           <a:ea typeface="배달의민족 주아"/>
@@ -10732,7 +10749,7 @@
                       <a:r>
                         <a:rPr lang="en-US" sz="1400" b="0">
                           <a:solidFill>
-                            <a:srgbClr val="1a2b3c"/>
+                            <a:srgbClr val="1A2B3C"/>
                           </a:solidFill>
                           <a:latin typeface="배달의민족 주아"/>
                           <a:ea typeface="배달의민족 주아"/>
@@ -10740,52 +10757,50 @@
                         </a:rPr>
                         <a:t>0</a:t>
                       </a:r>
-                      <a:endParaRPr lang="en-US" sz="1400" b="0">
-                        <a:solidFill>
-                          <a:srgbClr val="1a2b3c"/>
-                        </a:solidFill>
-                        <a:latin typeface="배달의민족 주아"/>
-                        <a:ea typeface="배달의민족 주아"/>
-                        <a:cs typeface="Calibri"/>
-                      </a:endParaRPr>
                     </a:p>
                   </a:txBody>
-                  <a:tcPr marL="91440" marR="91440" anchor="ctr">
+                  <a:tcPr anchor="ctr">
                     <a:lnL w="12700" cap="flat" cmpd="sng" algn="ctr">
                       <a:solidFill>
-                        <a:srgbClr val="d0d0d0"/>
+                        <a:srgbClr val="D0D0D0"/>
                       </a:solidFill>
                       <a:prstDash val="solid"/>
                       <a:round/>
                     </a:lnL>
                     <a:lnR w="12700" cap="flat" cmpd="sng" algn="ctr">
                       <a:solidFill>
-                        <a:srgbClr val="d0d0d0"/>
+                        <a:srgbClr val="D0D0D0"/>
                       </a:solidFill>
                       <a:prstDash val="solid"/>
                       <a:round/>
                     </a:lnR>
                     <a:lnT w="12700" cap="flat" cmpd="sng" algn="ctr">
                       <a:solidFill>
-                        <a:srgbClr val="d0d0d0"/>
+                        <a:srgbClr val="D0D0D0"/>
                       </a:solidFill>
                       <a:prstDash val="solid"/>
                       <a:round/>
                     </a:lnT>
                     <a:lnB w="12700" cap="flat" cmpd="sng" algn="ctr">
                       <a:solidFill>
-                        <a:srgbClr val="d0d0d0"/>
+                        <a:srgbClr val="D0D0D0"/>
                       </a:solidFill>
                       <a:prstDash val="solid"/>
                       <a:round/>
                     </a:lnB>
                   </a:tcPr>
                 </a:tc>
+                <a:extLst>
+                  <a:ext uri="{0D108BD9-81ED-4DB2-BD59-A6C34878D82A}">
+                    <a16:rowId xmlns:a16="http://schemas.microsoft.com/office/drawing/2014/main" val="10001"/>
+                  </a:ext>
+                </a:extLst>
               </a:tr>
               <a:tr h="324612">
                 <a:tc vMerge="1">
                   <a:txBody>
                     <a:bodyPr/>
+                    <a:lstStyle/>
                     <a:p>
                       <a:pPr lvl="0">
                         <a:defRPr/>
@@ -10793,31 +10808,31 @@
                       <a:endParaRPr/>
                     </a:p>
                   </a:txBody>
-                  <a:tcPr marL="91440" marR="91440" anchor="ctr">
+                  <a:tcPr anchor="ctr">
                     <a:lnL w="12700" cap="flat" cmpd="sng" algn="ctr">
                       <a:solidFill>
-                        <a:srgbClr val="d0d0d0"/>
+                        <a:srgbClr val="D0D0D0"/>
                       </a:solidFill>
                       <a:prstDash val="solid"/>
                       <a:round/>
                     </a:lnL>
                     <a:lnR w="12700" cap="flat" cmpd="sng" algn="ctr">
                       <a:solidFill>
-                        <a:srgbClr val="d0d0d0"/>
+                        <a:srgbClr val="D0D0D0"/>
                       </a:solidFill>
                       <a:prstDash val="solid"/>
                       <a:round/>
                     </a:lnR>
                     <a:lnT w="12700" cap="flat" cmpd="sng" algn="ctr">
                       <a:solidFill>
-                        <a:srgbClr val="d0d0d0"/>
+                        <a:srgbClr val="D0D0D0"/>
                       </a:solidFill>
                       <a:prstDash val="solid"/>
                       <a:round/>
                     </a:lnT>
                     <a:lnB w="12700" cap="flat" cmpd="sng" algn="ctr">
                       <a:solidFill>
-                        <a:srgbClr val="d0d0d0"/>
+                        <a:srgbClr val="D0D0D0"/>
                       </a:solidFill>
                       <a:prstDash val="solid"/>
                       <a:round/>
@@ -10826,7 +10841,8 @@
                 </a:tc>
                 <a:tc>
                   <a:txBody>
-                    <a:bodyPr vert="horz" lIns="91440" tIns="45720" rIns="91440" bIns="45720" anchor="ctr" anchorCtr="0"/>
+                    <a:bodyPr/>
+                    <a:lstStyle/>
                     <a:p>
                       <a:pPr marL="0" indent="0" algn="l">
                         <a:buNone/>
@@ -10835,7 +10851,7 @@
                       <a:r>
                         <a:rPr lang="en-US" sz="1400" b="0">
                           <a:solidFill>
-                            <a:srgbClr val="1a2b3c"/>
+                            <a:srgbClr val="1A2B3C"/>
                           </a:solidFill>
                           <a:latin typeface="배달의민족 주아"/>
                           <a:ea typeface="배달의민족 주아"/>
@@ -10850,31 +10866,31 @@
                       </a:endParaRPr>
                     </a:p>
                   </a:txBody>
-                  <a:tcPr marL="91440" marR="91440" anchor="ctr">
+                  <a:tcPr anchor="ctr">
                     <a:lnL w="12700" cap="flat" cmpd="sng" algn="ctr">
                       <a:solidFill>
-                        <a:srgbClr val="d0d0d0"/>
+                        <a:srgbClr val="D0D0D0"/>
                       </a:solidFill>
                       <a:prstDash val="solid"/>
                       <a:round/>
                     </a:lnL>
                     <a:lnR w="12700" cap="flat" cmpd="sng" algn="ctr">
                       <a:solidFill>
-                        <a:srgbClr val="d0d0d0"/>
+                        <a:srgbClr val="D0D0D0"/>
                       </a:solidFill>
                       <a:prstDash val="solid"/>
                       <a:round/>
                     </a:lnR>
                     <a:lnT w="12700" cap="flat" cmpd="sng" algn="ctr">
                       <a:solidFill>
-                        <a:srgbClr val="d0d0d0"/>
+                        <a:srgbClr val="D0D0D0"/>
                       </a:solidFill>
                       <a:prstDash val="solid"/>
                       <a:round/>
                     </a:lnT>
                     <a:lnB w="12700" cap="flat" cmpd="sng" algn="ctr">
                       <a:solidFill>
-                        <a:srgbClr val="d0d0d0"/>
+                        <a:srgbClr val="D0D0D0"/>
                       </a:solidFill>
                       <a:prstDash val="solid"/>
                       <a:round/>
@@ -10883,7 +10899,8 @@
                 </a:tc>
                 <a:tc>
                   <a:txBody>
-                    <a:bodyPr vert="horz" lIns="91440" tIns="45720" rIns="91440" bIns="45720" anchor="ctr" anchorCtr="0"/>
+                    <a:bodyPr/>
+                    <a:lstStyle/>
                     <a:p>
                       <a:pPr marL="0" indent="0" algn="l">
                         <a:buNone/>
@@ -10892,7 +10909,7 @@
                       <a:r>
                         <a:rPr lang="en-US" sz="1400" b="0">
                           <a:solidFill>
-                            <a:srgbClr val="1a2b3c"/>
+                            <a:srgbClr val="1A2B3C"/>
                           </a:solidFill>
                           <a:latin typeface="배달의민족 주아"/>
                           <a:ea typeface="배달의민족 주아"/>
@@ -10903,7 +10920,7 @@
                       <a:r>
                         <a:rPr lang="en-US" altLang="ko-KR" sz="1400" b="0">
                           <a:solidFill>
-                            <a:srgbClr val="1a2b3c"/>
+                            <a:srgbClr val="1A2B3C"/>
                           </a:solidFill>
                           <a:latin typeface="배달의민족 주아"/>
                           <a:ea typeface="배달의민족 주아"/>
@@ -10914,7 +10931,7 @@
                       <a:r>
                         <a:rPr lang="ko-KR" altLang="en-US" sz="1400" b="0">
                           <a:solidFill>
-                            <a:srgbClr val="1a2b3c"/>
+                            <a:srgbClr val="1A2B3C"/>
                           </a:solidFill>
                           <a:latin typeface="배달의민족 주아"/>
                           <a:ea typeface="배달의민족 주아"/>
@@ -10925,7 +10942,7 @@
                       <a:r>
                         <a:rPr lang="en-US" sz="1400" b="0">
                           <a:solidFill>
-                            <a:srgbClr val="1a2b3c"/>
+                            <a:srgbClr val="1A2B3C"/>
                           </a:solidFill>
                           <a:latin typeface="배달의민족 주아"/>
                           <a:ea typeface="배달의민족 주아"/>
@@ -10933,52 +10950,50 @@
                         </a:rPr>
                         <a:t>0</a:t>
                       </a:r>
-                      <a:endParaRPr lang="en-US" sz="1400" b="0">
-                        <a:solidFill>
-                          <a:srgbClr val="1a2b3c"/>
-                        </a:solidFill>
-                        <a:latin typeface="배달의민족 주아"/>
-                        <a:ea typeface="배달의민족 주아"/>
-                        <a:cs typeface="Calibri"/>
-                      </a:endParaRPr>
                     </a:p>
                   </a:txBody>
-                  <a:tcPr marL="91440" marR="91440" anchor="ctr">
+                  <a:tcPr anchor="ctr">
                     <a:lnL w="12700" cap="flat" cmpd="sng" algn="ctr">
                       <a:solidFill>
-                        <a:srgbClr val="d0d0d0"/>
+                        <a:srgbClr val="D0D0D0"/>
                       </a:solidFill>
                       <a:prstDash val="solid"/>
                       <a:round/>
                     </a:lnL>
                     <a:lnR w="12700" cap="flat" cmpd="sng" algn="ctr">
                       <a:solidFill>
-                        <a:srgbClr val="d0d0d0"/>
+                        <a:srgbClr val="D0D0D0"/>
                       </a:solidFill>
                       <a:prstDash val="solid"/>
                       <a:round/>
                     </a:lnR>
                     <a:lnT w="12700" cap="flat" cmpd="sng" algn="ctr">
                       <a:solidFill>
-                        <a:srgbClr val="d0d0d0"/>
+                        <a:srgbClr val="D0D0D0"/>
                       </a:solidFill>
                       <a:prstDash val="solid"/>
                       <a:round/>
                     </a:lnT>
                     <a:lnB w="12700" cap="flat" cmpd="sng" algn="ctr">
                       <a:solidFill>
-                        <a:srgbClr val="d0d0d0"/>
+                        <a:srgbClr val="D0D0D0"/>
                       </a:solidFill>
                       <a:prstDash val="solid"/>
                       <a:round/>
                     </a:lnB>
                   </a:tcPr>
                 </a:tc>
+                <a:extLst>
+                  <a:ext uri="{0D108BD9-81ED-4DB2-BD59-A6C34878D82A}">
+                    <a16:rowId xmlns:a16="http://schemas.microsoft.com/office/drawing/2014/main" val="10002"/>
+                  </a:ext>
+                </a:extLst>
               </a:tr>
               <a:tr h="324612">
                 <a:tc vMerge="1">
                   <a:txBody>
                     <a:bodyPr/>
+                    <a:lstStyle/>
                     <a:p>
                       <a:pPr lvl="0">
                         <a:defRPr/>
@@ -10986,31 +11001,31 @@
                       <a:endParaRPr/>
                     </a:p>
                   </a:txBody>
-                  <a:tcPr marL="91440" marR="91440" anchor="ctr">
+                  <a:tcPr anchor="ctr">
                     <a:lnL w="12700" cap="flat" cmpd="sng" algn="ctr">
                       <a:solidFill>
-                        <a:srgbClr val="d0d0d0"/>
+                        <a:srgbClr val="D0D0D0"/>
                       </a:solidFill>
                       <a:prstDash val="solid"/>
                       <a:round/>
                     </a:lnL>
                     <a:lnR w="12700" cap="flat" cmpd="sng" algn="ctr">
                       <a:solidFill>
-                        <a:srgbClr val="d0d0d0"/>
+                        <a:srgbClr val="D0D0D0"/>
                       </a:solidFill>
                       <a:prstDash val="solid"/>
                       <a:round/>
                     </a:lnR>
                     <a:lnT w="12700" cap="flat" cmpd="sng" algn="ctr">
                       <a:solidFill>
-                        <a:srgbClr val="d0d0d0"/>
+                        <a:srgbClr val="D0D0D0"/>
                       </a:solidFill>
                       <a:prstDash val="solid"/>
                       <a:round/>
                     </a:lnT>
                     <a:lnB w="12700" cap="flat" cmpd="sng" algn="ctr">
                       <a:solidFill>
-                        <a:srgbClr val="d0d0d0"/>
+                        <a:srgbClr val="D0D0D0"/>
                       </a:solidFill>
                       <a:prstDash val="solid"/>
                       <a:round/>
@@ -11019,7 +11034,8 @@
                 </a:tc>
                 <a:tc>
                   <a:txBody>
-                    <a:bodyPr vert="horz" lIns="91440" tIns="45720" rIns="91440" bIns="45720" anchor="ctr" anchorCtr="0"/>
+                    <a:bodyPr/>
+                    <a:lstStyle/>
                     <a:p>
                       <a:pPr marL="0" indent="0" algn="l">
                         <a:buNone/>
@@ -11028,7 +11044,7 @@
                       <a:r>
                         <a:rPr lang="en-US" sz="1400" b="0">
                           <a:solidFill>
-                            <a:srgbClr val="1a2b3c"/>
+                            <a:srgbClr val="1A2B3C"/>
                           </a:solidFill>
                           <a:latin typeface="배달의민족 주아"/>
                           <a:ea typeface="배달의민족 주아"/>
@@ -11043,31 +11059,31 @@
                       </a:endParaRPr>
                     </a:p>
                   </a:txBody>
-                  <a:tcPr marL="91440" marR="91440" anchor="ctr">
+                  <a:tcPr anchor="ctr">
                     <a:lnL w="12700" cap="flat" cmpd="sng" algn="ctr">
                       <a:solidFill>
-                        <a:srgbClr val="d0d0d0"/>
+                        <a:srgbClr val="D0D0D0"/>
                       </a:solidFill>
                       <a:prstDash val="solid"/>
                       <a:round/>
                     </a:lnL>
                     <a:lnR w="12700" cap="flat" cmpd="sng" algn="ctr">
                       <a:solidFill>
-                        <a:srgbClr val="d0d0d0"/>
+                        <a:srgbClr val="D0D0D0"/>
                       </a:solidFill>
                       <a:prstDash val="solid"/>
                       <a:round/>
                     </a:lnR>
                     <a:lnT w="12700" cap="flat" cmpd="sng" algn="ctr">
                       <a:solidFill>
-                        <a:srgbClr val="d0d0d0"/>
+                        <a:srgbClr val="D0D0D0"/>
                       </a:solidFill>
                       <a:prstDash val="solid"/>
                       <a:round/>
                     </a:lnT>
                     <a:lnB w="12700" cap="flat" cmpd="sng" algn="ctr">
                       <a:solidFill>
-                        <a:srgbClr val="d0d0d0"/>
+                        <a:srgbClr val="D0D0D0"/>
                       </a:solidFill>
                       <a:prstDash val="solid"/>
                       <a:round/>
@@ -11076,7 +11092,8 @@
                 </a:tc>
                 <a:tc>
                   <a:txBody>
-                    <a:bodyPr vert="horz" lIns="91440" tIns="45720" rIns="91440" bIns="45720" anchor="ctr" anchorCtr="0"/>
+                    <a:bodyPr/>
+                    <a:lstStyle/>
                     <a:p>
                       <a:pPr marL="0" indent="0" algn="l">
                         <a:buNone/>
@@ -11085,7 +11102,7 @@
                       <a:r>
                         <a:rPr lang="en-US" sz="1400" b="0">
                           <a:solidFill>
-                            <a:srgbClr val="1a2b3c"/>
+                            <a:srgbClr val="1A2B3C"/>
                           </a:solidFill>
                           <a:latin typeface="배달의민족 주아"/>
                           <a:ea typeface="배달의민족 주아"/>
@@ -11096,7 +11113,7 @@
                       <a:r>
                         <a:rPr lang="ko-KR" altLang="en-US" sz="1400" b="0">
                           <a:solidFill>
-                            <a:srgbClr val="1a2b3c"/>
+                            <a:srgbClr val="1A2B3C"/>
                           </a:solidFill>
                           <a:latin typeface="배달의민족 주아"/>
                           <a:ea typeface="배달의민족 주아"/>
@@ -11107,7 +11124,7 @@
                       <a:r>
                         <a:rPr lang="en-US" sz="1400" b="0">
                           <a:solidFill>
-                            <a:srgbClr val="1a2b3c"/>
+                            <a:srgbClr val="1A2B3C"/>
                           </a:solidFill>
                           <a:latin typeface="배달의민족 주아"/>
                           <a:ea typeface="배달의민족 주아"/>
@@ -11115,52 +11132,50 @@
                         </a:rPr>
                         <a:t>90</a:t>
                       </a:r>
-                      <a:endParaRPr lang="en-US" sz="1400" b="0">
-                        <a:solidFill>
-                          <a:srgbClr val="1a2b3c"/>
-                        </a:solidFill>
-                        <a:latin typeface="배달의민족 주아"/>
-                        <a:ea typeface="배달의민족 주아"/>
-                        <a:cs typeface="Calibri"/>
-                      </a:endParaRPr>
                     </a:p>
                   </a:txBody>
-                  <a:tcPr marL="91440" marR="91440" anchor="ctr">
+                  <a:tcPr anchor="ctr">
                     <a:lnL w="12700" cap="flat" cmpd="sng" algn="ctr">
                       <a:solidFill>
-                        <a:srgbClr val="d0d0d0"/>
+                        <a:srgbClr val="D0D0D0"/>
                       </a:solidFill>
                       <a:prstDash val="solid"/>
                       <a:round/>
                     </a:lnL>
                     <a:lnR w="12700" cap="flat" cmpd="sng" algn="ctr">
                       <a:solidFill>
-                        <a:srgbClr val="d0d0d0"/>
+                        <a:srgbClr val="D0D0D0"/>
                       </a:solidFill>
                       <a:prstDash val="solid"/>
                       <a:round/>
                     </a:lnR>
                     <a:lnT w="12700" cap="flat" cmpd="sng" algn="ctr">
                       <a:solidFill>
-                        <a:srgbClr val="d0d0d0"/>
+                        <a:srgbClr val="D0D0D0"/>
                       </a:solidFill>
                       <a:prstDash val="solid"/>
                       <a:round/>
                     </a:lnT>
                     <a:lnB w="12700" cap="flat" cmpd="sng" algn="ctr">
                       <a:solidFill>
-                        <a:srgbClr val="d0d0d0"/>
+                        <a:srgbClr val="D0D0D0"/>
                       </a:solidFill>
                       <a:prstDash val="solid"/>
                       <a:round/>
                     </a:lnB>
                   </a:tcPr>
                 </a:tc>
+                <a:extLst>
+                  <a:ext uri="{0D108BD9-81ED-4DB2-BD59-A6C34878D82A}">
+                    <a16:rowId xmlns:a16="http://schemas.microsoft.com/office/drawing/2014/main" val="10003"/>
+                  </a:ext>
+                </a:extLst>
               </a:tr>
               <a:tr h="324612">
                 <a:tc vMerge="1">
                   <a:txBody>
                     <a:bodyPr/>
+                    <a:lstStyle/>
                     <a:p>
                       <a:pPr lvl="0">
                         <a:defRPr/>
@@ -11168,31 +11183,31 @@
                       <a:endParaRPr/>
                     </a:p>
                   </a:txBody>
-                  <a:tcPr marL="91440" marR="91440" anchor="ctr">
+                  <a:tcPr anchor="ctr">
                     <a:lnL w="12700" cap="flat" cmpd="sng" algn="ctr">
                       <a:solidFill>
-                        <a:srgbClr val="d0d0d0"/>
+                        <a:srgbClr val="D0D0D0"/>
                       </a:solidFill>
                       <a:prstDash val="solid"/>
                       <a:round/>
                     </a:lnL>
                     <a:lnR w="12700" cap="flat" cmpd="sng" algn="ctr">
                       <a:solidFill>
-                        <a:srgbClr val="d0d0d0"/>
+                        <a:srgbClr val="D0D0D0"/>
                       </a:solidFill>
                       <a:prstDash val="solid"/>
                       <a:round/>
                     </a:lnR>
                     <a:lnT w="12700" cap="flat" cmpd="sng" algn="ctr">
                       <a:solidFill>
-                        <a:srgbClr val="d0d0d0"/>
+                        <a:srgbClr val="D0D0D0"/>
                       </a:solidFill>
                       <a:prstDash val="solid"/>
                       <a:round/>
                     </a:lnT>
                     <a:lnB w="12700" cap="flat" cmpd="sng" algn="ctr">
                       <a:solidFill>
-                        <a:srgbClr val="d0d0d0"/>
+                        <a:srgbClr val="D0D0D0"/>
                       </a:solidFill>
                       <a:prstDash val="solid"/>
                       <a:round/>
@@ -11201,7 +11216,8 @@
                 </a:tc>
                 <a:tc>
                   <a:txBody>
-                    <a:bodyPr vert="horz" lIns="91440" tIns="45720" rIns="91440" bIns="45720" anchor="ctr" anchorCtr="0"/>
+                    <a:bodyPr/>
+                    <a:lstStyle/>
                     <a:p>
                       <a:pPr marL="0" indent="0" algn="l">
                         <a:buNone/>
@@ -11210,7 +11226,7 @@
                       <a:r>
                         <a:rPr lang="en-US" sz="1400" b="0">
                           <a:solidFill>
-                            <a:srgbClr val="1a2b3c"/>
+                            <a:srgbClr val="1A2B3C"/>
                           </a:solidFill>
                           <a:latin typeface="배달의민족 주아"/>
                           <a:ea typeface="배달의민족 주아"/>
@@ -11225,31 +11241,31 @@
                       </a:endParaRPr>
                     </a:p>
                   </a:txBody>
-                  <a:tcPr marL="91440" marR="91440" anchor="ctr">
+                  <a:tcPr anchor="ctr">
                     <a:lnL w="12700" cap="flat" cmpd="sng" algn="ctr">
                       <a:solidFill>
-                        <a:srgbClr val="d0d0d0"/>
+                        <a:srgbClr val="D0D0D0"/>
                       </a:solidFill>
                       <a:prstDash val="solid"/>
                       <a:round/>
                     </a:lnL>
                     <a:lnR w="12700" cap="flat" cmpd="sng" algn="ctr">
                       <a:solidFill>
-                        <a:srgbClr val="d0d0d0"/>
+                        <a:srgbClr val="D0D0D0"/>
                       </a:solidFill>
                       <a:prstDash val="solid"/>
                       <a:round/>
                     </a:lnR>
                     <a:lnT w="12700" cap="flat" cmpd="sng" algn="ctr">
                       <a:solidFill>
-                        <a:srgbClr val="d0d0d0"/>
+                        <a:srgbClr val="D0D0D0"/>
                       </a:solidFill>
                       <a:prstDash val="solid"/>
                       <a:round/>
                     </a:lnT>
                     <a:lnB w="12700" cap="flat" cmpd="sng" algn="ctr">
                       <a:solidFill>
-                        <a:srgbClr val="d0d0d0"/>
+                        <a:srgbClr val="D0D0D0"/>
                       </a:solidFill>
                       <a:prstDash val="solid"/>
                       <a:round/>
@@ -11258,7 +11274,8 @@
                 </a:tc>
                 <a:tc>
                   <a:txBody>
-                    <a:bodyPr vert="horz" lIns="91440" tIns="45720" rIns="91440" bIns="45720" anchor="ctr" anchorCtr="0"/>
+                    <a:bodyPr/>
+                    <a:lstStyle/>
                     <a:p>
                       <a:pPr marL="0" indent="0" algn="l">
                         <a:buNone/>
@@ -11267,7 +11284,7 @@
                       <a:r>
                         <a:rPr lang="en-US" sz="1400" b="0">
                           <a:solidFill>
-                            <a:srgbClr val="1a2b3c"/>
+                            <a:srgbClr val="1A2B3C"/>
                           </a:solidFill>
                           <a:latin typeface="배달의민족 주아"/>
                           <a:ea typeface="배달의민족 주아"/>
@@ -11278,7 +11295,7 @@
                       <a:r>
                         <a:rPr lang="ko-KR" altLang="en-US" sz="1400" b="0">
                           <a:solidFill>
-                            <a:srgbClr val="1a2b3c"/>
+                            <a:srgbClr val="1A2B3C"/>
                           </a:solidFill>
                           <a:latin typeface="배달의민족 주아"/>
                           <a:ea typeface="배달의민족 주아"/>
@@ -11289,7 +11306,7 @@
                       <a:r>
                         <a:rPr lang="en-US" sz="1400" b="0">
                           <a:solidFill>
-                            <a:srgbClr val="1a2b3c"/>
+                            <a:srgbClr val="1A2B3C"/>
                           </a:solidFill>
                           <a:latin typeface="배달의민족 주아"/>
                           <a:ea typeface="배달의민족 주아"/>
@@ -11297,52 +11314,50 @@
                         </a:rPr>
                         <a:t>35</a:t>
                       </a:r>
-                      <a:endParaRPr lang="en-US" sz="1400" b="0">
-                        <a:solidFill>
-                          <a:srgbClr val="1a2b3c"/>
-                        </a:solidFill>
-                        <a:latin typeface="배달의민족 주아"/>
-                        <a:ea typeface="배달의민족 주아"/>
-                        <a:cs typeface="Calibri"/>
-                      </a:endParaRPr>
                     </a:p>
                   </a:txBody>
-                  <a:tcPr marL="91440" marR="91440" anchor="ctr">
+                  <a:tcPr anchor="ctr">
                     <a:lnL w="12700" cap="flat" cmpd="sng" algn="ctr">
                       <a:solidFill>
-                        <a:srgbClr val="d0d0d0"/>
+                        <a:srgbClr val="D0D0D0"/>
                       </a:solidFill>
                       <a:prstDash val="solid"/>
                       <a:round/>
                     </a:lnL>
                     <a:lnR w="12700" cap="flat" cmpd="sng" algn="ctr">
                       <a:solidFill>
-                        <a:srgbClr val="d0d0d0"/>
+                        <a:srgbClr val="D0D0D0"/>
                       </a:solidFill>
                       <a:prstDash val="solid"/>
                       <a:round/>
                     </a:lnR>
                     <a:lnT w="12700" cap="flat" cmpd="sng" algn="ctr">
                       <a:solidFill>
-                        <a:srgbClr val="d0d0d0"/>
+                        <a:srgbClr val="D0D0D0"/>
                       </a:solidFill>
                       <a:prstDash val="solid"/>
                       <a:round/>
                     </a:lnT>
                     <a:lnB w="12700" cap="flat" cmpd="sng" algn="ctr">
                       <a:solidFill>
-                        <a:srgbClr val="d0d0d0"/>
+                        <a:srgbClr val="D0D0D0"/>
                       </a:solidFill>
                       <a:prstDash val="solid"/>
                       <a:round/>
                     </a:lnB>
                   </a:tcPr>
                 </a:tc>
+                <a:extLst>
+                  <a:ext uri="{0D108BD9-81ED-4DB2-BD59-A6C34878D82A}">
+                    <a16:rowId xmlns:a16="http://schemas.microsoft.com/office/drawing/2014/main" val="10004"/>
+                  </a:ext>
+                </a:extLst>
               </a:tr>
               <a:tr h="324612">
                 <a:tc>
                   <a:txBody>
-                    <a:bodyPr vert="horz" lIns="91440" tIns="45720" rIns="91440" bIns="45720" anchor="ctr" anchorCtr="0"/>
+                    <a:bodyPr/>
+                    <a:lstStyle/>
                     <a:p>
                       <a:pPr marL="0" indent="0" algn="ctr">
                         <a:buNone/>
@@ -11351,7 +11366,7 @@
                       <a:r>
                         <a:rPr lang="en-US" sz="1400" b="0">
                           <a:solidFill>
-                            <a:srgbClr val="607d8b"/>
+                            <a:srgbClr val="607D8B"/>
                           </a:solidFill>
                           <a:latin typeface="배달의민족 주아"/>
                           <a:ea typeface="배달의민족 주아"/>
@@ -11366,31 +11381,31 @@
                       </a:endParaRPr>
                     </a:p>
                   </a:txBody>
-                  <a:tcPr marL="91440" marR="91440" anchor="ctr">
+                  <a:tcPr anchor="ctr">
                     <a:lnL w="12700" cap="flat" cmpd="sng" algn="ctr">
                       <a:solidFill>
-                        <a:srgbClr val="d0d0d0"/>
+                        <a:srgbClr val="D0D0D0"/>
                       </a:solidFill>
                       <a:prstDash val="solid"/>
                       <a:round/>
                     </a:lnL>
                     <a:lnR w="12700" cap="flat" cmpd="sng" algn="ctr">
                       <a:solidFill>
-                        <a:srgbClr val="d0d0d0"/>
+                        <a:srgbClr val="D0D0D0"/>
                       </a:solidFill>
                       <a:prstDash val="solid"/>
                       <a:round/>
                     </a:lnR>
                     <a:lnT w="12700" cap="flat" cmpd="sng" algn="ctr">
                       <a:solidFill>
-                        <a:srgbClr val="d0d0d0"/>
+                        <a:srgbClr val="D0D0D0"/>
                       </a:solidFill>
                       <a:prstDash val="solid"/>
                       <a:round/>
                     </a:lnT>
                     <a:lnB w="12700" cap="flat" cmpd="sng" algn="ctr">
                       <a:solidFill>
-                        <a:srgbClr val="d0d0d0"/>
+                        <a:srgbClr val="D0D0D0"/>
                       </a:solidFill>
                       <a:prstDash val="solid"/>
                       <a:round/>
@@ -11399,7 +11414,8 @@
                 </a:tc>
                 <a:tc>
                   <a:txBody>
-                    <a:bodyPr vert="horz" lIns="91440" tIns="45720" rIns="91440" bIns="45720" anchor="ctr" anchorCtr="0"/>
+                    <a:bodyPr/>
+                    <a:lstStyle/>
                     <a:p>
                       <a:pPr marL="0" indent="0" algn="l">
                         <a:buNone/>
@@ -11408,7 +11424,7 @@
                       <a:r>
                         <a:rPr lang="en-US" sz="1400" b="0">
                           <a:solidFill>
-                            <a:srgbClr val="1a2b3c"/>
+                            <a:srgbClr val="1A2B3C"/>
                           </a:solidFill>
                           <a:latin typeface="배달의민족 주아"/>
                           <a:ea typeface="배달의민족 주아"/>
@@ -11423,31 +11439,31 @@
                       </a:endParaRPr>
                     </a:p>
                   </a:txBody>
-                  <a:tcPr marL="91440" marR="91440" anchor="ctr">
+                  <a:tcPr anchor="ctr">
                     <a:lnL w="12700" cap="flat" cmpd="sng" algn="ctr">
                       <a:solidFill>
-                        <a:srgbClr val="d0d0d0"/>
+                        <a:srgbClr val="D0D0D0"/>
                       </a:solidFill>
                       <a:prstDash val="solid"/>
                       <a:round/>
                     </a:lnL>
                     <a:lnR w="12700" cap="flat" cmpd="sng" algn="ctr">
                       <a:solidFill>
-                        <a:srgbClr val="d0d0d0"/>
+                        <a:srgbClr val="D0D0D0"/>
                       </a:solidFill>
                       <a:prstDash val="solid"/>
                       <a:round/>
                     </a:lnR>
                     <a:lnT w="12700" cap="flat" cmpd="sng" algn="ctr">
                       <a:solidFill>
-                        <a:srgbClr val="d0d0d0"/>
+                        <a:srgbClr val="D0D0D0"/>
                       </a:solidFill>
                       <a:prstDash val="solid"/>
                       <a:round/>
                     </a:lnT>
                     <a:lnB w="12700" cap="flat" cmpd="sng" algn="ctr">
                       <a:solidFill>
-                        <a:srgbClr val="d0d0d0"/>
+                        <a:srgbClr val="D0D0D0"/>
                       </a:solidFill>
                       <a:prstDash val="solid"/>
                       <a:round/>
@@ -11456,7 +11472,8 @@
                 </a:tc>
                 <a:tc>
                   <a:txBody>
-                    <a:bodyPr vert="horz" lIns="91440" tIns="45720" rIns="91440" bIns="45720" anchor="ctr" anchorCtr="0"/>
+                    <a:bodyPr/>
+                    <a:lstStyle/>
                     <a:p>
                       <a:pPr marL="0" indent="0" algn="l">
                         <a:buNone/>
@@ -11465,7 +11482,7 @@
                       <a:r>
                         <a:rPr lang="en-US" sz="1400" b="0">
                           <a:solidFill>
-                            <a:srgbClr val="1a2b3c"/>
+                            <a:srgbClr val="1A2B3C"/>
                           </a:solidFill>
                           <a:latin typeface="배달의민족 주아"/>
                           <a:ea typeface="배달의민족 주아"/>
@@ -11480,42 +11497,48 @@
                       </a:endParaRPr>
                     </a:p>
                   </a:txBody>
-                  <a:tcPr marL="91440" marR="91440" anchor="ctr">
+                  <a:tcPr anchor="ctr">
                     <a:lnL w="12700" cap="flat" cmpd="sng" algn="ctr">
                       <a:solidFill>
-                        <a:srgbClr val="d0d0d0"/>
+                        <a:srgbClr val="D0D0D0"/>
                       </a:solidFill>
                       <a:prstDash val="solid"/>
                       <a:round/>
                     </a:lnL>
                     <a:lnR w="12700" cap="flat" cmpd="sng" algn="ctr">
                       <a:solidFill>
-                        <a:srgbClr val="d0d0d0"/>
+                        <a:srgbClr val="D0D0D0"/>
                       </a:solidFill>
                       <a:prstDash val="solid"/>
                       <a:round/>
                     </a:lnR>
                     <a:lnT w="12700" cap="flat" cmpd="sng" algn="ctr">
                       <a:solidFill>
-                        <a:srgbClr val="d0d0d0"/>
+                        <a:srgbClr val="D0D0D0"/>
                       </a:solidFill>
                       <a:prstDash val="solid"/>
                       <a:round/>
                     </a:lnT>
                     <a:lnB w="12700" cap="flat" cmpd="sng" algn="ctr">
                       <a:solidFill>
-                        <a:srgbClr val="d0d0d0"/>
+                        <a:srgbClr val="D0D0D0"/>
                       </a:solidFill>
                       <a:prstDash val="solid"/>
                       <a:round/>
                     </a:lnB>
                   </a:tcPr>
                 </a:tc>
+                <a:extLst>
+                  <a:ext uri="{0D108BD9-81ED-4DB2-BD59-A6C34878D82A}">
+                    <a16:rowId xmlns:a16="http://schemas.microsoft.com/office/drawing/2014/main" val="10005"/>
+                  </a:ext>
+                </a:extLst>
               </a:tr>
               <a:tr h="324612">
                 <a:tc rowSpan="2">
                   <a:txBody>
-                    <a:bodyPr vert="horz" lIns="91440" tIns="45720" rIns="91440" bIns="45720" anchor="ctr" anchorCtr="0"/>
+                    <a:bodyPr/>
+                    <a:lstStyle/>
                     <a:p>
                       <a:pPr marL="0" indent="0" algn="ctr">
                         <a:buNone/>
@@ -11524,7 +11547,7 @@
                       <a:r>
                         <a:rPr lang="en-US" sz="1400" b="0">
                           <a:solidFill>
-                            <a:srgbClr val="27ae60"/>
+                            <a:srgbClr val="27AE60"/>
                           </a:solidFill>
                           <a:latin typeface="배달의민족 주아"/>
                           <a:ea typeface="배달의민족 주아"/>
@@ -11532,41 +11555,33 @@
                         </a:rPr>
                         <a:t>굿</a:t>
                       </a:r>
-                      <a:endParaRPr lang="en-US" sz="1400" b="0">
-                        <a:solidFill>
-                          <a:srgbClr val="27ae60"/>
-                        </a:solidFill>
-                        <a:latin typeface="배달의민족 주아"/>
-                        <a:ea typeface="배달의민족 주아"/>
-                        <a:cs typeface="Calibri"/>
-                      </a:endParaRPr>
                     </a:p>
                   </a:txBody>
-                  <a:tcPr marL="91440" marR="91440" anchor="ctr">
+                  <a:tcPr anchor="ctr">
                     <a:lnL w="12700" cap="flat" cmpd="sng" algn="ctr">
                       <a:solidFill>
-                        <a:srgbClr val="d0d0d0"/>
+                        <a:srgbClr val="D0D0D0"/>
                       </a:solidFill>
                       <a:prstDash val="solid"/>
                       <a:round/>
                     </a:lnL>
                     <a:lnR w="12700" cap="flat" cmpd="sng" algn="ctr">
                       <a:solidFill>
-                        <a:srgbClr val="d0d0d0"/>
+                        <a:srgbClr val="D0D0D0"/>
                       </a:solidFill>
                       <a:prstDash val="solid"/>
                       <a:round/>
                     </a:lnR>
                     <a:lnT w="12700" cap="flat" cmpd="sng" algn="ctr">
                       <a:solidFill>
-                        <a:srgbClr val="d0d0d0"/>
+                        <a:srgbClr val="D0D0D0"/>
                       </a:solidFill>
                       <a:prstDash val="solid"/>
                       <a:round/>
                     </a:lnT>
                     <a:lnB w="12700" cap="flat" cmpd="sng" algn="ctr">
                       <a:solidFill>
-                        <a:srgbClr val="d0d0d0"/>
+                        <a:srgbClr val="D0D0D0"/>
                       </a:solidFill>
                       <a:prstDash val="solid"/>
                       <a:round/>
@@ -11575,7 +11590,8 @@
                 </a:tc>
                 <a:tc>
                   <a:txBody>
-                    <a:bodyPr vert="horz" lIns="91440" tIns="45720" rIns="91440" bIns="45720" anchor="ctr" anchorCtr="0"/>
+                    <a:bodyPr/>
+                    <a:lstStyle/>
                     <a:p>
                       <a:pPr marL="0" indent="0" algn="l">
                         <a:buNone/>
@@ -11584,7 +11600,7 @@
                       <a:r>
                         <a:rPr lang="en-US" sz="1400" b="0">
                           <a:solidFill>
-                            <a:srgbClr val="1a2b3c"/>
+                            <a:srgbClr val="1A2B3C"/>
                           </a:solidFill>
                           <a:latin typeface="배달의민족 주아"/>
                           <a:ea typeface="배달의민족 주아"/>
@@ -11599,31 +11615,31 @@
                       </a:endParaRPr>
                     </a:p>
                   </a:txBody>
-                  <a:tcPr marL="91440" marR="91440" anchor="ctr">
+                  <a:tcPr anchor="ctr">
                     <a:lnL w="12700" cap="flat" cmpd="sng" algn="ctr">
                       <a:solidFill>
-                        <a:srgbClr val="d0d0d0"/>
+                        <a:srgbClr val="D0D0D0"/>
                       </a:solidFill>
                       <a:prstDash val="solid"/>
                       <a:round/>
                     </a:lnL>
                     <a:lnR w="12700" cap="flat" cmpd="sng" algn="ctr">
                       <a:solidFill>
-                        <a:srgbClr val="d0d0d0"/>
+                        <a:srgbClr val="D0D0D0"/>
                       </a:solidFill>
                       <a:prstDash val="solid"/>
                       <a:round/>
                     </a:lnR>
                     <a:lnT w="12700" cap="flat" cmpd="sng" algn="ctr">
                       <a:solidFill>
-                        <a:srgbClr val="d0d0d0"/>
+                        <a:srgbClr val="D0D0D0"/>
                       </a:solidFill>
                       <a:prstDash val="solid"/>
                       <a:round/>
                     </a:lnT>
                     <a:lnB w="12700" cap="flat" cmpd="sng" algn="ctr">
                       <a:solidFill>
-                        <a:srgbClr val="d0d0d0"/>
+                        <a:srgbClr val="D0D0D0"/>
                       </a:solidFill>
                       <a:prstDash val="solid"/>
                       <a:round/>
@@ -11632,7 +11648,8 @@
                 </a:tc>
                 <a:tc>
                   <a:txBody>
-                    <a:bodyPr vert="horz" lIns="91440" tIns="45720" rIns="91440" bIns="45720" anchor="ctr" anchorCtr="0"/>
+                    <a:bodyPr/>
+                    <a:lstStyle/>
                     <a:p>
                       <a:pPr marL="0" indent="0" algn="l">
                         <a:buNone/>
@@ -11641,7 +11658,7 @@
                       <a:r>
                         <a:rPr lang="en-US" sz="1400" b="0">
                           <a:solidFill>
-                            <a:srgbClr val="1a2b3c"/>
+                            <a:srgbClr val="1A2B3C"/>
                           </a:solidFill>
                           <a:latin typeface="배달의민족 주아"/>
                           <a:ea typeface="배달의민족 주아"/>
@@ -11652,7 +11669,7 @@
                       <a:r>
                         <a:rPr lang="ko-KR" altLang="en-US" sz="1400" b="0">
                           <a:solidFill>
-                            <a:srgbClr val="1a2b3c"/>
+                            <a:srgbClr val="1A2B3C"/>
                           </a:solidFill>
                           <a:latin typeface="배달의민족 주아"/>
                           <a:ea typeface="배달의민족 주아"/>
@@ -11663,7 +11680,7 @@
                       <a:r>
                         <a:rPr lang="en-US" sz="1400" b="0">
                           <a:solidFill>
-                            <a:srgbClr val="1a2b3c"/>
+                            <a:srgbClr val="1A2B3C"/>
                           </a:solidFill>
                           <a:latin typeface="배달의민족 주아"/>
                           <a:ea typeface="배달의민족 주아"/>
@@ -11671,52 +11688,50 @@
                         </a:rPr>
                         <a:t> 랜덤 분기</a:t>
                       </a:r>
-                      <a:endParaRPr lang="en-US" sz="1400" b="0">
-                        <a:solidFill>
-                          <a:srgbClr val="1a2b3c"/>
-                        </a:solidFill>
-                        <a:latin typeface="배달의민족 주아"/>
-                        <a:ea typeface="배달의민족 주아"/>
-                        <a:cs typeface="Calibri"/>
-                      </a:endParaRPr>
                     </a:p>
                   </a:txBody>
-                  <a:tcPr marL="91440" marR="91440" anchor="ctr">
+                  <a:tcPr anchor="ctr">
                     <a:lnL w="12700" cap="flat" cmpd="sng" algn="ctr">
                       <a:solidFill>
-                        <a:srgbClr val="d0d0d0"/>
+                        <a:srgbClr val="D0D0D0"/>
                       </a:solidFill>
                       <a:prstDash val="solid"/>
                       <a:round/>
                     </a:lnL>
                     <a:lnR w="12700" cap="flat" cmpd="sng" algn="ctr">
                       <a:solidFill>
-                        <a:srgbClr val="d0d0d0"/>
+                        <a:srgbClr val="D0D0D0"/>
                       </a:solidFill>
                       <a:prstDash val="solid"/>
                       <a:round/>
                     </a:lnR>
                     <a:lnT w="12700" cap="flat" cmpd="sng" algn="ctr">
                       <a:solidFill>
-                        <a:srgbClr val="d0d0d0"/>
+                        <a:srgbClr val="D0D0D0"/>
                       </a:solidFill>
                       <a:prstDash val="solid"/>
                       <a:round/>
                     </a:lnT>
                     <a:lnB w="12700" cap="flat" cmpd="sng" algn="ctr">
                       <a:solidFill>
-                        <a:srgbClr val="d0d0d0"/>
+                        <a:srgbClr val="D0D0D0"/>
                       </a:solidFill>
                       <a:prstDash val="solid"/>
                       <a:round/>
                     </a:lnB>
                   </a:tcPr>
                 </a:tc>
+                <a:extLst>
+                  <a:ext uri="{0D108BD9-81ED-4DB2-BD59-A6C34878D82A}">
+                    <a16:rowId xmlns:a16="http://schemas.microsoft.com/office/drawing/2014/main" val="10006"/>
+                  </a:ext>
+                </a:extLst>
               </a:tr>
               <a:tr h="324612">
                 <a:tc vMerge="1">
                   <a:txBody>
                     <a:bodyPr/>
+                    <a:lstStyle/>
                     <a:p>
                       <a:pPr lvl="0">
                         <a:defRPr/>
@@ -11724,31 +11739,31 @@
                       <a:endParaRPr/>
                     </a:p>
                   </a:txBody>
-                  <a:tcPr marL="91440" marR="91440" anchor="ctr">
+                  <a:tcPr anchor="ctr">
                     <a:lnL w="12700" cap="flat" cmpd="sng" algn="ctr">
                       <a:solidFill>
-                        <a:srgbClr val="d0d0d0"/>
+                        <a:srgbClr val="D0D0D0"/>
                       </a:solidFill>
                       <a:prstDash val="solid"/>
                       <a:round/>
                     </a:lnL>
                     <a:lnR w="12700" cap="flat" cmpd="sng" algn="ctr">
                       <a:solidFill>
-                        <a:srgbClr val="d0d0d0"/>
+                        <a:srgbClr val="D0D0D0"/>
                       </a:solidFill>
                       <a:prstDash val="solid"/>
                       <a:round/>
                     </a:lnR>
                     <a:lnT w="12700" cap="flat" cmpd="sng" algn="ctr">
                       <a:solidFill>
-                        <a:srgbClr val="d0d0d0"/>
+                        <a:srgbClr val="D0D0D0"/>
                       </a:solidFill>
                       <a:prstDash val="solid"/>
                       <a:round/>
                     </a:lnT>
                     <a:lnB w="12700" cap="flat" cmpd="sng" algn="ctr">
                       <a:solidFill>
-                        <a:srgbClr val="d0d0d0"/>
+                        <a:srgbClr val="D0D0D0"/>
                       </a:solidFill>
                       <a:prstDash val="solid"/>
                       <a:round/>
@@ -11757,7 +11772,8 @@
                 </a:tc>
                 <a:tc>
                   <a:txBody>
-                    <a:bodyPr vert="horz" lIns="91440" tIns="45720" rIns="91440" bIns="45720" anchor="ctr" anchorCtr="0"/>
+                    <a:bodyPr/>
+                    <a:lstStyle/>
                     <a:p>
                       <a:pPr marL="0" indent="0" algn="l">
                         <a:buNone/>
@@ -11766,7 +11782,7 @@
                       <a:r>
                         <a:rPr lang="en-US" sz="1400" b="0">
                           <a:solidFill>
-                            <a:srgbClr val="1a2b3c"/>
+                            <a:srgbClr val="1A2B3C"/>
                           </a:solidFill>
                           <a:latin typeface="배달의민족 주아"/>
                           <a:ea typeface="배달의민족 주아"/>
@@ -11781,31 +11797,31 @@
                       </a:endParaRPr>
                     </a:p>
                   </a:txBody>
-                  <a:tcPr marL="91440" marR="91440" anchor="ctr">
+                  <a:tcPr anchor="ctr">
                     <a:lnL w="12700" cap="flat" cmpd="sng" algn="ctr">
                       <a:solidFill>
-                        <a:srgbClr val="d0d0d0"/>
+                        <a:srgbClr val="D0D0D0"/>
                       </a:solidFill>
                       <a:prstDash val="solid"/>
                       <a:round/>
                     </a:lnL>
                     <a:lnR w="12700" cap="flat" cmpd="sng" algn="ctr">
                       <a:solidFill>
-                        <a:srgbClr val="d0d0d0"/>
+                        <a:srgbClr val="D0D0D0"/>
                       </a:solidFill>
                       <a:prstDash val="solid"/>
                       <a:round/>
                     </a:lnR>
                     <a:lnT w="12700" cap="flat" cmpd="sng" algn="ctr">
                       <a:solidFill>
-                        <a:srgbClr val="d0d0d0"/>
+                        <a:srgbClr val="D0D0D0"/>
                       </a:solidFill>
                       <a:prstDash val="solid"/>
                       <a:round/>
                     </a:lnT>
                     <a:lnB w="12700" cap="flat" cmpd="sng" algn="ctr">
                       <a:solidFill>
-                        <a:srgbClr val="d0d0d0"/>
+                        <a:srgbClr val="D0D0D0"/>
                       </a:solidFill>
                       <a:prstDash val="solid"/>
                       <a:round/>
@@ -11814,7 +11830,8 @@
                 </a:tc>
                 <a:tc>
                   <a:txBody>
-                    <a:bodyPr vert="horz" lIns="91440" tIns="45720" rIns="91440" bIns="45720" anchor="ctr" anchorCtr="0"/>
+                    <a:bodyPr/>
+                    <a:lstStyle/>
                     <a:p>
                       <a:pPr marL="0" indent="0" algn="l">
                         <a:buNone/>
@@ -11823,7 +11840,7 @@
                       <a:r>
                         <a:rPr lang="en-US" sz="1400" b="0">
                           <a:solidFill>
-                            <a:srgbClr val="1a2b3c"/>
+                            <a:srgbClr val="1A2B3C"/>
                           </a:solidFill>
                           <a:latin typeface="배달의민족 주아"/>
                           <a:ea typeface="배달의민족 주아"/>
@@ -11834,7 +11851,7 @@
                       <a:r>
                         <a:rPr lang="ko-KR" altLang="en-US" sz="1400" b="0">
                           <a:solidFill>
-                            <a:srgbClr val="1a2b3c"/>
+                            <a:srgbClr val="1A2B3C"/>
                           </a:solidFill>
                           <a:latin typeface="배달의민족 주아"/>
                           <a:ea typeface="배달의민족 주아"/>
@@ -11845,7 +11862,7 @@
                       <a:r>
                         <a:rPr lang="en-US" sz="1400" b="0">
                           <a:solidFill>
-                            <a:srgbClr val="1a2b3c"/>
+                            <a:srgbClr val="1A2B3C"/>
                           </a:solidFill>
                           <a:latin typeface="배달의민족 주아"/>
                           <a:ea typeface="배달의민족 주아"/>
@@ -11853,52 +11870,50 @@
                         </a:rPr>
                         <a:t>76</a:t>
                       </a:r>
-                      <a:endParaRPr lang="en-US" sz="1400" b="0">
-                        <a:solidFill>
-                          <a:srgbClr val="1a2b3c"/>
-                        </a:solidFill>
-                        <a:latin typeface="배달의민족 주아"/>
-                        <a:ea typeface="배달의민족 주아"/>
-                        <a:cs typeface="Calibri"/>
-                      </a:endParaRPr>
                     </a:p>
                   </a:txBody>
-                  <a:tcPr marL="91440" marR="91440" anchor="ctr">
+                  <a:tcPr anchor="ctr">
                     <a:lnL w="12700" cap="flat" cmpd="sng" algn="ctr">
                       <a:solidFill>
-                        <a:srgbClr val="d0d0d0"/>
+                        <a:srgbClr val="D0D0D0"/>
                       </a:solidFill>
                       <a:prstDash val="solid"/>
                       <a:round/>
                     </a:lnL>
                     <a:lnR w="12700" cap="flat" cmpd="sng" algn="ctr">
                       <a:solidFill>
-                        <a:srgbClr val="d0d0d0"/>
+                        <a:srgbClr val="D0D0D0"/>
                       </a:solidFill>
                       <a:prstDash val="solid"/>
                       <a:round/>
                     </a:lnR>
                     <a:lnT w="12700" cap="flat" cmpd="sng" algn="ctr">
                       <a:solidFill>
-                        <a:srgbClr val="d0d0d0"/>
+                        <a:srgbClr val="D0D0D0"/>
                       </a:solidFill>
                       <a:prstDash val="solid"/>
                       <a:round/>
                     </a:lnT>
                     <a:lnB w="12700" cap="flat" cmpd="sng" algn="ctr">
                       <a:solidFill>
-                        <a:srgbClr val="d0d0d0"/>
+                        <a:srgbClr val="D0D0D0"/>
                       </a:solidFill>
                       <a:prstDash val="solid"/>
                       <a:round/>
                     </a:lnB>
                   </a:tcPr>
                 </a:tc>
+                <a:extLst>
+                  <a:ext uri="{0D108BD9-81ED-4DB2-BD59-A6C34878D82A}">
+                    <a16:rowId xmlns:a16="http://schemas.microsoft.com/office/drawing/2014/main" val="10007"/>
+                  </a:ext>
+                </a:extLst>
               </a:tr>
               <a:tr h="324612">
                 <a:tc rowSpan="4">
                   <a:txBody>
-                    <a:bodyPr vert="horz" lIns="91440" tIns="45720" rIns="91440" bIns="45720" anchor="ctr" anchorCtr="0"/>
+                    <a:bodyPr/>
+                    <a:lstStyle/>
                     <a:p>
                       <a:pPr marL="0" indent="0" algn="ctr">
                         <a:buNone/>
@@ -11907,7 +11922,7 @@
                       <a:r>
                         <a:rPr lang="en-US" sz="1400" b="0">
                           <a:solidFill>
-                            <a:srgbClr val="7d3c98"/>
+                            <a:srgbClr val="7D3C98"/>
                           </a:solidFill>
                           <a:latin typeface="배달의민족 주아"/>
                           <a:ea typeface="배달의민족 주아"/>
@@ -11915,41 +11930,33 @@
                         </a:rPr>
                         <a:t>히든</a:t>
                       </a:r>
-                      <a:endParaRPr lang="en-US" sz="1400" b="0">
-                        <a:solidFill>
-                          <a:srgbClr val="7d3c98"/>
-                        </a:solidFill>
-                        <a:latin typeface="배달의민족 주아"/>
-                        <a:ea typeface="배달의민족 주아"/>
-                        <a:cs typeface="Calibri"/>
-                      </a:endParaRPr>
                     </a:p>
                   </a:txBody>
-                  <a:tcPr marL="91440" marR="91440" anchor="ctr">
+                  <a:tcPr anchor="ctr">
                     <a:lnL w="12700" cap="flat" cmpd="sng" algn="ctr">
                       <a:solidFill>
-                        <a:srgbClr val="d0d0d0"/>
+                        <a:srgbClr val="D0D0D0"/>
                       </a:solidFill>
                       <a:prstDash val="solid"/>
                       <a:round/>
                     </a:lnL>
                     <a:lnR w="12700" cap="flat" cmpd="sng" algn="ctr">
                       <a:solidFill>
-                        <a:srgbClr val="d0d0d0"/>
+                        <a:srgbClr val="D0D0D0"/>
                       </a:solidFill>
                       <a:prstDash val="solid"/>
                       <a:round/>
                     </a:lnR>
                     <a:lnT w="12700" cap="flat" cmpd="sng" algn="ctr">
                       <a:solidFill>
-                        <a:srgbClr val="d0d0d0"/>
+                        <a:srgbClr val="D0D0D0"/>
                       </a:solidFill>
                       <a:prstDash val="solid"/>
                       <a:round/>
                     </a:lnT>
                     <a:lnB w="12700" cap="flat" cmpd="sng" algn="ctr">
                       <a:solidFill>
-                        <a:srgbClr val="d0d0d0"/>
+                        <a:srgbClr val="D0D0D0"/>
                       </a:solidFill>
                       <a:prstDash val="solid"/>
                       <a:round/>
@@ -11958,7 +11965,8 @@
                 </a:tc>
                 <a:tc>
                   <a:txBody>
-                    <a:bodyPr vert="horz" lIns="91440" tIns="45720" rIns="91440" bIns="45720" anchor="ctr" anchorCtr="0"/>
+                    <a:bodyPr/>
+                    <a:lstStyle/>
                     <a:p>
                       <a:pPr marL="0" indent="0" algn="l">
                         <a:buNone/>
@@ -11967,7 +11975,7 @@
                       <a:r>
                         <a:rPr lang="en-US" sz="1400" b="0">
                           <a:solidFill>
-                            <a:srgbClr val="1a2b3c"/>
+                            <a:srgbClr val="1A2B3C"/>
                           </a:solidFill>
                           <a:latin typeface="배달의민족 주아"/>
                           <a:ea typeface="배달의민족 주아"/>
@@ -11982,31 +11990,31 @@
                       </a:endParaRPr>
                     </a:p>
                   </a:txBody>
-                  <a:tcPr marL="91440" marR="91440" anchor="ctr">
+                  <a:tcPr anchor="ctr">
                     <a:lnL w="12700" cap="flat" cmpd="sng" algn="ctr">
                       <a:solidFill>
-                        <a:srgbClr val="d0d0d0"/>
+                        <a:srgbClr val="D0D0D0"/>
                       </a:solidFill>
                       <a:prstDash val="solid"/>
                       <a:round/>
                     </a:lnL>
                     <a:lnR w="12700" cap="flat" cmpd="sng" algn="ctr">
                       <a:solidFill>
-                        <a:srgbClr val="d0d0d0"/>
+                        <a:srgbClr val="D0D0D0"/>
                       </a:solidFill>
                       <a:prstDash val="solid"/>
                       <a:round/>
                     </a:lnR>
                     <a:lnT w="12700" cap="flat" cmpd="sng" algn="ctr">
                       <a:solidFill>
-                        <a:srgbClr val="d0d0d0"/>
+                        <a:srgbClr val="D0D0D0"/>
                       </a:solidFill>
                       <a:prstDash val="solid"/>
                       <a:round/>
                     </a:lnT>
                     <a:lnB w="12700" cap="flat" cmpd="sng" algn="ctr">
                       <a:solidFill>
-                        <a:srgbClr val="d0d0d0"/>
+                        <a:srgbClr val="D0D0D0"/>
                       </a:solidFill>
                       <a:prstDash val="solid"/>
                       <a:round/>
@@ -12015,7 +12023,8 @@
                 </a:tc>
                 <a:tc>
                   <a:txBody>
-                    <a:bodyPr vert="horz" lIns="91440" tIns="45720" rIns="91440" bIns="45720" anchor="ctr" anchorCtr="0"/>
+                    <a:bodyPr/>
+                    <a:lstStyle/>
                     <a:p>
                       <a:pPr marL="0" indent="0" algn="l">
                         <a:buNone/>
@@ -12024,7 +12033,7 @@
                       <a:r>
                         <a:rPr lang="en-US" sz="1400" b="0">
                           <a:solidFill>
-                            <a:srgbClr val="1a2b3c"/>
+                            <a:srgbClr val="1A2B3C"/>
                           </a:solidFill>
                           <a:latin typeface="배달의민족 주아"/>
                           <a:ea typeface="배달의민족 주아"/>
@@ -12035,7 +12044,7 @@
                       <a:r>
                         <a:rPr lang="en-US" altLang="ko-KR" sz="1400" b="0">
                           <a:solidFill>
-                            <a:srgbClr val="1a2b3c"/>
+                            <a:srgbClr val="1A2B3C"/>
                           </a:solidFill>
                           <a:latin typeface="배달의민족 주아"/>
                           <a:ea typeface="배달의민족 주아"/>
@@ -12046,7 +12055,7 @@
                       <a:r>
                         <a:rPr lang="en-US" sz="1400" b="0">
                           <a:solidFill>
-                            <a:srgbClr val="1a2b3c"/>
+                            <a:srgbClr val="1A2B3C"/>
                           </a:solidFill>
                           <a:latin typeface="배달의민족 주아"/>
                           <a:ea typeface="배달의민족 주아"/>
@@ -12057,7 +12066,7 @@
                       <a:r>
                         <a:rPr lang="en-US" altLang="ko-KR" sz="1400" b="0">
                           <a:solidFill>
-                            <a:srgbClr val="1a2b3c"/>
+                            <a:srgbClr val="1A2B3C"/>
                           </a:solidFill>
                           <a:latin typeface="배달의민족 주아"/>
                           <a:ea typeface="배달의민족 주아"/>
@@ -12068,7 +12077,7 @@
                       <a:r>
                         <a:rPr lang="ko-KR" altLang="en-US" sz="1400" b="0">
                           <a:solidFill>
-                            <a:srgbClr val="1a2b3c"/>
+                            <a:srgbClr val="1A2B3C"/>
                           </a:solidFill>
                           <a:latin typeface="배달의민족 주아"/>
                           <a:ea typeface="배달의민족 주아"/>
@@ -12076,52 +12085,50 @@
                         </a:rPr>
                         <a:t> 선택</a:t>
                       </a:r>
-                      <a:endParaRPr lang="ko-KR" altLang="en-US" sz="1400" b="0">
-                        <a:solidFill>
-                          <a:srgbClr val="1a2b3c"/>
-                        </a:solidFill>
-                        <a:latin typeface="배달의민족 주아"/>
-                        <a:ea typeface="배달의민족 주아"/>
-                        <a:cs typeface="Calibri"/>
-                      </a:endParaRPr>
                     </a:p>
                   </a:txBody>
-                  <a:tcPr marL="91440" marR="91440" anchor="ctr">
+                  <a:tcPr anchor="ctr">
                     <a:lnL w="12700" cap="flat" cmpd="sng" algn="ctr">
                       <a:solidFill>
-                        <a:srgbClr val="d0d0d0"/>
+                        <a:srgbClr val="D0D0D0"/>
                       </a:solidFill>
                       <a:prstDash val="solid"/>
                       <a:round/>
                     </a:lnL>
                     <a:lnR w="12700" cap="flat" cmpd="sng" algn="ctr">
                       <a:solidFill>
-                        <a:srgbClr val="d0d0d0"/>
+                        <a:srgbClr val="D0D0D0"/>
                       </a:solidFill>
                       <a:prstDash val="solid"/>
                       <a:round/>
                     </a:lnR>
                     <a:lnT w="12700" cap="flat" cmpd="sng" algn="ctr">
                       <a:solidFill>
-                        <a:srgbClr val="d0d0d0"/>
+                        <a:srgbClr val="D0D0D0"/>
                       </a:solidFill>
                       <a:prstDash val="solid"/>
                       <a:round/>
                     </a:lnT>
                     <a:lnB w="12700" cap="flat" cmpd="sng" algn="ctr">
                       <a:solidFill>
-                        <a:srgbClr val="d0d0d0"/>
+                        <a:srgbClr val="D0D0D0"/>
                       </a:solidFill>
                       <a:prstDash val="solid"/>
                       <a:round/>
                     </a:lnB>
                   </a:tcPr>
                 </a:tc>
+                <a:extLst>
+                  <a:ext uri="{0D108BD9-81ED-4DB2-BD59-A6C34878D82A}">
+                    <a16:rowId xmlns:a16="http://schemas.microsoft.com/office/drawing/2014/main" val="10008"/>
+                  </a:ext>
+                </a:extLst>
               </a:tr>
               <a:tr h="324612">
                 <a:tc vMerge="1">
                   <a:txBody>
                     <a:bodyPr/>
+                    <a:lstStyle/>
                     <a:p>
                       <a:pPr lvl="0">
                         <a:defRPr/>
@@ -12129,31 +12136,31 @@
                       <a:endParaRPr/>
                     </a:p>
                   </a:txBody>
-                  <a:tcPr marL="91440" marR="91440" anchor="ctr">
+                  <a:tcPr anchor="ctr">
                     <a:lnL w="12700" cap="flat" cmpd="sng" algn="ctr">
                       <a:solidFill>
-                        <a:srgbClr val="d0d0d0"/>
+                        <a:srgbClr val="D0D0D0"/>
                       </a:solidFill>
                       <a:prstDash val="solid"/>
                       <a:round/>
                     </a:lnL>
                     <a:lnR w="12700" cap="flat" cmpd="sng" algn="ctr">
                       <a:solidFill>
-                        <a:srgbClr val="d0d0d0"/>
+                        <a:srgbClr val="D0D0D0"/>
                       </a:solidFill>
                       <a:prstDash val="solid"/>
                       <a:round/>
                     </a:lnR>
                     <a:lnT w="12700" cap="flat" cmpd="sng" algn="ctr">
                       <a:solidFill>
-                        <a:srgbClr val="d0d0d0"/>
+                        <a:srgbClr val="D0D0D0"/>
                       </a:solidFill>
                       <a:prstDash val="solid"/>
                       <a:round/>
                     </a:lnT>
                     <a:lnB w="12700" cap="flat" cmpd="sng" algn="ctr">
                       <a:solidFill>
-                        <a:srgbClr val="d0d0d0"/>
+                        <a:srgbClr val="D0D0D0"/>
                       </a:solidFill>
                       <a:prstDash val="solid"/>
                       <a:round/>
@@ -12162,7 +12169,8 @@
                 </a:tc>
                 <a:tc>
                   <a:txBody>
-                    <a:bodyPr vert="horz" lIns="91440" tIns="45720" rIns="91440" bIns="45720" anchor="ctr" anchorCtr="0"/>
+                    <a:bodyPr/>
+                    <a:lstStyle/>
                     <a:p>
                       <a:pPr marL="0" indent="0" algn="l">
                         <a:buNone/>
@@ -12171,7 +12179,7 @@
                       <a:r>
                         <a:rPr lang="en-US" sz="1400" b="0">
                           <a:solidFill>
-                            <a:srgbClr val="1a2b3c"/>
+                            <a:srgbClr val="1A2B3C"/>
                           </a:solidFill>
                           <a:latin typeface="배달의민족 주아"/>
                           <a:ea typeface="배달의민족 주아"/>
@@ -12186,31 +12194,31 @@
                       </a:endParaRPr>
                     </a:p>
                   </a:txBody>
-                  <a:tcPr marL="91440" marR="91440" anchor="ctr">
+                  <a:tcPr anchor="ctr">
                     <a:lnL w="12700" cap="flat" cmpd="sng" algn="ctr">
                       <a:solidFill>
-                        <a:srgbClr val="d0d0d0"/>
+                        <a:srgbClr val="D0D0D0"/>
                       </a:solidFill>
                       <a:prstDash val="solid"/>
                       <a:round/>
                     </a:lnL>
                     <a:lnR w="12700" cap="flat" cmpd="sng" algn="ctr">
                       <a:solidFill>
-                        <a:srgbClr val="d0d0d0"/>
+                        <a:srgbClr val="D0D0D0"/>
                       </a:solidFill>
                       <a:prstDash val="solid"/>
                       <a:round/>
                     </a:lnR>
                     <a:lnT w="12700" cap="flat" cmpd="sng" algn="ctr">
                       <a:solidFill>
-                        <a:srgbClr val="d0d0d0"/>
+                        <a:srgbClr val="D0D0D0"/>
                       </a:solidFill>
                       <a:prstDash val="solid"/>
                       <a:round/>
                     </a:lnT>
                     <a:lnB w="12700" cap="flat" cmpd="sng" algn="ctr">
                       <a:solidFill>
-                        <a:srgbClr val="d0d0d0"/>
+                        <a:srgbClr val="D0D0D0"/>
                       </a:solidFill>
                       <a:prstDash val="solid"/>
                       <a:round/>
@@ -12219,7 +12227,8 @@
                 </a:tc>
                 <a:tc>
                   <a:txBody>
-                    <a:bodyPr vert="horz" lIns="91440" tIns="45720" rIns="91440" bIns="45720" anchor="ctr" anchorCtr="0"/>
+                    <a:bodyPr/>
+                    <a:lstStyle/>
                     <a:p>
                       <a:pPr marL="0" indent="0" algn="l">
                         <a:buNone/>
@@ -12228,7 +12237,7 @@
                       <a:r>
                         <a:rPr lang="en-US" sz="1400" b="0">
                           <a:solidFill>
-                            <a:srgbClr val="1a2b3c"/>
+                            <a:srgbClr val="1A2B3C"/>
                           </a:solidFill>
                           <a:latin typeface="배달의민족 주아"/>
                           <a:ea typeface="배달의민족 주아"/>
@@ -12239,7 +12248,7 @@
                       <a:r>
                         <a:rPr lang="ko-KR" altLang="en-US" sz="1400" b="0">
                           <a:solidFill>
-                            <a:srgbClr val="1a2b3c"/>
+                            <a:srgbClr val="1A2B3C"/>
                           </a:solidFill>
                           <a:latin typeface="배달의민족 주아"/>
                           <a:ea typeface="배달의민족 주아"/>
@@ -12250,7 +12259,7 @@
                       <a:r>
                         <a:rPr lang="en-US" sz="1400" b="0">
                           <a:solidFill>
-                            <a:srgbClr val="1a2b3c"/>
+                            <a:srgbClr val="1A2B3C"/>
                           </a:solidFill>
                           <a:latin typeface="배달의민족 주아"/>
                           <a:ea typeface="배달의민족 주아"/>
@@ -12258,52 +12267,50 @@
                         </a:rPr>
                         <a:t>≥ 85</a:t>
                       </a:r>
-                      <a:endParaRPr lang="en-US" sz="1400" b="0">
-                        <a:solidFill>
-                          <a:srgbClr val="1a2b3c"/>
-                        </a:solidFill>
-                        <a:latin typeface="배달의민족 주아"/>
-                        <a:ea typeface="배달의민족 주아"/>
-                        <a:cs typeface="Calibri"/>
-                      </a:endParaRPr>
                     </a:p>
                   </a:txBody>
-                  <a:tcPr marL="91440" marR="91440" anchor="ctr">
+                  <a:tcPr anchor="ctr">
                     <a:lnL w="12700" cap="flat" cmpd="sng" algn="ctr">
                       <a:solidFill>
-                        <a:srgbClr val="d0d0d0"/>
+                        <a:srgbClr val="D0D0D0"/>
                       </a:solidFill>
                       <a:prstDash val="solid"/>
                       <a:round/>
                     </a:lnL>
                     <a:lnR w="12700" cap="flat" cmpd="sng" algn="ctr">
                       <a:solidFill>
-                        <a:srgbClr val="d0d0d0"/>
+                        <a:srgbClr val="D0D0D0"/>
                       </a:solidFill>
                       <a:prstDash val="solid"/>
                       <a:round/>
                     </a:lnR>
                     <a:lnT w="12700" cap="flat" cmpd="sng" algn="ctr">
                       <a:solidFill>
-                        <a:srgbClr val="d0d0d0"/>
+                        <a:srgbClr val="D0D0D0"/>
                       </a:solidFill>
                       <a:prstDash val="solid"/>
                       <a:round/>
                     </a:lnT>
                     <a:lnB w="12700" cap="flat" cmpd="sng" algn="ctr">
                       <a:solidFill>
-                        <a:srgbClr val="d0d0d0"/>
+                        <a:srgbClr val="D0D0D0"/>
                       </a:solidFill>
                       <a:prstDash val="solid"/>
                       <a:round/>
                     </a:lnB>
                   </a:tcPr>
                 </a:tc>
+                <a:extLst>
+                  <a:ext uri="{0D108BD9-81ED-4DB2-BD59-A6C34878D82A}">
+                    <a16:rowId xmlns:a16="http://schemas.microsoft.com/office/drawing/2014/main" val="10009"/>
+                  </a:ext>
+                </a:extLst>
               </a:tr>
               <a:tr h="324612">
                 <a:tc vMerge="1">
                   <a:txBody>
                     <a:bodyPr/>
+                    <a:lstStyle/>
                     <a:p>
                       <a:pPr lvl="0">
                         <a:defRPr/>
@@ -12311,31 +12318,31 @@
                       <a:endParaRPr/>
                     </a:p>
                   </a:txBody>
-                  <a:tcPr marL="91440" marR="91440" anchor="ctr">
+                  <a:tcPr anchor="ctr">
                     <a:lnL w="12700" cap="flat" cmpd="sng" algn="ctr">
                       <a:solidFill>
-                        <a:srgbClr val="d0d0d0"/>
+                        <a:srgbClr val="D0D0D0"/>
                       </a:solidFill>
                       <a:prstDash val="solid"/>
                       <a:round/>
                     </a:lnL>
                     <a:lnR w="12700" cap="flat" cmpd="sng" algn="ctr">
                       <a:solidFill>
-                        <a:srgbClr val="d0d0d0"/>
+                        <a:srgbClr val="D0D0D0"/>
                       </a:solidFill>
                       <a:prstDash val="solid"/>
                       <a:round/>
                     </a:lnR>
                     <a:lnT w="12700" cap="flat" cmpd="sng" algn="ctr">
                       <a:solidFill>
-                        <a:srgbClr val="d0d0d0"/>
+                        <a:srgbClr val="D0D0D0"/>
                       </a:solidFill>
                       <a:prstDash val="solid"/>
                       <a:round/>
                     </a:lnT>
                     <a:lnB w="12700" cap="flat" cmpd="sng" algn="ctr">
                       <a:solidFill>
-                        <a:srgbClr val="d0d0d0"/>
+                        <a:srgbClr val="D0D0D0"/>
                       </a:solidFill>
                       <a:prstDash val="solid"/>
                       <a:round/>
@@ -12344,7 +12351,8 @@
                 </a:tc>
                 <a:tc>
                   <a:txBody>
-                    <a:bodyPr vert="horz" lIns="91440" tIns="45720" rIns="91440" bIns="45720" anchor="ctr" anchorCtr="0"/>
+                    <a:bodyPr/>
+                    <a:lstStyle/>
                     <a:p>
                       <a:pPr marL="0" indent="0" algn="l">
                         <a:buNone/>
@@ -12353,7 +12361,7 @@
                       <a:r>
                         <a:rPr lang="en-US" sz="1400" b="0">
                           <a:solidFill>
-                            <a:srgbClr val="1a2b3c"/>
+                            <a:srgbClr val="1A2B3C"/>
                           </a:solidFill>
                           <a:latin typeface="배달의민족 주아"/>
                           <a:ea typeface="배달의민족 주아"/>
@@ -12368,31 +12376,31 @@
                       </a:endParaRPr>
                     </a:p>
                   </a:txBody>
-                  <a:tcPr marL="91440" marR="91440" anchor="ctr">
+                  <a:tcPr anchor="ctr">
                     <a:lnL w="12700" cap="flat" cmpd="sng" algn="ctr">
                       <a:solidFill>
-                        <a:srgbClr val="d0d0d0"/>
+                        <a:srgbClr val="D0D0D0"/>
                       </a:solidFill>
                       <a:prstDash val="solid"/>
                       <a:round/>
                     </a:lnL>
                     <a:lnR w="12700" cap="flat" cmpd="sng" algn="ctr">
                       <a:solidFill>
-                        <a:srgbClr val="d0d0d0"/>
+                        <a:srgbClr val="D0D0D0"/>
                       </a:solidFill>
                       <a:prstDash val="solid"/>
                       <a:round/>
                     </a:lnR>
                     <a:lnT w="12700" cap="flat" cmpd="sng" algn="ctr">
                       <a:solidFill>
-                        <a:srgbClr val="d0d0d0"/>
+                        <a:srgbClr val="D0D0D0"/>
                       </a:solidFill>
                       <a:prstDash val="solid"/>
                       <a:round/>
                     </a:lnT>
                     <a:lnB w="12700" cap="flat" cmpd="sng" algn="ctr">
                       <a:solidFill>
-                        <a:srgbClr val="d0d0d0"/>
+                        <a:srgbClr val="D0D0D0"/>
                       </a:solidFill>
                       <a:prstDash val="solid"/>
                       <a:round/>
@@ -12401,7 +12409,8 @@
                 </a:tc>
                 <a:tc>
                   <a:txBody>
-                    <a:bodyPr vert="horz" lIns="91440" tIns="45720" rIns="91440" bIns="45720" anchor="ctr" anchorCtr="0"/>
+                    <a:bodyPr/>
+                    <a:lstStyle/>
                     <a:p>
                       <a:pPr marL="0" indent="0" algn="l">
                         <a:buNone/>
@@ -12410,7 +12419,7 @@
                       <a:r>
                         <a:rPr lang="en-US" sz="1400" b="0">
                           <a:solidFill>
-                            <a:srgbClr val="1a2b3c"/>
+                            <a:srgbClr val="1A2B3C"/>
                           </a:solidFill>
                           <a:latin typeface="배달의민족 주아"/>
                           <a:ea typeface="배달의민족 주아"/>
@@ -12421,7 +12430,7 @@
                       <a:r>
                         <a:rPr lang="ko-KR" altLang="en-US" sz="1400" b="0">
                           <a:solidFill>
-                            <a:srgbClr val="1a2b3c"/>
+                            <a:srgbClr val="1A2B3C"/>
                           </a:solidFill>
                           <a:latin typeface="배달의민족 주아"/>
                           <a:ea typeface="배달의민족 주아"/>
@@ -12432,7 +12441,7 @@
                       <a:r>
                         <a:rPr lang="en-US" sz="1400" b="0">
                           <a:solidFill>
-                            <a:srgbClr val="1a2b3c"/>
+                            <a:srgbClr val="1A2B3C"/>
                           </a:solidFill>
                           <a:latin typeface="배달의민족 주아"/>
                           <a:ea typeface="배달의민족 주아"/>
@@ -12440,52 +12449,50 @@
                         </a:rPr>
                         <a:t>85</a:t>
                       </a:r>
-                      <a:endParaRPr lang="en-US" sz="1400" b="0">
-                        <a:solidFill>
-                          <a:srgbClr val="1a2b3c"/>
-                        </a:solidFill>
-                        <a:latin typeface="배달의민족 주아"/>
-                        <a:ea typeface="배달의민족 주아"/>
-                        <a:cs typeface="Calibri"/>
-                      </a:endParaRPr>
                     </a:p>
                   </a:txBody>
-                  <a:tcPr marL="91440" marR="91440" anchor="ctr">
+                  <a:tcPr anchor="ctr">
                     <a:lnL w="12700" cap="flat" cmpd="sng" algn="ctr">
                       <a:solidFill>
-                        <a:srgbClr val="d0d0d0"/>
+                        <a:srgbClr val="D0D0D0"/>
                       </a:solidFill>
                       <a:prstDash val="solid"/>
                       <a:round/>
                     </a:lnL>
                     <a:lnR w="12700" cap="flat" cmpd="sng" algn="ctr">
                       <a:solidFill>
-                        <a:srgbClr val="d0d0d0"/>
+                        <a:srgbClr val="D0D0D0"/>
                       </a:solidFill>
                       <a:prstDash val="solid"/>
                       <a:round/>
                     </a:lnR>
                     <a:lnT w="12700" cap="flat" cmpd="sng" algn="ctr">
                       <a:solidFill>
-                        <a:srgbClr val="d0d0d0"/>
+                        <a:srgbClr val="D0D0D0"/>
                       </a:solidFill>
                       <a:prstDash val="solid"/>
                       <a:round/>
                     </a:lnT>
                     <a:lnB w="12700" cap="flat" cmpd="sng" algn="ctr">
                       <a:solidFill>
-                        <a:srgbClr val="d0d0d0"/>
+                        <a:srgbClr val="D0D0D0"/>
                       </a:solidFill>
                       <a:prstDash val="solid"/>
                       <a:round/>
                     </a:lnB>
                   </a:tcPr>
                 </a:tc>
+                <a:extLst>
+                  <a:ext uri="{0D108BD9-81ED-4DB2-BD59-A6C34878D82A}">
+                    <a16:rowId xmlns:a16="http://schemas.microsoft.com/office/drawing/2014/main" val="10010"/>
+                  </a:ext>
+                </a:extLst>
               </a:tr>
               <a:tr h="324612">
                 <a:tc vMerge="1">
                   <a:txBody>
                     <a:bodyPr/>
+                    <a:lstStyle/>
                     <a:p>
                       <a:pPr lvl="0">
                         <a:defRPr/>
@@ -12493,31 +12500,31 @@
                       <a:endParaRPr/>
                     </a:p>
                   </a:txBody>
-                  <a:tcPr marL="91440" marR="91440" anchor="ctr">
+                  <a:tcPr anchor="ctr">
                     <a:lnL w="12700" cap="flat" cmpd="sng" algn="ctr">
                       <a:solidFill>
-                        <a:srgbClr val="d0d0d0"/>
+                        <a:srgbClr val="D0D0D0"/>
                       </a:solidFill>
                       <a:prstDash val="solid"/>
                       <a:round/>
                     </a:lnL>
                     <a:lnR w="12700" cap="flat" cmpd="sng" algn="ctr">
                       <a:solidFill>
-                        <a:srgbClr val="d0d0d0"/>
+                        <a:srgbClr val="D0D0D0"/>
                       </a:solidFill>
                       <a:prstDash val="solid"/>
                       <a:round/>
                     </a:lnR>
                     <a:lnT w="12700" cap="flat" cmpd="sng" algn="ctr">
                       <a:solidFill>
-                        <a:srgbClr val="d0d0d0"/>
+                        <a:srgbClr val="D0D0D0"/>
                       </a:solidFill>
                       <a:prstDash val="solid"/>
                       <a:round/>
                     </a:lnT>
                     <a:lnB w="12700" cap="flat" cmpd="sng" algn="ctr">
                       <a:solidFill>
-                        <a:srgbClr val="d0d0d0"/>
+                        <a:srgbClr val="D0D0D0"/>
                       </a:solidFill>
                       <a:prstDash val="solid"/>
                       <a:round/>
@@ -12526,7 +12533,8 @@
                 </a:tc>
                 <a:tc>
                   <a:txBody>
-                    <a:bodyPr vert="horz" lIns="91440" tIns="45720" rIns="91440" bIns="45720" anchor="ctr" anchorCtr="0"/>
+                    <a:bodyPr/>
+                    <a:lstStyle/>
                     <a:p>
                       <a:pPr marL="0" indent="0" algn="l">
                         <a:buNone/>
@@ -12535,7 +12543,7 @@
                       <a:r>
                         <a:rPr lang="en-US" sz="1400" b="0">
                           <a:solidFill>
-                            <a:srgbClr val="1a2b3c"/>
+                            <a:srgbClr val="1A2B3C"/>
                           </a:solidFill>
                           <a:latin typeface="배달의민족 주아"/>
                           <a:ea typeface="배달의민족 주아"/>
@@ -12550,31 +12558,31 @@
                       </a:endParaRPr>
                     </a:p>
                   </a:txBody>
-                  <a:tcPr marL="91440" marR="91440" anchor="ctr">
+                  <a:tcPr anchor="ctr">
                     <a:lnL w="12700" cap="flat" cmpd="sng" algn="ctr">
                       <a:solidFill>
-                        <a:srgbClr val="d0d0d0"/>
+                        <a:srgbClr val="D0D0D0"/>
                       </a:solidFill>
                       <a:prstDash val="solid"/>
                       <a:round/>
                     </a:lnL>
                     <a:lnR w="12700" cap="flat" cmpd="sng" algn="ctr">
                       <a:solidFill>
-                        <a:srgbClr val="d0d0d0"/>
+                        <a:srgbClr val="D0D0D0"/>
                       </a:solidFill>
                       <a:prstDash val="solid"/>
                       <a:round/>
                     </a:lnR>
                     <a:lnT w="12700" cap="flat" cmpd="sng" algn="ctr">
                       <a:solidFill>
-                        <a:srgbClr val="d0d0d0"/>
+                        <a:srgbClr val="D0D0D0"/>
                       </a:solidFill>
                       <a:prstDash val="solid"/>
                       <a:round/>
                     </a:lnT>
                     <a:lnB w="12700" cap="flat" cmpd="sng" algn="ctr">
                       <a:solidFill>
-                        <a:srgbClr val="d0d0d0"/>
+                        <a:srgbClr val="D0D0D0"/>
                       </a:solidFill>
                       <a:prstDash val="solid"/>
                       <a:round/>
@@ -12583,7 +12591,8 @@
                 </a:tc>
                 <a:tc>
                   <a:txBody>
-                    <a:bodyPr vert="horz" lIns="91440" tIns="45720" rIns="91440" bIns="45720" anchor="ctr" anchorCtr="0"/>
+                    <a:bodyPr/>
+                    <a:lstStyle/>
                     <a:p>
                       <a:pPr marL="0" indent="0" algn="l">
                         <a:buNone/>
@@ -12592,7 +12601,7 @@
                       <a:r>
                         <a:rPr lang="en-US" sz="1400" b="0">
                           <a:solidFill>
-                            <a:srgbClr val="1a2b3c"/>
+                            <a:srgbClr val="1A2B3C"/>
                           </a:solidFill>
                           <a:latin typeface="배달의민족 주아"/>
                           <a:ea typeface="배달의민족 주아"/>
@@ -12603,7 +12612,7 @@
                       <a:r>
                         <a:rPr lang="ko-KR" altLang="en-US" sz="1400" b="0">
                           <a:solidFill>
-                            <a:srgbClr val="1a2b3c"/>
+                            <a:srgbClr val="1A2B3C"/>
                           </a:solidFill>
                           <a:latin typeface="배달의민족 주아"/>
                           <a:ea typeface="배달의민족 주아"/>
@@ -12614,7 +12623,7 @@
                       <a:r>
                         <a:rPr lang="en-US" sz="1400" b="0">
                           <a:solidFill>
-                            <a:srgbClr val="1a2b3c"/>
+                            <a:srgbClr val="1A2B3C"/>
                           </a:solidFill>
                           <a:latin typeface="배달의민족 주아"/>
                           <a:ea typeface="배달의민족 주아"/>
@@ -12622,47 +12631,44 @@
                         </a:rPr>
                         <a:t>85</a:t>
                       </a:r>
-                      <a:endParaRPr lang="en-US" sz="1400" b="0">
-                        <a:solidFill>
-                          <a:srgbClr val="1a2b3c"/>
-                        </a:solidFill>
-                        <a:latin typeface="배달의민족 주아"/>
-                        <a:ea typeface="배달의민족 주아"/>
-                        <a:cs typeface="Calibri"/>
-                      </a:endParaRPr>
                     </a:p>
                   </a:txBody>
-                  <a:tcPr marL="91440" marR="91440" anchor="ctr">
+                  <a:tcPr anchor="ctr">
                     <a:lnL w="12700" cap="flat" cmpd="sng" algn="ctr">
                       <a:solidFill>
-                        <a:srgbClr val="d0d0d0"/>
+                        <a:srgbClr val="D0D0D0"/>
                       </a:solidFill>
                       <a:prstDash val="solid"/>
                       <a:round/>
                     </a:lnL>
                     <a:lnR w="12700" cap="flat" cmpd="sng" algn="ctr">
                       <a:solidFill>
-                        <a:srgbClr val="d0d0d0"/>
+                        <a:srgbClr val="D0D0D0"/>
                       </a:solidFill>
                       <a:prstDash val="solid"/>
                       <a:round/>
                     </a:lnR>
                     <a:lnT w="12700" cap="flat" cmpd="sng" algn="ctr">
                       <a:solidFill>
-                        <a:srgbClr val="d0d0d0"/>
+                        <a:srgbClr val="D0D0D0"/>
                       </a:solidFill>
                       <a:prstDash val="solid"/>
                       <a:round/>
                     </a:lnT>
                     <a:lnB w="12700" cap="flat" cmpd="sng" algn="ctr">
                       <a:solidFill>
-                        <a:srgbClr val="d0d0d0"/>
+                        <a:srgbClr val="D0D0D0"/>
                       </a:solidFill>
                       <a:prstDash val="solid"/>
                       <a:round/>
                     </a:lnB>
                   </a:tcPr>
                 </a:tc>
+                <a:extLst>
+                  <a:ext uri="{0D108BD9-81ED-4DB2-BD59-A6C34878D82A}">
+                    <a16:rowId xmlns:a16="http://schemas.microsoft.com/office/drawing/2014/main" val="10011"/>
+                  </a:ext>
+                </a:extLst>
               </a:tr>
             </a:tbl>
           </a:graphicData>
@@ -12683,7 +12689,7 @@
             <a:avLst/>
           </a:prstGeom>
           <a:solidFill>
-            <a:srgbClr val="3fbfa6">
+            <a:srgbClr val="3FBFA6">
               <a:alpha val="50000"/>
             </a:srgbClr>
           </a:solidFill>
@@ -12694,6 +12700,7 @@
         </p:spPr>
         <p:txBody>
           <a:bodyPr anchor="ctr"/>
+          <a:lstStyle/>
           <a:p>
             <a:pPr algn="ctr">
               <a:defRPr/>
@@ -12717,7 +12724,7 @@
             <a:avLst/>
           </a:prstGeom>
           <a:solidFill>
-            <a:srgbClr val="3fbfa6">
+            <a:srgbClr val="3FBFA6">
               <a:alpha val="50000"/>
             </a:srgbClr>
           </a:solidFill>
@@ -12728,6 +12735,7 @@
         </p:spPr>
         <p:txBody>
           <a:bodyPr anchor="ctr"/>
+          <a:lstStyle/>
           <a:p>
             <a:pPr algn="ctr">
               <a:defRPr/>
@@ -12741,11 +12749,11 @@
   <p:clrMapOvr>
     <a:masterClrMapping/>
   </p:clrMapOvr>
-  <mc:AlternateContent xmlns:mc="http://schemas.openxmlformats.org/markup-compatibility/2006">
-    <mc:Choice xmlns:p14="http://schemas.microsoft.com/office/powerpoint/2010/main" Requires="p14">
-      <p:transition xmlns:mc="http://schemas.openxmlformats.org/markup-compatibility/2006" xmlns:p14="http://schemas.microsoft.com/office/powerpoint/2010/main" mc:Ignorable="p14" p14:dur="500"/>
+  <mc:AlternateContent xmlns:mc="http://schemas.openxmlformats.org/markup-compatibility/2006" xmlns:p14="http://schemas.microsoft.com/office/powerpoint/2010/main">
+    <mc:Choice Requires="p14">
+      <p:transition/>
     </mc:Choice>
-    <mc:Fallback>
+    <mc:Fallback xmlns:dsp="http://schemas.microsoft.com/office/drawing/2008/diagram" xmlns:dgm="http://schemas.openxmlformats.org/drawingml/2006/diagram" xmlns:c="http://schemas.openxmlformats.org/drawingml/2006/chart" xmlns="">
       <p:transition/>
     </mc:Fallback>
   </mc:AlternateContent>
@@ -12753,13 +12761,14 @@
 </file>
 
 <file path=ppt/slides/slide8.xml><?xml version="1.0" encoding="utf-8"?>
-<p:sld xmlns:r="http://schemas.openxmlformats.org/officeDocument/2006/relationships" xmlns:c="http://schemas.openxmlformats.org/drawingml/2006/chart" xmlns:a="http://schemas.openxmlformats.org/drawingml/2006/main" xmlns:dgm="http://schemas.openxmlformats.org/drawingml/2006/diagram" xmlns:dsp="http://schemas.microsoft.com/office/drawing/2008/diagram" xmlns:p="http://schemas.openxmlformats.org/presentationml/2006/main">
+<p:sld xmlns:a="http://schemas.openxmlformats.org/drawingml/2006/main" xmlns:r="http://schemas.openxmlformats.org/officeDocument/2006/relationships" xmlns:p="http://schemas.openxmlformats.org/presentationml/2006/main">
   <p:cSld name="Slide 8">
     <p:bg>
-      <p:bgPr shadeToTitle="0">
+      <p:bgPr>
         <a:solidFill>
-          <a:srgbClr val="f4f7fa"/>
+          <a:srgbClr val="F4F7FA"/>
         </a:solidFill>
+        <a:effectLst/>
       </p:bgPr>
     </p:bg>
     <p:spTree>
@@ -12804,7 +12813,7 @@
             <a:r>
               <a:rPr lang="en-US" sz="3300">
                 <a:solidFill>
-                  <a:srgbClr val="1a2b3c"/>
+                  <a:srgbClr val="1A2B3C"/>
                 </a:solidFill>
                 <a:latin typeface="SB 어그로 Bold"/>
                 <a:ea typeface="SB 어그로 Bold"/>
@@ -12834,17 +12843,18 @@
             <a:avLst/>
           </a:prstGeom>
           <a:solidFill>
-            <a:srgbClr val="3fbfa6"/>
+            <a:srgbClr val="3FBFA6"/>
           </a:solidFill>
           <a:ln w="12700">
             <a:solidFill>
-              <a:srgbClr val="3fbfa6"/>
+              <a:srgbClr val="3FBFA6"/>
             </a:solidFill>
             <a:prstDash val="solid"/>
           </a:ln>
         </p:spPr>
         <p:txBody>
           <a:bodyPr anchor="ctr"/>
+          <a:lstStyle/>
           <a:p>
             <a:pPr algn="ctr">
               <a:defRPr/>
@@ -12868,11 +12878,11 @@
             <a:avLst/>
           </a:prstGeom>
           <a:solidFill>
-            <a:srgbClr val="ffffff"/>
+            <a:srgbClr val="FFFFFF"/>
           </a:solidFill>
           <a:ln w="12700">
             <a:solidFill>
-              <a:srgbClr val="f4a261"/>
+              <a:srgbClr val="F4A261"/>
             </a:solidFill>
             <a:prstDash val="solid"/>
           </a:ln>
@@ -12886,6 +12896,7 @@
         </p:spPr>
         <p:txBody>
           <a:bodyPr anchor="ctr"/>
+          <a:lstStyle/>
           <a:p>
             <a:pPr algn="ctr">
               <a:defRPr/>
@@ -12909,17 +12920,18 @@
             <a:avLst/>
           </a:prstGeom>
           <a:solidFill>
-            <a:srgbClr val="f4a261"/>
+            <a:srgbClr val="F4A261"/>
           </a:solidFill>
           <a:ln w="12700">
             <a:solidFill>
-              <a:srgbClr val="f4a261"/>
+              <a:srgbClr val="F4A261"/>
             </a:solidFill>
             <a:prstDash val="solid"/>
           </a:ln>
         </p:spPr>
         <p:txBody>
           <a:bodyPr anchor="ctr"/>
+          <a:lstStyle/>
           <a:p>
             <a:pPr algn="ctr">
               <a:defRPr/>
@@ -12956,7 +12968,7 @@
             <a:r>
               <a:rPr lang="en-US" sz="1200" b="1">
                 <a:solidFill>
-                  <a:srgbClr val="ffffff"/>
+                  <a:srgbClr val="FFFFFF"/>
                 </a:solidFill>
                 <a:latin typeface="배달의민족 주아"/>
                 <a:ea typeface="배달의민족 주아"/>
@@ -12999,7 +13011,7 @@
             <a:r>
               <a:rPr lang="en-US" sz="1050">
                 <a:solidFill>
-                  <a:srgbClr val="1a2b3c"/>
+                  <a:srgbClr val="1A2B3C"/>
                 </a:solidFill>
                 <a:latin typeface="배달의민족 주아"/>
                 <a:ea typeface="배달의민족 주아"/>
@@ -13007,14 +13019,6 @@
               </a:rPr>
               <a:t>한글 컴파일 오류</a:t>
             </a:r>
-            <a:endParaRPr lang="en-US" sz="1050">
-              <a:solidFill>
-                <a:srgbClr val="1a2b3c"/>
-              </a:solidFill>
-              <a:latin typeface="배달의민족 주아"/>
-              <a:ea typeface="배달의민족 주아"/>
-              <a:cs typeface="Calibri"/>
-            </a:endParaRPr>
           </a:p>
           <a:p>
             <a:pPr marL="0" indent="0" algn="l">
@@ -13024,7 +13028,7 @@
             <a:r>
               <a:rPr lang="en-US" sz="1050">
                 <a:solidFill>
-                  <a:srgbClr val="1a2b3c"/>
+                  <a:srgbClr val="1A2B3C"/>
                 </a:solidFill>
                 <a:latin typeface="배달의민족 주아"/>
                 <a:ea typeface="배달의민족 주아"/>
@@ -13032,14 +13036,6 @@
               </a:rPr>
               <a:t>팀원별 Windows 코드페이지 </a:t>
             </a:r>
-            <a:endParaRPr lang="en-US" sz="1050">
-              <a:solidFill>
-                <a:srgbClr val="1a2b3c"/>
-              </a:solidFill>
-              <a:latin typeface="배달의민족 주아"/>
-              <a:ea typeface="배달의민족 주아"/>
-              <a:cs typeface="Calibri"/>
-            </a:endParaRPr>
           </a:p>
           <a:p>
             <a:pPr marL="0" indent="0" algn="l">
@@ -13049,7 +13045,7 @@
             <a:r>
               <a:rPr lang="en-US" sz="1050">
                 <a:solidFill>
-                  <a:srgbClr val="1a2b3c"/>
+                  <a:srgbClr val="1A2B3C"/>
                 </a:solidFill>
                 <a:latin typeface="배달의민족 주아"/>
                 <a:ea typeface="배달의민족 주아"/>
@@ -13060,7 +13056,7 @@
             <a:r>
               <a:rPr lang="ko-KR" altLang="en-US" sz="1050">
                 <a:solidFill>
-                  <a:srgbClr val="1a2b3c"/>
+                  <a:srgbClr val="1A2B3C"/>
                 </a:solidFill>
                 <a:latin typeface="배달의민족 주아"/>
                 <a:ea typeface="배달의민족 주아"/>
@@ -13071,7 +13067,7 @@
             <a:r>
               <a:rPr lang="en-US" sz="1050">
                 <a:solidFill>
-                  <a:srgbClr val="1a2b3c"/>
+                  <a:srgbClr val="1A2B3C"/>
                 </a:solidFill>
                 <a:latin typeface="배달의민족 주아"/>
                 <a:ea typeface="배달의민족 주아"/>
@@ -13079,14 +13075,6 @@
               </a:rPr>
               <a:t>한글 문자열 컴파일 불가</a:t>
             </a:r>
-            <a:endParaRPr lang="en-US" sz="1050">
-              <a:solidFill>
-                <a:srgbClr val="1a2b3c"/>
-              </a:solidFill>
-              <a:latin typeface="배달의민족 주아"/>
-              <a:ea typeface="배달의민족 주아"/>
-              <a:cs typeface="Calibri"/>
-            </a:endParaRPr>
           </a:p>
         </p:txBody>
       </p:sp>
@@ -13105,11 +13093,11 @@
             <a:avLst/>
           </a:prstGeom>
           <a:solidFill>
-            <a:srgbClr val="ffffff"/>
+            <a:srgbClr val="FFFFFF"/>
           </a:solidFill>
           <a:ln w="12700">
             <a:solidFill>
-              <a:srgbClr val="27ae60"/>
+              <a:srgbClr val="27AE60"/>
             </a:solidFill>
             <a:prstDash val="solid"/>
           </a:ln>
@@ -13123,6 +13111,7 @@
         </p:spPr>
         <p:txBody>
           <a:bodyPr anchor="ctr"/>
+          <a:lstStyle/>
           <a:p>
             <a:pPr algn="ctr">
               <a:defRPr/>
@@ -13146,17 +13135,18 @@
             <a:avLst/>
           </a:prstGeom>
           <a:solidFill>
-            <a:srgbClr val="27ae60"/>
+            <a:srgbClr val="27AE60"/>
           </a:solidFill>
           <a:ln w="12700">
             <a:solidFill>
-              <a:srgbClr val="27ae60"/>
+              <a:srgbClr val="27AE60"/>
             </a:solidFill>
             <a:prstDash val="solid"/>
           </a:ln>
         </p:spPr>
         <p:txBody>
           <a:bodyPr anchor="ctr"/>
+          <a:lstStyle/>
           <a:p>
             <a:pPr algn="ctr">
               <a:defRPr/>
@@ -13193,7 +13183,7 @@
             <a:r>
               <a:rPr lang="en-US" sz="1200" b="1">
                 <a:solidFill>
-                  <a:srgbClr val="ffffff"/>
+                  <a:srgbClr val="FFFFFF"/>
                 </a:solidFill>
                 <a:latin typeface="배달의민족 주아"/>
                 <a:ea typeface="배달의민족 주아"/>
@@ -13237,7 +13227,7 @@
             <a:r>
               <a:rPr lang="en-US" sz="1050">
                 <a:solidFill>
-                  <a:srgbClr val="1a2b3c"/>
+                  <a:srgbClr val="1A2B3C"/>
                 </a:solidFill>
                 <a:latin typeface="배달의민족 주아"/>
                 <a:ea typeface="배달의민족 주아"/>
@@ -13245,14 +13235,6 @@
               </a:rPr>
               <a:t>/utf-8 옵션 적용</a:t>
             </a:r>
-            <a:endParaRPr lang="en-US" sz="1050">
-              <a:solidFill>
-                <a:srgbClr val="1a2b3c"/>
-              </a:solidFill>
-              <a:latin typeface="배달의민족 주아"/>
-              <a:ea typeface="배달의민족 주아"/>
-              <a:cs typeface="Consolas"/>
-            </a:endParaRPr>
           </a:p>
           <a:p>
             <a:pPr marL="171450" indent="-171450" algn="l">
@@ -13263,7 +13245,7 @@
             <a:r>
               <a:rPr lang="en-US" sz="1050">
                 <a:solidFill>
-                  <a:srgbClr val="1a2b3c"/>
+                  <a:srgbClr val="1A2B3C"/>
                 </a:solidFill>
                 <a:latin typeface="배달의민족 주아"/>
                 <a:ea typeface="배달의민족 주아"/>
@@ -13293,11 +13275,11 @@
             <a:avLst/>
           </a:prstGeom>
           <a:solidFill>
-            <a:srgbClr val="ffffff"/>
+            <a:srgbClr val="FFFFFF"/>
           </a:solidFill>
           <a:ln w="12700">
             <a:solidFill>
-              <a:srgbClr val="2471a3"/>
+              <a:srgbClr val="2471A3"/>
             </a:solidFill>
             <a:prstDash val="solid"/>
           </a:ln>
@@ -13311,6 +13293,7 @@
         </p:spPr>
         <p:txBody>
           <a:bodyPr anchor="ctr"/>
+          <a:lstStyle/>
           <a:p>
             <a:pPr algn="ctr">
               <a:defRPr/>
@@ -13334,17 +13317,18 @@
             <a:avLst/>
           </a:prstGeom>
           <a:solidFill>
-            <a:srgbClr val="2471a3"/>
+            <a:srgbClr val="2471A3"/>
           </a:solidFill>
           <a:ln w="12700">
             <a:solidFill>
-              <a:srgbClr val="2471a3"/>
+              <a:srgbClr val="2471A3"/>
             </a:solidFill>
             <a:prstDash val="solid"/>
           </a:ln>
         </p:spPr>
         <p:txBody>
           <a:bodyPr anchor="ctr"/>
+          <a:lstStyle/>
           <a:p>
             <a:pPr algn="ctr">
               <a:defRPr/>
@@ -13381,7 +13365,7 @@
             <a:r>
               <a:rPr lang="en-US" sz="1200" b="1">
                 <a:solidFill>
-                  <a:srgbClr val="ffffff"/>
+                  <a:srgbClr val="FFFFFF"/>
                 </a:solidFill>
                 <a:latin typeface="배달의민족 주아"/>
                 <a:ea typeface="배달의민족 주아"/>
@@ -13424,7 +13408,7 @@
             <a:r>
               <a:rPr lang="en-US" sz="1050">
                 <a:solidFill>
-                  <a:srgbClr val="1a2b3c"/>
+                  <a:srgbClr val="1A2B3C"/>
                 </a:solidFill>
                 <a:latin typeface="배달의민족 주아"/>
                 <a:ea typeface="배달의민족 주아"/>
@@ -13432,9 +13416,33 @@
               </a:rPr>
               <a:t>런타임 한글 깨짐</a:t>
             </a:r>
+          </a:p>
+          <a:p>
+            <a:pPr marL="0" indent="0" algn="l">
+              <a:buNone/>
+              <a:defRPr/>
+            </a:pPr>
+            <a:r>
+              <a:rPr lang="en-US" sz="1050">
+                <a:solidFill>
+                  <a:srgbClr val="1A2B3C"/>
+                </a:solidFill>
+                <a:latin typeface="배달의민족 주아"/>
+                <a:ea typeface="배달의민족 주아"/>
+                <a:cs typeface="Calibri"/>
+              </a:rPr>
+              <a:t>터미널 출력 인코딩과</a:t>
+            </a:r>
+            <a:r>
+              <a:rPr lang="en-US" sz="1050">
+                <a:latin typeface="배달의민족 주아"/>
+                <a:ea typeface="배달의민족 주아"/>
+              </a:rPr>
+              <a:t> </a:t>
+            </a:r>
             <a:endParaRPr lang="en-US" sz="1050">
               <a:solidFill>
-                <a:srgbClr val="1a2b3c"/>
+                <a:srgbClr val="1A2B3C"/>
               </a:solidFill>
               <a:latin typeface="배달의민족 주아"/>
               <a:ea typeface="배달의민족 주아"/>
@@ -13449,76 +13457,36 @@
             <a:r>
               <a:rPr lang="en-US" sz="1050">
                 <a:solidFill>
-                  <a:srgbClr val="1a2b3c"/>
+                  <a:srgbClr val="1A2B3C"/>
                 </a:solidFill>
                 <a:latin typeface="배달의민족 주아"/>
                 <a:ea typeface="배달의민족 주아"/>
                 <a:cs typeface="Calibri"/>
               </a:rPr>
-              <a:t>터미널 출력 인코딩과</a:t>
-            </a:r>
-            <a:r>
-              <a:rPr lang="en-US" sz="1050">
-                <a:latin typeface="배달의민족 주아"/>
-                <a:ea typeface="배달의민족 주아"/>
-              </a:rPr>
-              <a:t> </a:t>
-            </a:r>
-            <a:endParaRPr lang="en-US" sz="1050">
-              <a:solidFill>
-                <a:srgbClr val="1a2b3c"/>
-              </a:solidFill>
-              <a:latin typeface="배달의민족 주아"/>
-              <a:ea typeface="배달의민족 주아"/>
-              <a:cs typeface="Calibri"/>
-            </a:endParaRPr>
-          </a:p>
-          <a:p>
-            <a:pPr marL="0" indent="0" algn="l">
-              <a:buNone/>
-              <a:defRPr/>
-            </a:pPr>
-            <a:r>
-              <a:rPr lang="en-US" sz="1050">
-                <a:solidFill>
-                  <a:srgbClr val="1a2b3c"/>
+              <a:t>소스 인코딩</a:t>
+            </a:r>
+            <a:r>
+              <a:rPr lang="ko-KR" altLang="en-US" sz="1050">
+                <a:solidFill>
+                  <a:srgbClr val="1A2B3C"/>
                 </a:solidFill>
                 <a:latin typeface="배달의민족 주아"/>
                 <a:ea typeface="배달의민족 주아"/>
                 <a:cs typeface="Calibri"/>
               </a:rPr>
-              <a:t>소스 인코딩</a:t>
-            </a:r>
-            <a:r>
-              <a:rPr lang="ko-KR" altLang="en-US" sz="1050">
-                <a:solidFill>
-                  <a:srgbClr val="1a2b3c"/>
+              <a:t> </a:t>
+            </a:r>
+            <a:r>
+              <a:rPr lang="en-US" sz="1050">
+                <a:solidFill>
+                  <a:srgbClr val="1A2B3C"/>
                 </a:solidFill>
                 <a:latin typeface="배달의민족 주아"/>
                 <a:ea typeface="배달의민족 주아"/>
                 <a:cs typeface="Calibri"/>
               </a:rPr>
-              <a:t> </a:t>
-            </a:r>
-            <a:r>
-              <a:rPr lang="en-US" sz="1050">
-                <a:solidFill>
-                  <a:srgbClr val="1a2b3c"/>
-                </a:solidFill>
-                <a:latin typeface="배달의민족 주아"/>
-                <a:ea typeface="배달의민족 주아"/>
-                <a:cs typeface="Calibri"/>
-              </a:rPr>
               <a:t>불일치</a:t>
             </a:r>
-            <a:endParaRPr lang="en-US" sz="1050">
-              <a:solidFill>
-                <a:srgbClr val="1a2b3c"/>
-              </a:solidFill>
-              <a:latin typeface="배달의민족 주아"/>
-              <a:ea typeface="배달의민족 주아"/>
-              <a:cs typeface="Calibri"/>
-            </a:endParaRPr>
           </a:p>
         </p:txBody>
       </p:sp>
@@ -13537,11 +13505,11 @@
             <a:avLst/>
           </a:prstGeom>
           <a:solidFill>
-            <a:srgbClr val="ffffff"/>
+            <a:srgbClr val="FFFFFF"/>
           </a:solidFill>
           <a:ln w="12700">
             <a:solidFill>
-              <a:srgbClr val="27ae60"/>
+              <a:srgbClr val="27AE60"/>
             </a:solidFill>
             <a:prstDash val="solid"/>
           </a:ln>
@@ -13555,6 +13523,7 @@
         </p:spPr>
         <p:txBody>
           <a:bodyPr anchor="ctr"/>
+          <a:lstStyle/>
           <a:p>
             <a:pPr algn="ctr">
               <a:defRPr/>
@@ -13578,17 +13547,18 @@
             <a:avLst/>
           </a:prstGeom>
           <a:solidFill>
-            <a:srgbClr val="27ae60"/>
+            <a:srgbClr val="27AE60"/>
           </a:solidFill>
           <a:ln w="12700">
             <a:solidFill>
-              <a:srgbClr val="27ae60"/>
+              <a:srgbClr val="27AE60"/>
             </a:solidFill>
             <a:prstDash val="solid"/>
           </a:ln>
         </p:spPr>
         <p:txBody>
           <a:bodyPr anchor="ctr"/>
+          <a:lstStyle/>
           <a:p>
             <a:pPr algn="ctr">
               <a:defRPr/>
@@ -13625,7 +13595,7 @@
             <a:r>
               <a:rPr lang="en-US" sz="1200" b="1">
                 <a:solidFill>
-                  <a:srgbClr val="ffffff"/>
+                  <a:srgbClr val="FFFFFF"/>
                 </a:solidFill>
                 <a:latin typeface="배달의민족 주아"/>
                 <a:ea typeface="배달의민족 주아"/>
@@ -13669,7 +13639,7 @@
             <a:r>
               <a:rPr lang="en-US" sz="1050">
                 <a:solidFill>
-                  <a:srgbClr val="1a2b3c"/>
+                  <a:srgbClr val="1A2B3C"/>
                 </a:solidFill>
                 <a:latin typeface="배달의민족 주아"/>
                 <a:ea typeface="배달의민족 주아"/>
@@ -13677,14 +13647,6 @@
               </a:rPr>
               <a:t>system("chcp 65001") 호출</a:t>
             </a:r>
-            <a:endParaRPr lang="en-US" sz="1050">
-              <a:solidFill>
-                <a:srgbClr val="1a2b3c"/>
-              </a:solidFill>
-              <a:latin typeface="배달의민족 주아"/>
-              <a:ea typeface="배달의민족 주아"/>
-              <a:cs typeface="Consolas"/>
-            </a:endParaRPr>
           </a:p>
           <a:p>
             <a:pPr marL="171450" indent="-171450" algn="l">
@@ -13695,7 +13657,7 @@
             <a:r>
               <a:rPr lang="en-US" sz="1050">
                 <a:solidFill>
-                  <a:srgbClr val="1a2b3c"/>
+                  <a:srgbClr val="1A2B3C"/>
                 </a:solidFill>
                 <a:latin typeface="배달의민족 주아"/>
                 <a:ea typeface="배달의민족 주아"/>
@@ -13725,11 +13687,11 @@
             <a:avLst/>
           </a:prstGeom>
           <a:solidFill>
-            <a:srgbClr val="ffffff"/>
+            <a:srgbClr val="FFFFFF"/>
           </a:solidFill>
           <a:ln w="12700">
             <a:solidFill>
-              <a:srgbClr val="3fbfa6"/>
+              <a:srgbClr val="3FBFA6"/>
             </a:solidFill>
             <a:prstDash val="solid"/>
           </a:ln>
@@ -13743,6 +13705,7 @@
         </p:spPr>
         <p:txBody>
           <a:bodyPr anchor="ctr"/>
+          <a:lstStyle/>
           <a:p>
             <a:pPr algn="ctr">
               <a:defRPr/>
@@ -13766,17 +13729,18 @@
             <a:avLst/>
           </a:prstGeom>
           <a:solidFill>
-            <a:srgbClr val="3fbfa6"/>
+            <a:srgbClr val="3FBFA6"/>
           </a:solidFill>
           <a:ln w="12700">
             <a:solidFill>
-              <a:srgbClr val="3fbfa6"/>
+              <a:srgbClr val="3FBFA6"/>
             </a:solidFill>
             <a:prstDash val="solid"/>
           </a:ln>
         </p:spPr>
         <p:txBody>
           <a:bodyPr anchor="ctr"/>
+          <a:lstStyle/>
           <a:p>
             <a:pPr algn="ctr">
               <a:defRPr/>
@@ -13813,7 +13777,7 @@
             <a:r>
               <a:rPr lang="en-US" sz="1200" b="1">
                 <a:solidFill>
-                  <a:srgbClr val="ffffff"/>
+                  <a:srgbClr val="FFFFFF"/>
                 </a:solidFill>
                 <a:latin typeface="배달의민족 주아"/>
                 <a:ea typeface="배달의민족 주아"/>
@@ -13856,7 +13820,7 @@
             <a:r>
               <a:rPr lang="en-US" sz="1050">
                 <a:solidFill>
-                  <a:srgbClr val="1a2b3c"/>
+                  <a:srgbClr val="1A2B3C"/>
                 </a:solidFill>
                 <a:latin typeface="배달의민족 주아"/>
                 <a:ea typeface="배달의민족 주아"/>
@@ -13864,14 +13828,6 @@
               </a:rPr>
               <a:t>행동 횟수 7회 버그</a:t>
             </a:r>
-            <a:endParaRPr lang="en-US" sz="1050">
-              <a:solidFill>
-                <a:srgbClr val="1a2b3c"/>
-              </a:solidFill>
-              <a:latin typeface="배달의민족 주아"/>
-              <a:ea typeface="배달의민족 주아"/>
-              <a:cs typeface="Calibri"/>
-            </a:endParaRPr>
           </a:p>
           <a:p>
             <a:pPr marL="0" indent="0" algn="l">
@@ -13881,7 +13837,7 @@
             <a:r>
               <a:rPr lang="en-US" sz="1050">
                 <a:solidFill>
-                  <a:srgbClr val="1a2b3c"/>
+                  <a:srgbClr val="1A2B3C"/>
                 </a:solidFill>
                 <a:latin typeface="배달의민족 주아"/>
                 <a:ea typeface="배달의민족 주아"/>
@@ -13889,14 +13845,6 @@
               </a:rPr>
               <a:t>daily_count / week_count</a:t>
             </a:r>
-            <a:endParaRPr lang="en-US" sz="1050">
-              <a:solidFill>
-                <a:srgbClr val="1a2b3c"/>
-              </a:solidFill>
-              <a:latin typeface="배달의민족 주아"/>
-              <a:ea typeface="배달의민족 주아"/>
-              <a:cs typeface="Calibri"/>
-            </a:endParaRPr>
           </a:p>
           <a:p>
             <a:pPr marL="0" indent="0" algn="l">
@@ -13906,7 +13854,7 @@
             <a:r>
               <a:rPr lang="en-US" sz="1050">
                 <a:solidFill>
-                  <a:srgbClr val="1a2b3c"/>
+                  <a:srgbClr val="1A2B3C"/>
                 </a:solidFill>
                 <a:latin typeface="배달의민족 주아"/>
                 <a:ea typeface="배달의민족 주아"/>
@@ -13917,7 +13865,7 @@
             <a:r>
               <a:rPr lang="ko-KR" altLang="en-US" sz="1050">
                 <a:solidFill>
-                  <a:srgbClr val="1a2b3c"/>
+                  <a:srgbClr val="1A2B3C"/>
                 </a:solidFill>
                 <a:latin typeface="배달의민족 주아"/>
                 <a:ea typeface="배달의민족 주아"/>
@@ -13928,7 +13876,7 @@
             <a:r>
               <a:rPr lang="en-US" sz="1050">
                 <a:solidFill>
-                  <a:srgbClr val="1a2b3c"/>
+                  <a:srgbClr val="1A2B3C"/>
                 </a:solidFill>
                 <a:latin typeface="배달의민족 주아"/>
                 <a:ea typeface="배달의민족 주아"/>
@@ -13936,14 +13884,6 @@
               </a:rPr>
               <a:t>로 오류 발생</a:t>
             </a:r>
-            <a:endParaRPr lang="en-US" sz="1050">
-              <a:solidFill>
-                <a:srgbClr val="1a2b3c"/>
-              </a:solidFill>
-              <a:latin typeface="배달의민족 주아"/>
-              <a:ea typeface="배달의민족 주아"/>
-              <a:cs typeface="Calibri"/>
-            </a:endParaRPr>
           </a:p>
         </p:txBody>
       </p:sp>
@@ -13962,11 +13902,11 @@
             <a:avLst/>
           </a:prstGeom>
           <a:solidFill>
-            <a:srgbClr val="ffffff"/>
+            <a:srgbClr val="FFFFFF"/>
           </a:solidFill>
           <a:ln w="12700">
             <a:solidFill>
-              <a:srgbClr val="27ae60"/>
+              <a:srgbClr val="27AE60"/>
             </a:solidFill>
             <a:prstDash val="solid"/>
           </a:ln>
@@ -13980,6 +13920,7 @@
         </p:spPr>
         <p:txBody>
           <a:bodyPr anchor="ctr"/>
+          <a:lstStyle/>
           <a:p>
             <a:pPr algn="ctr">
               <a:defRPr/>
@@ -14003,17 +13944,18 @@
             <a:avLst/>
           </a:prstGeom>
           <a:solidFill>
-            <a:srgbClr val="27ae60"/>
+            <a:srgbClr val="27AE60"/>
           </a:solidFill>
           <a:ln w="12700">
             <a:solidFill>
-              <a:srgbClr val="27ae60"/>
+              <a:srgbClr val="27AE60"/>
             </a:solidFill>
             <a:prstDash val="solid"/>
           </a:ln>
         </p:spPr>
         <p:txBody>
           <a:bodyPr anchor="ctr"/>
+          <a:lstStyle/>
           <a:p>
             <a:pPr algn="ctr">
               <a:defRPr/>
@@ -14050,7 +13992,7 @@
             <a:r>
               <a:rPr lang="en-US" sz="1200" b="1">
                 <a:solidFill>
-                  <a:srgbClr val="ffffff"/>
+                  <a:srgbClr val="FFFFFF"/>
                 </a:solidFill>
                 <a:latin typeface="배달의민족 주아"/>
                 <a:ea typeface="배달의민족 주아"/>
@@ -14094,7 +14036,7 @@
             <a:r>
               <a:rPr lang="en-US" altLang="ko-KR" sz="1050">
                 <a:solidFill>
-                  <a:srgbClr val="1a2b3c"/>
+                  <a:srgbClr val="1A2B3C"/>
                 </a:solidFill>
                 <a:latin typeface="배달의민족 주아"/>
                 <a:ea typeface="배달의민족 주아"/>
@@ -14105,7 +14047,7 @@
             <a:r>
               <a:rPr lang="en-US" sz="1050">
                 <a:solidFill>
-                  <a:srgbClr val="1a2b3c"/>
+                  <a:srgbClr val="1A2B3C"/>
                 </a:solidFill>
                 <a:latin typeface="배달의민족 주아"/>
                 <a:ea typeface="배달의민족 주아"/>
@@ -14116,7 +14058,7 @@
             <a:r>
               <a:rPr lang="ko-KR" altLang="en-US" sz="1050">
                 <a:solidFill>
-                  <a:srgbClr val="1a2b3c"/>
+                  <a:srgbClr val="1A2B3C"/>
                 </a:solidFill>
                 <a:latin typeface="배달의민족 주아"/>
                 <a:ea typeface="배달의민족 주아"/>
@@ -14124,14 +14066,6 @@
               </a:rPr>
               <a:t>삭제</a:t>
             </a:r>
-            <a:endParaRPr lang="ko-KR" altLang="en-US" sz="1050">
-              <a:solidFill>
-                <a:srgbClr val="1a2b3c"/>
-              </a:solidFill>
-              <a:latin typeface="배달의민족 주아"/>
-              <a:ea typeface="배달의민족 주아"/>
-              <a:cs typeface="Consolas"/>
-            </a:endParaRPr>
           </a:p>
           <a:p>
             <a:pPr marL="171450" indent="-171450" algn="l">
@@ -14142,7 +14076,7 @@
             <a:r>
               <a:rPr lang="en-US" sz="1050">
                 <a:solidFill>
-                  <a:srgbClr val="1a2b3c"/>
+                  <a:srgbClr val="1A2B3C"/>
                 </a:solidFill>
                 <a:latin typeface="배달의민족 주아"/>
                 <a:ea typeface="배달의민족 주아"/>
@@ -14172,11 +14106,11 @@
             <a:avLst/>
           </a:prstGeom>
           <a:solidFill>
-            <a:srgbClr val="ffffff"/>
+            <a:srgbClr val="FFFFFF"/>
           </a:solidFill>
           <a:ln w="12700">
             <a:solidFill>
-              <a:srgbClr val="c0392b"/>
+              <a:srgbClr val="C0392B"/>
             </a:solidFill>
             <a:prstDash val="solid"/>
           </a:ln>
@@ -14190,6 +14124,7 @@
         </p:spPr>
         <p:txBody>
           <a:bodyPr anchor="ctr"/>
+          <a:lstStyle/>
           <a:p>
             <a:pPr algn="ctr">
               <a:defRPr/>
@@ -14213,17 +14148,18 @@
             <a:avLst/>
           </a:prstGeom>
           <a:solidFill>
-            <a:srgbClr val="c0392b"/>
+            <a:srgbClr val="C0392B"/>
           </a:solidFill>
           <a:ln w="12700">
             <a:solidFill>
-              <a:srgbClr val="c0392b"/>
+              <a:srgbClr val="C0392B"/>
             </a:solidFill>
             <a:prstDash val="solid"/>
           </a:ln>
         </p:spPr>
         <p:txBody>
           <a:bodyPr anchor="ctr"/>
+          <a:lstStyle/>
           <a:p>
             <a:pPr algn="ctr">
               <a:defRPr/>
@@ -14260,7 +14196,7 @@
             <a:r>
               <a:rPr lang="en-US" sz="1200" b="1">
                 <a:solidFill>
-                  <a:srgbClr val="ffffff"/>
+                  <a:srgbClr val="FFFFFF"/>
                 </a:solidFill>
                 <a:latin typeface="배달의민족 주아"/>
                 <a:ea typeface="배달의민족 주아"/>
@@ -14303,7 +14239,7 @@
             <a:r>
               <a:rPr lang="en-US" sz="1050">
                 <a:solidFill>
-                  <a:srgbClr val="1a2b3c"/>
+                  <a:srgbClr val="1A2B3C"/>
                 </a:solidFill>
                 <a:latin typeface="배달의민족 주아"/>
                 <a:ea typeface="배달의민족 주아"/>
@@ -14311,14 +14247,6 @@
               </a:rPr>
               <a:t>엔딩 밸런스 조정</a:t>
             </a:r>
-            <a:endParaRPr lang="en-US" sz="1050">
-              <a:solidFill>
-                <a:srgbClr val="1a2b3c"/>
-              </a:solidFill>
-              <a:latin typeface="배달의민족 주아"/>
-              <a:ea typeface="배달의민족 주아"/>
-              <a:cs typeface="Calibri"/>
-            </a:endParaRPr>
           </a:p>
           <a:p>
             <a:pPr marL="0" indent="0" algn="l">
@@ -14328,7 +14256,7 @@
             <a:r>
               <a:rPr lang="en-US" sz="1050">
                 <a:solidFill>
-                  <a:srgbClr val="1a2b3c"/>
+                  <a:srgbClr val="1A2B3C"/>
                 </a:solidFill>
                 <a:latin typeface="배달의민족 주아"/>
                 <a:ea typeface="배달의민족 주아"/>
@@ -14336,14 +14264,6 @@
               </a:rPr>
               <a:t>히든엔딩 조건 만족도 100+수치 100</a:t>
             </a:r>
-            <a:endParaRPr lang="en-US" sz="1050">
-              <a:solidFill>
-                <a:srgbClr val="1a2b3c"/>
-              </a:solidFill>
-              <a:latin typeface="배달의민족 주아"/>
-              <a:ea typeface="배달의민족 주아"/>
-              <a:cs typeface="Calibri"/>
-            </a:endParaRPr>
           </a:p>
           <a:p>
             <a:pPr marL="0" indent="0" algn="l">
@@ -14353,7 +14273,7 @@
             <a:r>
               <a:rPr lang="en-US" sz="1050">
                 <a:solidFill>
-                  <a:srgbClr val="1a2b3c"/>
+                  <a:srgbClr val="1A2B3C"/>
                 </a:solidFill>
                 <a:latin typeface="배달의민족 주아"/>
                 <a:ea typeface="배달의민족 주아"/>
@@ -14383,11 +14303,11 @@
             <a:avLst/>
           </a:prstGeom>
           <a:solidFill>
-            <a:srgbClr val="ffffff"/>
+            <a:srgbClr val="FFFFFF"/>
           </a:solidFill>
           <a:ln w="12700">
             <a:solidFill>
-              <a:srgbClr val="27ae60"/>
+              <a:srgbClr val="27AE60"/>
             </a:solidFill>
             <a:prstDash val="solid"/>
           </a:ln>
@@ -14401,6 +14321,7 @@
         </p:spPr>
         <p:txBody>
           <a:bodyPr anchor="ctr"/>
+          <a:lstStyle/>
           <a:p>
             <a:pPr algn="ctr">
               <a:defRPr/>
@@ -14424,17 +14345,18 @@
             <a:avLst/>
           </a:prstGeom>
           <a:solidFill>
-            <a:srgbClr val="27ae60"/>
+            <a:srgbClr val="27AE60"/>
           </a:solidFill>
           <a:ln w="12700">
             <a:solidFill>
-              <a:srgbClr val="27ae60"/>
+              <a:srgbClr val="27AE60"/>
             </a:solidFill>
             <a:prstDash val="solid"/>
           </a:ln>
         </p:spPr>
         <p:txBody>
           <a:bodyPr anchor="ctr"/>
+          <a:lstStyle/>
           <a:p>
             <a:pPr algn="ctr">
               <a:defRPr/>
@@ -14471,7 +14393,7 @@
             <a:r>
               <a:rPr lang="en-US" sz="1200" b="1">
                 <a:solidFill>
-                  <a:srgbClr val="ffffff"/>
+                  <a:srgbClr val="FFFFFF"/>
                 </a:solidFill>
                 <a:latin typeface="배달의민족 주아"/>
                 <a:ea typeface="배달의민족 주아"/>
@@ -14515,7 +14437,7 @@
             <a:r>
               <a:rPr lang="en-US" sz="1050">
                 <a:solidFill>
-                  <a:srgbClr val="1a2b3c"/>
+                  <a:srgbClr val="1A2B3C"/>
                 </a:solidFill>
                 <a:latin typeface="배달의민족 주아"/>
                 <a:ea typeface="배달의민족 주아"/>
@@ -14523,14 +14445,6 @@
               </a:rPr>
               <a:t>만족도 100 만족도 85로 완화</a:t>
             </a:r>
-            <a:endParaRPr lang="en-US" sz="1050">
-              <a:solidFill>
-                <a:srgbClr val="1a2b3c"/>
-              </a:solidFill>
-              <a:latin typeface="배달의민족 주아"/>
-              <a:ea typeface="배달의민족 주아"/>
-              <a:cs typeface="Consolas"/>
-            </a:endParaRPr>
           </a:p>
           <a:p>
             <a:pPr marL="171450" indent="-171450" algn="l">
@@ -14541,7 +14455,7 @@
             <a:r>
               <a:rPr lang="en-US" sz="1050">
                 <a:solidFill>
-                  <a:srgbClr val="1a2b3c"/>
+                  <a:srgbClr val="1A2B3C"/>
                 </a:solidFill>
                 <a:latin typeface="배달의민족 주아"/>
                 <a:ea typeface="배달의민족 주아"/>
@@ -14571,7 +14485,7 @@
             <a:avLst/>
           </a:prstGeom>
           <a:solidFill>
-            <a:srgbClr val="3fbfa6">
+            <a:srgbClr val="3FBFA6">
               <a:alpha val="50000"/>
             </a:srgbClr>
           </a:solidFill>
@@ -14582,6 +14496,7 @@
         </p:spPr>
         <p:txBody>
           <a:bodyPr anchor="ctr"/>
+          <a:lstStyle/>
           <a:p>
             <a:pPr algn="ctr">
               <a:defRPr/>
@@ -14605,7 +14520,7 @@
             <a:avLst/>
           </a:prstGeom>
           <a:solidFill>
-            <a:srgbClr val="3fbfa6">
+            <a:srgbClr val="3FBFA6">
               <a:alpha val="50000"/>
             </a:srgbClr>
           </a:solidFill>
@@ -14616,6 +14531,7 @@
         </p:spPr>
         <p:txBody>
           <a:bodyPr anchor="ctr"/>
+          <a:lstStyle/>
           <a:p>
             <a:pPr algn="ctr">
               <a:defRPr/>
@@ -14641,11 +14557,11 @@
             </a:avLst>
           </a:prstGeom>
           <a:solidFill>
-            <a:srgbClr val="3fbfa6"/>
+            <a:srgbClr val="3FBFA6"/>
           </a:solidFill>
           <a:ln>
             <a:solidFill>
-              <a:srgbClr val="1a2b3c"/>
+              <a:srgbClr val="1A2B3C"/>
             </a:solidFill>
           </a:ln>
         </p:spPr>
@@ -14697,11 +14613,11 @@
             </a:avLst>
           </a:prstGeom>
           <a:solidFill>
-            <a:srgbClr val="3fbfa6"/>
+            <a:srgbClr val="3FBFA6"/>
           </a:solidFill>
           <a:ln>
             <a:solidFill>
-              <a:srgbClr val="1a2b3c"/>
+              <a:srgbClr val="1A2B3C"/>
             </a:solidFill>
           </a:ln>
         </p:spPr>
@@ -14753,11 +14669,11 @@
             </a:avLst>
           </a:prstGeom>
           <a:solidFill>
-            <a:srgbClr val="3fbfa6"/>
+            <a:srgbClr val="3FBFA6"/>
           </a:solidFill>
           <a:ln>
             <a:solidFill>
-              <a:srgbClr val="1a2b3c"/>
+              <a:srgbClr val="1A2B3C"/>
             </a:solidFill>
           </a:ln>
         </p:spPr>
@@ -14809,11 +14725,11 @@
             </a:avLst>
           </a:prstGeom>
           <a:solidFill>
-            <a:srgbClr val="3fbfa6"/>
+            <a:srgbClr val="3FBFA6"/>
           </a:solidFill>
           <a:ln>
             <a:solidFill>
-              <a:srgbClr val="1a2b3c"/>
+              <a:srgbClr val="1A2B3C"/>
             </a:solidFill>
           </a:ln>
         </p:spPr>
@@ -14853,11 +14769,11 @@
   <p:clrMapOvr>
     <a:masterClrMapping/>
   </p:clrMapOvr>
-  <mc:AlternateContent xmlns:mc="http://schemas.openxmlformats.org/markup-compatibility/2006">
-    <mc:Choice xmlns:p14="http://schemas.microsoft.com/office/powerpoint/2010/main" Requires="p14">
-      <p:transition xmlns:mc="http://schemas.openxmlformats.org/markup-compatibility/2006" xmlns:p14="http://schemas.microsoft.com/office/powerpoint/2010/main" mc:Ignorable="p14" p14:dur="500"/>
+  <mc:AlternateContent xmlns:mc="http://schemas.openxmlformats.org/markup-compatibility/2006" xmlns:p14="http://schemas.microsoft.com/office/powerpoint/2010/main">
+    <mc:Choice Requires="p14">
+      <p:transition/>
     </mc:Choice>
-    <mc:Fallback>
+    <mc:Fallback xmlns:dsp="http://schemas.microsoft.com/office/drawing/2008/diagram" xmlns:dgm="http://schemas.openxmlformats.org/drawingml/2006/diagram" xmlns:c="http://schemas.openxmlformats.org/drawingml/2006/chart" xmlns="">
       <p:transition/>
     </mc:Fallback>
   </mc:AlternateContent>
@@ -14865,13 +14781,14 @@
 </file>
 
 <file path=ppt/slides/slide9.xml><?xml version="1.0" encoding="utf-8"?>
-<p:sld xmlns:r="http://schemas.openxmlformats.org/officeDocument/2006/relationships" xmlns:c="http://schemas.openxmlformats.org/drawingml/2006/chart" xmlns:a="http://schemas.openxmlformats.org/drawingml/2006/main" xmlns:dgm="http://schemas.openxmlformats.org/drawingml/2006/diagram" xmlns:dsp="http://schemas.microsoft.com/office/drawing/2008/diagram" xmlns:p="http://schemas.openxmlformats.org/presentationml/2006/main">
+<p:sld xmlns:a="http://schemas.openxmlformats.org/drawingml/2006/main" xmlns:r="http://schemas.openxmlformats.org/officeDocument/2006/relationships" xmlns:p="http://schemas.openxmlformats.org/presentationml/2006/main">
   <p:cSld name="Slide 9">
     <p:bg>
-      <p:bgPr shadeToTitle="0">
+      <p:bgPr>
         <a:solidFill>
-          <a:srgbClr val="1a2b3c"/>
+          <a:srgbClr val="1A2B3C"/>
         </a:solidFill>
+        <a:effectLst/>
       </p:bgPr>
     </p:bg>
     <p:spTree>
@@ -14903,17 +14820,18 @@
             <a:avLst/>
           </a:prstGeom>
           <a:solidFill>
-            <a:srgbClr val="3fbfa6"/>
+            <a:srgbClr val="3FBFA6"/>
           </a:solidFill>
           <a:ln w="12700">
             <a:solidFill>
-              <a:srgbClr val="3fbfa6"/>
+              <a:srgbClr val="3FBFA6"/>
             </a:solidFill>
             <a:prstDash val="solid"/>
           </a:ln>
         </p:spPr>
         <p:txBody>
           <a:bodyPr anchor="ctr"/>
+          <a:lstStyle/>
           <a:p>
             <a:pPr algn="ctr">
               <a:defRPr/>
@@ -14950,7 +14868,7 @@
             <a:r>
               <a:rPr lang="en-US" sz="5400">
                 <a:solidFill>
-                  <a:srgbClr val="ffffff"/>
+                  <a:srgbClr val="FFFFFF"/>
                 </a:solidFill>
                 <a:latin typeface="SB 어그로 Bold"/>
                 <a:ea typeface="SB 어그로 Bold"/>
@@ -14961,7 +14879,7 @@
             <a:r>
               <a:rPr lang="en-US" sz="5400" b="1">
                 <a:solidFill>
-                  <a:srgbClr val="ffffff"/>
+                  <a:srgbClr val="FFFFFF"/>
                 </a:solidFill>
                 <a:latin typeface="SB 어그로 Bold"/>
                 <a:ea typeface="SB 어그로 Bold"/>
@@ -15003,7 +14921,7 @@
             <a:r>
               <a:rPr lang="en-US" sz="1600" b="1">
                 <a:solidFill>
-                  <a:srgbClr val="607d8b"/>
+                  <a:srgbClr val="607D8B"/>
                 </a:solidFill>
                 <a:latin typeface="CookieRunOTF Regular"/>
                 <a:ea typeface="CookieRunOTF Regular"/>
@@ -15014,7 +14932,7 @@
             <a:r>
               <a:rPr lang="en-US" sz="1600">
                 <a:solidFill>
-                  <a:srgbClr val="607d8b"/>
+                  <a:srgbClr val="607D8B"/>
                 </a:solidFill>
                 <a:latin typeface="CookieRunOTF Regular"/>
                 <a:ea typeface="CookieRunOTF Regular"/>
@@ -15044,17 +14962,18 @@
             <a:avLst/>
           </a:prstGeom>
           <a:solidFill>
-            <a:srgbClr val="3fbfa6"/>
+            <a:srgbClr val="3FBFA6"/>
           </a:solidFill>
           <a:ln w="12700">
             <a:solidFill>
-              <a:srgbClr val="3fbfa6"/>
+              <a:srgbClr val="3FBFA6"/>
             </a:solidFill>
             <a:prstDash val="solid"/>
           </a:ln>
         </p:spPr>
         <p:txBody>
           <a:bodyPr anchor="ctr"/>
+          <a:lstStyle/>
           <a:p>
             <a:pPr algn="ctr">
               <a:defRPr/>
@@ -15068,11 +14987,11 @@
   <p:clrMapOvr>
     <a:masterClrMapping/>
   </p:clrMapOvr>
-  <mc:AlternateContent xmlns:mc="http://schemas.openxmlformats.org/markup-compatibility/2006">
-    <mc:Choice xmlns:p14="http://schemas.microsoft.com/office/powerpoint/2010/main" Requires="p14">
-      <p:transition xmlns:mc="http://schemas.openxmlformats.org/markup-compatibility/2006" xmlns:p14="http://schemas.microsoft.com/office/powerpoint/2010/main" mc:Ignorable="p14" p14:dur="500"/>
+  <mc:AlternateContent xmlns:mc="http://schemas.openxmlformats.org/markup-compatibility/2006" xmlns:p14="http://schemas.microsoft.com/office/powerpoint/2010/main">
+    <mc:Choice Requires="p14">
+      <p:transition/>
     </mc:Choice>
-    <mc:Fallback>
+    <mc:Fallback xmlns:dsp="http://schemas.microsoft.com/office/drawing/2008/diagram" xmlns:dgm="http://schemas.openxmlformats.org/drawingml/2006/diagram" xmlns:c="http://schemas.openxmlformats.org/drawingml/2006/chart" xmlns="">
       <p:transition/>
     </mc:Fallback>
   </mc:AlternateContent>
@@ -15080,49 +14999,49 @@
 </file>
 
 <file path=ppt/theme/theme1.xml><?xml version="1.0" encoding="utf-8"?>
-<a:theme xmlns:r="http://schemas.openxmlformats.org/officeDocument/2006/relationships" xmlns:c="http://schemas.openxmlformats.org/drawingml/2006/chart" xmlns:dgm="http://schemas.openxmlformats.org/drawingml/2006/diagram" xmlns:dsp="http://schemas.microsoft.com/office/drawing/2008/diagram" xmlns:a="http://schemas.openxmlformats.org/drawingml/2006/main" xmlns:pic="http://schemas.openxmlformats.org/drawingml/2006/picture" xmlns:wp="http://schemas.openxmlformats.org/drawingml/2006/wordprocessingDrawing" xmlns:xdr="http://schemas.openxmlformats.org/drawingml/2006/spreadsheetDrawing" xmlns:p="http://schemas.openxmlformats.org/presentationml/2006/main" name="Office Theme">
+<a:theme xmlns:a="http://schemas.openxmlformats.org/drawingml/2006/main" name="Office Theme">
   <a:themeElements>
     <a:clrScheme name="Office">
       <a:dk1>
         <a:sysClr val="windowText" lastClr="000000"/>
       </a:dk1>
       <a:lt1>
-        <a:sysClr val="window" lastClr="ffffff"/>
+        <a:sysClr val="window" lastClr="FFFFFF"/>
       </a:lt1>
       <a:dk2>
-        <a:srgbClr val="44546a"/>
+        <a:srgbClr val="44546A"/>
       </a:dk2>
       <a:lt2>
-        <a:srgbClr val="e7e6e6"/>
+        <a:srgbClr val="E7E6E6"/>
       </a:lt2>
       <a:accent1>
-        <a:srgbClr val="4472c4"/>
+        <a:srgbClr val="4472C4"/>
       </a:accent1>
       <a:accent2>
-        <a:srgbClr val="ed7d31"/>
+        <a:srgbClr val="ED7D31"/>
       </a:accent2>
       <a:accent3>
-        <a:srgbClr val="a5a5a5"/>
+        <a:srgbClr val="A5A5A5"/>
       </a:accent3>
       <a:accent4>
-        <a:srgbClr val="ffc000"/>
+        <a:srgbClr val="FFC000"/>
       </a:accent4>
       <a:accent5>
-        <a:srgbClr val="5b9bd5"/>
+        <a:srgbClr val="5B9BD5"/>
       </a:accent5>
       <a:accent6>
-        <a:srgbClr val="70ad47"/>
+        <a:srgbClr val="70AD47"/>
       </a:accent6>
       <a:hlink>
-        <a:srgbClr val="0563c1"/>
+        <a:srgbClr val="0563C1"/>
       </a:hlink>
       <a:folHlink>
-        <a:srgbClr val="954f72"/>
+        <a:srgbClr val="954F72"/>
       </a:folHlink>
     </a:clrScheme>
     <a:fontScheme name="Office">
       <a:majorFont>
-        <a:latin typeface="Calibri Light" panose="20"/>
+        <a:latin typeface="Calibri Light" panose="20000000000000000000"/>
         <a:ea typeface=""/>
         <a:cs typeface=""/>
         <a:font script="Jpan" typeface="Yu Gothic Light"/>
@@ -15174,7 +15093,7 @@
         <a:font script="Tfng" typeface="Ebrima"/>
       </a:majorFont>
       <a:minorFont>
-        <a:latin typeface="Calibri" panose="20"/>
+        <a:latin typeface="Calibri" panose="20000000000000000000"/>
         <a:ea typeface=""/>
         <a:cs typeface=""/>
         <a:font script="Jpan" typeface="Yu Gothic"/>
@@ -15364,53 +15283,55 @@
       </a:bgFillStyleLst>
     </a:fmtScheme>
   </a:themeElements>
+  <a:objectDefaults/>
+  <a:extraClrSchemeLst/>
 </a:theme>
 </file>
 
 <file path=ppt/theme/theme2.xml><?xml version="1.0" encoding="utf-8"?>
-<a:theme xmlns:r="http://schemas.openxmlformats.org/officeDocument/2006/relationships" xmlns:c="http://schemas.openxmlformats.org/drawingml/2006/chart" xmlns:dgm="http://schemas.openxmlformats.org/drawingml/2006/diagram" xmlns:dsp="http://schemas.microsoft.com/office/drawing/2008/diagram" xmlns:a="http://schemas.openxmlformats.org/drawingml/2006/main" xmlns:pic="http://schemas.openxmlformats.org/drawingml/2006/picture" xmlns:wp="http://schemas.openxmlformats.org/drawingml/2006/wordprocessingDrawing" xmlns:xdr="http://schemas.openxmlformats.org/drawingml/2006/spreadsheetDrawing" xmlns:p="http://schemas.openxmlformats.org/presentationml/2006/main" name="Office 테마">
+<a:theme xmlns:a="http://schemas.openxmlformats.org/drawingml/2006/main" name="Office 테마">
   <a:themeElements>
     <a:clrScheme name="Office">
       <a:dk1>
         <a:sysClr val="windowText" lastClr="000000"/>
       </a:dk1>
       <a:lt1>
-        <a:sysClr val="window" lastClr="ffffff"/>
+        <a:sysClr val="window" lastClr="FFFFFF"/>
       </a:lt1>
       <a:dk2>
-        <a:srgbClr val="44546a"/>
+        <a:srgbClr val="44546A"/>
       </a:dk2>
       <a:lt2>
-        <a:srgbClr val="e7e6e6"/>
+        <a:srgbClr val="E7E6E6"/>
       </a:lt2>
       <a:accent1>
-        <a:srgbClr val="4472c4"/>
+        <a:srgbClr val="4472C4"/>
       </a:accent1>
       <a:accent2>
-        <a:srgbClr val="ed7d31"/>
+        <a:srgbClr val="ED7D31"/>
       </a:accent2>
       <a:accent3>
-        <a:srgbClr val="a5a5a5"/>
+        <a:srgbClr val="A5A5A5"/>
       </a:accent3>
       <a:accent4>
-        <a:srgbClr val="ffc000"/>
+        <a:srgbClr val="FFC000"/>
       </a:accent4>
       <a:accent5>
-        <a:srgbClr val="5b9bd5"/>
+        <a:srgbClr val="5B9BD5"/>
       </a:accent5>
       <a:accent6>
-        <a:srgbClr val="70ad47"/>
+        <a:srgbClr val="70AD47"/>
       </a:accent6>
       <a:hlink>
-        <a:srgbClr val="0563c1"/>
+        <a:srgbClr val="0563C1"/>
       </a:hlink>
       <a:folHlink>
-        <a:srgbClr val="954f72"/>
+        <a:srgbClr val="954F72"/>
       </a:folHlink>
     </a:clrScheme>
     <a:fontScheme name="Office">
       <a:majorFont>
-        <a:latin typeface="맑은 고딕" panose="20"/>
+        <a:latin typeface="맑은 고딕" panose="20000000000000000000"/>
         <a:ea typeface=""/>
         <a:cs typeface=""/>
         <a:font script="Jpan" typeface="Yu Gothic Light"/>
@@ -15462,7 +15383,7 @@
         <a:font script="Tfng" typeface="Ebrima"/>
       </a:majorFont>
       <a:minorFont>
-        <a:latin typeface="맑은 고딕" panose="20"/>
+        <a:latin typeface="맑은 고딕" panose="20000000000000000000"/>
         <a:ea typeface=""/>
         <a:cs typeface=""/>
         <a:font script="Jpan" typeface="Yu Gothic"/>
@@ -15652,5 +15573,7 @@
       </a:bgFillStyleLst>
     </a:fmtScheme>
   </a:themeElements>
+  <a:objectDefaults/>
+  <a:extraClrSchemeLst/>
 </a:theme>
 </file>